--- a/docs/plots/carbo/jx_carbo_linsubhr_ratio_hosp3.pptx
+++ b/docs/plots/carbo/jx_carbo_linsubhr_ratio_hosp3.pptx
@@ -3003,494 +3003,497 @@
           <p:spPr>
             <a:xfrm>
               <a:off x="817517" y="1896563"/>
-              <a:ext cx="7370972" cy="3650336"/>
+              <a:ext cx="7370972" cy="3649819"/>
             </a:xfrm>
             <a:custGeom>
               <a:avLst/>
               <a:pathLst>
-                <a:path w="7370972" h="3650336">
+                <a:path w="7370972" h="3649819">
                   <a:moveTo>
-                    <a:pt x="2422980" y="0"/>
+                    <a:pt x="2388750" y="0"/>
                   </a:moveTo>
                   <a:lnTo>
-                    <a:pt x="2480027" y="301667"/>
-                  </a:lnTo>
-                  <a:lnTo>
-                    <a:pt x="2557661" y="667393"/>
-                  </a:lnTo>
-                  <a:lnTo>
-                    <a:pt x="2635295" y="993203"/>
-                  </a:lnTo>
-                  <a:lnTo>
-                    <a:pt x="2712930" y="1283455"/>
-                  </a:lnTo>
-                  <a:lnTo>
-                    <a:pt x="2790564" y="1542028"/>
-                  </a:lnTo>
-                  <a:lnTo>
-                    <a:pt x="2868198" y="1772381"/>
-                  </a:lnTo>
-                  <a:lnTo>
-                    <a:pt x="2945832" y="1977593"/>
-                  </a:lnTo>
-                  <a:lnTo>
-                    <a:pt x="3023466" y="2160408"/>
-                  </a:lnTo>
-                  <a:lnTo>
-                    <a:pt x="3101100" y="2323271"/>
-                  </a:lnTo>
-                  <a:lnTo>
-                    <a:pt x="3178734" y="2468358"/>
-                  </a:lnTo>
-                  <a:lnTo>
-                    <a:pt x="3256368" y="2597611"/>
-                  </a:lnTo>
-                  <a:lnTo>
-                    <a:pt x="3334002" y="2712758"/>
-                  </a:lnTo>
-                  <a:lnTo>
-                    <a:pt x="3411636" y="2789848"/>
-                  </a:lnTo>
-                  <a:lnTo>
-                    <a:pt x="3489270" y="2810481"/>
-                  </a:lnTo>
-                  <a:lnTo>
-                    <a:pt x="3566904" y="2830620"/>
-                  </a:lnTo>
-                  <a:lnTo>
-                    <a:pt x="3644538" y="2850278"/>
-                  </a:lnTo>
-                  <a:lnTo>
-                    <a:pt x="3722172" y="2869466"/>
-                  </a:lnTo>
-                  <a:lnTo>
-                    <a:pt x="3799806" y="2888195"/>
-                  </a:lnTo>
-                  <a:lnTo>
-                    <a:pt x="3877440" y="2906476"/>
-                  </a:lnTo>
-                  <a:lnTo>
-                    <a:pt x="3955074" y="2924319"/>
-                  </a:lnTo>
-                  <a:lnTo>
-                    <a:pt x="4032708" y="2941736"/>
-                  </a:lnTo>
-                  <a:lnTo>
-                    <a:pt x="4110342" y="2958737"/>
-                  </a:lnTo>
-                  <a:lnTo>
-                    <a:pt x="4187976" y="2975331"/>
-                  </a:lnTo>
-                  <a:lnTo>
-                    <a:pt x="4265610" y="2991528"/>
-                  </a:lnTo>
-                  <a:lnTo>
-                    <a:pt x="4343244" y="3007338"/>
-                  </a:lnTo>
-                  <a:lnTo>
-                    <a:pt x="4420879" y="3022770"/>
-                  </a:lnTo>
-                  <a:lnTo>
-                    <a:pt x="4498513" y="3037833"/>
-                  </a:lnTo>
-                  <a:lnTo>
-                    <a:pt x="4576147" y="3052535"/>
-                  </a:lnTo>
-                  <a:lnTo>
-                    <a:pt x="4653781" y="3066886"/>
-                  </a:lnTo>
-                  <a:lnTo>
-                    <a:pt x="4731415" y="3080894"/>
-                  </a:lnTo>
-                  <a:lnTo>
-                    <a:pt x="4809049" y="3094567"/>
-                  </a:lnTo>
-                  <a:lnTo>
-                    <a:pt x="4886683" y="3107912"/>
-                  </a:lnTo>
-                  <a:lnTo>
-                    <a:pt x="4964317" y="3120939"/>
-                  </a:lnTo>
-                  <a:lnTo>
-                    <a:pt x="5041951" y="3133654"/>
-                  </a:lnTo>
-                  <a:lnTo>
-                    <a:pt x="5119585" y="3146065"/>
-                  </a:lnTo>
-                  <a:lnTo>
-                    <a:pt x="5197219" y="3158180"/>
-                  </a:lnTo>
-                  <a:lnTo>
-                    <a:pt x="5274853" y="3170004"/>
-                  </a:lnTo>
-                  <a:lnTo>
-                    <a:pt x="5352487" y="3181546"/>
-                  </a:lnTo>
-                  <a:lnTo>
-                    <a:pt x="5430121" y="3192812"/>
-                  </a:lnTo>
-                  <a:lnTo>
-                    <a:pt x="5507755" y="3203808"/>
-                  </a:lnTo>
-                  <a:lnTo>
-                    <a:pt x="5585389" y="3214542"/>
-                  </a:lnTo>
-                  <a:lnTo>
-                    <a:pt x="5663023" y="3225018"/>
-                  </a:lnTo>
-                  <a:lnTo>
-                    <a:pt x="5740657" y="3235245"/>
-                  </a:lnTo>
-                  <a:lnTo>
-                    <a:pt x="5818291" y="3245226"/>
-                  </a:lnTo>
-                  <a:lnTo>
-                    <a:pt x="5895925" y="3254969"/>
-                  </a:lnTo>
-                  <a:lnTo>
-                    <a:pt x="5973559" y="3264479"/>
-                  </a:lnTo>
-                  <a:lnTo>
-                    <a:pt x="6051193" y="3273762"/>
-                  </a:lnTo>
-                  <a:lnTo>
-                    <a:pt x="6128827" y="3282822"/>
-                  </a:lnTo>
-                  <a:lnTo>
-                    <a:pt x="6206462" y="3291666"/>
-                  </a:lnTo>
-                  <a:lnTo>
-                    <a:pt x="6284096" y="3300298"/>
-                  </a:lnTo>
-                  <a:lnTo>
-                    <a:pt x="6361730" y="3308724"/>
-                  </a:lnTo>
-                  <a:lnTo>
-                    <a:pt x="6439364" y="3316949"/>
-                  </a:lnTo>
-                  <a:lnTo>
-                    <a:pt x="6516998" y="3324977"/>
-                  </a:lnTo>
-                  <a:lnTo>
-                    <a:pt x="6594632" y="3332812"/>
-                  </a:lnTo>
-                  <a:lnTo>
-                    <a:pt x="6672266" y="3340461"/>
-                  </a:lnTo>
-                  <a:lnTo>
-                    <a:pt x="6749900" y="3347926"/>
-                  </a:lnTo>
-                  <a:lnTo>
-                    <a:pt x="6827534" y="3355213"/>
-                  </a:lnTo>
-                  <a:lnTo>
-                    <a:pt x="6905168" y="3362326"/>
-                  </a:lnTo>
-                  <a:lnTo>
-                    <a:pt x="6982802" y="3369269"/>
-                  </a:lnTo>
-                  <a:lnTo>
-                    <a:pt x="7060436" y="3376045"/>
-                  </a:lnTo>
-                  <a:lnTo>
-                    <a:pt x="7138070" y="3382660"/>
-                  </a:lnTo>
-                  <a:lnTo>
-                    <a:pt x="7215704" y="3389116"/>
-                  </a:lnTo>
-                  <a:lnTo>
-                    <a:pt x="7293338" y="3395418"/>
-                  </a:lnTo>
-                  <a:lnTo>
-                    <a:pt x="7370972" y="3401569"/>
-                  </a:lnTo>
-                  <a:lnTo>
-                    <a:pt x="7370972" y="3650336"/>
-                  </a:lnTo>
-                  <a:lnTo>
-                    <a:pt x="7293338" y="3650053"/>
-                  </a:lnTo>
-                  <a:lnTo>
-                    <a:pt x="7215704" y="3649736"/>
-                  </a:lnTo>
-                  <a:lnTo>
-                    <a:pt x="7138070" y="3649379"/>
-                  </a:lnTo>
-                  <a:lnTo>
-                    <a:pt x="7060436" y="3648980"/>
-                  </a:lnTo>
-                  <a:lnTo>
-                    <a:pt x="6982802" y="3648531"/>
-                  </a:lnTo>
-                  <a:lnTo>
-                    <a:pt x="6905168" y="3648027"/>
-                  </a:lnTo>
-                  <a:lnTo>
-                    <a:pt x="6827534" y="3647461"/>
-                  </a:lnTo>
-                  <a:lnTo>
-                    <a:pt x="6749900" y="3646826"/>
-                  </a:lnTo>
-                  <a:lnTo>
-                    <a:pt x="6672266" y="3646114"/>
-                  </a:lnTo>
-                  <a:lnTo>
-                    <a:pt x="6594632" y="3645314"/>
-                  </a:lnTo>
-                  <a:lnTo>
-                    <a:pt x="6516998" y="3644416"/>
-                  </a:lnTo>
-                  <a:lnTo>
-                    <a:pt x="6439364" y="3643408"/>
-                  </a:lnTo>
-                  <a:lnTo>
-                    <a:pt x="6361730" y="3642277"/>
-                  </a:lnTo>
-                  <a:lnTo>
-                    <a:pt x="6284096" y="3641007"/>
-                  </a:lnTo>
-                  <a:lnTo>
-                    <a:pt x="6206462" y="3639581"/>
-                  </a:lnTo>
-                  <a:lnTo>
-                    <a:pt x="6128827" y="3637981"/>
-                  </a:lnTo>
-                  <a:lnTo>
-                    <a:pt x="6051193" y="3636184"/>
-                  </a:lnTo>
-                  <a:lnTo>
-                    <a:pt x="5973559" y="3634168"/>
-                  </a:lnTo>
-                  <a:lnTo>
-                    <a:pt x="5895925" y="3631904"/>
-                  </a:lnTo>
-                  <a:lnTo>
-                    <a:pt x="5818291" y="3629364"/>
-                  </a:lnTo>
-                  <a:lnTo>
-                    <a:pt x="5740657" y="3626512"/>
-                  </a:lnTo>
-                  <a:lnTo>
-                    <a:pt x="5663023" y="3623310"/>
-                  </a:lnTo>
-                  <a:lnTo>
-                    <a:pt x="5585389" y="3619717"/>
-                  </a:lnTo>
-                  <a:lnTo>
-                    <a:pt x="5507755" y="3615683"/>
-                  </a:lnTo>
-                  <a:lnTo>
-                    <a:pt x="5430121" y="3611155"/>
-                  </a:lnTo>
-                  <a:lnTo>
-                    <a:pt x="5352487" y="3606072"/>
-                  </a:lnTo>
-                  <a:lnTo>
-                    <a:pt x="5274853" y="3600366"/>
-                  </a:lnTo>
-                  <a:lnTo>
-                    <a:pt x="5197219" y="3593962"/>
-                  </a:lnTo>
-                  <a:lnTo>
-                    <a:pt x="5119585" y="3586773"/>
-                  </a:lnTo>
-                  <a:lnTo>
-                    <a:pt x="5041951" y="3578703"/>
-                  </a:lnTo>
-                  <a:lnTo>
-                    <a:pt x="4964317" y="3569644"/>
-                  </a:lnTo>
-                  <a:lnTo>
-                    <a:pt x="4886683" y="3559476"/>
-                  </a:lnTo>
-                  <a:lnTo>
-                    <a:pt x="4809049" y="3548062"/>
-                  </a:lnTo>
-                  <a:lnTo>
-                    <a:pt x="4731415" y="3535250"/>
-                  </a:lnTo>
-                  <a:lnTo>
-                    <a:pt x="4653781" y="3520868"/>
-                  </a:lnTo>
-                  <a:lnTo>
-                    <a:pt x="4576147" y="3504724"/>
-                  </a:lnTo>
-                  <a:lnTo>
-                    <a:pt x="4498513" y="3486602"/>
-                  </a:lnTo>
-                  <a:lnTo>
-                    <a:pt x="4420879" y="3466260"/>
-                  </a:lnTo>
-                  <a:lnTo>
-                    <a:pt x="4343244" y="3443426"/>
-                  </a:lnTo>
-                  <a:lnTo>
-                    <a:pt x="4265610" y="3417795"/>
-                  </a:lnTo>
-                  <a:lnTo>
-                    <a:pt x="4187976" y="3389023"/>
-                  </a:lnTo>
-                  <a:lnTo>
-                    <a:pt x="4110342" y="3356727"/>
-                  </a:lnTo>
-                  <a:lnTo>
-                    <a:pt x="4032708" y="3320474"/>
-                  </a:lnTo>
-                  <a:lnTo>
-                    <a:pt x="3955074" y="3279779"/>
-                  </a:lnTo>
-                  <a:lnTo>
-                    <a:pt x="3877440" y="3234099"/>
-                  </a:lnTo>
-                  <a:lnTo>
-                    <a:pt x="3799806" y="3182823"/>
-                  </a:lnTo>
-                  <a:lnTo>
-                    <a:pt x="3722172" y="3125265"/>
-                  </a:lnTo>
-                  <a:lnTo>
-                    <a:pt x="3644538" y="3060656"/>
-                  </a:lnTo>
-                  <a:lnTo>
-                    <a:pt x="3566904" y="2988131"/>
-                  </a:lnTo>
-                  <a:lnTo>
-                    <a:pt x="3489270" y="2906721"/>
-                  </a:lnTo>
-                  <a:lnTo>
-                    <a:pt x="3411636" y="2815337"/>
-                  </a:lnTo>
-                  <a:lnTo>
-                    <a:pt x="3334002" y="2768710"/>
-                  </a:lnTo>
-                  <a:lnTo>
-                    <a:pt x="3256368" y="2747053"/>
-                  </a:lnTo>
-                  <a:lnTo>
-                    <a:pt x="3178734" y="2724867"/>
-                  </a:lnTo>
-                  <a:lnTo>
-                    <a:pt x="3101100" y="2702136"/>
-                  </a:lnTo>
-                  <a:lnTo>
-                    <a:pt x="3023466" y="2678849"/>
-                  </a:lnTo>
-                  <a:lnTo>
-                    <a:pt x="2945832" y="2654991"/>
-                  </a:lnTo>
-                  <a:lnTo>
-                    <a:pt x="2868198" y="2630549"/>
-                  </a:lnTo>
-                  <a:lnTo>
-                    <a:pt x="2790564" y="2605508"/>
-                  </a:lnTo>
-                  <a:lnTo>
-                    <a:pt x="2712930" y="2579853"/>
-                  </a:lnTo>
-                  <a:lnTo>
-                    <a:pt x="2635295" y="2553570"/>
-                  </a:lnTo>
-                  <a:lnTo>
-                    <a:pt x="2557661" y="2526643"/>
-                  </a:lnTo>
-                  <a:lnTo>
-                    <a:pt x="2480027" y="2499056"/>
-                  </a:lnTo>
-                  <a:lnTo>
-                    <a:pt x="2402393" y="2470793"/>
-                  </a:lnTo>
-                  <a:lnTo>
-                    <a:pt x="2324759" y="2441838"/>
-                  </a:lnTo>
-                  <a:lnTo>
-                    <a:pt x="2247125" y="2412174"/>
-                  </a:lnTo>
-                  <a:lnTo>
-                    <a:pt x="2169491" y="2381782"/>
-                  </a:lnTo>
-                  <a:lnTo>
-                    <a:pt x="2091857" y="2350647"/>
-                  </a:lnTo>
-                  <a:lnTo>
-                    <a:pt x="2014223" y="2318748"/>
-                  </a:lnTo>
-                  <a:lnTo>
-                    <a:pt x="1936589" y="2286068"/>
-                  </a:lnTo>
-                  <a:lnTo>
-                    <a:pt x="1858955" y="2252587"/>
-                  </a:lnTo>
-                  <a:lnTo>
-                    <a:pt x="1781321" y="2218286"/>
-                  </a:lnTo>
-                  <a:lnTo>
-                    <a:pt x="1703687" y="2183144"/>
-                  </a:lnTo>
-                  <a:lnTo>
-                    <a:pt x="1626053" y="2147142"/>
-                  </a:lnTo>
-                  <a:lnTo>
-                    <a:pt x="1548419" y="2110257"/>
-                  </a:lnTo>
-                  <a:lnTo>
-                    <a:pt x="1470785" y="2072469"/>
-                  </a:lnTo>
-                  <a:lnTo>
-                    <a:pt x="1393151" y="2033755"/>
-                  </a:lnTo>
-                  <a:lnTo>
-                    <a:pt x="1315517" y="1994093"/>
-                  </a:lnTo>
-                  <a:lnTo>
-                    <a:pt x="1237883" y="1953458"/>
-                  </a:lnTo>
-                  <a:lnTo>
-                    <a:pt x="1160249" y="1911829"/>
-                  </a:lnTo>
-                  <a:lnTo>
-                    <a:pt x="1082615" y="1869179"/>
-                  </a:lnTo>
-                  <a:lnTo>
-                    <a:pt x="1004981" y="1825484"/>
-                  </a:lnTo>
-                  <a:lnTo>
-                    <a:pt x="927346" y="1780719"/>
-                  </a:lnTo>
-                  <a:lnTo>
-                    <a:pt x="849712" y="1734858"/>
-                  </a:lnTo>
-                  <a:lnTo>
-                    <a:pt x="772078" y="1687872"/>
-                  </a:lnTo>
-                  <a:lnTo>
-                    <a:pt x="694444" y="1639736"/>
-                  </a:lnTo>
-                  <a:lnTo>
-                    <a:pt x="616810" y="1590420"/>
-                  </a:lnTo>
-                  <a:lnTo>
-                    <a:pt x="539176" y="1539896"/>
-                  </a:lnTo>
-                  <a:lnTo>
-                    <a:pt x="461542" y="1488134"/>
-                  </a:lnTo>
-                  <a:lnTo>
-                    <a:pt x="383908" y="1435104"/>
-                  </a:lnTo>
-                  <a:lnTo>
-                    <a:pt x="306274" y="1380774"/>
-                  </a:lnTo>
-                  <a:lnTo>
-                    <a:pt x="228640" y="1325114"/>
-                  </a:lnTo>
-                  <a:lnTo>
-                    <a:pt x="151006" y="1268090"/>
-                  </a:lnTo>
-                  <a:lnTo>
-                    <a:pt x="73372" y="1209669"/>
-                  </a:lnTo>
-                  <a:lnTo>
-                    <a:pt x="0" y="1153102"/>
+                    <a:pt x="2402393" y="74269"/>
+                  </a:lnTo>
+                  <a:lnTo>
+                    <a:pt x="2480027" y="452232"/>
+                  </a:lnTo>
+                  <a:lnTo>
+                    <a:pt x="2557661" y="790273"/>
+                  </a:lnTo>
+                  <a:lnTo>
+                    <a:pt x="2635295" y="1092609"/>
+                  </a:lnTo>
+                  <a:lnTo>
+                    <a:pt x="2712930" y="1363011"/>
+                  </a:lnTo>
+                  <a:lnTo>
+                    <a:pt x="2790564" y="1604851"/>
+                  </a:lnTo>
+                  <a:lnTo>
+                    <a:pt x="2868198" y="1821148"/>
+                  </a:lnTo>
+                  <a:lnTo>
+                    <a:pt x="2945832" y="2014598"/>
+                  </a:lnTo>
+                  <a:lnTo>
+                    <a:pt x="3023466" y="2187616"/>
+                  </a:lnTo>
+                  <a:lnTo>
+                    <a:pt x="3101100" y="2342358"/>
+                  </a:lnTo>
+                  <a:lnTo>
+                    <a:pt x="3178734" y="2480756"/>
+                  </a:lnTo>
+                  <a:lnTo>
+                    <a:pt x="3256368" y="2604536"/>
+                  </a:lnTo>
+                  <a:lnTo>
+                    <a:pt x="3334002" y="2715241"/>
+                  </a:lnTo>
+                  <a:lnTo>
+                    <a:pt x="3411636" y="2790575"/>
+                  </a:lnTo>
+                  <a:lnTo>
+                    <a:pt x="3489270" y="2813349"/>
+                  </a:lnTo>
+                  <a:lnTo>
+                    <a:pt x="3566904" y="2835521"/>
+                  </a:lnTo>
+                  <a:lnTo>
+                    <a:pt x="3644538" y="2857108"/>
+                  </a:lnTo>
+                  <a:lnTo>
+                    <a:pt x="3722172" y="2878124"/>
+                  </a:lnTo>
+                  <a:lnTo>
+                    <a:pt x="3799806" y="2898585"/>
+                  </a:lnTo>
+                  <a:lnTo>
+                    <a:pt x="3877440" y="2918505"/>
+                  </a:lnTo>
+                  <a:lnTo>
+                    <a:pt x="3955074" y="2937900"/>
+                  </a:lnTo>
+                  <a:lnTo>
+                    <a:pt x="4032708" y="2956782"/>
+                  </a:lnTo>
+                  <a:lnTo>
+                    <a:pt x="4110342" y="2975165"/>
+                  </a:lnTo>
+                  <a:lnTo>
+                    <a:pt x="4187976" y="2993062"/>
+                  </a:lnTo>
+                  <a:lnTo>
+                    <a:pt x="4265610" y="3010487"/>
+                  </a:lnTo>
+                  <a:lnTo>
+                    <a:pt x="4343244" y="3027451"/>
+                  </a:lnTo>
+                  <a:lnTo>
+                    <a:pt x="4420879" y="3043967"/>
+                  </a:lnTo>
+                  <a:lnTo>
+                    <a:pt x="4498513" y="3060047"/>
+                  </a:lnTo>
+                  <a:lnTo>
+                    <a:pt x="4576147" y="3075702"/>
+                  </a:lnTo>
+                  <a:lnTo>
+                    <a:pt x="4653781" y="3090944"/>
+                  </a:lnTo>
+                  <a:lnTo>
+                    <a:pt x="4731415" y="3105782"/>
+                  </a:lnTo>
+                  <a:lnTo>
+                    <a:pt x="4809049" y="3120229"/>
+                  </a:lnTo>
+                  <a:lnTo>
+                    <a:pt x="4886683" y="3134294"/>
+                  </a:lnTo>
+                  <a:lnTo>
+                    <a:pt x="4964317" y="3147988"/>
+                  </a:lnTo>
+                  <a:lnTo>
+                    <a:pt x="5041951" y="3161320"/>
+                  </a:lnTo>
+                  <a:lnTo>
+                    <a:pt x="5119585" y="3174299"/>
+                  </a:lnTo>
+                  <a:lnTo>
+                    <a:pt x="5197219" y="3186936"/>
+                  </a:lnTo>
+                  <a:lnTo>
+                    <a:pt x="5274853" y="3199239"/>
+                  </a:lnTo>
+                  <a:lnTo>
+                    <a:pt x="5352487" y="3211217"/>
+                  </a:lnTo>
+                  <a:lnTo>
+                    <a:pt x="5430121" y="3222879"/>
+                  </a:lnTo>
+                  <a:lnTo>
+                    <a:pt x="5507755" y="3234232"/>
+                  </a:lnTo>
+                  <a:lnTo>
+                    <a:pt x="5585389" y="3245285"/>
+                  </a:lnTo>
+                  <a:lnTo>
+                    <a:pt x="5663023" y="3256047"/>
+                  </a:lnTo>
+                  <a:lnTo>
+                    <a:pt x="5740657" y="3266524"/>
+                  </a:lnTo>
+                  <a:lnTo>
+                    <a:pt x="5818291" y="3276724"/>
+                  </a:lnTo>
+                  <a:lnTo>
+                    <a:pt x="5895925" y="3286655"/>
+                  </a:lnTo>
+                  <a:lnTo>
+                    <a:pt x="5973559" y="3296324"/>
+                  </a:lnTo>
+                  <a:lnTo>
+                    <a:pt x="6051193" y="3305737"/>
+                  </a:lnTo>
+                  <a:lnTo>
+                    <a:pt x="6128827" y="3314902"/>
+                  </a:lnTo>
+                  <a:lnTo>
+                    <a:pt x="6206462" y="3323824"/>
+                  </a:lnTo>
+                  <a:lnTo>
+                    <a:pt x="6284096" y="3332511"/>
+                  </a:lnTo>
+                  <a:lnTo>
+                    <a:pt x="6361730" y="3340968"/>
+                  </a:lnTo>
+                  <a:lnTo>
+                    <a:pt x="6439364" y="3349201"/>
+                  </a:lnTo>
+                  <a:lnTo>
+                    <a:pt x="6516998" y="3357218"/>
+                  </a:lnTo>
+                  <a:lnTo>
+                    <a:pt x="6594632" y="3365022"/>
+                  </a:lnTo>
+                  <a:lnTo>
+                    <a:pt x="6672266" y="3372621"/>
+                  </a:lnTo>
+                  <a:lnTo>
+                    <a:pt x="6749900" y="3380018"/>
+                  </a:lnTo>
+                  <a:lnTo>
+                    <a:pt x="6827534" y="3387220"/>
+                  </a:lnTo>
+                  <a:lnTo>
+                    <a:pt x="6905168" y="3394232"/>
+                  </a:lnTo>
+                  <a:lnTo>
+                    <a:pt x="6982802" y="3401059"/>
+                  </a:lnTo>
+                  <a:lnTo>
+                    <a:pt x="7060436" y="3407705"/>
+                  </a:lnTo>
+                  <a:lnTo>
+                    <a:pt x="7138070" y="3414176"/>
+                  </a:lnTo>
+                  <a:lnTo>
+                    <a:pt x="7215704" y="3420475"/>
+                  </a:lnTo>
+                  <a:lnTo>
+                    <a:pt x="7293338" y="3426609"/>
+                  </a:lnTo>
+                  <a:lnTo>
+                    <a:pt x="7370972" y="3432580"/>
+                  </a:lnTo>
+                  <a:lnTo>
+                    <a:pt x="7370972" y="3649819"/>
+                  </a:lnTo>
+                  <a:lnTo>
+                    <a:pt x="7293338" y="3649485"/>
+                  </a:lnTo>
+                  <a:lnTo>
+                    <a:pt x="7215704" y="3649112"/>
+                  </a:lnTo>
+                  <a:lnTo>
+                    <a:pt x="7138070" y="3648695"/>
+                  </a:lnTo>
+                  <a:lnTo>
+                    <a:pt x="7060436" y="3648229"/>
+                  </a:lnTo>
+                  <a:lnTo>
+                    <a:pt x="6982802" y="3647707"/>
+                  </a:lnTo>
+                  <a:lnTo>
+                    <a:pt x="6905168" y="3647124"/>
+                  </a:lnTo>
+                  <a:lnTo>
+                    <a:pt x="6827534" y="3646473"/>
+                  </a:lnTo>
+                  <a:lnTo>
+                    <a:pt x="6749900" y="3645744"/>
+                  </a:lnTo>
+                  <a:lnTo>
+                    <a:pt x="6672266" y="3644929"/>
+                  </a:lnTo>
+                  <a:lnTo>
+                    <a:pt x="6594632" y="3644018"/>
+                  </a:lnTo>
+                  <a:lnTo>
+                    <a:pt x="6516998" y="3643000"/>
+                  </a:lnTo>
+                  <a:lnTo>
+                    <a:pt x="6439364" y="3641861"/>
+                  </a:lnTo>
+                  <a:lnTo>
+                    <a:pt x="6361730" y="3640587"/>
+                  </a:lnTo>
+                  <a:lnTo>
+                    <a:pt x="6284096" y="3639163"/>
+                  </a:lnTo>
+                  <a:lnTo>
+                    <a:pt x="6206462" y="3637571"/>
+                  </a:lnTo>
+                  <a:lnTo>
+                    <a:pt x="6128827" y="3635792"/>
+                  </a:lnTo>
+                  <a:lnTo>
+                    <a:pt x="6051193" y="3633801"/>
+                  </a:lnTo>
+                  <a:lnTo>
+                    <a:pt x="5973559" y="3631576"/>
+                  </a:lnTo>
+                  <a:lnTo>
+                    <a:pt x="5895925" y="3629088"/>
+                  </a:lnTo>
+                  <a:lnTo>
+                    <a:pt x="5818291" y="3626306"/>
+                  </a:lnTo>
+                  <a:lnTo>
+                    <a:pt x="5740657" y="3623196"/>
+                  </a:lnTo>
+                  <a:lnTo>
+                    <a:pt x="5663023" y="3619718"/>
+                  </a:lnTo>
+                  <a:lnTo>
+                    <a:pt x="5585389" y="3615830"/>
+                  </a:lnTo>
+                  <a:lnTo>
+                    <a:pt x="5507755" y="3611482"/>
+                  </a:lnTo>
+                  <a:lnTo>
+                    <a:pt x="5430121" y="3606621"/>
+                  </a:lnTo>
+                  <a:lnTo>
+                    <a:pt x="5352487" y="3601186"/>
+                  </a:lnTo>
+                  <a:lnTo>
+                    <a:pt x="5274853" y="3595109"/>
+                  </a:lnTo>
+                  <a:lnTo>
+                    <a:pt x="5197219" y="3588314"/>
+                  </a:lnTo>
+                  <a:lnTo>
+                    <a:pt x="5119585" y="3580717"/>
+                  </a:lnTo>
+                  <a:lnTo>
+                    <a:pt x="5041951" y="3572223"/>
+                  </a:lnTo>
+                  <a:lnTo>
+                    <a:pt x="4964317" y="3562725"/>
+                  </a:lnTo>
+                  <a:lnTo>
+                    <a:pt x="4886683" y="3552106"/>
+                  </a:lnTo>
+                  <a:lnTo>
+                    <a:pt x="4809049" y="3540233"/>
+                  </a:lnTo>
+                  <a:lnTo>
+                    <a:pt x="4731415" y="3526958"/>
+                  </a:lnTo>
+                  <a:lnTo>
+                    <a:pt x="4653781" y="3512114"/>
+                  </a:lnTo>
+                  <a:lnTo>
+                    <a:pt x="4576147" y="3495518"/>
+                  </a:lnTo>
+                  <a:lnTo>
+                    <a:pt x="4498513" y="3476962"/>
+                  </a:lnTo>
+                  <a:lnTo>
+                    <a:pt x="4420879" y="3456214"/>
+                  </a:lnTo>
+                  <a:lnTo>
+                    <a:pt x="4343244" y="3433016"/>
+                  </a:lnTo>
+                  <a:lnTo>
+                    <a:pt x="4265610" y="3407079"/>
+                  </a:lnTo>
+                  <a:lnTo>
+                    <a:pt x="4187976" y="3378078"/>
+                  </a:lnTo>
+                  <a:lnTo>
+                    <a:pt x="4110342" y="3345652"/>
+                  </a:lnTo>
+                  <a:lnTo>
+                    <a:pt x="4032708" y="3309397"/>
+                  </a:lnTo>
+                  <a:lnTo>
+                    <a:pt x="3955074" y="3268860"/>
+                  </a:lnTo>
+                  <a:lnTo>
+                    <a:pt x="3877440" y="3223536"/>
+                  </a:lnTo>
+                  <a:lnTo>
+                    <a:pt x="3799806" y="3172859"/>
+                  </a:lnTo>
+                  <a:lnTo>
+                    <a:pt x="3722172" y="3116197"/>
+                  </a:lnTo>
+                  <a:lnTo>
+                    <a:pt x="3644538" y="3052844"/>
+                  </a:lnTo>
+                  <a:lnTo>
+                    <a:pt x="3566904" y="2982009"/>
+                  </a:lnTo>
+                  <a:lnTo>
+                    <a:pt x="3489270" y="2902808"/>
+                  </a:lnTo>
+                  <a:lnTo>
+                    <a:pt x="3411636" y="2814254"/>
+                  </a:lnTo>
+                  <a:lnTo>
+                    <a:pt x="3334002" y="2767183"/>
+                  </a:lnTo>
+                  <a:lnTo>
+                    <a:pt x="3256368" y="2743157"/>
+                  </a:lnTo>
+                  <a:lnTo>
+                    <a:pt x="3178734" y="2718478"/>
+                  </a:lnTo>
+                  <a:lnTo>
+                    <a:pt x="3101100" y="2693130"/>
+                  </a:lnTo>
+                  <a:lnTo>
+                    <a:pt x="3023466" y="2667094"/>
+                  </a:lnTo>
+                  <a:lnTo>
+                    <a:pt x="2945832" y="2640351"/>
+                  </a:lnTo>
+                  <a:lnTo>
+                    <a:pt x="2868198" y="2612883"/>
+                  </a:lnTo>
+                  <a:lnTo>
+                    <a:pt x="2790564" y="2584670"/>
+                  </a:lnTo>
+                  <a:lnTo>
+                    <a:pt x="2712930" y="2555691"/>
+                  </a:lnTo>
+                  <a:lnTo>
+                    <a:pt x="2635295" y="2525926"/>
+                  </a:lnTo>
+                  <a:lnTo>
+                    <a:pt x="2557661" y="2495353"/>
+                  </a:lnTo>
+                  <a:lnTo>
+                    <a:pt x="2480027" y="2463950"/>
+                  </a:lnTo>
+                  <a:lnTo>
+                    <a:pt x="2402393" y="2431695"/>
+                  </a:lnTo>
+                  <a:lnTo>
+                    <a:pt x="2324759" y="2398566"/>
+                  </a:lnTo>
+                  <a:lnTo>
+                    <a:pt x="2247125" y="2364537"/>
+                  </a:lnTo>
+                  <a:lnTo>
+                    <a:pt x="2169491" y="2329584"/>
+                  </a:lnTo>
+                  <a:lnTo>
+                    <a:pt x="2091857" y="2293684"/>
+                  </a:lnTo>
+                  <a:lnTo>
+                    <a:pt x="2014223" y="2256809"/>
+                  </a:lnTo>
+                  <a:lnTo>
+                    <a:pt x="1936589" y="2218934"/>
+                  </a:lnTo>
+                  <a:lnTo>
+                    <a:pt x="1858955" y="2180031"/>
+                  </a:lnTo>
+                  <a:lnTo>
+                    <a:pt x="1781321" y="2140072"/>
+                  </a:lnTo>
+                  <a:lnTo>
+                    <a:pt x="1703687" y="2099029"/>
+                  </a:lnTo>
+                  <a:lnTo>
+                    <a:pt x="1626053" y="2056872"/>
+                  </a:lnTo>
+                  <a:lnTo>
+                    <a:pt x="1548419" y="2013572"/>
+                  </a:lnTo>
+                  <a:lnTo>
+                    <a:pt x="1470785" y="1969096"/>
+                  </a:lnTo>
+                  <a:lnTo>
+                    <a:pt x="1393151" y="1923414"/>
+                  </a:lnTo>
+                  <a:lnTo>
+                    <a:pt x="1315517" y="1876492"/>
+                  </a:lnTo>
+                  <a:lnTo>
+                    <a:pt x="1237883" y="1828297"/>
+                  </a:lnTo>
+                  <a:lnTo>
+                    <a:pt x="1160249" y="1778794"/>
+                  </a:lnTo>
+                  <a:lnTo>
+                    <a:pt x="1082615" y="1727948"/>
+                  </a:lnTo>
+                  <a:lnTo>
+                    <a:pt x="1004981" y="1675723"/>
+                  </a:lnTo>
+                  <a:lnTo>
+                    <a:pt x="927346" y="1622080"/>
+                  </a:lnTo>
+                  <a:lnTo>
+                    <a:pt x="849712" y="1566981"/>
+                  </a:lnTo>
+                  <a:lnTo>
+                    <a:pt x="772078" y="1510388"/>
+                  </a:lnTo>
+                  <a:lnTo>
+                    <a:pt x="694444" y="1452259"/>
+                  </a:lnTo>
+                  <a:lnTo>
+                    <a:pt x="616810" y="1392552"/>
+                  </a:lnTo>
+                  <a:lnTo>
+                    <a:pt x="539176" y="1331226"/>
+                  </a:lnTo>
+                  <a:lnTo>
+                    <a:pt x="461542" y="1268235"/>
+                  </a:lnTo>
+                  <a:lnTo>
+                    <a:pt x="383908" y="1203535"/>
+                  </a:lnTo>
+                  <a:lnTo>
+                    <a:pt x="306274" y="1137080"/>
+                  </a:lnTo>
+                  <a:lnTo>
+                    <a:pt x="228640" y="1068821"/>
+                  </a:lnTo>
+                  <a:lnTo>
+                    <a:pt x="151006" y="998710"/>
+                  </a:lnTo>
+                  <a:lnTo>
+                    <a:pt x="73372" y="926697"/>
+                  </a:lnTo>
+                  <a:lnTo>
+                    <a:pt x="0" y="856790"/>
                   </a:lnTo>
                   <a:close/>
                 </a:path>
@@ -3516,207 +3519,210 @@
           </p:nvSpPr>
           <p:spPr>
             <a:xfrm>
-              <a:off x="3240498" y="1896563"/>
-              <a:ext cx="4947992" cy="3401569"/>
+              <a:off x="3206267" y="1896563"/>
+              <a:ext cx="4982222" cy="3432580"/>
             </a:xfrm>
             <a:custGeom>
               <a:avLst/>
               <a:pathLst>
-                <a:path w="4947992" h="3401569">
+                <a:path w="4982222" h="3432580">
                   <a:moveTo>
                     <a:pt x="0" y="0"/>
                   </a:moveTo>
                   <a:lnTo>
-                    <a:pt x="57047" y="301667"/>
-                  </a:lnTo>
-                  <a:lnTo>
-                    <a:pt x="134681" y="667393"/>
-                  </a:lnTo>
-                  <a:lnTo>
-                    <a:pt x="212315" y="993203"/>
-                  </a:lnTo>
-                  <a:lnTo>
-                    <a:pt x="289949" y="1283455"/>
-                  </a:lnTo>
-                  <a:lnTo>
-                    <a:pt x="367583" y="1542028"/>
-                  </a:lnTo>
-                  <a:lnTo>
-                    <a:pt x="445217" y="1772381"/>
-                  </a:lnTo>
-                  <a:lnTo>
-                    <a:pt x="522851" y="1977593"/>
-                  </a:lnTo>
-                  <a:lnTo>
-                    <a:pt x="600485" y="2160408"/>
-                  </a:lnTo>
-                  <a:lnTo>
-                    <a:pt x="678119" y="2323271"/>
-                  </a:lnTo>
-                  <a:lnTo>
-                    <a:pt x="755753" y="2468358"/>
-                  </a:lnTo>
-                  <a:lnTo>
-                    <a:pt x="833387" y="2597611"/>
-                  </a:lnTo>
-                  <a:lnTo>
-                    <a:pt x="911021" y="2712758"/>
-                  </a:lnTo>
-                  <a:lnTo>
-                    <a:pt x="988655" y="2789848"/>
-                  </a:lnTo>
-                  <a:lnTo>
-                    <a:pt x="1066289" y="2810481"/>
-                  </a:lnTo>
-                  <a:lnTo>
-                    <a:pt x="1143923" y="2830620"/>
-                  </a:lnTo>
-                  <a:lnTo>
-                    <a:pt x="1221557" y="2850278"/>
-                  </a:lnTo>
-                  <a:lnTo>
-                    <a:pt x="1299191" y="2869466"/>
-                  </a:lnTo>
-                  <a:lnTo>
-                    <a:pt x="1376826" y="2888195"/>
-                  </a:lnTo>
-                  <a:lnTo>
-                    <a:pt x="1454460" y="2906476"/>
-                  </a:lnTo>
-                  <a:lnTo>
-                    <a:pt x="1532094" y="2924319"/>
-                  </a:lnTo>
-                  <a:lnTo>
-                    <a:pt x="1609728" y="2941736"/>
-                  </a:lnTo>
-                  <a:lnTo>
-                    <a:pt x="1687362" y="2958737"/>
-                  </a:lnTo>
-                  <a:lnTo>
-                    <a:pt x="1764996" y="2975331"/>
-                  </a:lnTo>
-                  <a:lnTo>
-                    <a:pt x="1842630" y="2991528"/>
-                  </a:lnTo>
-                  <a:lnTo>
-                    <a:pt x="1920264" y="3007338"/>
-                  </a:lnTo>
-                  <a:lnTo>
-                    <a:pt x="1997898" y="3022770"/>
-                  </a:lnTo>
-                  <a:lnTo>
-                    <a:pt x="2075532" y="3037833"/>
-                  </a:lnTo>
-                  <a:lnTo>
-                    <a:pt x="2153166" y="3052535"/>
-                  </a:lnTo>
-                  <a:lnTo>
-                    <a:pt x="2230800" y="3066886"/>
-                  </a:lnTo>
-                  <a:lnTo>
-                    <a:pt x="2308434" y="3080894"/>
-                  </a:lnTo>
-                  <a:lnTo>
-                    <a:pt x="2386068" y="3094567"/>
-                  </a:lnTo>
-                  <a:lnTo>
-                    <a:pt x="2463702" y="3107912"/>
-                  </a:lnTo>
-                  <a:lnTo>
-                    <a:pt x="2541336" y="3120939"/>
-                  </a:lnTo>
-                  <a:lnTo>
-                    <a:pt x="2618970" y="3133654"/>
-                  </a:lnTo>
-                  <a:lnTo>
-                    <a:pt x="2696604" y="3146065"/>
-                  </a:lnTo>
-                  <a:lnTo>
-                    <a:pt x="2774238" y="3158180"/>
-                  </a:lnTo>
-                  <a:lnTo>
-                    <a:pt x="2851872" y="3170004"/>
-                  </a:lnTo>
-                  <a:lnTo>
-                    <a:pt x="2929506" y="3181546"/>
-                  </a:lnTo>
-                  <a:lnTo>
-                    <a:pt x="3007140" y="3192812"/>
-                  </a:lnTo>
-                  <a:lnTo>
-                    <a:pt x="3084775" y="3203808"/>
-                  </a:lnTo>
-                  <a:lnTo>
-                    <a:pt x="3162409" y="3214542"/>
-                  </a:lnTo>
-                  <a:lnTo>
-                    <a:pt x="3240043" y="3225018"/>
-                  </a:lnTo>
-                  <a:lnTo>
-                    <a:pt x="3317677" y="3235245"/>
-                  </a:lnTo>
-                  <a:lnTo>
-                    <a:pt x="3395311" y="3245226"/>
-                  </a:lnTo>
-                  <a:lnTo>
-                    <a:pt x="3472945" y="3254969"/>
-                  </a:lnTo>
-                  <a:lnTo>
-                    <a:pt x="3550579" y="3264479"/>
-                  </a:lnTo>
-                  <a:lnTo>
-                    <a:pt x="3628213" y="3273762"/>
-                  </a:lnTo>
-                  <a:lnTo>
-                    <a:pt x="3705847" y="3282822"/>
-                  </a:lnTo>
-                  <a:lnTo>
-                    <a:pt x="3783481" y="3291666"/>
-                  </a:lnTo>
-                  <a:lnTo>
-                    <a:pt x="3861115" y="3300298"/>
-                  </a:lnTo>
-                  <a:lnTo>
-                    <a:pt x="3938749" y="3308724"/>
-                  </a:lnTo>
-                  <a:lnTo>
-                    <a:pt x="4016383" y="3316949"/>
-                  </a:lnTo>
-                  <a:lnTo>
-                    <a:pt x="4094017" y="3324977"/>
-                  </a:lnTo>
-                  <a:lnTo>
-                    <a:pt x="4171651" y="3332812"/>
-                  </a:lnTo>
-                  <a:lnTo>
-                    <a:pt x="4249285" y="3340461"/>
-                  </a:lnTo>
-                  <a:lnTo>
-                    <a:pt x="4326919" y="3347926"/>
-                  </a:lnTo>
-                  <a:lnTo>
-                    <a:pt x="4404553" y="3355213"/>
-                  </a:lnTo>
-                  <a:lnTo>
-                    <a:pt x="4482187" y="3362326"/>
-                  </a:lnTo>
-                  <a:lnTo>
-                    <a:pt x="4559821" y="3369269"/>
-                  </a:lnTo>
-                  <a:lnTo>
-                    <a:pt x="4637455" y="3376045"/>
-                  </a:lnTo>
-                  <a:lnTo>
-                    <a:pt x="4715089" y="3382660"/>
-                  </a:lnTo>
-                  <a:lnTo>
-                    <a:pt x="4792723" y="3389116"/>
-                  </a:lnTo>
-                  <a:lnTo>
-                    <a:pt x="4870358" y="3395418"/>
-                  </a:lnTo>
-                  <a:lnTo>
-                    <a:pt x="4947992" y="3401569"/>
+                    <a:pt x="13643" y="74269"/>
+                  </a:lnTo>
+                  <a:lnTo>
+                    <a:pt x="91277" y="452232"/>
+                  </a:lnTo>
+                  <a:lnTo>
+                    <a:pt x="168911" y="790273"/>
+                  </a:lnTo>
+                  <a:lnTo>
+                    <a:pt x="246545" y="1092609"/>
+                  </a:lnTo>
+                  <a:lnTo>
+                    <a:pt x="324179" y="1363011"/>
+                  </a:lnTo>
+                  <a:lnTo>
+                    <a:pt x="401813" y="1604851"/>
+                  </a:lnTo>
+                  <a:lnTo>
+                    <a:pt x="479447" y="1821148"/>
+                  </a:lnTo>
+                  <a:lnTo>
+                    <a:pt x="557082" y="2014598"/>
+                  </a:lnTo>
+                  <a:lnTo>
+                    <a:pt x="634716" y="2187616"/>
+                  </a:lnTo>
+                  <a:lnTo>
+                    <a:pt x="712350" y="2342358"/>
+                  </a:lnTo>
+                  <a:lnTo>
+                    <a:pt x="789984" y="2480756"/>
+                  </a:lnTo>
+                  <a:lnTo>
+                    <a:pt x="867618" y="2604536"/>
+                  </a:lnTo>
+                  <a:lnTo>
+                    <a:pt x="945252" y="2715241"/>
+                  </a:lnTo>
+                  <a:lnTo>
+                    <a:pt x="1022886" y="2790575"/>
+                  </a:lnTo>
+                  <a:lnTo>
+                    <a:pt x="1100520" y="2813349"/>
+                  </a:lnTo>
+                  <a:lnTo>
+                    <a:pt x="1178154" y="2835521"/>
+                  </a:lnTo>
+                  <a:lnTo>
+                    <a:pt x="1255788" y="2857108"/>
+                  </a:lnTo>
+                  <a:lnTo>
+                    <a:pt x="1333422" y="2878124"/>
+                  </a:lnTo>
+                  <a:lnTo>
+                    <a:pt x="1411056" y="2898585"/>
+                  </a:lnTo>
+                  <a:lnTo>
+                    <a:pt x="1488690" y="2918505"/>
+                  </a:lnTo>
+                  <a:lnTo>
+                    <a:pt x="1566324" y="2937900"/>
+                  </a:lnTo>
+                  <a:lnTo>
+                    <a:pt x="1643958" y="2956782"/>
+                  </a:lnTo>
+                  <a:lnTo>
+                    <a:pt x="1721592" y="2975165"/>
+                  </a:lnTo>
+                  <a:lnTo>
+                    <a:pt x="1799226" y="2993062"/>
+                  </a:lnTo>
+                  <a:lnTo>
+                    <a:pt x="1876860" y="3010487"/>
+                  </a:lnTo>
+                  <a:lnTo>
+                    <a:pt x="1954494" y="3027451"/>
+                  </a:lnTo>
+                  <a:lnTo>
+                    <a:pt x="2032128" y="3043967"/>
+                  </a:lnTo>
+                  <a:lnTo>
+                    <a:pt x="2109762" y="3060047"/>
+                  </a:lnTo>
+                  <a:lnTo>
+                    <a:pt x="2187396" y="3075702"/>
+                  </a:lnTo>
+                  <a:lnTo>
+                    <a:pt x="2265031" y="3090944"/>
+                  </a:lnTo>
+                  <a:lnTo>
+                    <a:pt x="2342665" y="3105782"/>
+                  </a:lnTo>
+                  <a:lnTo>
+                    <a:pt x="2420299" y="3120229"/>
+                  </a:lnTo>
+                  <a:lnTo>
+                    <a:pt x="2497933" y="3134294"/>
+                  </a:lnTo>
+                  <a:lnTo>
+                    <a:pt x="2575567" y="3147988"/>
+                  </a:lnTo>
+                  <a:lnTo>
+                    <a:pt x="2653201" y="3161320"/>
+                  </a:lnTo>
+                  <a:lnTo>
+                    <a:pt x="2730835" y="3174299"/>
+                  </a:lnTo>
+                  <a:lnTo>
+                    <a:pt x="2808469" y="3186936"/>
+                  </a:lnTo>
+                  <a:lnTo>
+                    <a:pt x="2886103" y="3199239"/>
+                  </a:lnTo>
+                  <a:lnTo>
+                    <a:pt x="2963737" y="3211217"/>
+                  </a:lnTo>
+                  <a:lnTo>
+                    <a:pt x="3041371" y="3222879"/>
+                  </a:lnTo>
+                  <a:lnTo>
+                    <a:pt x="3119005" y="3234232"/>
+                  </a:lnTo>
+                  <a:lnTo>
+                    <a:pt x="3196639" y="3245285"/>
+                  </a:lnTo>
+                  <a:lnTo>
+                    <a:pt x="3274273" y="3256047"/>
+                  </a:lnTo>
+                  <a:lnTo>
+                    <a:pt x="3351907" y="3266524"/>
+                  </a:lnTo>
+                  <a:lnTo>
+                    <a:pt x="3429541" y="3276724"/>
+                  </a:lnTo>
+                  <a:lnTo>
+                    <a:pt x="3507175" y="3286655"/>
+                  </a:lnTo>
+                  <a:lnTo>
+                    <a:pt x="3584809" y="3296324"/>
+                  </a:lnTo>
+                  <a:lnTo>
+                    <a:pt x="3662443" y="3305737"/>
+                  </a:lnTo>
+                  <a:lnTo>
+                    <a:pt x="3740077" y="3314902"/>
+                  </a:lnTo>
+                  <a:lnTo>
+                    <a:pt x="3817711" y="3323824"/>
+                  </a:lnTo>
+                  <a:lnTo>
+                    <a:pt x="3895345" y="3332511"/>
+                  </a:lnTo>
+                  <a:lnTo>
+                    <a:pt x="3972980" y="3340968"/>
+                  </a:lnTo>
+                  <a:lnTo>
+                    <a:pt x="4050614" y="3349201"/>
+                  </a:lnTo>
+                  <a:lnTo>
+                    <a:pt x="4128248" y="3357218"/>
+                  </a:lnTo>
+                  <a:lnTo>
+                    <a:pt x="4205882" y="3365022"/>
+                  </a:lnTo>
+                  <a:lnTo>
+                    <a:pt x="4283516" y="3372621"/>
+                  </a:lnTo>
+                  <a:lnTo>
+                    <a:pt x="4361150" y="3380018"/>
+                  </a:lnTo>
+                  <a:lnTo>
+                    <a:pt x="4438784" y="3387220"/>
+                  </a:lnTo>
+                  <a:lnTo>
+                    <a:pt x="4516418" y="3394232"/>
+                  </a:lnTo>
+                  <a:lnTo>
+                    <a:pt x="4594052" y="3401059"/>
+                  </a:lnTo>
+                  <a:lnTo>
+                    <a:pt x="4671686" y="3407705"/>
+                  </a:lnTo>
+                  <a:lnTo>
+                    <a:pt x="4749320" y="3414176"/>
+                  </a:lnTo>
+                  <a:lnTo>
+                    <a:pt x="4826954" y="3420475"/>
+                  </a:lnTo>
+                  <a:lnTo>
+                    <a:pt x="4904588" y="3426609"/>
+                  </a:lnTo>
+                  <a:lnTo>
+                    <a:pt x="4982222" y="3432580"/>
                   </a:lnTo>
                 </a:path>
               </a:pathLst>
@@ -3736,297 +3742,297 @@
           </p:nvSpPr>
           <p:spPr>
             <a:xfrm>
-              <a:off x="817517" y="3049665"/>
-              <a:ext cx="7370972" cy="2497234"/>
+              <a:off x="817517" y="2753353"/>
+              <a:ext cx="7370972" cy="2793029"/>
             </a:xfrm>
             <a:custGeom>
               <a:avLst/>
               <a:pathLst>
-                <a:path w="7370972" h="2497234">
+                <a:path w="7370972" h="2793029">
                   <a:moveTo>
-                    <a:pt x="7370972" y="2497234"/>
+                    <a:pt x="7370972" y="2793029"/>
                   </a:moveTo>
                   <a:lnTo>
-                    <a:pt x="7293338" y="2496951"/>
-                  </a:lnTo>
-                  <a:lnTo>
-                    <a:pt x="7215704" y="2496634"/>
-                  </a:lnTo>
-                  <a:lnTo>
-                    <a:pt x="7138070" y="2496277"/>
-                  </a:lnTo>
-                  <a:lnTo>
-                    <a:pt x="7060436" y="2495877"/>
-                  </a:lnTo>
-                  <a:lnTo>
-                    <a:pt x="6982802" y="2495429"/>
-                  </a:lnTo>
-                  <a:lnTo>
-                    <a:pt x="6905168" y="2494925"/>
-                  </a:lnTo>
-                  <a:lnTo>
-                    <a:pt x="6827534" y="2494359"/>
-                  </a:lnTo>
-                  <a:lnTo>
-                    <a:pt x="6749900" y="2493724"/>
-                  </a:lnTo>
-                  <a:lnTo>
-                    <a:pt x="6672266" y="2493012"/>
-                  </a:lnTo>
-                  <a:lnTo>
-                    <a:pt x="6594632" y="2492212"/>
-                  </a:lnTo>
-                  <a:lnTo>
-                    <a:pt x="6516998" y="2491314"/>
-                  </a:lnTo>
-                  <a:lnTo>
-                    <a:pt x="6439364" y="2490306"/>
-                  </a:lnTo>
-                  <a:lnTo>
-                    <a:pt x="6361730" y="2489174"/>
-                  </a:lnTo>
-                  <a:lnTo>
-                    <a:pt x="6284096" y="2487904"/>
-                  </a:lnTo>
-                  <a:lnTo>
-                    <a:pt x="6206462" y="2486479"/>
-                  </a:lnTo>
-                  <a:lnTo>
-                    <a:pt x="6128827" y="2484878"/>
-                  </a:lnTo>
-                  <a:lnTo>
-                    <a:pt x="6051193" y="2483082"/>
-                  </a:lnTo>
-                  <a:lnTo>
-                    <a:pt x="5973559" y="2481066"/>
-                  </a:lnTo>
-                  <a:lnTo>
-                    <a:pt x="5895925" y="2478802"/>
-                  </a:lnTo>
-                  <a:lnTo>
-                    <a:pt x="5818291" y="2476262"/>
-                  </a:lnTo>
-                  <a:lnTo>
-                    <a:pt x="5740657" y="2473410"/>
-                  </a:lnTo>
-                  <a:lnTo>
-                    <a:pt x="5663023" y="2470208"/>
-                  </a:lnTo>
-                  <a:lnTo>
-                    <a:pt x="5585389" y="2466614"/>
-                  </a:lnTo>
-                  <a:lnTo>
-                    <a:pt x="5507755" y="2462581"/>
-                  </a:lnTo>
-                  <a:lnTo>
-                    <a:pt x="5430121" y="2458053"/>
-                  </a:lnTo>
-                  <a:lnTo>
-                    <a:pt x="5352487" y="2452970"/>
-                  </a:lnTo>
-                  <a:lnTo>
-                    <a:pt x="5274853" y="2447264"/>
-                  </a:lnTo>
-                  <a:lnTo>
-                    <a:pt x="5197219" y="2440860"/>
-                  </a:lnTo>
-                  <a:lnTo>
-                    <a:pt x="5119585" y="2433671"/>
-                  </a:lnTo>
-                  <a:lnTo>
-                    <a:pt x="5041951" y="2425601"/>
-                  </a:lnTo>
-                  <a:lnTo>
-                    <a:pt x="4964317" y="2416542"/>
-                  </a:lnTo>
-                  <a:lnTo>
-                    <a:pt x="4886683" y="2406374"/>
-                  </a:lnTo>
-                  <a:lnTo>
-                    <a:pt x="4809049" y="2394960"/>
-                  </a:lnTo>
-                  <a:lnTo>
-                    <a:pt x="4731415" y="2382148"/>
-                  </a:lnTo>
-                  <a:lnTo>
-                    <a:pt x="4653781" y="2367766"/>
-                  </a:lnTo>
-                  <a:lnTo>
-                    <a:pt x="4576147" y="2351622"/>
-                  </a:lnTo>
-                  <a:lnTo>
-                    <a:pt x="4498513" y="2333500"/>
-                  </a:lnTo>
-                  <a:lnTo>
-                    <a:pt x="4420879" y="2313158"/>
-                  </a:lnTo>
-                  <a:lnTo>
-                    <a:pt x="4343244" y="2290324"/>
-                  </a:lnTo>
-                  <a:lnTo>
-                    <a:pt x="4265610" y="2264693"/>
-                  </a:lnTo>
-                  <a:lnTo>
-                    <a:pt x="4187976" y="2235921"/>
-                  </a:lnTo>
-                  <a:lnTo>
-                    <a:pt x="4110342" y="2203625"/>
-                  </a:lnTo>
-                  <a:lnTo>
-                    <a:pt x="4032708" y="2167372"/>
-                  </a:lnTo>
-                  <a:lnTo>
-                    <a:pt x="3955074" y="2126677"/>
-                  </a:lnTo>
-                  <a:lnTo>
-                    <a:pt x="3877440" y="2080997"/>
-                  </a:lnTo>
-                  <a:lnTo>
-                    <a:pt x="3799806" y="2029721"/>
-                  </a:lnTo>
-                  <a:lnTo>
-                    <a:pt x="3722172" y="1972163"/>
-                  </a:lnTo>
-                  <a:lnTo>
-                    <a:pt x="3644538" y="1907553"/>
-                  </a:lnTo>
-                  <a:lnTo>
-                    <a:pt x="3566904" y="1835028"/>
-                  </a:lnTo>
-                  <a:lnTo>
-                    <a:pt x="3489270" y="1753618"/>
-                  </a:lnTo>
-                  <a:lnTo>
-                    <a:pt x="3411636" y="1662235"/>
-                  </a:lnTo>
-                  <a:lnTo>
-                    <a:pt x="3334002" y="1615607"/>
-                  </a:lnTo>
-                  <a:lnTo>
-                    <a:pt x="3256368" y="1593951"/>
-                  </a:lnTo>
-                  <a:lnTo>
-                    <a:pt x="3178734" y="1571764"/>
-                  </a:lnTo>
-                  <a:lnTo>
-                    <a:pt x="3101100" y="1549034"/>
-                  </a:lnTo>
-                  <a:lnTo>
-                    <a:pt x="3023466" y="1525747"/>
-                  </a:lnTo>
-                  <a:lnTo>
-                    <a:pt x="2945832" y="1501889"/>
-                  </a:lnTo>
-                  <a:lnTo>
-                    <a:pt x="2868198" y="1477447"/>
-                  </a:lnTo>
-                  <a:lnTo>
-                    <a:pt x="2790564" y="1452406"/>
-                  </a:lnTo>
-                  <a:lnTo>
-                    <a:pt x="2712930" y="1426751"/>
-                  </a:lnTo>
-                  <a:lnTo>
-                    <a:pt x="2635295" y="1400468"/>
-                  </a:lnTo>
-                  <a:lnTo>
-                    <a:pt x="2557661" y="1373541"/>
-                  </a:lnTo>
-                  <a:lnTo>
-                    <a:pt x="2480027" y="1345954"/>
-                  </a:lnTo>
-                  <a:lnTo>
-                    <a:pt x="2402393" y="1317691"/>
-                  </a:lnTo>
-                  <a:lnTo>
-                    <a:pt x="2324759" y="1288736"/>
-                  </a:lnTo>
-                  <a:lnTo>
-                    <a:pt x="2247125" y="1259072"/>
-                  </a:lnTo>
-                  <a:lnTo>
-                    <a:pt x="2169491" y="1228680"/>
-                  </a:lnTo>
-                  <a:lnTo>
-                    <a:pt x="2091857" y="1197544"/>
-                  </a:lnTo>
-                  <a:lnTo>
-                    <a:pt x="2014223" y="1165646"/>
-                  </a:lnTo>
-                  <a:lnTo>
-                    <a:pt x="1936589" y="1132966"/>
-                  </a:lnTo>
-                  <a:lnTo>
-                    <a:pt x="1858955" y="1099485"/>
-                  </a:lnTo>
-                  <a:lnTo>
-                    <a:pt x="1781321" y="1065184"/>
-                  </a:lnTo>
-                  <a:lnTo>
-                    <a:pt x="1703687" y="1030042"/>
-                  </a:lnTo>
-                  <a:lnTo>
-                    <a:pt x="1626053" y="994040"/>
-                  </a:lnTo>
-                  <a:lnTo>
-                    <a:pt x="1548419" y="957155"/>
-                  </a:lnTo>
-                  <a:lnTo>
-                    <a:pt x="1470785" y="919367"/>
-                  </a:lnTo>
-                  <a:lnTo>
-                    <a:pt x="1393151" y="880653"/>
-                  </a:lnTo>
-                  <a:lnTo>
-                    <a:pt x="1315517" y="840990"/>
-                  </a:lnTo>
-                  <a:lnTo>
-                    <a:pt x="1237883" y="800356"/>
-                  </a:lnTo>
-                  <a:lnTo>
-                    <a:pt x="1160249" y="758726"/>
-                  </a:lnTo>
-                  <a:lnTo>
-                    <a:pt x="1082615" y="716077"/>
-                  </a:lnTo>
-                  <a:lnTo>
-                    <a:pt x="1004981" y="672382"/>
-                  </a:lnTo>
-                  <a:lnTo>
-                    <a:pt x="927346" y="627617"/>
-                  </a:lnTo>
-                  <a:lnTo>
-                    <a:pt x="849712" y="581755"/>
-                  </a:lnTo>
-                  <a:lnTo>
-                    <a:pt x="772078" y="534770"/>
-                  </a:lnTo>
-                  <a:lnTo>
-                    <a:pt x="694444" y="486633"/>
-                  </a:lnTo>
-                  <a:lnTo>
-                    <a:pt x="616810" y="437318"/>
-                  </a:lnTo>
-                  <a:lnTo>
-                    <a:pt x="539176" y="386793"/>
-                  </a:lnTo>
-                  <a:lnTo>
-                    <a:pt x="461542" y="335032"/>
-                  </a:lnTo>
-                  <a:lnTo>
-                    <a:pt x="383908" y="282001"/>
-                  </a:lnTo>
-                  <a:lnTo>
-                    <a:pt x="306274" y="227672"/>
-                  </a:lnTo>
-                  <a:lnTo>
-                    <a:pt x="228640" y="172012"/>
-                  </a:lnTo>
-                  <a:lnTo>
-                    <a:pt x="151006" y="114988"/>
-                  </a:lnTo>
-                  <a:lnTo>
-                    <a:pt x="73372" y="56566"/>
+                    <a:pt x="7293338" y="2792695"/>
+                  </a:lnTo>
+                  <a:lnTo>
+                    <a:pt x="7215704" y="2792322"/>
+                  </a:lnTo>
+                  <a:lnTo>
+                    <a:pt x="7138070" y="2791905"/>
+                  </a:lnTo>
+                  <a:lnTo>
+                    <a:pt x="7060436" y="2791439"/>
+                  </a:lnTo>
+                  <a:lnTo>
+                    <a:pt x="6982802" y="2790917"/>
+                  </a:lnTo>
+                  <a:lnTo>
+                    <a:pt x="6905168" y="2790334"/>
+                  </a:lnTo>
+                  <a:lnTo>
+                    <a:pt x="6827534" y="2789683"/>
+                  </a:lnTo>
+                  <a:lnTo>
+                    <a:pt x="6749900" y="2788954"/>
+                  </a:lnTo>
+                  <a:lnTo>
+                    <a:pt x="6672266" y="2788139"/>
+                  </a:lnTo>
+                  <a:lnTo>
+                    <a:pt x="6594632" y="2787228"/>
+                  </a:lnTo>
+                  <a:lnTo>
+                    <a:pt x="6516998" y="2786209"/>
+                  </a:lnTo>
+                  <a:lnTo>
+                    <a:pt x="6439364" y="2785070"/>
+                  </a:lnTo>
+                  <a:lnTo>
+                    <a:pt x="6361730" y="2783797"/>
+                  </a:lnTo>
+                  <a:lnTo>
+                    <a:pt x="6284096" y="2782373"/>
+                  </a:lnTo>
+                  <a:lnTo>
+                    <a:pt x="6206462" y="2780781"/>
+                  </a:lnTo>
+                  <a:lnTo>
+                    <a:pt x="6128827" y="2779001"/>
+                  </a:lnTo>
+                  <a:lnTo>
+                    <a:pt x="6051193" y="2777011"/>
+                  </a:lnTo>
+                  <a:lnTo>
+                    <a:pt x="5973559" y="2774786"/>
+                  </a:lnTo>
+                  <a:lnTo>
+                    <a:pt x="5895925" y="2772298"/>
+                  </a:lnTo>
+                  <a:lnTo>
+                    <a:pt x="5818291" y="2769516"/>
+                  </a:lnTo>
+                  <a:lnTo>
+                    <a:pt x="5740657" y="2766406"/>
+                  </a:lnTo>
+                  <a:lnTo>
+                    <a:pt x="5663023" y="2762928"/>
+                  </a:lnTo>
+                  <a:lnTo>
+                    <a:pt x="5585389" y="2759040"/>
+                  </a:lnTo>
+                  <a:lnTo>
+                    <a:pt x="5507755" y="2754692"/>
+                  </a:lnTo>
+                  <a:lnTo>
+                    <a:pt x="5430121" y="2749831"/>
+                  </a:lnTo>
+                  <a:lnTo>
+                    <a:pt x="5352487" y="2744396"/>
+                  </a:lnTo>
+                  <a:lnTo>
+                    <a:pt x="5274853" y="2738319"/>
+                  </a:lnTo>
+                  <a:lnTo>
+                    <a:pt x="5197219" y="2731524"/>
+                  </a:lnTo>
+                  <a:lnTo>
+                    <a:pt x="5119585" y="2723927"/>
+                  </a:lnTo>
+                  <a:lnTo>
+                    <a:pt x="5041951" y="2715433"/>
+                  </a:lnTo>
+                  <a:lnTo>
+                    <a:pt x="4964317" y="2705935"/>
+                  </a:lnTo>
+                  <a:lnTo>
+                    <a:pt x="4886683" y="2695316"/>
+                  </a:lnTo>
+                  <a:lnTo>
+                    <a:pt x="4809049" y="2683443"/>
+                  </a:lnTo>
+                  <a:lnTo>
+                    <a:pt x="4731415" y="2670167"/>
+                  </a:lnTo>
+                  <a:lnTo>
+                    <a:pt x="4653781" y="2655324"/>
+                  </a:lnTo>
+                  <a:lnTo>
+                    <a:pt x="4576147" y="2638728"/>
+                  </a:lnTo>
+                  <a:lnTo>
+                    <a:pt x="4498513" y="2620172"/>
+                  </a:lnTo>
+                  <a:lnTo>
+                    <a:pt x="4420879" y="2599424"/>
+                  </a:lnTo>
+                  <a:lnTo>
+                    <a:pt x="4343244" y="2576226"/>
+                  </a:lnTo>
+                  <a:lnTo>
+                    <a:pt x="4265610" y="2550288"/>
+                  </a:lnTo>
+                  <a:lnTo>
+                    <a:pt x="4187976" y="2521288"/>
+                  </a:lnTo>
+                  <a:lnTo>
+                    <a:pt x="4110342" y="2488862"/>
+                  </a:lnTo>
+                  <a:lnTo>
+                    <a:pt x="4032708" y="2452607"/>
+                  </a:lnTo>
+                  <a:lnTo>
+                    <a:pt x="3955074" y="2412070"/>
+                  </a:lnTo>
+                  <a:lnTo>
+                    <a:pt x="3877440" y="2366746"/>
+                  </a:lnTo>
+                  <a:lnTo>
+                    <a:pt x="3799806" y="2316069"/>
+                  </a:lnTo>
+                  <a:lnTo>
+                    <a:pt x="3722172" y="2259407"/>
+                  </a:lnTo>
+                  <a:lnTo>
+                    <a:pt x="3644538" y="2196054"/>
+                  </a:lnTo>
+                  <a:lnTo>
+                    <a:pt x="3566904" y="2125219"/>
+                  </a:lnTo>
+                  <a:lnTo>
+                    <a:pt x="3489270" y="2046018"/>
+                  </a:lnTo>
+                  <a:lnTo>
+                    <a:pt x="3411636" y="1957464"/>
+                  </a:lnTo>
+                  <a:lnTo>
+                    <a:pt x="3334002" y="1910393"/>
+                  </a:lnTo>
+                  <a:lnTo>
+                    <a:pt x="3256368" y="1886366"/>
+                  </a:lnTo>
+                  <a:lnTo>
+                    <a:pt x="3178734" y="1861688"/>
+                  </a:lnTo>
+                  <a:lnTo>
+                    <a:pt x="3101100" y="1836340"/>
+                  </a:lnTo>
+                  <a:lnTo>
+                    <a:pt x="3023466" y="1810304"/>
+                  </a:lnTo>
+                  <a:lnTo>
+                    <a:pt x="2945832" y="1783561"/>
+                  </a:lnTo>
+                  <a:lnTo>
+                    <a:pt x="2868198" y="1756093"/>
+                  </a:lnTo>
+                  <a:lnTo>
+                    <a:pt x="2790564" y="1727880"/>
+                  </a:lnTo>
+                  <a:lnTo>
+                    <a:pt x="2712930" y="1698901"/>
+                  </a:lnTo>
+                  <a:lnTo>
+                    <a:pt x="2635295" y="1669136"/>
+                  </a:lnTo>
+                  <a:lnTo>
+                    <a:pt x="2557661" y="1638563"/>
+                  </a:lnTo>
+                  <a:lnTo>
+                    <a:pt x="2480027" y="1607160"/>
+                  </a:lnTo>
+                  <a:lnTo>
+                    <a:pt x="2402393" y="1574905"/>
+                  </a:lnTo>
+                  <a:lnTo>
+                    <a:pt x="2324759" y="1541775"/>
+                  </a:lnTo>
+                  <a:lnTo>
+                    <a:pt x="2247125" y="1507747"/>
+                  </a:lnTo>
+                  <a:lnTo>
+                    <a:pt x="2169491" y="1472794"/>
+                  </a:lnTo>
+                  <a:lnTo>
+                    <a:pt x="2091857" y="1436894"/>
+                  </a:lnTo>
+                  <a:lnTo>
+                    <a:pt x="2014223" y="1400019"/>
+                  </a:lnTo>
+                  <a:lnTo>
+                    <a:pt x="1936589" y="1362144"/>
+                  </a:lnTo>
+                  <a:lnTo>
+                    <a:pt x="1858955" y="1323241"/>
+                  </a:lnTo>
+                  <a:lnTo>
+                    <a:pt x="1781321" y="1283282"/>
+                  </a:lnTo>
+                  <a:lnTo>
+                    <a:pt x="1703687" y="1242239"/>
+                  </a:lnTo>
+                  <a:lnTo>
+                    <a:pt x="1626053" y="1200082"/>
+                  </a:lnTo>
+                  <a:lnTo>
+                    <a:pt x="1548419" y="1156782"/>
+                  </a:lnTo>
+                  <a:lnTo>
+                    <a:pt x="1470785" y="1112306"/>
+                  </a:lnTo>
+                  <a:lnTo>
+                    <a:pt x="1393151" y="1066624"/>
+                  </a:lnTo>
+                  <a:lnTo>
+                    <a:pt x="1315517" y="1019702"/>
+                  </a:lnTo>
+                  <a:lnTo>
+                    <a:pt x="1237883" y="971507"/>
+                  </a:lnTo>
+                  <a:lnTo>
+                    <a:pt x="1160249" y="922004"/>
+                  </a:lnTo>
+                  <a:lnTo>
+                    <a:pt x="1082615" y="871158"/>
+                  </a:lnTo>
+                  <a:lnTo>
+                    <a:pt x="1004981" y="818932"/>
+                  </a:lnTo>
+                  <a:lnTo>
+                    <a:pt x="927346" y="765290"/>
+                  </a:lnTo>
+                  <a:lnTo>
+                    <a:pt x="849712" y="710191"/>
+                  </a:lnTo>
+                  <a:lnTo>
+                    <a:pt x="772078" y="653598"/>
+                  </a:lnTo>
+                  <a:lnTo>
+                    <a:pt x="694444" y="595468"/>
+                  </a:lnTo>
+                  <a:lnTo>
+                    <a:pt x="616810" y="535762"/>
+                  </a:lnTo>
+                  <a:lnTo>
+                    <a:pt x="539176" y="474435"/>
+                  </a:lnTo>
+                  <a:lnTo>
+                    <a:pt x="461542" y="411445"/>
+                  </a:lnTo>
+                  <a:lnTo>
+                    <a:pt x="383908" y="346745"/>
+                  </a:lnTo>
+                  <a:lnTo>
+                    <a:pt x="306274" y="280289"/>
+                  </a:lnTo>
+                  <a:lnTo>
+                    <a:pt x="228640" y="212031"/>
+                  </a:lnTo>
+                  <a:lnTo>
+                    <a:pt x="151006" y="141920"/>
+                  </a:lnTo>
+                  <a:lnTo>
+                    <a:pt x="73372" y="69907"/>
                   </a:lnTo>
                   <a:lnTo>
                     <a:pt x="0" y="0"/>
@@ -4049,231 +4055,234 @@
           </p:nvSpPr>
           <p:spPr>
             <a:xfrm>
-              <a:off x="2609815" y="1896563"/>
-              <a:ext cx="5578674" cy="3628573"/>
+              <a:off x="2593871" y="1896563"/>
+              <a:ext cx="5594618" cy="3627711"/>
             </a:xfrm>
             <a:custGeom>
               <a:avLst/>
               <a:pathLst>
-                <a:path w="5578674" h="3628573">
+                <a:path w="5594618" h="3627711">
                   <a:moveTo>
                     <a:pt x="0" y="0"/>
                   </a:moveTo>
                   <a:lnTo>
-                    <a:pt x="66657" y="213734"/>
-                  </a:lnTo>
-                  <a:lnTo>
-                    <a:pt x="144291" y="445861"/>
-                  </a:lnTo>
-                  <a:lnTo>
-                    <a:pt x="221925" y="662319"/>
-                  </a:lnTo>
-                  <a:lnTo>
-                    <a:pt x="299559" y="864166"/>
-                  </a:lnTo>
-                  <a:lnTo>
-                    <a:pt x="377193" y="1052389"/>
-                  </a:lnTo>
-                  <a:lnTo>
-                    <a:pt x="454827" y="1227907"/>
-                  </a:lnTo>
-                  <a:lnTo>
-                    <a:pt x="532461" y="1391577"/>
-                  </a:lnTo>
-                  <a:lnTo>
-                    <a:pt x="610095" y="1544199"/>
-                  </a:lnTo>
-                  <a:lnTo>
-                    <a:pt x="687729" y="1686519"/>
-                  </a:lnTo>
-                  <a:lnTo>
-                    <a:pt x="765363" y="1819233"/>
-                  </a:lnTo>
-                  <a:lnTo>
-                    <a:pt x="842998" y="1942988"/>
-                  </a:lnTo>
-                  <a:lnTo>
-                    <a:pt x="920632" y="2058390"/>
-                  </a:lnTo>
-                  <a:lnTo>
-                    <a:pt x="998266" y="2166003"/>
-                  </a:lnTo>
-                  <a:lnTo>
-                    <a:pt x="1075900" y="2266351"/>
-                  </a:lnTo>
-                  <a:lnTo>
-                    <a:pt x="1153534" y="2359926"/>
-                  </a:lnTo>
-                  <a:lnTo>
-                    <a:pt x="1231168" y="2447185"/>
-                  </a:lnTo>
-                  <a:lnTo>
-                    <a:pt x="1308802" y="2528553"/>
-                  </a:lnTo>
-                  <a:lnTo>
-                    <a:pt x="1386436" y="2604430"/>
-                  </a:lnTo>
-                  <a:lnTo>
-                    <a:pt x="1464070" y="2675184"/>
-                  </a:lnTo>
-                  <a:lnTo>
-                    <a:pt x="1541704" y="2741163"/>
-                  </a:lnTo>
-                  <a:lnTo>
-                    <a:pt x="1619338" y="2802688"/>
-                  </a:lnTo>
-                  <a:lnTo>
-                    <a:pt x="1696972" y="2860060"/>
-                  </a:lnTo>
-                  <a:lnTo>
-                    <a:pt x="1774606" y="2913560"/>
-                  </a:lnTo>
-                  <a:lnTo>
-                    <a:pt x="1852240" y="2963448"/>
-                  </a:lnTo>
-                  <a:lnTo>
-                    <a:pt x="1929874" y="3009969"/>
-                  </a:lnTo>
-                  <a:lnTo>
-                    <a:pt x="2007508" y="3053349"/>
-                  </a:lnTo>
-                  <a:lnTo>
-                    <a:pt x="2085142" y="3093802"/>
-                  </a:lnTo>
-                  <a:lnTo>
-                    <a:pt x="2162776" y="3131524"/>
-                  </a:lnTo>
-                  <a:lnTo>
-                    <a:pt x="2240410" y="3166699"/>
-                  </a:lnTo>
-                  <a:lnTo>
-                    <a:pt x="2318044" y="3199501"/>
-                  </a:lnTo>
-                  <a:lnTo>
-                    <a:pt x="2395678" y="3230088"/>
-                  </a:lnTo>
-                  <a:lnTo>
-                    <a:pt x="2473312" y="3258610"/>
-                  </a:lnTo>
-                  <a:lnTo>
-                    <a:pt x="2550947" y="3285208"/>
-                  </a:lnTo>
-                  <a:lnTo>
-                    <a:pt x="2628581" y="3310010"/>
-                  </a:lnTo>
-                  <a:lnTo>
-                    <a:pt x="2706215" y="3333137"/>
-                  </a:lnTo>
-                  <a:lnTo>
-                    <a:pt x="2783849" y="3354704"/>
-                  </a:lnTo>
-                  <a:lnTo>
-                    <a:pt x="2861483" y="3374815"/>
-                  </a:lnTo>
-                  <a:lnTo>
-                    <a:pt x="2939117" y="3393568"/>
-                  </a:lnTo>
-                  <a:lnTo>
-                    <a:pt x="3016751" y="3411056"/>
-                  </a:lnTo>
-                  <a:lnTo>
-                    <a:pt x="3094385" y="3427363"/>
-                  </a:lnTo>
-                  <a:lnTo>
-                    <a:pt x="3172019" y="3442570"/>
-                  </a:lnTo>
-                  <a:lnTo>
-                    <a:pt x="3249653" y="3456750"/>
-                  </a:lnTo>
-                  <a:lnTo>
-                    <a:pt x="3327287" y="3469973"/>
-                  </a:lnTo>
-                  <a:lnTo>
-                    <a:pt x="3404921" y="3482303"/>
-                  </a:lnTo>
-                  <a:lnTo>
-                    <a:pt x="3482555" y="3493801"/>
-                  </a:lnTo>
-                  <a:lnTo>
-                    <a:pt x="3560189" y="3504523"/>
-                  </a:lnTo>
-                  <a:lnTo>
-                    <a:pt x="3637823" y="3514521"/>
-                  </a:lnTo>
-                  <a:lnTo>
-                    <a:pt x="3715457" y="3523844"/>
-                  </a:lnTo>
-                  <a:lnTo>
-                    <a:pt x="3793091" y="3532538"/>
-                  </a:lnTo>
-                  <a:lnTo>
-                    <a:pt x="3870725" y="3540645"/>
-                  </a:lnTo>
-                  <a:lnTo>
-                    <a:pt x="3948359" y="3548205"/>
-                  </a:lnTo>
-                  <a:lnTo>
-                    <a:pt x="4025993" y="3555255"/>
-                  </a:lnTo>
-                  <a:lnTo>
-                    <a:pt x="4103627" y="3561828"/>
-                  </a:lnTo>
-                  <a:lnTo>
-                    <a:pt x="4181261" y="3567958"/>
-                  </a:lnTo>
-                  <a:lnTo>
-                    <a:pt x="4258896" y="3573675"/>
-                  </a:lnTo>
-                  <a:lnTo>
-                    <a:pt x="4336530" y="3579005"/>
-                  </a:lnTo>
-                  <a:lnTo>
-                    <a:pt x="4414164" y="3583976"/>
-                  </a:lnTo>
-                  <a:lnTo>
-                    <a:pt x="4491798" y="3588611"/>
-                  </a:lnTo>
-                  <a:lnTo>
-                    <a:pt x="4569432" y="3592933"/>
-                  </a:lnTo>
-                  <a:lnTo>
-                    <a:pt x="4647066" y="3596963"/>
-                  </a:lnTo>
-                  <a:lnTo>
-                    <a:pt x="4724700" y="3600722"/>
-                  </a:lnTo>
-                  <a:lnTo>
-                    <a:pt x="4802334" y="3604227"/>
-                  </a:lnTo>
-                  <a:lnTo>
-                    <a:pt x="4879968" y="3607495"/>
-                  </a:lnTo>
-                  <a:lnTo>
-                    <a:pt x="4957602" y="3610542"/>
-                  </a:lnTo>
-                  <a:lnTo>
-                    <a:pt x="5035236" y="3613384"/>
-                  </a:lnTo>
-                  <a:lnTo>
-                    <a:pt x="5112870" y="3616034"/>
-                  </a:lnTo>
-                  <a:lnTo>
-                    <a:pt x="5190504" y="3618505"/>
-                  </a:lnTo>
-                  <a:lnTo>
-                    <a:pt x="5268138" y="3620810"/>
-                  </a:lnTo>
-                  <a:lnTo>
-                    <a:pt x="5345772" y="3622958"/>
-                  </a:lnTo>
-                  <a:lnTo>
-                    <a:pt x="5423406" y="3624962"/>
-                  </a:lnTo>
-                  <a:lnTo>
-                    <a:pt x="5501040" y="3626831"/>
-                  </a:lnTo>
-                  <a:lnTo>
-                    <a:pt x="5578674" y="3628573"/>
+                    <a:pt x="4967" y="16669"/>
+                  </a:lnTo>
+                  <a:lnTo>
+                    <a:pt x="82601" y="259774"/>
+                  </a:lnTo>
+                  <a:lnTo>
+                    <a:pt x="160235" y="486625"/>
+                  </a:lnTo>
+                  <a:lnTo>
+                    <a:pt x="237869" y="698308"/>
+                  </a:lnTo>
+                  <a:lnTo>
+                    <a:pt x="315503" y="895838"/>
+                  </a:lnTo>
+                  <a:lnTo>
+                    <a:pt x="393137" y="1080161"/>
+                  </a:lnTo>
+                  <a:lnTo>
+                    <a:pt x="470771" y="1252159"/>
+                  </a:lnTo>
+                  <a:lnTo>
+                    <a:pt x="548405" y="1412658"/>
+                  </a:lnTo>
+                  <a:lnTo>
+                    <a:pt x="626039" y="1562426"/>
+                  </a:lnTo>
+                  <a:lnTo>
+                    <a:pt x="703673" y="1702180"/>
+                  </a:lnTo>
+                  <a:lnTo>
+                    <a:pt x="781307" y="1832590"/>
+                  </a:lnTo>
+                  <a:lnTo>
+                    <a:pt x="858941" y="1954281"/>
+                  </a:lnTo>
+                  <a:lnTo>
+                    <a:pt x="936575" y="2067835"/>
+                  </a:lnTo>
+                  <a:lnTo>
+                    <a:pt x="1014210" y="2173797"/>
+                  </a:lnTo>
+                  <a:lnTo>
+                    <a:pt x="1091844" y="2272674"/>
+                  </a:lnTo>
+                  <a:lnTo>
+                    <a:pt x="1169478" y="2364940"/>
+                  </a:lnTo>
+                  <a:lnTo>
+                    <a:pt x="1247112" y="2451037"/>
+                  </a:lnTo>
+                  <a:lnTo>
+                    <a:pt x="1324746" y="2531378"/>
+                  </a:lnTo>
+                  <a:lnTo>
+                    <a:pt x="1402380" y="2606347"/>
+                  </a:lnTo>
+                  <a:lnTo>
+                    <a:pt x="1480014" y="2676303"/>
+                  </a:lnTo>
+                  <a:lnTo>
+                    <a:pt x="1557648" y="2741582"/>
+                  </a:lnTo>
+                  <a:lnTo>
+                    <a:pt x="1635282" y="2802497"/>
+                  </a:lnTo>
+                  <a:lnTo>
+                    <a:pt x="1712916" y="2859338"/>
+                  </a:lnTo>
+                  <a:lnTo>
+                    <a:pt x="1790550" y="2912380"/>
+                  </a:lnTo>
+                  <a:lnTo>
+                    <a:pt x="1868184" y="2961874"/>
+                  </a:lnTo>
+                  <a:lnTo>
+                    <a:pt x="1945818" y="3008060"/>
+                  </a:lnTo>
+                  <a:lnTo>
+                    <a:pt x="2023452" y="3051157"/>
+                  </a:lnTo>
+                  <a:lnTo>
+                    <a:pt x="2101086" y="3091373"/>
+                  </a:lnTo>
+                  <a:lnTo>
+                    <a:pt x="2178720" y="3128900"/>
+                  </a:lnTo>
+                  <a:lnTo>
+                    <a:pt x="2256354" y="3163918"/>
+                  </a:lnTo>
+                  <a:lnTo>
+                    <a:pt x="2333988" y="3196595"/>
+                  </a:lnTo>
+                  <a:lnTo>
+                    <a:pt x="2411622" y="3227087"/>
+                  </a:lnTo>
+                  <a:lnTo>
+                    <a:pt x="2489256" y="3255540"/>
+                  </a:lnTo>
+                  <a:lnTo>
+                    <a:pt x="2566890" y="3282091"/>
+                  </a:lnTo>
+                  <a:lnTo>
+                    <a:pt x="2644524" y="3306866"/>
+                  </a:lnTo>
+                  <a:lnTo>
+                    <a:pt x="2722159" y="3329985"/>
+                  </a:lnTo>
+                  <a:lnTo>
+                    <a:pt x="2799793" y="3351559"/>
+                  </a:lnTo>
+                  <a:lnTo>
+                    <a:pt x="2877427" y="3371689"/>
+                  </a:lnTo>
+                  <a:lnTo>
+                    <a:pt x="2955061" y="3390474"/>
+                  </a:lnTo>
+                  <a:lnTo>
+                    <a:pt x="3032695" y="3408003"/>
+                  </a:lnTo>
+                  <a:lnTo>
+                    <a:pt x="3110329" y="3424360"/>
+                  </a:lnTo>
+                  <a:lnTo>
+                    <a:pt x="3187963" y="3439623"/>
+                  </a:lnTo>
+                  <a:lnTo>
+                    <a:pt x="3265597" y="3453866"/>
+                  </a:lnTo>
+                  <a:lnTo>
+                    <a:pt x="3343231" y="3467156"/>
+                  </a:lnTo>
+                  <a:lnTo>
+                    <a:pt x="3420865" y="3479558"/>
+                  </a:lnTo>
+                  <a:lnTo>
+                    <a:pt x="3498499" y="3491131"/>
+                  </a:lnTo>
+                  <a:lnTo>
+                    <a:pt x="3576133" y="3501930"/>
+                  </a:lnTo>
+                  <a:lnTo>
+                    <a:pt x="3653767" y="3512007"/>
+                  </a:lnTo>
+                  <a:lnTo>
+                    <a:pt x="3731401" y="3521410"/>
+                  </a:lnTo>
+                  <a:lnTo>
+                    <a:pt x="3809035" y="3530184"/>
+                  </a:lnTo>
+                  <a:lnTo>
+                    <a:pt x="3886669" y="3538372"/>
+                  </a:lnTo>
+                  <a:lnTo>
+                    <a:pt x="3964303" y="3546012"/>
+                  </a:lnTo>
+                  <a:lnTo>
+                    <a:pt x="4041937" y="3553142"/>
+                  </a:lnTo>
+                  <a:lnTo>
+                    <a:pt x="4119571" y="3559794"/>
+                  </a:lnTo>
+                  <a:lnTo>
+                    <a:pt x="4197205" y="3566002"/>
+                  </a:lnTo>
+                  <a:lnTo>
+                    <a:pt x="4274839" y="3571795"/>
+                  </a:lnTo>
+                  <a:lnTo>
+                    <a:pt x="4352473" y="3577201"/>
+                  </a:lnTo>
+                  <a:lnTo>
+                    <a:pt x="4430107" y="3582245"/>
+                  </a:lnTo>
+                  <a:lnTo>
+                    <a:pt x="4507742" y="3586952"/>
+                  </a:lnTo>
+                  <a:lnTo>
+                    <a:pt x="4585376" y="3591344"/>
+                  </a:lnTo>
+                  <a:lnTo>
+                    <a:pt x="4663010" y="3595443"/>
+                  </a:lnTo>
+                  <a:lnTo>
+                    <a:pt x="4740644" y="3599267"/>
+                  </a:lnTo>
+                  <a:lnTo>
+                    <a:pt x="4818278" y="3602836"/>
+                  </a:lnTo>
+                  <a:lnTo>
+                    <a:pt x="4895912" y="3606166"/>
+                  </a:lnTo>
+                  <a:lnTo>
+                    <a:pt x="4973546" y="3609274"/>
+                  </a:lnTo>
+                  <a:lnTo>
+                    <a:pt x="5051180" y="3612173"/>
+                  </a:lnTo>
+                  <a:lnTo>
+                    <a:pt x="5128814" y="3614879"/>
+                  </a:lnTo>
+                  <a:lnTo>
+                    <a:pt x="5206448" y="3617404"/>
+                  </a:lnTo>
+                  <a:lnTo>
+                    <a:pt x="5284082" y="3619760"/>
+                  </a:lnTo>
+                  <a:lnTo>
+                    <a:pt x="5361716" y="3621959"/>
+                  </a:lnTo>
+                  <a:lnTo>
+                    <a:pt x="5439350" y="3624010"/>
+                  </a:lnTo>
+                  <a:lnTo>
+                    <a:pt x="5516984" y="3625925"/>
+                  </a:lnTo>
+                  <a:lnTo>
+                    <a:pt x="5594618" y="3627711"/>
                   </a:lnTo>
                 </a:path>
               </a:pathLst>

--- a/docs/plots/carbo/jx_carbo_linsubhr_ratio_hosp3.pptx
+++ b/docs/plots/carbo/jx_carbo_linsubhr_ratio_hosp3.pptx
@@ -3003,497 +3003,497 @@
           <p:spPr>
             <a:xfrm>
               <a:off x="817517" y="1896563"/>
-              <a:ext cx="7370972" cy="3649819"/>
+              <a:ext cx="7370972" cy="3648863"/>
             </a:xfrm>
             <a:custGeom>
               <a:avLst/>
               <a:pathLst>
-                <a:path w="7370972" h="3649819">
+                <a:path w="7370972" h="3648863">
                   <a:moveTo>
-                    <a:pt x="2388750" y="0"/>
+                    <a:pt x="2335110" y="0"/>
                   </a:moveTo>
                   <a:lnTo>
-                    <a:pt x="2402393" y="74269"/>
-                  </a:lnTo>
-                  <a:lnTo>
-                    <a:pt x="2480027" y="452232"/>
-                  </a:lnTo>
-                  <a:lnTo>
-                    <a:pt x="2557661" y="790273"/>
-                  </a:lnTo>
-                  <a:lnTo>
-                    <a:pt x="2635295" y="1092609"/>
-                  </a:lnTo>
-                  <a:lnTo>
-                    <a:pt x="2712930" y="1363011"/>
-                  </a:lnTo>
-                  <a:lnTo>
-                    <a:pt x="2790564" y="1604851"/>
-                  </a:lnTo>
-                  <a:lnTo>
-                    <a:pt x="2868198" y="1821148"/>
-                  </a:lnTo>
-                  <a:lnTo>
-                    <a:pt x="2945832" y="2014598"/>
-                  </a:lnTo>
-                  <a:lnTo>
-                    <a:pt x="3023466" y="2187616"/>
-                  </a:lnTo>
-                  <a:lnTo>
-                    <a:pt x="3101100" y="2342358"/>
-                  </a:lnTo>
-                  <a:lnTo>
-                    <a:pt x="3178734" y="2480756"/>
-                  </a:lnTo>
-                  <a:lnTo>
-                    <a:pt x="3256368" y="2604536"/>
-                  </a:lnTo>
-                  <a:lnTo>
-                    <a:pt x="3334002" y="2715241"/>
-                  </a:lnTo>
-                  <a:lnTo>
-                    <a:pt x="3411636" y="2790575"/>
-                  </a:lnTo>
-                  <a:lnTo>
-                    <a:pt x="3489270" y="2813349"/>
-                  </a:lnTo>
-                  <a:lnTo>
-                    <a:pt x="3566904" y="2835521"/>
-                  </a:lnTo>
-                  <a:lnTo>
-                    <a:pt x="3644538" y="2857108"/>
-                  </a:lnTo>
-                  <a:lnTo>
-                    <a:pt x="3722172" y="2878124"/>
-                  </a:lnTo>
-                  <a:lnTo>
-                    <a:pt x="3799806" y="2898585"/>
-                  </a:lnTo>
-                  <a:lnTo>
-                    <a:pt x="3877440" y="2918505"/>
-                  </a:lnTo>
-                  <a:lnTo>
-                    <a:pt x="3955074" y="2937900"/>
-                  </a:lnTo>
-                  <a:lnTo>
-                    <a:pt x="4032708" y="2956782"/>
-                  </a:lnTo>
-                  <a:lnTo>
-                    <a:pt x="4110342" y="2975165"/>
-                  </a:lnTo>
-                  <a:lnTo>
-                    <a:pt x="4187976" y="2993062"/>
-                  </a:lnTo>
-                  <a:lnTo>
-                    <a:pt x="4265610" y="3010487"/>
-                  </a:lnTo>
-                  <a:lnTo>
-                    <a:pt x="4343244" y="3027451"/>
-                  </a:lnTo>
-                  <a:lnTo>
-                    <a:pt x="4420879" y="3043967"/>
-                  </a:lnTo>
-                  <a:lnTo>
-                    <a:pt x="4498513" y="3060047"/>
-                  </a:lnTo>
-                  <a:lnTo>
-                    <a:pt x="4576147" y="3075702"/>
-                  </a:lnTo>
-                  <a:lnTo>
-                    <a:pt x="4653781" y="3090944"/>
-                  </a:lnTo>
-                  <a:lnTo>
-                    <a:pt x="4731415" y="3105782"/>
-                  </a:lnTo>
-                  <a:lnTo>
-                    <a:pt x="4809049" y="3120229"/>
-                  </a:lnTo>
-                  <a:lnTo>
-                    <a:pt x="4886683" y="3134294"/>
-                  </a:lnTo>
-                  <a:lnTo>
-                    <a:pt x="4964317" y="3147988"/>
-                  </a:lnTo>
-                  <a:lnTo>
-                    <a:pt x="5041951" y="3161320"/>
-                  </a:lnTo>
-                  <a:lnTo>
-                    <a:pt x="5119585" y="3174299"/>
-                  </a:lnTo>
-                  <a:lnTo>
-                    <a:pt x="5197219" y="3186936"/>
-                  </a:lnTo>
-                  <a:lnTo>
-                    <a:pt x="5274853" y="3199239"/>
-                  </a:lnTo>
-                  <a:lnTo>
-                    <a:pt x="5352487" y="3211217"/>
-                  </a:lnTo>
-                  <a:lnTo>
-                    <a:pt x="5430121" y="3222879"/>
-                  </a:lnTo>
-                  <a:lnTo>
-                    <a:pt x="5507755" y="3234232"/>
-                  </a:lnTo>
-                  <a:lnTo>
-                    <a:pt x="5585389" y="3245285"/>
-                  </a:lnTo>
-                  <a:lnTo>
-                    <a:pt x="5663023" y="3256047"/>
-                  </a:lnTo>
-                  <a:lnTo>
-                    <a:pt x="5740657" y="3266524"/>
-                  </a:lnTo>
-                  <a:lnTo>
-                    <a:pt x="5818291" y="3276724"/>
-                  </a:lnTo>
-                  <a:lnTo>
-                    <a:pt x="5895925" y="3286655"/>
-                  </a:lnTo>
-                  <a:lnTo>
-                    <a:pt x="5973559" y="3296324"/>
-                  </a:lnTo>
-                  <a:lnTo>
-                    <a:pt x="6051193" y="3305737"/>
-                  </a:lnTo>
-                  <a:lnTo>
-                    <a:pt x="6128827" y="3314902"/>
-                  </a:lnTo>
-                  <a:lnTo>
-                    <a:pt x="6206462" y="3323824"/>
-                  </a:lnTo>
-                  <a:lnTo>
-                    <a:pt x="6284096" y="3332511"/>
-                  </a:lnTo>
-                  <a:lnTo>
-                    <a:pt x="6361730" y="3340968"/>
-                  </a:lnTo>
-                  <a:lnTo>
-                    <a:pt x="6439364" y="3349201"/>
-                  </a:lnTo>
-                  <a:lnTo>
-                    <a:pt x="6516998" y="3357218"/>
-                  </a:lnTo>
-                  <a:lnTo>
-                    <a:pt x="6594632" y="3365022"/>
-                  </a:lnTo>
-                  <a:lnTo>
-                    <a:pt x="6672266" y="3372621"/>
-                  </a:lnTo>
-                  <a:lnTo>
-                    <a:pt x="6749900" y="3380018"/>
-                  </a:lnTo>
-                  <a:lnTo>
-                    <a:pt x="6827534" y="3387220"/>
-                  </a:lnTo>
-                  <a:lnTo>
-                    <a:pt x="6905168" y="3394232"/>
-                  </a:lnTo>
-                  <a:lnTo>
-                    <a:pt x="6982802" y="3401059"/>
-                  </a:lnTo>
-                  <a:lnTo>
-                    <a:pt x="7060436" y="3407705"/>
-                  </a:lnTo>
-                  <a:lnTo>
-                    <a:pt x="7138070" y="3414176"/>
-                  </a:lnTo>
-                  <a:lnTo>
-                    <a:pt x="7215704" y="3420475"/>
-                  </a:lnTo>
-                  <a:lnTo>
-                    <a:pt x="7293338" y="3426609"/>
-                  </a:lnTo>
-                  <a:lnTo>
-                    <a:pt x="7370972" y="3432580"/>
-                  </a:lnTo>
-                  <a:lnTo>
-                    <a:pt x="7370972" y="3649819"/>
-                  </a:lnTo>
-                  <a:lnTo>
-                    <a:pt x="7293338" y="3649485"/>
-                  </a:lnTo>
-                  <a:lnTo>
-                    <a:pt x="7215704" y="3649112"/>
-                  </a:lnTo>
-                  <a:lnTo>
-                    <a:pt x="7138070" y="3648695"/>
-                  </a:lnTo>
-                  <a:lnTo>
-                    <a:pt x="7060436" y="3648229"/>
-                  </a:lnTo>
-                  <a:lnTo>
-                    <a:pt x="6982802" y="3647707"/>
-                  </a:lnTo>
-                  <a:lnTo>
-                    <a:pt x="6905168" y="3647124"/>
-                  </a:lnTo>
-                  <a:lnTo>
-                    <a:pt x="6827534" y="3646473"/>
-                  </a:lnTo>
-                  <a:lnTo>
-                    <a:pt x="6749900" y="3645744"/>
-                  </a:lnTo>
-                  <a:lnTo>
-                    <a:pt x="6672266" y="3644929"/>
-                  </a:lnTo>
-                  <a:lnTo>
-                    <a:pt x="6594632" y="3644018"/>
-                  </a:lnTo>
-                  <a:lnTo>
-                    <a:pt x="6516998" y="3643000"/>
-                  </a:lnTo>
-                  <a:lnTo>
-                    <a:pt x="6439364" y="3641861"/>
-                  </a:lnTo>
-                  <a:lnTo>
-                    <a:pt x="6361730" y="3640587"/>
-                  </a:lnTo>
-                  <a:lnTo>
-                    <a:pt x="6284096" y="3639163"/>
-                  </a:lnTo>
-                  <a:lnTo>
-                    <a:pt x="6206462" y="3637571"/>
-                  </a:lnTo>
-                  <a:lnTo>
-                    <a:pt x="6128827" y="3635792"/>
-                  </a:lnTo>
-                  <a:lnTo>
-                    <a:pt x="6051193" y="3633801"/>
-                  </a:lnTo>
-                  <a:lnTo>
-                    <a:pt x="5973559" y="3631576"/>
-                  </a:lnTo>
-                  <a:lnTo>
-                    <a:pt x="5895925" y="3629088"/>
-                  </a:lnTo>
-                  <a:lnTo>
-                    <a:pt x="5818291" y="3626306"/>
-                  </a:lnTo>
-                  <a:lnTo>
-                    <a:pt x="5740657" y="3623196"/>
-                  </a:lnTo>
-                  <a:lnTo>
-                    <a:pt x="5663023" y="3619718"/>
-                  </a:lnTo>
-                  <a:lnTo>
-                    <a:pt x="5585389" y="3615830"/>
-                  </a:lnTo>
-                  <a:lnTo>
-                    <a:pt x="5507755" y="3611482"/>
-                  </a:lnTo>
-                  <a:lnTo>
-                    <a:pt x="5430121" y="3606621"/>
-                  </a:lnTo>
-                  <a:lnTo>
-                    <a:pt x="5352487" y="3601186"/>
-                  </a:lnTo>
-                  <a:lnTo>
-                    <a:pt x="5274853" y="3595109"/>
-                  </a:lnTo>
-                  <a:lnTo>
-                    <a:pt x="5197219" y="3588314"/>
-                  </a:lnTo>
-                  <a:lnTo>
-                    <a:pt x="5119585" y="3580717"/>
-                  </a:lnTo>
-                  <a:lnTo>
-                    <a:pt x="5041951" y="3572223"/>
-                  </a:lnTo>
-                  <a:lnTo>
-                    <a:pt x="4964317" y="3562725"/>
-                  </a:lnTo>
-                  <a:lnTo>
-                    <a:pt x="4886683" y="3552106"/>
-                  </a:lnTo>
-                  <a:lnTo>
-                    <a:pt x="4809049" y="3540233"/>
-                  </a:lnTo>
-                  <a:lnTo>
-                    <a:pt x="4731415" y="3526958"/>
-                  </a:lnTo>
-                  <a:lnTo>
-                    <a:pt x="4653781" y="3512114"/>
-                  </a:lnTo>
-                  <a:lnTo>
-                    <a:pt x="4576147" y="3495518"/>
-                  </a:lnTo>
-                  <a:lnTo>
-                    <a:pt x="4498513" y="3476962"/>
-                  </a:lnTo>
-                  <a:lnTo>
-                    <a:pt x="4420879" y="3456214"/>
-                  </a:lnTo>
-                  <a:lnTo>
-                    <a:pt x="4343244" y="3433016"/>
-                  </a:lnTo>
-                  <a:lnTo>
-                    <a:pt x="4265610" y="3407079"/>
-                  </a:lnTo>
-                  <a:lnTo>
-                    <a:pt x="4187976" y="3378078"/>
-                  </a:lnTo>
-                  <a:lnTo>
-                    <a:pt x="4110342" y="3345652"/>
-                  </a:lnTo>
-                  <a:lnTo>
-                    <a:pt x="4032708" y="3309397"/>
-                  </a:lnTo>
-                  <a:lnTo>
-                    <a:pt x="3955074" y="3268860"/>
-                  </a:lnTo>
-                  <a:lnTo>
-                    <a:pt x="3877440" y="3223536"/>
-                  </a:lnTo>
-                  <a:lnTo>
-                    <a:pt x="3799806" y="3172859"/>
-                  </a:lnTo>
-                  <a:lnTo>
-                    <a:pt x="3722172" y="3116197"/>
-                  </a:lnTo>
-                  <a:lnTo>
-                    <a:pt x="3644538" y="3052844"/>
-                  </a:lnTo>
-                  <a:lnTo>
-                    <a:pt x="3566904" y="2982009"/>
-                  </a:lnTo>
-                  <a:lnTo>
-                    <a:pt x="3489270" y="2902808"/>
-                  </a:lnTo>
-                  <a:lnTo>
-                    <a:pt x="3411636" y="2814254"/>
-                  </a:lnTo>
-                  <a:lnTo>
-                    <a:pt x="3334002" y="2767183"/>
-                  </a:lnTo>
-                  <a:lnTo>
-                    <a:pt x="3256368" y="2743157"/>
-                  </a:lnTo>
-                  <a:lnTo>
-                    <a:pt x="3178734" y="2718478"/>
-                  </a:lnTo>
-                  <a:lnTo>
-                    <a:pt x="3101100" y="2693130"/>
-                  </a:lnTo>
-                  <a:lnTo>
-                    <a:pt x="3023466" y="2667094"/>
-                  </a:lnTo>
-                  <a:lnTo>
-                    <a:pt x="2945832" y="2640351"/>
-                  </a:lnTo>
-                  <a:lnTo>
-                    <a:pt x="2868198" y="2612883"/>
-                  </a:lnTo>
-                  <a:lnTo>
-                    <a:pt x="2790564" y="2584670"/>
-                  </a:lnTo>
-                  <a:lnTo>
-                    <a:pt x="2712930" y="2555691"/>
-                  </a:lnTo>
-                  <a:lnTo>
-                    <a:pt x="2635295" y="2525926"/>
-                  </a:lnTo>
-                  <a:lnTo>
-                    <a:pt x="2557661" y="2495353"/>
-                  </a:lnTo>
-                  <a:lnTo>
-                    <a:pt x="2480027" y="2463950"/>
-                  </a:lnTo>
-                  <a:lnTo>
-                    <a:pt x="2402393" y="2431695"/>
-                  </a:lnTo>
-                  <a:lnTo>
-                    <a:pt x="2324759" y="2398566"/>
-                  </a:lnTo>
-                  <a:lnTo>
-                    <a:pt x="2247125" y="2364537"/>
-                  </a:lnTo>
-                  <a:lnTo>
-                    <a:pt x="2169491" y="2329584"/>
-                  </a:lnTo>
-                  <a:lnTo>
-                    <a:pt x="2091857" y="2293684"/>
-                  </a:lnTo>
-                  <a:lnTo>
-                    <a:pt x="2014223" y="2256809"/>
-                  </a:lnTo>
-                  <a:lnTo>
-                    <a:pt x="1936589" y="2218934"/>
-                  </a:lnTo>
-                  <a:lnTo>
-                    <a:pt x="1858955" y="2180031"/>
-                  </a:lnTo>
-                  <a:lnTo>
-                    <a:pt x="1781321" y="2140072"/>
-                  </a:lnTo>
-                  <a:lnTo>
-                    <a:pt x="1703687" y="2099029"/>
-                  </a:lnTo>
-                  <a:lnTo>
-                    <a:pt x="1626053" y="2056872"/>
-                  </a:lnTo>
-                  <a:lnTo>
-                    <a:pt x="1548419" y="2013572"/>
-                  </a:lnTo>
-                  <a:lnTo>
-                    <a:pt x="1470785" y="1969096"/>
-                  </a:lnTo>
-                  <a:lnTo>
-                    <a:pt x="1393151" y="1923414"/>
-                  </a:lnTo>
-                  <a:lnTo>
-                    <a:pt x="1315517" y="1876492"/>
-                  </a:lnTo>
-                  <a:lnTo>
-                    <a:pt x="1237883" y="1828297"/>
-                  </a:lnTo>
-                  <a:lnTo>
-                    <a:pt x="1160249" y="1778794"/>
-                  </a:lnTo>
-                  <a:lnTo>
-                    <a:pt x="1082615" y="1727948"/>
-                  </a:lnTo>
-                  <a:lnTo>
-                    <a:pt x="1004981" y="1675723"/>
-                  </a:lnTo>
-                  <a:lnTo>
-                    <a:pt x="927346" y="1622080"/>
-                  </a:lnTo>
-                  <a:lnTo>
-                    <a:pt x="849712" y="1566981"/>
-                  </a:lnTo>
-                  <a:lnTo>
-                    <a:pt x="772078" y="1510388"/>
-                  </a:lnTo>
-                  <a:lnTo>
-                    <a:pt x="694444" y="1452259"/>
-                  </a:lnTo>
-                  <a:lnTo>
-                    <a:pt x="616810" y="1392552"/>
-                  </a:lnTo>
-                  <a:lnTo>
-                    <a:pt x="539176" y="1331226"/>
-                  </a:lnTo>
-                  <a:lnTo>
-                    <a:pt x="461542" y="1268235"/>
-                  </a:lnTo>
-                  <a:lnTo>
-                    <a:pt x="383908" y="1203535"/>
-                  </a:lnTo>
-                  <a:lnTo>
-                    <a:pt x="306274" y="1137080"/>
-                  </a:lnTo>
-                  <a:lnTo>
-                    <a:pt x="228640" y="1068821"/>
-                  </a:lnTo>
-                  <a:lnTo>
-                    <a:pt x="151006" y="998710"/>
-                  </a:lnTo>
-                  <a:lnTo>
-                    <a:pt x="73372" y="926697"/>
-                  </a:lnTo>
-                  <a:lnTo>
-                    <a:pt x="0" y="856790"/>
+                    <a:pt x="2402393" y="322580"/>
+                  </a:lnTo>
+                  <a:lnTo>
+                    <a:pt x="2480027" y="657364"/>
+                  </a:lnTo>
+                  <a:lnTo>
+                    <a:pt x="2557661" y="958491"/>
+                  </a:lnTo>
+                  <a:lnTo>
+                    <a:pt x="2635295" y="1229345"/>
+                  </a:lnTo>
+                  <a:lnTo>
+                    <a:pt x="2712930" y="1472968"/>
+                  </a:lnTo>
+                  <a:lnTo>
+                    <a:pt x="2790564" y="1692100"/>
+                  </a:lnTo>
+                  <a:lnTo>
+                    <a:pt x="2868198" y="1889201"/>
+                  </a:lnTo>
+                  <a:lnTo>
+                    <a:pt x="2945832" y="2066487"/>
+                  </a:lnTo>
+                  <a:lnTo>
+                    <a:pt x="3023466" y="2225949"/>
+                  </a:lnTo>
+                  <a:lnTo>
+                    <a:pt x="3101100" y="2369380"/>
+                  </a:lnTo>
+                  <a:lnTo>
+                    <a:pt x="3178734" y="2498392"/>
+                  </a:lnTo>
+                  <a:lnTo>
+                    <a:pt x="3256368" y="2614433"/>
+                  </a:lnTo>
+                  <a:lnTo>
+                    <a:pt x="3334002" y="2718808"/>
+                  </a:lnTo>
+                  <a:lnTo>
+                    <a:pt x="3411636" y="2788646"/>
+                  </a:lnTo>
+                  <a:lnTo>
+                    <a:pt x="3489270" y="2805721"/>
+                  </a:lnTo>
+                  <a:lnTo>
+                    <a:pt x="3566904" y="2822460"/>
+                  </a:lnTo>
+                  <a:lnTo>
+                    <a:pt x="3644538" y="2838867"/>
+                  </a:lnTo>
+                  <a:lnTo>
+                    <a:pt x="3722172" y="2854950"/>
+                  </a:lnTo>
+                  <a:lnTo>
+                    <a:pt x="3799806" y="2870716"/>
+                  </a:lnTo>
+                  <a:lnTo>
+                    <a:pt x="3877440" y="2886169"/>
+                  </a:lnTo>
+                  <a:lnTo>
+                    <a:pt x="3955074" y="2901318"/>
+                  </a:lnTo>
+                  <a:lnTo>
+                    <a:pt x="4032708" y="2916167"/>
+                  </a:lnTo>
+                  <a:lnTo>
+                    <a:pt x="4110342" y="2930722"/>
+                  </a:lnTo>
+                  <a:lnTo>
+                    <a:pt x="4187976" y="2944990"/>
+                  </a:lnTo>
+                  <a:lnTo>
+                    <a:pt x="4265610" y="2958976"/>
+                  </a:lnTo>
+                  <a:lnTo>
+                    <a:pt x="4343244" y="2972685"/>
+                  </a:lnTo>
+                  <a:lnTo>
+                    <a:pt x="4420879" y="2986124"/>
+                  </a:lnTo>
+                  <a:lnTo>
+                    <a:pt x="4498513" y="2999297"/>
+                  </a:lnTo>
+                  <a:lnTo>
+                    <a:pt x="4576147" y="3012209"/>
+                  </a:lnTo>
+                  <a:lnTo>
+                    <a:pt x="4653781" y="3024866"/>
+                  </a:lnTo>
+                  <a:lnTo>
+                    <a:pt x="4731415" y="3037274"/>
+                  </a:lnTo>
+                  <a:lnTo>
+                    <a:pt x="4809049" y="3049436"/>
+                  </a:lnTo>
+                  <a:lnTo>
+                    <a:pt x="4886683" y="3061357"/>
+                  </a:lnTo>
+                  <a:lnTo>
+                    <a:pt x="4964317" y="3073043"/>
+                  </a:lnTo>
+                  <a:lnTo>
+                    <a:pt x="5041951" y="3084498"/>
+                  </a:lnTo>
+                  <a:lnTo>
+                    <a:pt x="5119585" y="3095727"/>
+                  </a:lnTo>
+                  <a:lnTo>
+                    <a:pt x="5197219" y="3106733"/>
+                  </a:lnTo>
+                  <a:lnTo>
+                    <a:pt x="5274853" y="3117523"/>
+                  </a:lnTo>
+                  <a:lnTo>
+                    <a:pt x="5352487" y="3128099"/>
+                  </a:lnTo>
+                  <a:lnTo>
+                    <a:pt x="5430121" y="3138466"/>
+                  </a:lnTo>
+                  <a:lnTo>
+                    <a:pt x="5507755" y="3148628"/>
+                  </a:lnTo>
+                  <a:lnTo>
+                    <a:pt x="5585389" y="3158589"/>
+                  </a:lnTo>
+                  <a:lnTo>
+                    <a:pt x="5663023" y="3168353"/>
+                  </a:lnTo>
+                  <a:lnTo>
+                    <a:pt x="5740657" y="3177924"/>
+                  </a:lnTo>
+                  <a:lnTo>
+                    <a:pt x="5818291" y="3187307"/>
+                  </a:lnTo>
+                  <a:lnTo>
+                    <a:pt x="5895925" y="3196503"/>
+                  </a:lnTo>
+                  <a:lnTo>
+                    <a:pt x="5973559" y="3205518"/>
+                  </a:lnTo>
+                  <a:lnTo>
+                    <a:pt x="6051193" y="3214355"/>
+                  </a:lnTo>
+                  <a:lnTo>
+                    <a:pt x="6128827" y="3223017"/>
+                  </a:lnTo>
+                  <a:lnTo>
+                    <a:pt x="6206462" y="3231508"/>
+                  </a:lnTo>
+                  <a:lnTo>
+                    <a:pt x="6284096" y="3239832"/>
+                  </a:lnTo>
+                  <a:lnTo>
+                    <a:pt x="6361730" y="3247990"/>
+                  </a:lnTo>
+                  <a:lnTo>
+                    <a:pt x="6439364" y="3255988"/>
+                  </a:lnTo>
+                  <a:lnTo>
+                    <a:pt x="6516998" y="3263827"/>
+                  </a:lnTo>
+                  <a:lnTo>
+                    <a:pt x="6594632" y="3271511"/>
+                  </a:lnTo>
+                  <a:lnTo>
+                    <a:pt x="6672266" y="3279044"/>
+                  </a:lnTo>
+                  <a:lnTo>
+                    <a:pt x="6749900" y="3286428"/>
+                  </a:lnTo>
+                  <a:lnTo>
+                    <a:pt x="6827534" y="3293665"/>
+                  </a:lnTo>
+                  <a:lnTo>
+                    <a:pt x="6905168" y="3300760"/>
+                  </a:lnTo>
+                  <a:lnTo>
+                    <a:pt x="6982802" y="3307715"/>
+                  </a:lnTo>
+                  <a:lnTo>
+                    <a:pt x="7060436" y="3314532"/>
+                  </a:lnTo>
+                  <a:lnTo>
+                    <a:pt x="7138070" y="3321214"/>
+                  </a:lnTo>
+                  <a:lnTo>
+                    <a:pt x="7215704" y="3327764"/>
+                  </a:lnTo>
+                  <a:lnTo>
+                    <a:pt x="7293338" y="3334185"/>
+                  </a:lnTo>
+                  <a:lnTo>
+                    <a:pt x="7370972" y="3340479"/>
+                  </a:lnTo>
+                  <a:lnTo>
+                    <a:pt x="7370972" y="3648863"/>
+                  </a:lnTo>
+                  <a:lnTo>
+                    <a:pt x="7293338" y="3648441"/>
+                  </a:lnTo>
+                  <a:lnTo>
+                    <a:pt x="7215704" y="3647971"/>
+                  </a:lnTo>
+                  <a:lnTo>
+                    <a:pt x="7138070" y="3647449"/>
+                  </a:lnTo>
+                  <a:lnTo>
+                    <a:pt x="7060436" y="3646868"/>
+                  </a:lnTo>
+                  <a:lnTo>
+                    <a:pt x="6982802" y="3646223"/>
+                  </a:lnTo>
+                  <a:lnTo>
+                    <a:pt x="6905168" y="3645505"/>
+                  </a:lnTo>
+                  <a:lnTo>
+                    <a:pt x="6827534" y="3644708"/>
+                  </a:lnTo>
+                  <a:lnTo>
+                    <a:pt x="6749900" y="3643821"/>
+                  </a:lnTo>
+                  <a:lnTo>
+                    <a:pt x="6672266" y="3642834"/>
+                  </a:lnTo>
+                  <a:lnTo>
+                    <a:pt x="6594632" y="3641738"/>
+                  </a:lnTo>
+                  <a:lnTo>
+                    <a:pt x="6516998" y="3640519"/>
+                  </a:lnTo>
+                  <a:lnTo>
+                    <a:pt x="6439364" y="3639164"/>
+                  </a:lnTo>
+                  <a:lnTo>
+                    <a:pt x="6361730" y="3637658"/>
+                  </a:lnTo>
+                  <a:lnTo>
+                    <a:pt x="6284096" y="3635983"/>
+                  </a:lnTo>
+                  <a:lnTo>
+                    <a:pt x="6206462" y="3634120"/>
+                  </a:lnTo>
+                  <a:lnTo>
+                    <a:pt x="6128827" y="3632050"/>
+                  </a:lnTo>
+                  <a:lnTo>
+                    <a:pt x="6051193" y="3629748"/>
+                  </a:lnTo>
+                  <a:lnTo>
+                    <a:pt x="5973559" y="3627189"/>
+                  </a:lnTo>
+                  <a:lnTo>
+                    <a:pt x="5895925" y="3624344"/>
+                  </a:lnTo>
+                  <a:lnTo>
+                    <a:pt x="5818291" y="3621181"/>
+                  </a:lnTo>
+                  <a:lnTo>
+                    <a:pt x="5740657" y="3617665"/>
+                  </a:lnTo>
+                  <a:lnTo>
+                    <a:pt x="5663023" y="3613755"/>
+                  </a:lnTo>
+                  <a:lnTo>
+                    <a:pt x="5585389" y="3609409"/>
+                  </a:lnTo>
+                  <a:lnTo>
+                    <a:pt x="5507755" y="3604577"/>
+                  </a:lnTo>
+                  <a:lnTo>
+                    <a:pt x="5430121" y="3599204"/>
+                  </a:lnTo>
+                  <a:lnTo>
+                    <a:pt x="5352487" y="3593231"/>
+                  </a:lnTo>
+                  <a:lnTo>
+                    <a:pt x="5274853" y="3586591"/>
+                  </a:lnTo>
+                  <a:lnTo>
+                    <a:pt x="5197219" y="3579208"/>
+                  </a:lnTo>
+                  <a:lnTo>
+                    <a:pt x="5119585" y="3571000"/>
+                  </a:lnTo>
+                  <a:lnTo>
+                    <a:pt x="5041951" y="3561875"/>
+                  </a:lnTo>
+                  <a:lnTo>
+                    <a:pt x="4964317" y="3551729"/>
+                  </a:lnTo>
+                  <a:lnTo>
+                    <a:pt x="4886683" y="3540450"/>
+                  </a:lnTo>
+                  <a:lnTo>
+                    <a:pt x="4809049" y="3527910"/>
+                  </a:lnTo>
+                  <a:lnTo>
+                    <a:pt x="4731415" y="3513969"/>
+                  </a:lnTo>
+                  <a:lnTo>
+                    <a:pt x="4653781" y="3498469"/>
+                  </a:lnTo>
+                  <a:lnTo>
+                    <a:pt x="4576147" y="3481237"/>
+                  </a:lnTo>
+                  <a:lnTo>
+                    <a:pt x="4498513" y="3462079"/>
+                  </a:lnTo>
+                  <a:lnTo>
+                    <a:pt x="4420879" y="3440779"/>
+                  </a:lnTo>
+                  <a:lnTo>
+                    <a:pt x="4343244" y="3417099"/>
+                  </a:lnTo>
+                  <a:lnTo>
+                    <a:pt x="4265610" y="3390772"/>
+                  </a:lnTo>
+                  <a:lnTo>
+                    <a:pt x="4187976" y="3361503"/>
+                  </a:lnTo>
+                  <a:lnTo>
+                    <a:pt x="4110342" y="3328962"/>
+                  </a:lnTo>
+                  <a:lnTo>
+                    <a:pt x="4032708" y="3292784"/>
+                  </a:lnTo>
+                  <a:lnTo>
+                    <a:pt x="3955074" y="3252562"/>
+                  </a:lnTo>
+                  <a:lnTo>
+                    <a:pt x="3877440" y="3207844"/>
+                  </a:lnTo>
+                  <a:lnTo>
+                    <a:pt x="3799806" y="3158129"/>
+                  </a:lnTo>
+                  <a:lnTo>
+                    <a:pt x="3722172" y="3102857"/>
+                  </a:lnTo>
+                  <a:lnTo>
+                    <a:pt x="3644538" y="3041407"/>
+                  </a:lnTo>
+                  <a:lnTo>
+                    <a:pt x="3566904" y="2973089"/>
+                  </a:lnTo>
+                  <a:lnTo>
+                    <a:pt x="3489270" y="2897134"/>
+                  </a:lnTo>
+                  <a:lnTo>
+                    <a:pt x="3411636" y="2812690"/>
+                  </a:lnTo>
+                  <a:lnTo>
+                    <a:pt x="3334002" y="2771225"/>
+                  </a:lnTo>
+                  <a:lnTo>
+                    <a:pt x="3256368" y="2753454"/>
+                  </a:lnTo>
+                  <a:lnTo>
+                    <a:pt x="3178734" y="2735325"/>
+                  </a:lnTo>
+                  <a:lnTo>
+                    <a:pt x="3101100" y="2716830"/>
+                  </a:lnTo>
+                  <a:lnTo>
+                    <a:pt x="3023466" y="2697961"/>
+                  </a:lnTo>
+                  <a:lnTo>
+                    <a:pt x="2945832" y="2678713"/>
+                  </a:lnTo>
+                  <a:lnTo>
+                    <a:pt x="2868198" y="2659077"/>
+                  </a:lnTo>
+                  <a:lnTo>
+                    <a:pt x="2790564" y="2639044"/>
+                  </a:lnTo>
+                  <a:lnTo>
+                    <a:pt x="2712930" y="2618608"/>
+                  </a:lnTo>
+                  <a:lnTo>
+                    <a:pt x="2635295" y="2597759"/>
+                  </a:lnTo>
+                  <a:lnTo>
+                    <a:pt x="2557661" y="2576491"/>
+                  </a:lnTo>
+                  <a:lnTo>
+                    <a:pt x="2480027" y="2554793"/>
+                  </a:lnTo>
+                  <a:lnTo>
+                    <a:pt x="2402393" y="2532658"/>
+                  </a:lnTo>
+                  <a:lnTo>
+                    <a:pt x="2324759" y="2510077"/>
+                  </a:lnTo>
+                  <a:lnTo>
+                    <a:pt x="2247125" y="2487040"/>
+                  </a:lnTo>
+                  <a:lnTo>
+                    <a:pt x="2169491" y="2463539"/>
+                  </a:lnTo>
+                  <a:lnTo>
+                    <a:pt x="2091857" y="2439564"/>
+                  </a:lnTo>
+                  <a:lnTo>
+                    <a:pt x="2014223" y="2415106"/>
+                  </a:lnTo>
+                  <a:lnTo>
+                    <a:pt x="1936589" y="2390155"/>
+                  </a:lnTo>
+                  <a:lnTo>
+                    <a:pt x="1858955" y="2364700"/>
+                  </a:lnTo>
+                  <a:lnTo>
+                    <a:pt x="1781321" y="2338732"/>
+                  </a:lnTo>
+                  <a:lnTo>
+                    <a:pt x="1703687" y="2312241"/>
+                  </a:lnTo>
+                  <a:lnTo>
+                    <a:pt x="1626053" y="2285216"/>
+                  </a:lnTo>
+                  <a:lnTo>
+                    <a:pt x="1548419" y="2257645"/>
+                  </a:lnTo>
+                  <a:lnTo>
+                    <a:pt x="1470785" y="2229519"/>
+                  </a:lnTo>
+                  <a:lnTo>
+                    <a:pt x="1393151" y="2200826"/>
+                  </a:lnTo>
+                  <a:lnTo>
+                    <a:pt x="1315517" y="2171554"/>
+                  </a:lnTo>
+                  <a:lnTo>
+                    <a:pt x="1237883" y="2141692"/>
+                  </a:lnTo>
+                  <a:lnTo>
+                    <a:pt x="1160249" y="2111228"/>
+                  </a:lnTo>
+                  <a:lnTo>
+                    <a:pt x="1082615" y="2080150"/>
+                  </a:lnTo>
+                  <a:lnTo>
+                    <a:pt x="1004981" y="2048445"/>
+                  </a:lnTo>
+                  <a:lnTo>
+                    <a:pt x="927346" y="2016101"/>
+                  </a:lnTo>
+                  <a:lnTo>
+                    <a:pt x="849712" y="1983105"/>
+                  </a:lnTo>
+                  <a:lnTo>
+                    <a:pt x="772078" y="1949444"/>
+                  </a:lnTo>
+                  <a:lnTo>
+                    <a:pt x="694444" y="1915103"/>
+                  </a:lnTo>
+                  <a:lnTo>
+                    <a:pt x="616810" y="1880071"/>
+                  </a:lnTo>
+                  <a:lnTo>
+                    <a:pt x="539176" y="1844332"/>
+                  </a:lnTo>
+                  <a:lnTo>
+                    <a:pt x="461542" y="1807873"/>
+                  </a:lnTo>
+                  <a:lnTo>
+                    <a:pt x="383908" y="1770678"/>
+                  </a:lnTo>
+                  <a:lnTo>
+                    <a:pt x="306274" y="1732734"/>
+                  </a:lnTo>
+                  <a:lnTo>
+                    <a:pt x="228640" y="1694024"/>
+                  </a:lnTo>
+                  <a:lnTo>
+                    <a:pt x="151006" y="1654534"/>
+                  </a:lnTo>
+                  <a:lnTo>
+                    <a:pt x="73372" y="1614248"/>
+                  </a:lnTo>
+                  <a:lnTo>
+                    <a:pt x="0" y="1575405"/>
                   </a:lnTo>
                   <a:close/>
                 </a:path>
@@ -3519,210 +3519,210 @@
           </p:nvSpPr>
           <p:spPr>
             <a:xfrm>
-              <a:off x="3206267" y="1896563"/>
-              <a:ext cx="4982222" cy="3432580"/>
+              <a:off x="3152628" y="1896563"/>
+              <a:ext cx="5035862" cy="3340479"/>
             </a:xfrm>
             <a:custGeom>
               <a:avLst/>
               <a:pathLst>
-                <a:path w="4982222" h="3432580">
+                <a:path w="5035862" h="3340479">
                   <a:moveTo>
                     <a:pt x="0" y="0"/>
                   </a:moveTo>
                   <a:lnTo>
-                    <a:pt x="13643" y="74269"/>
-                  </a:lnTo>
-                  <a:lnTo>
-                    <a:pt x="91277" y="452232"/>
-                  </a:lnTo>
-                  <a:lnTo>
-                    <a:pt x="168911" y="790273"/>
-                  </a:lnTo>
-                  <a:lnTo>
-                    <a:pt x="246545" y="1092609"/>
-                  </a:lnTo>
-                  <a:lnTo>
-                    <a:pt x="324179" y="1363011"/>
-                  </a:lnTo>
-                  <a:lnTo>
-                    <a:pt x="401813" y="1604851"/>
-                  </a:lnTo>
-                  <a:lnTo>
-                    <a:pt x="479447" y="1821148"/>
-                  </a:lnTo>
-                  <a:lnTo>
-                    <a:pt x="557082" y="2014598"/>
-                  </a:lnTo>
-                  <a:lnTo>
-                    <a:pt x="634716" y="2187616"/>
-                  </a:lnTo>
-                  <a:lnTo>
-                    <a:pt x="712350" y="2342358"/>
-                  </a:lnTo>
-                  <a:lnTo>
-                    <a:pt x="789984" y="2480756"/>
-                  </a:lnTo>
-                  <a:lnTo>
-                    <a:pt x="867618" y="2604536"/>
-                  </a:lnTo>
-                  <a:lnTo>
-                    <a:pt x="945252" y="2715241"/>
-                  </a:lnTo>
-                  <a:lnTo>
-                    <a:pt x="1022886" y="2790575"/>
-                  </a:lnTo>
-                  <a:lnTo>
-                    <a:pt x="1100520" y="2813349"/>
-                  </a:lnTo>
-                  <a:lnTo>
-                    <a:pt x="1178154" y="2835521"/>
-                  </a:lnTo>
-                  <a:lnTo>
-                    <a:pt x="1255788" y="2857108"/>
-                  </a:lnTo>
-                  <a:lnTo>
-                    <a:pt x="1333422" y="2878124"/>
-                  </a:lnTo>
-                  <a:lnTo>
-                    <a:pt x="1411056" y="2898585"/>
-                  </a:lnTo>
-                  <a:lnTo>
-                    <a:pt x="1488690" y="2918505"/>
-                  </a:lnTo>
-                  <a:lnTo>
-                    <a:pt x="1566324" y="2937900"/>
-                  </a:lnTo>
-                  <a:lnTo>
-                    <a:pt x="1643958" y="2956782"/>
-                  </a:lnTo>
-                  <a:lnTo>
-                    <a:pt x="1721592" y="2975165"/>
-                  </a:lnTo>
-                  <a:lnTo>
-                    <a:pt x="1799226" y="2993062"/>
-                  </a:lnTo>
-                  <a:lnTo>
-                    <a:pt x="1876860" y="3010487"/>
-                  </a:lnTo>
-                  <a:lnTo>
-                    <a:pt x="1954494" y="3027451"/>
-                  </a:lnTo>
-                  <a:lnTo>
-                    <a:pt x="2032128" y="3043967"/>
-                  </a:lnTo>
-                  <a:lnTo>
-                    <a:pt x="2109762" y="3060047"/>
-                  </a:lnTo>
-                  <a:lnTo>
-                    <a:pt x="2187396" y="3075702"/>
-                  </a:lnTo>
-                  <a:lnTo>
-                    <a:pt x="2265031" y="3090944"/>
-                  </a:lnTo>
-                  <a:lnTo>
-                    <a:pt x="2342665" y="3105782"/>
-                  </a:lnTo>
-                  <a:lnTo>
-                    <a:pt x="2420299" y="3120229"/>
-                  </a:lnTo>
-                  <a:lnTo>
-                    <a:pt x="2497933" y="3134294"/>
-                  </a:lnTo>
-                  <a:lnTo>
-                    <a:pt x="2575567" y="3147988"/>
-                  </a:lnTo>
-                  <a:lnTo>
-                    <a:pt x="2653201" y="3161320"/>
-                  </a:lnTo>
-                  <a:lnTo>
-                    <a:pt x="2730835" y="3174299"/>
-                  </a:lnTo>
-                  <a:lnTo>
-                    <a:pt x="2808469" y="3186936"/>
-                  </a:lnTo>
-                  <a:lnTo>
-                    <a:pt x="2886103" y="3199239"/>
-                  </a:lnTo>
-                  <a:lnTo>
-                    <a:pt x="2963737" y="3211217"/>
-                  </a:lnTo>
-                  <a:lnTo>
-                    <a:pt x="3041371" y="3222879"/>
-                  </a:lnTo>
-                  <a:lnTo>
-                    <a:pt x="3119005" y="3234232"/>
-                  </a:lnTo>
-                  <a:lnTo>
-                    <a:pt x="3196639" y="3245285"/>
-                  </a:lnTo>
-                  <a:lnTo>
-                    <a:pt x="3274273" y="3256047"/>
-                  </a:lnTo>
-                  <a:lnTo>
-                    <a:pt x="3351907" y="3266524"/>
-                  </a:lnTo>
-                  <a:lnTo>
-                    <a:pt x="3429541" y="3276724"/>
-                  </a:lnTo>
-                  <a:lnTo>
-                    <a:pt x="3507175" y="3286655"/>
-                  </a:lnTo>
-                  <a:lnTo>
-                    <a:pt x="3584809" y="3296324"/>
-                  </a:lnTo>
-                  <a:lnTo>
-                    <a:pt x="3662443" y="3305737"/>
-                  </a:lnTo>
-                  <a:lnTo>
-                    <a:pt x="3740077" y="3314902"/>
-                  </a:lnTo>
-                  <a:lnTo>
-                    <a:pt x="3817711" y="3323824"/>
-                  </a:lnTo>
-                  <a:lnTo>
-                    <a:pt x="3895345" y="3332511"/>
-                  </a:lnTo>
-                  <a:lnTo>
-                    <a:pt x="3972980" y="3340968"/>
-                  </a:lnTo>
-                  <a:lnTo>
-                    <a:pt x="4050614" y="3349201"/>
-                  </a:lnTo>
-                  <a:lnTo>
-                    <a:pt x="4128248" y="3357218"/>
-                  </a:lnTo>
-                  <a:lnTo>
-                    <a:pt x="4205882" y="3365022"/>
-                  </a:lnTo>
-                  <a:lnTo>
-                    <a:pt x="4283516" y="3372621"/>
-                  </a:lnTo>
-                  <a:lnTo>
-                    <a:pt x="4361150" y="3380018"/>
-                  </a:lnTo>
-                  <a:lnTo>
-                    <a:pt x="4438784" y="3387220"/>
-                  </a:lnTo>
-                  <a:lnTo>
-                    <a:pt x="4516418" y="3394232"/>
-                  </a:lnTo>
-                  <a:lnTo>
-                    <a:pt x="4594052" y="3401059"/>
-                  </a:lnTo>
-                  <a:lnTo>
-                    <a:pt x="4671686" y="3407705"/>
-                  </a:lnTo>
-                  <a:lnTo>
-                    <a:pt x="4749320" y="3414176"/>
-                  </a:lnTo>
-                  <a:lnTo>
-                    <a:pt x="4826954" y="3420475"/>
-                  </a:lnTo>
-                  <a:lnTo>
-                    <a:pt x="4904588" y="3426609"/>
-                  </a:lnTo>
-                  <a:lnTo>
-                    <a:pt x="4982222" y="3432580"/>
+                    <a:pt x="67283" y="322580"/>
+                  </a:lnTo>
+                  <a:lnTo>
+                    <a:pt x="144917" y="657364"/>
+                  </a:lnTo>
+                  <a:lnTo>
+                    <a:pt x="222551" y="958491"/>
+                  </a:lnTo>
+                  <a:lnTo>
+                    <a:pt x="300185" y="1229345"/>
+                  </a:lnTo>
+                  <a:lnTo>
+                    <a:pt x="377819" y="1472968"/>
+                  </a:lnTo>
+                  <a:lnTo>
+                    <a:pt x="455453" y="1692100"/>
+                  </a:lnTo>
+                  <a:lnTo>
+                    <a:pt x="533087" y="1889201"/>
+                  </a:lnTo>
+                  <a:lnTo>
+                    <a:pt x="610721" y="2066487"/>
+                  </a:lnTo>
+                  <a:lnTo>
+                    <a:pt x="688356" y="2225949"/>
+                  </a:lnTo>
+                  <a:lnTo>
+                    <a:pt x="765990" y="2369380"/>
+                  </a:lnTo>
+                  <a:lnTo>
+                    <a:pt x="843624" y="2498392"/>
+                  </a:lnTo>
+                  <a:lnTo>
+                    <a:pt x="921258" y="2614433"/>
+                  </a:lnTo>
+                  <a:lnTo>
+                    <a:pt x="998892" y="2718808"/>
+                  </a:lnTo>
+                  <a:lnTo>
+                    <a:pt x="1076526" y="2788646"/>
+                  </a:lnTo>
+                  <a:lnTo>
+                    <a:pt x="1154160" y="2805721"/>
+                  </a:lnTo>
+                  <a:lnTo>
+                    <a:pt x="1231794" y="2822460"/>
+                  </a:lnTo>
+                  <a:lnTo>
+                    <a:pt x="1309428" y="2838867"/>
+                  </a:lnTo>
+                  <a:lnTo>
+                    <a:pt x="1387062" y="2854950"/>
+                  </a:lnTo>
+                  <a:lnTo>
+                    <a:pt x="1464696" y="2870716"/>
+                  </a:lnTo>
+                  <a:lnTo>
+                    <a:pt x="1542330" y="2886169"/>
+                  </a:lnTo>
+                  <a:lnTo>
+                    <a:pt x="1619964" y="2901318"/>
+                  </a:lnTo>
+                  <a:lnTo>
+                    <a:pt x="1697598" y="2916167"/>
+                  </a:lnTo>
+                  <a:lnTo>
+                    <a:pt x="1775232" y="2930722"/>
+                  </a:lnTo>
+                  <a:lnTo>
+                    <a:pt x="1852866" y="2944990"/>
+                  </a:lnTo>
+                  <a:lnTo>
+                    <a:pt x="1930500" y="2958976"/>
+                  </a:lnTo>
+                  <a:lnTo>
+                    <a:pt x="2008134" y="2972685"/>
+                  </a:lnTo>
+                  <a:lnTo>
+                    <a:pt x="2085768" y="2986124"/>
+                  </a:lnTo>
+                  <a:lnTo>
+                    <a:pt x="2163402" y="2999297"/>
+                  </a:lnTo>
+                  <a:lnTo>
+                    <a:pt x="2241036" y="3012209"/>
+                  </a:lnTo>
+                  <a:lnTo>
+                    <a:pt x="2318670" y="3024866"/>
+                  </a:lnTo>
+                  <a:lnTo>
+                    <a:pt x="2396305" y="3037274"/>
+                  </a:lnTo>
+                  <a:lnTo>
+                    <a:pt x="2473939" y="3049436"/>
+                  </a:lnTo>
+                  <a:lnTo>
+                    <a:pt x="2551573" y="3061357"/>
+                  </a:lnTo>
+                  <a:lnTo>
+                    <a:pt x="2629207" y="3073043"/>
+                  </a:lnTo>
+                  <a:lnTo>
+                    <a:pt x="2706841" y="3084498"/>
+                  </a:lnTo>
+                  <a:lnTo>
+                    <a:pt x="2784475" y="3095727"/>
+                  </a:lnTo>
+                  <a:lnTo>
+                    <a:pt x="2862109" y="3106733"/>
+                  </a:lnTo>
+                  <a:lnTo>
+                    <a:pt x="2939743" y="3117523"/>
+                  </a:lnTo>
+                  <a:lnTo>
+                    <a:pt x="3017377" y="3128099"/>
+                  </a:lnTo>
+                  <a:lnTo>
+                    <a:pt x="3095011" y="3138466"/>
+                  </a:lnTo>
+                  <a:lnTo>
+                    <a:pt x="3172645" y="3148628"/>
+                  </a:lnTo>
+                  <a:lnTo>
+                    <a:pt x="3250279" y="3158589"/>
+                  </a:lnTo>
+                  <a:lnTo>
+                    <a:pt x="3327913" y="3168353"/>
+                  </a:lnTo>
+                  <a:lnTo>
+                    <a:pt x="3405547" y="3177924"/>
+                  </a:lnTo>
+                  <a:lnTo>
+                    <a:pt x="3483181" y="3187307"/>
+                  </a:lnTo>
+                  <a:lnTo>
+                    <a:pt x="3560815" y="3196503"/>
+                  </a:lnTo>
+                  <a:lnTo>
+                    <a:pt x="3638449" y="3205518"/>
+                  </a:lnTo>
+                  <a:lnTo>
+                    <a:pt x="3716083" y="3214355"/>
+                  </a:lnTo>
+                  <a:lnTo>
+                    <a:pt x="3793717" y="3223017"/>
+                  </a:lnTo>
+                  <a:lnTo>
+                    <a:pt x="3871351" y="3231508"/>
+                  </a:lnTo>
+                  <a:lnTo>
+                    <a:pt x="3948985" y="3239832"/>
+                  </a:lnTo>
+                  <a:lnTo>
+                    <a:pt x="4026619" y="3247990"/>
+                  </a:lnTo>
+                  <a:lnTo>
+                    <a:pt x="4104254" y="3255988"/>
+                  </a:lnTo>
+                  <a:lnTo>
+                    <a:pt x="4181888" y="3263827"/>
+                  </a:lnTo>
+                  <a:lnTo>
+                    <a:pt x="4259522" y="3271511"/>
+                  </a:lnTo>
+                  <a:lnTo>
+                    <a:pt x="4337156" y="3279044"/>
+                  </a:lnTo>
+                  <a:lnTo>
+                    <a:pt x="4414790" y="3286428"/>
+                  </a:lnTo>
+                  <a:lnTo>
+                    <a:pt x="4492424" y="3293665"/>
+                  </a:lnTo>
+                  <a:lnTo>
+                    <a:pt x="4570058" y="3300760"/>
+                  </a:lnTo>
+                  <a:lnTo>
+                    <a:pt x="4647692" y="3307715"/>
+                  </a:lnTo>
+                  <a:lnTo>
+                    <a:pt x="4725326" y="3314532"/>
+                  </a:lnTo>
+                  <a:lnTo>
+                    <a:pt x="4802960" y="3321214"/>
+                  </a:lnTo>
+                  <a:lnTo>
+                    <a:pt x="4880594" y="3327764"/>
+                  </a:lnTo>
+                  <a:lnTo>
+                    <a:pt x="4958228" y="3334185"/>
+                  </a:lnTo>
+                  <a:lnTo>
+                    <a:pt x="5035862" y="3340479"/>
                   </a:lnTo>
                 </a:path>
               </a:pathLst>
@@ -3742,297 +3742,297 @@
           </p:nvSpPr>
           <p:spPr>
             <a:xfrm>
-              <a:off x="817517" y="2753353"/>
-              <a:ext cx="7370972" cy="2793029"/>
+              <a:off x="817517" y="3471969"/>
+              <a:ext cx="7370972" cy="2073457"/>
             </a:xfrm>
             <a:custGeom>
               <a:avLst/>
               <a:pathLst>
-                <a:path w="7370972" h="2793029">
+                <a:path w="7370972" h="2073457">
                   <a:moveTo>
-                    <a:pt x="7370972" y="2793029"/>
+                    <a:pt x="7370972" y="2073457"/>
                   </a:moveTo>
                   <a:lnTo>
-                    <a:pt x="7293338" y="2792695"/>
-                  </a:lnTo>
-                  <a:lnTo>
-                    <a:pt x="7215704" y="2792322"/>
-                  </a:lnTo>
-                  <a:lnTo>
-                    <a:pt x="7138070" y="2791905"/>
-                  </a:lnTo>
-                  <a:lnTo>
-                    <a:pt x="7060436" y="2791439"/>
-                  </a:lnTo>
-                  <a:lnTo>
-                    <a:pt x="6982802" y="2790917"/>
-                  </a:lnTo>
-                  <a:lnTo>
-                    <a:pt x="6905168" y="2790334"/>
-                  </a:lnTo>
-                  <a:lnTo>
-                    <a:pt x="6827534" y="2789683"/>
-                  </a:lnTo>
-                  <a:lnTo>
-                    <a:pt x="6749900" y="2788954"/>
-                  </a:lnTo>
-                  <a:lnTo>
-                    <a:pt x="6672266" y="2788139"/>
-                  </a:lnTo>
-                  <a:lnTo>
-                    <a:pt x="6594632" y="2787228"/>
-                  </a:lnTo>
-                  <a:lnTo>
-                    <a:pt x="6516998" y="2786209"/>
-                  </a:lnTo>
-                  <a:lnTo>
-                    <a:pt x="6439364" y="2785070"/>
-                  </a:lnTo>
-                  <a:lnTo>
-                    <a:pt x="6361730" y="2783797"/>
-                  </a:lnTo>
-                  <a:lnTo>
-                    <a:pt x="6284096" y="2782373"/>
-                  </a:lnTo>
-                  <a:lnTo>
-                    <a:pt x="6206462" y="2780781"/>
-                  </a:lnTo>
-                  <a:lnTo>
-                    <a:pt x="6128827" y="2779001"/>
-                  </a:lnTo>
-                  <a:lnTo>
-                    <a:pt x="6051193" y="2777011"/>
-                  </a:lnTo>
-                  <a:lnTo>
-                    <a:pt x="5973559" y="2774786"/>
-                  </a:lnTo>
-                  <a:lnTo>
-                    <a:pt x="5895925" y="2772298"/>
-                  </a:lnTo>
-                  <a:lnTo>
-                    <a:pt x="5818291" y="2769516"/>
-                  </a:lnTo>
-                  <a:lnTo>
-                    <a:pt x="5740657" y="2766406"/>
-                  </a:lnTo>
-                  <a:lnTo>
-                    <a:pt x="5663023" y="2762928"/>
-                  </a:lnTo>
-                  <a:lnTo>
-                    <a:pt x="5585389" y="2759040"/>
-                  </a:lnTo>
-                  <a:lnTo>
-                    <a:pt x="5507755" y="2754692"/>
-                  </a:lnTo>
-                  <a:lnTo>
-                    <a:pt x="5430121" y="2749831"/>
-                  </a:lnTo>
-                  <a:lnTo>
-                    <a:pt x="5352487" y="2744396"/>
-                  </a:lnTo>
-                  <a:lnTo>
-                    <a:pt x="5274853" y="2738319"/>
-                  </a:lnTo>
-                  <a:lnTo>
-                    <a:pt x="5197219" y="2731524"/>
-                  </a:lnTo>
-                  <a:lnTo>
-                    <a:pt x="5119585" y="2723927"/>
-                  </a:lnTo>
-                  <a:lnTo>
-                    <a:pt x="5041951" y="2715433"/>
-                  </a:lnTo>
-                  <a:lnTo>
-                    <a:pt x="4964317" y="2705935"/>
-                  </a:lnTo>
-                  <a:lnTo>
-                    <a:pt x="4886683" y="2695316"/>
-                  </a:lnTo>
-                  <a:lnTo>
-                    <a:pt x="4809049" y="2683443"/>
-                  </a:lnTo>
-                  <a:lnTo>
-                    <a:pt x="4731415" y="2670167"/>
-                  </a:lnTo>
-                  <a:lnTo>
-                    <a:pt x="4653781" y="2655324"/>
-                  </a:lnTo>
-                  <a:lnTo>
-                    <a:pt x="4576147" y="2638728"/>
-                  </a:lnTo>
-                  <a:lnTo>
-                    <a:pt x="4498513" y="2620172"/>
-                  </a:lnTo>
-                  <a:lnTo>
-                    <a:pt x="4420879" y="2599424"/>
-                  </a:lnTo>
-                  <a:lnTo>
-                    <a:pt x="4343244" y="2576226"/>
-                  </a:lnTo>
-                  <a:lnTo>
-                    <a:pt x="4265610" y="2550288"/>
-                  </a:lnTo>
-                  <a:lnTo>
-                    <a:pt x="4187976" y="2521288"/>
-                  </a:lnTo>
-                  <a:lnTo>
-                    <a:pt x="4110342" y="2488862"/>
-                  </a:lnTo>
-                  <a:lnTo>
-                    <a:pt x="4032708" y="2452607"/>
-                  </a:lnTo>
-                  <a:lnTo>
-                    <a:pt x="3955074" y="2412070"/>
-                  </a:lnTo>
-                  <a:lnTo>
-                    <a:pt x="3877440" y="2366746"/>
-                  </a:lnTo>
-                  <a:lnTo>
-                    <a:pt x="3799806" y="2316069"/>
-                  </a:lnTo>
-                  <a:lnTo>
-                    <a:pt x="3722172" y="2259407"/>
-                  </a:lnTo>
-                  <a:lnTo>
-                    <a:pt x="3644538" y="2196054"/>
-                  </a:lnTo>
-                  <a:lnTo>
-                    <a:pt x="3566904" y="2125219"/>
-                  </a:lnTo>
-                  <a:lnTo>
-                    <a:pt x="3489270" y="2046018"/>
-                  </a:lnTo>
-                  <a:lnTo>
-                    <a:pt x="3411636" y="1957464"/>
-                  </a:lnTo>
-                  <a:lnTo>
-                    <a:pt x="3334002" y="1910393"/>
-                  </a:lnTo>
-                  <a:lnTo>
-                    <a:pt x="3256368" y="1886366"/>
-                  </a:lnTo>
-                  <a:lnTo>
-                    <a:pt x="3178734" y="1861688"/>
-                  </a:lnTo>
-                  <a:lnTo>
-                    <a:pt x="3101100" y="1836340"/>
-                  </a:lnTo>
-                  <a:lnTo>
-                    <a:pt x="3023466" y="1810304"/>
-                  </a:lnTo>
-                  <a:lnTo>
-                    <a:pt x="2945832" y="1783561"/>
-                  </a:lnTo>
-                  <a:lnTo>
-                    <a:pt x="2868198" y="1756093"/>
-                  </a:lnTo>
-                  <a:lnTo>
-                    <a:pt x="2790564" y="1727880"/>
-                  </a:lnTo>
-                  <a:lnTo>
-                    <a:pt x="2712930" y="1698901"/>
-                  </a:lnTo>
-                  <a:lnTo>
-                    <a:pt x="2635295" y="1669136"/>
-                  </a:lnTo>
-                  <a:lnTo>
-                    <a:pt x="2557661" y="1638563"/>
-                  </a:lnTo>
-                  <a:lnTo>
-                    <a:pt x="2480027" y="1607160"/>
-                  </a:lnTo>
-                  <a:lnTo>
-                    <a:pt x="2402393" y="1574905"/>
-                  </a:lnTo>
-                  <a:lnTo>
-                    <a:pt x="2324759" y="1541775"/>
-                  </a:lnTo>
-                  <a:lnTo>
-                    <a:pt x="2247125" y="1507747"/>
-                  </a:lnTo>
-                  <a:lnTo>
-                    <a:pt x="2169491" y="1472794"/>
-                  </a:lnTo>
-                  <a:lnTo>
-                    <a:pt x="2091857" y="1436894"/>
-                  </a:lnTo>
-                  <a:lnTo>
-                    <a:pt x="2014223" y="1400019"/>
-                  </a:lnTo>
-                  <a:lnTo>
-                    <a:pt x="1936589" y="1362144"/>
-                  </a:lnTo>
-                  <a:lnTo>
-                    <a:pt x="1858955" y="1323241"/>
-                  </a:lnTo>
-                  <a:lnTo>
-                    <a:pt x="1781321" y="1283282"/>
-                  </a:lnTo>
-                  <a:lnTo>
-                    <a:pt x="1703687" y="1242239"/>
-                  </a:lnTo>
-                  <a:lnTo>
-                    <a:pt x="1626053" y="1200082"/>
-                  </a:lnTo>
-                  <a:lnTo>
-                    <a:pt x="1548419" y="1156782"/>
-                  </a:lnTo>
-                  <a:lnTo>
-                    <a:pt x="1470785" y="1112306"/>
-                  </a:lnTo>
-                  <a:lnTo>
-                    <a:pt x="1393151" y="1066624"/>
-                  </a:lnTo>
-                  <a:lnTo>
-                    <a:pt x="1315517" y="1019702"/>
-                  </a:lnTo>
-                  <a:lnTo>
-                    <a:pt x="1237883" y="971507"/>
-                  </a:lnTo>
-                  <a:lnTo>
-                    <a:pt x="1160249" y="922004"/>
-                  </a:lnTo>
-                  <a:lnTo>
-                    <a:pt x="1082615" y="871158"/>
-                  </a:lnTo>
-                  <a:lnTo>
-                    <a:pt x="1004981" y="818932"/>
-                  </a:lnTo>
-                  <a:lnTo>
-                    <a:pt x="927346" y="765290"/>
-                  </a:lnTo>
-                  <a:lnTo>
-                    <a:pt x="849712" y="710191"/>
-                  </a:lnTo>
-                  <a:lnTo>
-                    <a:pt x="772078" y="653598"/>
-                  </a:lnTo>
-                  <a:lnTo>
-                    <a:pt x="694444" y="595468"/>
-                  </a:lnTo>
-                  <a:lnTo>
-                    <a:pt x="616810" y="535762"/>
-                  </a:lnTo>
-                  <a:lnTo>
-                    <a:pt x="539176" y="474435"/>
-                  </a:lnTo>
-                  <a:lnTo>
-                    <a:pt x="461542" y="411445"/>
-                  </a:lnTo>
-                  <a:lnTo>
-                    <a:pt x="383908" y="346745"/>
-                  </a:lnTo>
-                  <a:lnTo>
-                    <a:pt x="306274" y="280289"/>
-                  </a:lnTo>
-                  <a:lnTo>
-                    <a:pt x="228640" y="212031"/>
-                  </a:lnTo>
-                  <a:lnTo>
-                    <a:pt x="151006" y="141920"/>
-                  </a:lnTo>
-                  <a:lnTo>
-                    <a:pt x="73372" y="69907"/>
+                    <a:pt x="7293338" y="2073035"/>
+                  </a:lnTo>
+                  <a:lnTo>
+                    <a:pt x="7215704" y="2072565"/>
+                  </a:lnTo>
+                  <a:lnTo>
+                    <a:pt x="7138070" y="2072043"/>
+                  </a:lnTo>
+                  <a:lnTo>
+                    <a:pt x="7060436" y="2071463"/>
+                  </a:lnTo>
+                  <a:lnTo>
+                    <a:pt x="6982802" y="2070817"/>
+                  </a:lnTo>
+                  <a:lnTo>
+                    <a:pt x="6905168" y="2070099"/>
+                  </a:lnTo>
+                  <a:lnTo>
+                    <a:pt x="6827534" y="2069302"/>
+                  </a:lnTo>
+                  <a:lnTo>
+                    <a:pt x="6749900" y="2068415"/>
+                  </a:lnTo>
+                  <a:lnTo>
+                    <a:pt x="6672266" y="2067429"/>
+                  </a:lnTo>
+                  <a:lnTo>
+                    <a:pt x="6594632" y="2066332"/>
+                  </a:lnTo>
+                  <a:lnTo>
+                    <a:pt x="6516998" y="2065113"/>
+                  </a:lnTo>
+                  <a:lnTo>
+                    <a:pt x="6439364" y="2063758"/>
+                  </a:lnTo>
+                  <a:lnTo>
+                    <a:pt x="6361730" y="2062252"/>
+                  </a:lnTo>
+                  <a:lnTo>
+                    <a:pt x="6284096" y="2060577"/>
+                  </a:lnTo>
+                  <a:lnTo>
+                    <a:pt x="6206462" y="2058715"/>
+                  </a:lnTo>
+                  <a:lnTo>
+                    <a:pt x="6128827" y="2056644"/>
+                  </a:lnTo>
+                  <a:lnTo>
+                    <a:pt x="6051193" y="2054342"/>
+                  </a:lnTo>
+                  <a:lnTo>
+                    <a:pt x="5973559" y="2051784"/>
+                  </a:lnTo>
+                  <a:lnTo>
+                    <a:pt x="5895925" y="2048939"/>
+                  </a:lnTo>
+                  <a:lnTo>
+                    <a:pt x="5818291" y="2045776"/>
+                  </a:lnTo>
+                  <a:lnTo>
+                    <a:pt x="5740657" y="2042259"/>
+                  </a:lnTo>
+                  <a:lnTo>
+                    <a:pt x="5663023" y="2038349"/>
+                  </a:lnTo>
+                  <a:lnTo>
+                    <a:pt x="5585389" y="2034003"/>
+                  </a:lnTo>
+                  <a:lnTo>
+                    <a:pt x="5507755" y="2029171"/>
+                  </a:lnTo>
+                  <a:lnTo>
+                    <a:pt x="5430121" y="2023798"/>
+                  </a:lnTo>
+                  <a:lnTo>
+                    <a:pt x="5352487" y="2017825"/>
+                  </a:lnTo>
+                  <a:lnTo>
+                    <a:pt x="5274853" y="2011185"/>
+                  </a:lnTo>
+                  <a:lnTo>
+                    <a:pt x="5197219" y="2003802"/>
+                  </a:lnTo>
+                  <a:lnTo>
+                    <a:pt x="5119585" y="1995594"/>
+                  </a:lnTo>
+                  <a:lnTo>
+                    <a:pt x="5041951" y="1986469"/>
+                  </a:lnTo>
+                  <a:lnTo>
+                    <a:pt x="4964317" y="1976323"/>
+                  </a:lnTo>
+                  <a:lnTo>
+                    <a:pt x="4886683" y="1965044"/>
+                  </a:lnTo>
+                  <a:lnTo>
+                    <a:pt x="4809049" y="1952504"/>
+                  </a:lnTo>
+                  <a:lnTo>
+                    <a:pt x="4731415" y="1938563"/>
+                  </a:lnTo>
+                  <a:lnTo>
+                    <a:pt x="4653781" y="1923063"/>
+                  </a:lnTo>
+                  <a:lnTo>
+                    <a:pt x="4576147" y="1905831"/>
+                  </a:lnTo>
+                  <a:lnTo>
+                    <a:pt x="4498513" y="1886673"/>
+                  </a:lnTo>
+                  <a:lnTo>
+                    <a:pt x="4420879" y="1865373"/>
+                  </a:lnTo>
+                  <a:lnTo>
+                    <a:pt x="4343244" y="1841693"/>
+                  </a:lnTo>
+                  <a:lnTo>
+                    <a:pt x="4265610" y="1815366"/>
+                  </a:lnTo>
+                  <a:lnTo>
+                    <a:pt x="4187976" y="1786097"/>
+                  </a:lnTo>
+                  <a:lnTo>
+                    <a:pt x="4110342" y="1753556"/>
+                  </a:lnTo>
+                  <a:lnTo>
+                    <a:pt x="4032708" y="1717378"/>
+                  </a:lnTo>
+                  <a:lnTo>
+                    <a:pt x="3955074" y="1677156"/>
+                  </a:lnTo>
+                  <a:lnTo>
+                    <a:pt x="3877440" y="1632438"/>
+                  </a:lnTo>
+                  <a:lnTo>
+                    <a:pt x="3799806" y="1582723"/>
+                  </a:lnTo>
+                  <a:lnTo>
+                    <a:pt x="3722172" y="1527451"/>
+                  </a:lnTo>
+                  <a:lnTo>
+                    <a:pt x="3644538" y="1466001"/>
+                  </a:lnTo>
+                  <a:lnTo>
+                    <a:pt x="3566904" y="1397683"/>
+                  </a:lnTo>
+                  <a:lnTo>
+                    <a:pt x="3489270" y="1321728"/>
+                  </a:lnTo>
+                  <a:lnTo>
+                    <a:pt x="3411636" y="1237285"/>
+                  </a:lnTo>
+                  <a:lnTo>
+                    <a:pt x="3334002" y="1195820"/>
+                  </a:lnTo>
+                  <a:lnTo>
+                    <a:pt x="3256368" y="1178048"/>
+                  </a:lnTo>
+                  <a:lnTo>
+                    <a:pt x="3178734" y="1159919"/>
+                  </a:lnTo>
+                  <a:lnTo>
+                    <a:pt x="3101100" y="1141424"/>
+                  </a:lnTo>
+                  <a:lnTo>
+                    <a:pt x="3023466" y="1122556"/>
+                  </a:lnTo>
+                  <a:lnTo>
+                    <a:pt x="2945832" y="1103307"/>
+                  </a:lnTo>
+                  <a:lnTo>
+                    <a:pt x="2868198" y="1083671"/>
+                  </a:lnTo>
+                  <a:lnTo>
+                    <a:pt x="2790564" y="1063638"/>
+                  </a:lnTo>
+                  <a:lnTo>
+                    <a:pt x="2712930" y="1043202"/>
+                  </a:lnTo>
+                  <a:lnTo>
+                    <a:pt x="2635295" y="1022353"/>
+                  </a:lnTo>
+                  <a:lnTo>
+                    <a:pt x="2557661" y="1001085"/>
+                  </a:lnTo>
+                  <a:lnTo>
+                    <a:pt x="2480027" y="979387"/>
+                  </a:lnTo>
+                  <a:lnTo>
+                    <a:pt x="2402393" y="957252"/>
+                  </a:lnTo>
+                  <a:lnTo>
+                    <a:pt x="2324759" y="934671"/>
+                  </a:lnTo>
+                  <a:lnTo>
+                    <a:pt x="2247125" y="911634"/>
+                  </a:lnTo>
+                  <a:lnTo>
+                    <a:pt x="2169491" y="888133"/>
+                  </a:lnTo>
+                  <a:lnTo>
+                    <a:pt x="2091857" y="864158"/>
+                  </a:lnTo>
+                  <a:lnTo>
+                    <a:pt x="2014223" y="839700"/>
+                  </a:lnTo>
+                  <a:lnTo>
+                    <a:pt x="1936589" y="814749"/>
+                  </a:lnTo>
+                  <a:lnTo>
+                    <a:pt x="1858955" y="789294"/>
+                  </a:lnTo>
+                  <a:lnTo>
+                    <a:pt x="1781321" y="763326"/>
+                  </a:lnTo>
+                  <a:lnTo>
+                    <a:pt x="1703687" y="736835"/>
+                  </a:lnTo>
+                  <a:lnTo>
+                    <a:pt x="1626053" y="709810"/>
+                  </a:lnTo>
+                  <a:lnTo>
+                    <a:pt x="1548419" y="682239"/>
+                  </a:lnTo>
+                  <a:lnTo>
+                    <a:pt x="1470785" y="654113"/>
+                  </a:lnTo>
+                  <a:lnTo>
+                    <a:pt x="1393151" y="625420"/>
+                  </a:lnTo>
+                  <a:lnTo>
+                    <a:pt x="1315517" y="596148"/>
+                  </a:lnTo>
+                  <a:lnTo>
+                    <a:pt x="1237883" y="566286"/>
+                  </a:lnTo>
+                  <a:lnTo>
+                    <a:pt x="1160249" y="535822"/>
+                  </a:lnTo>
+                  <a:lnTo>
+                    <a:pt x="1082615" y="504744"/>
+                  </a:lnTo>
+                  <a:lnTo>
+                    <a:pt x="1004981" y="473039"/>
+                  </a:lnTo>
+                  <a:lnTo>
+                    <a:pt x="927346" y="440695"/>
+                  </a:lnTo>
+                  <a:lnTo>
+                    <a:pt x="849712" y="407699"/>
+                  </a:lnTo>
+                  <a:lnTo>
+                    <a:pt x="772078" y="374038"/>
+                  </a:lnTo>
+                  <a:lnTo>
+                    <a:pt x="694444" y="339697"/>
+                  </a:lnTo>
+                  <a:lnTo>
+                    <a:pt x="616810" y="304665"/>
+                  </a:lnTo>
+                  <a:lnTo>
+                    <a:pt x="539176" y="268926"/>
+                  </a:lnTo>
+                  <a:lnTo>
+                    <a:pt x="461542" y="232467"/>
+                  </a:lnTo>
+                  <a:lnTo>
+                    <a:pt x="383908" y="195272"/>
+                  </a:lnTo>
+                  <a:lnTo>
+                    <a:pt x="306274" y="157328"/>
+                  </a:lnTo>
+                  <a:lnTo>
+                    <a:pt x="228640" y="118618"/>
+                  </a:lnTo>
+                  <a:lnTo>
+                    <a:pt x="151006" y="79128"/>
+                  </a:lnTo>
+                  <a:lnTo>
+                    <a:pt x="73372" y="38842"/>
                   </a:lnTo>
                   <a:lnTo>
                     <a:pt x="0" y="0"/>
@@ -4055,234 +4055,240 @@
           </p:nvSpPr>
           <p:spPr>
             <a:xfrm>
-              <a:off x="2593871" y="1896563"/>
-              <a:ext cx="5594618" cy="3627711"/>
+              <a:off x="2434312" y="1896563"/>
+              <a:ext cx="5754178" cy="3618293"/>
             </a:xfrm>
             <a:custGeom>
               <a:avLst/>
               <a:pathLst>
-                <a:path w="5594618" h="3627711">
+                <a:path w="5754178" h="3618293">
                   <a:moveTo>
                     <a:pt x="0" y="0"/>
                   </a:moveTo>
                   <a:lnTo>
-                    <a:pt x="4967" y="16669"/>
-                  </a:lnTo>
-                  <a:lnTo>
-                    <a:pt x="82601" y="259774"/>
-                  </a:lnTo>
-                  <a:lnTo>
-                    <a:pt x="160235" y="486625"/>
-                  </a:lnTo>
-                  <a:lnTo>
-                    <a:pt x="237869" y="698308"/>
-                  </a:lnTo>
-                  <a:lnTo>
-                    <a:pt x="315503" y="895838"/>
-                  </a:lnTo>
-                  <a:lnTo>
-                    <a:pt x="393137" y="1080161"/>
-                  </a:lnTo>
-                  <a:lnTo>
-                    <a:pt x="470771" y="1252159"/>
-                  </a:lnTo>
-                  <a:lnTo>
-                    <a:pt x="548405" y="1412658"/>
-                  </a:lnTo>
-                  <a:lnTo>
-                    <a:pt x="626039" y="1562426"/>
-                  </a:lnTo>
-                  <a:lnTo>
-                    <a:pt x="703673" y="1702180"/>
-                  </a:lnTo>
-                  <a:lnTo>
-                    <a:pt x="781307" y="1832590"/>
-                  </a:lnTo>
-                  <a:lnTo>
-                    <a:pt x="858941" y="1954281"/>
-                  </a:lnTo>
-                  <a:lnTo>
-                    <a:pt x="936575" y="2067835"/>
-                  </a:lnTo>
-                  <a:lnTo>
-                    <a:pt x="1014210" y="2173797"/>
-                  </a:lnTo>
-                  <a:lnTo>
-                    <a:pt x="1091844" y="2272674"/>
-                  </a:lnTo>
-                  <a:lnTo>
-                    <a:pt x="1169478" y="2364940"/>
-                  </a:lnTo>
-                  <a:lnTo>
-                    <a:pt x="1247112" y="2451037"/>
-                  </a:lnTo>
-                  <a:lnTo>
-                    <a:pt x="1324746" y="2531378"/>
-                  </a:lnTo>
-                  <a:lnTo>
-                    <a:pt x="1402380" y="2606347"/>
-                  </a:lnTo>
-                  <a:lnTo>
-                    <a:pt x="1480014" y="2676303"/>
-                  </a:lnTo>
-                  <a:lnTo>
-                    <a:pt x="1557648" y="2741582"/>
-                  </a:lnTo>
-                  <a:lnTo>
-                    <a:pt x="1635282" y="2802497"/>
-                  </a:lnTo>
-                  <a:lnTo>
-                    <a:pt x="1712916" y="2859338"/>
-                  </a:lnTo>
-                  <a:lnTo>
-                    <a:pt x="1790550" y="2912380"/>
-                  </a:lnTo>
-                  <a:lnTo>
-                    <a:pt x="1868184" y="2961874"/>
-                  </a:lnTo>
-                  <a:lnTo>
-                    <a:pt x="1945818" y="3008060"/>
-                  </a:lnTo>
-                  <a:lnTo>
-                    <a:pt x="2023452" y="3051157"/>
-                  </a:lnTo>
-                  <a:lnTo>
-                    <a:pt x="2101086" y="3091373"/>
-                  </a:lnTo>
-                  <a:lnTo>
-                    <a:pt x="2178720" y="3128900"/>
-                  </a:lnTo>
-                  <a:lnTo>
-                    <a:pt x="2256354" y="3163918"/>
-                  </a:lnTo>
-                  <a:lnTo>
-                    <a:pt x="2333988" y="3196595"/>
-                  </a:lnTo>
-                  <a:lnTo>
-                    <a:pt x="2411622" y="3227087"/>
-                  </a:lnTo>
-                  <a:lnTo>
-                    <a:pt x="2489256" y="3255540"/>
-                  </a:lnTo>
-                  <a:lnTo>
-                    <a:pt x="2566890" y="3282091"/>
-                  </a:lnTo>
-                  <a:lnTo>
-                    <a:pt x="2644524" y="3306866"/>
-                  </a:lnTo>
-                  <a:lnTo>
-                    <a:pt x="2722159" y="3329985"/>
-                  </a:lnTo>
-                  <a:lnTo>
-                    <a:pt x="2799793" y="3351559"/>
-                  </a:lnTo>
-                  <a:lnTo>
-                    <a:pt x="2877427" y="3371689"/>
-                  </a:lnTo>
-                  <a:lnTo>
-                    <a:pt x="2955061" y="3390474"/>
-                  </a:lnTo>
-                  <a:lnTo>
-                    <a:pt x="3032695" y="3408003"/>
-                  </a:lnTo>
-                  <a:lnTo>
-                    <a:pt x="3110329" y="3424360"/>
-                  </a:lnTo>
-                  <a:lnTo>
-                    <a:pt x="3187963" y="3439623"/>
-                  </a:lnTo>
-                  <a:lnTo>
-                    <a:pt x="3265597" y="3453866"/>
-                  </a:lnTo>
-                  <a:lnTo>
-                    <a:pt x="3343231" y="3467156"/>
-                  </a:lnTo>
-                  <a:lnTo>
-                    <a:pt x="3420865" y="3479558"/>
-                  </a:lnTo>
-                  <a:lnTo>
-                    <a:pt x="3498499" y="3491131"/>
-                  </a:lnTo>
-                  <a:lnTo>
-                    <a:pt x="3576133" y="3501930"/>
-                  </a:lnTo>
-                  <a:lnTo>
-                    <a:pt x="3653767" y="3512007"/>
-                  </a:lnTo>
-                  <a:lnTo>
-                    <a:pt x="3731401" y="3521410"/>
-                  </a:lnTo>
-                  <a:lnTo>
-                    <a:pt x="3809035" y="3530184"/>
-                  </a:lnTo>
-                  <a:lnTo>
-                    <a:pt x="3886669" y="3538372"/>
-                  </a:lnTo>
-                  <a:lnTo>
-                    <a:pt x="3964303" y="3546012"/>
-                  </a:lnTo>
-                  <a:lnTo>
-                    <a:pt x="4041937" y="3553142"/>
-                  </a:lnTo>
-                  <a:lnTo>
-                    <a:pt x="4119571" y="3559794"/>
-                  </a:lnTo>
-                  <a:lnTo>
-                    <a:pt x="4197205" y="3566002"/>
-                  </a:lnTo>
-                  <a:lnTo>
-                    <a:pt x="4274839" y="3571795"/>
-                  </a:lnTo>
-                  <a:lnTo>
-                    <a:pt x="4352473" y="3577201"/>
-                  </a:lnTo>
-                  <a:lnTo>
-                    <a:pt x="4430107" y="3582245"/>
-                  </a:lnTo>
-                  <a:lnTo>
-                    <a:pt x="4507742" y="3586952"/>
-                  </a:lnTo>
-                  <a:lnTo>
-                    <a:pt x="4585376" y="3591344"/>
-                  </a:lnTo>
-                  <a:lnTo>
-                    <a:pt x="4663010" y="3595443"/>
-                  </a:lnTo>
-                  <a:lnTo>
-                    <a:pt x="4740644" y="3599267"/>
-                  </a:lnTo>
-                  <a:lnTo>
-                    <a:pt x="4818278" y="3602836"/>
-                  </a:lnTo>
-                  <a:lnTo>
-                    <a:pt x="4895912" y="3606166"/>
-                  </a:lnTo>
-                  <a:lnTo>
-                    <a:pt x="4973546" y="3609274"/>
-                  </a:lnTo>
-                  <a:lnTo>
-                    <a:pt x="5051180" y="3612173"/>
-                  </a:lnTo>
-                  <a:lnTo>
-                    <a:pt x="5128814" y="3614879"/>
-                  </a:lnTo>
-                  <a:lnTo>
-                    <a:pt x="5206448" y="3617404"/>
-                  </a:lnTo>
-                  <a:lnTo>
-                    <a:pt x="5284082" y="3619760"/>
-                  </a:lnTo>
-                  <a:lnTo>
-                    <a:pt x="5361716" y="3621959"/>
-                  </a:lnTo>
-                  <a:lnTo>
-                    <a:pt x="5439350" y="3624010"/>
-                  </a:lnTo>
-                  <a:lnTo>
-                    <a:pt x="5516984" y="3625925"/>
-                  </a:lnTo>
-                  <a:lnTo>
-                    <a:pt x="5594618" y="3627711"/>
+                    <a:pt x="9259" y="28090"/>
+                  </a:lnTo>
+                  <a:lnTo>
+                    <a:pt x="86893" y="249249"/>
+                  </a:lnTo>
+                  <a:lnTo>
+                    <a:pt x="164527" y="456914"/>
+                  </a:lnTo>
+                  <a:lnTo>
+                    <a:pt x="242161" y="651907"/>
+                  </a:lnTo>
+                  <a:lnTo>
+                    <a:pt x="319795" y="835002"/>
+                  </a:lnTo>
+                  <a:lnTo>
+                    <a:pt x="397429" y="1006926"/>
+                  </a:lnTo>
+                  <a:lnTo>
+                    <a:pt x="475063" y="1168359"/>
+                  </a:lnTo>
+                  <a:lnTo>
+                    <a:pt x="552697" y="1319943"/>
+                  </a:lnTo>
+                  <a:lnTo>
+                    <a:pt x="630331" y="1462277"/>
+                  </a:lnTo>
+                  <a:lnTo>
+                    <a:pt x="707965" y="1595926"/>
+                  </a:lnTo>
+                  <a:lnTo>
+                    <a:pt x="785599" y="1721420"/>
+                  </a:lnTo>
+                  <a:lnTo>
+                    <a:pt x="863233" y="1839258"/>
+                  </a:lnTo>
+                  <a:lnTo>
+                    <a:pt x="940867" y="1949905"/>
+                  </a:lnTo>
+                  <a:lnTo>
+                    <a:pt x="1018501" y="2053800"/>
+                  </a:lnTo>
+                  <a:lnTo>
+                    <a:pt x="1096135" y="2151357"/>
+                  </a:lnTo>
+                  <a:lnTo>
+                    <a:pt x="1173769" y="2242961"/>
+                  </a:lnTo>
+                  <a:lnTo>
+                    <a:pt x="1251403" y="2328975"/>
+                  </a:lnTo>
+                  <a:lnTo>
+                    <a:pt x="1329037" y="2409741"/>
+                  </a:lnTo>
+                  <a:lnTo>
+                    <a:pt x="1406671" y="2485579"/>
+                  </a:lnTo>
+                  <a:lnTo>
+                    <a:pt x="1484305" y="2556790"/>
+                  </a:lnTo>
+                  <a:lnTo>
+                    <a:pt x="1561940" y="2623655"/>
+                  </a:lnTo>
+                  <a:lnTo>
+                    <a:pt x="1639574" y="2686441"/>
+                  </a:lnTo>
+                  <a:lnTo>
+                    <a:pt x="1717208" y="2745395"/>
+                  </a:lnTo>
+                  <a:lnTo>
+                    <a:pt x="1794842" y="2800753"/>
+                  </a:lnTo>
+                  <a:lnTo>
+                    <a:pt x="1872476" y="2852733"/>
+                  </a:lnTo>
+                  <a:lnTo>
+                    <a:pt x="1950110" y="2901541"/>
+                  </a:lnTo>
+                  <a:lnTo>
+                    <a:pt x="2027744" y="2947370"/>
+                  </a:lnTo>
+                  <a:lnTo>
+                    <a:pt x="2105378" y="2990404"/>
+                  </a:lnTo>
+                  <a:lnTo>
+                    <a:pt x="2183012" y="3030812"/>
+                  </a:lnTo>
+                  <a:lnTo>
+                    <a:pt x="2260646" y="3068754"/>
+                  </a:lnTo>
+                  <a:lnTo>
+                    <a:pt x="2338280" y="3104381"/>
+                  </a:lnTo>
+                  <a:lnTo>
+                    <a:pt x="2415914" y="3137834"/>
+                  </a:lnTo>
+                  <a:lnTo>
+                    <a:pt x="2493548" y="3169246"/>
+                  </a:lnTo>
+                  <a:lnTo>
+                    <a:pt x="2571182" y="3198742"/>
+                  </a:lnTo>
+                  <a:lnTo>
+                    <a:pt x="2648816" y="3226437"/>
+                  </a:lnTo>
+                  <a:lnTo>
+                    <a:pt x="2726450" y="3252443"/>
+                  </a:lnTo>
+                  <a:lnTo>
+                    <a:pt x="2804084" y="3276862"/>
+                  </a:lnTo>
+                  <a:lnTo>
+                    <a:pt x="2881718" y="3299791"/>
+                  </a:lnTo>
+                  <a:lnTo>
+                    <a:pt x="2959352" y="3321321"/>
+                  </a:lnTo>
+                  <a:lnTo>
+                    <a:pt x="3036986" y="3341537"/>
+                  </a:lnTo>
+                  <a:lnTo>
+                    <a:pt x="3114620" y="3360520"/>
+                  </a:lnTo>
+                  <a:lnTo>
+                    <a:pt x="3192254" y="3378344"/>
+                  </a:lnTo>
+                  <a:lnTo>
+                    <a:pt x="3269889" y="3395081"/>
+                  </a:lnTo>
+                  <a:lnTo>
+                    <a:pt x="3347523" y="3410797"/>
+                  </a:lnTo>
+                  <a:lnTo>
+                    <a:pt x="3425157" y="3425554"/>
+                  </a:lnTo>
+                  <a:lnTo>
+                    <a:pt x="3502791" y="3439410"/>
+                  </a:lnTo>
+                  <a:lnTo>
+                    <a:pt x="3580425" y="3452421"/>
+                  </a:lnTo>
+                  <a:lnTo>
+                    <a:pt x="3658059" y="3464638"/>
+                  </a:lnTo>
+                  <a:lnTo>
+                    <a:pt x="3735693" y="3476109"/>
+                  </a:lnTo>
+                  <a:lnTo>
+                    <a:pt x="3813327" y="3486881"/>
+                  </a:lnTo>
+                  <a:lnTo>
+                    <a:pt x="3890961" y="3496995"/>
+                  </a:lnTo>
+                  <a:lnTo>
+                    <a:pt x="3968595" y="3506492"/>
+                  </a:lnTo>
+                  <a:lnTo>
+                    <a:pt x="4046229" y="3515410"/>
+                  </a:lnTo>
+                  <a:lnTo>
+                    <a:pt x="4123863" y="3523783"/>
+                  </a:lnTo>
+                  <a:lnTo>
+                    <a:pt x="4201497" y="3531646"/>
+                  </a:lnTo>
+                  <a:lnTo>
+                    <a:pt x="4279131" y="3539029"/>
+                  </a:lnTo>
+                  <a:lnTo>
+                    <a:pt x="4356765" y="3545961"/>
+                  </a:lnTo>
+                  <a:lnTo>
+                    <a:pt x="4434399" y="3552471"/>
+                  </a:lnTo>
+                  <a:lnTo>
+                    <a:pt x="4512033" y="3558583"/>
+                  </a:lnTo>
+                  <a:lnTo>
+                    <a:pt x="4589667" y="3564322"/>
+                  </a:lnTo>
+                  <a:lnTo>
+                    <a:pt x="4667301" y="3569711"/>
+                  </a:lnTo>
+                  <a:lnTo>
+                    <a:pt x="4744935" y="3574772"/>
+                  </a:lnTo>
+                  <a:lnTo>
+                    <a:pt x="4822569" y="3579523"/>
+                  </a:lnTo>
+                  <a:lnTo>
+                    <a:pt x="4900203" y="3583985"/>
+                  </a:lnTo>
+                  <a:lnTo>
+                    <a:pt x="4977838" y="3588174"/>
+                  </a:lnTo>
+                  <a:lnTo>
+                    <a:pt x="5055472" y="3592108"/>
+                  </a:lnTo>
+                  <a:lnTo>
+                    <a:pt x="5133106" y="3595801"/>
+                  </a:lnTo>
+                  <a:lnTo>
+                    <a:pt x="5210740" y="3599270"/>
+                  </a:lnTo>
+                  <a:lnTo>
+                    <a:pt x="5288374" y="3602526"/>
+                  </a:lnTo>
+                  <a:lnTo>
+                    <a:pt x="5366008" y="3605584"/>
+                  </a:lnTo>
+                  <a:lnTo>
+                    <a:pt x="5443642" y="3608456"/>
+                  </a:lnTo>
+                  <a:lnTo>
+                    <a:pt x="5521276" y="3611152"/>
+                  </a:lnTo>
+                  <a:lnTo>
+                    <a:pt x="5598910" y="3613684"/>
+                  </a:lnTo>
+                  <a:lnTo>
+                    <a:pt x="5676544" y="3616061"/>
+                  </a:lnTo>
+                  <a:lnTo>
+                    <a:pt x="5754178" y="3618293"/>
                   </a:lnTo>
                 </a:path>
               </a:pathLst>

--- a/docs/plots/carbo/jx_carbo_linsubhr_ratio_hosp3.pptx
+++ b/docs/plots/carbo/jx_carbo_linsubhr_ratio_hosp3.pptx
@@ -3003,497 +3003,497 @@
           <p:spPr>
             <a:xfrm>
               <a:off x="817517" y="1896563"/>
-              <a:ext cx="7370972" cy="3648863"/>
+              <a:ext cx="7370972" cy="3649819"/>
             </a:xfrm>
             <a:custGeom>
               <a:avLst/>
               <a:pathLst>
-                <a:path w="7370972" h="3648863">
+                <a:path w="7370972" h="3649819">
                   <a:moveTo>
-                    <a:pt x="2335110" y="0"/>
+                    <a:pt x="2388750" y="0"/>
                   </a:moveTo>
                   <a:lnTo>
-                    <a:pt x="2402393" y="322580"/>
-                  </a:lnTo>
-                  <a:lnTo>
-                    <a:pt x="2480027" y="657364"/>
-                  </a:lnTo>
-                  <a:lnTo>
-                    <a:pt x="2557661" y="958491"/>
-                  </a:lnTo>
-                  <a:lnTo>
-                    <a:pt x="2635295" y="1229345"/>
-                  </a:lnTo>
-                  <a:lnTo>
-                    <a:pt x="2712930" y="1472968"/>
-                  </a:lnTo>
-                  <a:lnTo>
-                    <a:pt x="2790564" y="1692100"/>
-                  </a:lnTo>
-                  <a:lnTo>
-                    <a:pt x="2868198" y="1889201"/>
-                  </a:lnTo>
-                  <a:lnTo>
-                    <a:pt x="2945832" y="2066487"/>
-                  </a:lnTo>
-                  <a:lnTo>
-                    <a:pt x="3023466" y="2225949"/>
-                  </a:lnTo>
-                  <a:lnTo>
-                    <a:pt x="3101100" y="2369380"/>
-                  </a:lnTo>
-                  <a:lnTo>
-                    <a:pt x="3178734" y="2498392"/>
-                  </a:lnTo>
-                  <a:lnTo>
-                    <a:pt x="3256368" y="2614433"/>
-                  </a:lnTo>
-                  <a:lnTo>
-                    <a:pt x="3334002" y="2718808"/>
-                  </a:lnTo>
-                  <a:lnTo>
-                    <a:pt x="3411636" y="2788646"/>
-                  </a:lnTo>
-                  <a:lnTo>
-                    <a:pt x="3489270" y="2805721"/>
-                  </a:lnTo>
-                  <a:lnTo>
-                    <a:pt x="3566904" y="2822460"/>
-                  </a:lnTo>
-                  <a:lnTo>
-                    <a:pt x="3644538" y="2838867"/>
-                  </a:lnTo>
-                  <a:lnTo>
-                    <a:pt x="3722172" y="2854950"/>
-                  </a:lnTo>
-                  <a:lnTo>
-                    <a:pt x="3799806" y="2870716"/>
-                  </a:lnTo>
-                  <a:lnTo>
-                    <a:pt x="3877440" y="2886169"/>
-                  </a:lnTo>
-                  <a:lnTo>
-                    <a:pt x="3955074" y="2901318"/>
-                  </a:lnTo>
-                  <a:lnTo>
-                    <a:pt x="4032708" y="2916167"/>
-                  </a:lnTo>
-                  <a:lnTo>
-                    <a:pt x="4110342" y="2930722"/>
-                  </a:lnTo>
-                  <a:lnTo>
-                    <a:pt x="4187976" y="2944990"/>
-                  </a:lnTo>
-                  <a:lnTo>
-                    <a:pt x="4265610" y="2958976"/>
-                  </a:lnTo>
-                  <a:lnTo>
-                    <a:pt x="4343244" y="2972685"/>
-                  </a:lnTo>
-                  <a:lnTo>
-                    <a:pt x="4420879" y="2986124"/>
-                  </a:lnTo>
-                  <a:lnTo>
-                    <a:pt x="4498513" y="2999297"/>
-                  </a:lnTo>
-                  <a:lnTo>
-                    <a:pt x="4576147" y="3012209"/>
-                  </a:lnTo>
-                  <a:lnTo>
-                    <a:pt x="4653781" y="3024866"/>
-                  </a:lnTo>
-                  <a:lnTo>
-                    <a:pt x="4731415" y="3037274"/>
-                  </a:lnTo>
-                  <a:lnTo>
-                    <a:pt x="4809049" y="3049436"/>
-                  </a:lnTo>
-                  <a:lnTo>
-                    <a:pt x="4886683" y="3061357"/>
-                  </a:lnTo>
-                  <a:lnTo>
-                    <a:pt x="4964317" y="3073043"/>
-                  </a:lnTo>
-                  <a:lnTo>
-                    <a:pt x="5041951" y="3084498"/>
-                  </a:lnTo>
-                  <a:lnTo>
-                    <a:pt x="5119585" y="3095727"/>
-                  </a:lnTo>
-                  <a:lnTo>
-                    <a:pt x="5197219" y="3106733"/>
-                  </a:lnTo>
-                  <a:lnTo>
-                    <a:pt x="5274853" y="3117523"/>
-                  </a:lnTo>
-                  <a:lnTo>
-                    <a:pt x="5352487" y="3128099"/>
-                  </a:lnTo>
-                  <a:lnTo>
-                    <a:pt x="5430121" y="3138466"/>
-                  </a:lnTo>
-                  <a:lnTo>
-                    <a:pt x="5507755" y="3148628"/>
-                  </a:lnTo>
-                  <a:lnTo>
-                    <a:pt x="5585389" y="3158589"/>
-                  </a:lnTo>
-                  <a:lnTo>
-                    <a:pt x="5663023" y="3168353"/>
-                  </a:lnTo>
-                  <a:lnTo>
-                    <a:pt x="5740657" y="3177924"/>
-                  </a:lnTo>
-                  <a:lnTo>
-                    <a:pt x="5818291" y="3187307"/>
-                  </a:lnTo>
-                  <a:lnTo>
-                    <a:pt x="5895925" y="3196503"/>
-                  </a:lnTo>
-                  <a:lnTo>
-                    <a:pt x="5973559" y="3205518"/>
-                  </a:lnTo>
-                  <a:lnTo>
-                    <a:pt x="6051193" y="3214355"/>
-                  </a:lnTo>
-                  <a:lnTo>
-                    <a:pt x="6128827" y="3223017"/>
-                  </a:lnTo>
-                  <a:lnTo>
-                    <a:pt x="6206462" y="3231508"/>
-                  </a:lnTo>
-                  <a:lnTo>
-                    <a:pt x="6284096" y="3239832"/>
-                  </a:lnTo>
-                  <a:lnTo>
-                    <a:pt x="6361730" y="3247990"/>
-                  </a:lnTo>
-                  <a:lnTo>
-                    <a:pt x="6439364" y="3255988"/>
-                  </a:lnTo>
-                  <a:lnTo>
-                    <a:pt x="6516998" y="3263827"/>
-                  </a:lnTo>
-                  <a:lnTo>
-                    <a:pt x="6594632" y="3271511"/>
-                  </a:lnTo>
-                  <a:lnTo>
-                    <a:pt x="6672266" y="3279044"/>
-                  </a:lnTo>
-                  <a:lnTo>
-                    <a:pt x="6749900" y="3286428"/>
-                  </a:lnTo>
-                  <a:lnTo>
-                    <a:pt x="6827534" y="3293665"/>
-                  </a:lnTo>
-                  <a:lnTo>
-                    <a:pt x="6905168" y="3300760"/>
-                  </a:lnTo>
-                  <a:lnTo>
-                    <a:pt x="6982802" y="3307715"/>
-                  </a:lnTo>
-                  <a:lnTo>
-                    <a:pt x="7060436" y="3314532"/>
-                  </a:lnTo>
-                  <a:lnTo>
-                    <a:pt x="7138070" y="3321214"/>
-                  </a:lnTo>
-                  <a:lnTo>
-                    <a:pt x="7215704" y="3327764"/>
-                  </a:lnTo>
-                  <a:lnTo>
-                    <a:pt x="7293338" y="3334185"/>
-                  </a:lnTo>
-                  <a:lnTo>
-                    <a:pt x="7370972" y="3340479"/>
-                  </a:lnTo>
-                  <a:lnTo>
-                    <a:pt x="7370972" y="3648863"/>
-                  </a:lnTo>
-                  <a:lnTo>
-                    <a:pt x="7293338" y="3648441"/>
-                  </a:lnTo>
-                  <a:lnTo>
-                    <a:pt x="7215704" y="3647971"/>
-                  </a:lnTo>
-                  <a:lnTo>
-                    <a:pt x="7138070" y="3647449"/>
-                  </a:lnTo>
-                  <a:lnTo>
-                    <a:pt x="7060436" y="3646868"/>
-                  </a:lnTo>
-                  <a:lnTo>
-                    <a:pt x="6982802" y="3646223"/>
-                  </a:lnTo>
-                  <a:lnTo>
-                    <a:pt x="6905168" y="3645505"/>
-                  </a:lnTo>
-                  <a:lnTo>
-                    <a:pt x="6827534" y="3644708"/>
-                  </a:lnTo>
-                  <a:lnTo>
-                    <a:pt x="6749900" y="3643821"/>
-                  </a:lnTo>
-                  <a:lnTo>
-                    <a:pt x="6672266" y="3642834"/>
-                  </a:lnTo>
-                  <a:lnTo>
-                    <a:pt x="6594632" y="3641738"/>
-                  </a:lnTo>
-                  <a:lnTo>
-                    <a:pt x="6516998" y="3640519"/>
-                  </a:lnTo>
-                  <a:lnTo>
-                    <a:pt x="6439364" y="3639164"/>
-                  </a:lnTo>
-                  <a:lnTo>
-                    <a:pt x="6361730" y="3637658"/>
-                  </a:lnTo>
-                  <a:lnTo>
-                    <a:pt x="6284096" y="3635983"/>
-                  </a:lnTo>
-                  <a:lnTo>
-                    <a:pt x="6206462" y="3634120"/>
-                  </a:lnTo>
-                  <a:lnTo>
-                    <a:pt x="6128827" y="3632050"/>
-                  </a:lnTo>
-                  <a:lnTo>
-                    <a:pt x="6051193" y="3629748"/>
-                  </a:lnTo>
-                  <a:lnTo>
-                    <a:pt x="5973559" y="3627189"/>
-                  </a:lnTo>
-                  <a:lnTo>
-                    <a:pt x="5895925" y="3624344"/>
-                  </a:lnTo>
-                  <a:lnTo>
-                    <a:pt x="5818291" y="3621181"/>
-                  </a:lnTo>
-                  <a:lnTo>
-                    <a:pt x="5740657" y="3617665"/>
-                  </a:lnTo>
-                  <a:lnTo>
-                    <a:pt x="5663023" y="3613755"/>
-                  </a:lnTo>
-                  <a:lnTo>
-                    <a:pt x="5585389" y="3609409"/>
-                  </a:lnTo>
-                  <a:lnTo>
-                    <a:pt x="5507755" y="3604577"/>
-                  </a:lnTo>
-                  <a:lnTo>
-                    <a:pt x="5430121" y="3599204"/>
-                  </a:lnTo>
-                  <a:lnTo>
-                    <a:pt x="5352487" y="3593231"/>
-                  </a:lnTo>
-                  <a:lnTo>
-                    <a:pt x="5274853" y="3586591"/>
-                  </a:lnTo>
-                  <a:lnTo>
-                    <a:pt x="5197219" y="3579208"/>
-                  </a:lnTo>
-                  <a:lnTo>
-                    <a:pt x="5119585" y="3571000"/>
-                  </a:lnTo>
-                  <a:lnTo>
-                    <a:pt x="5041951" y="3561875"/>
-                  </a:lnTo>
-                  <a:lnTo>
-                    <a:pt x="4964317" y="3551729"/>
-                  </a:lnTo>
-                  <a:lnTo>
-                    <a:pt x="4886683" y="3540450"/>
-                  </a:lnTo>
-                  <a:lnTo>
-                    <a:pt x="4809049" y="3527910"/>
-                  </a:lnTo>
-                  <a:lnTo>
-                    <a:pt x="4731415" y="3513969"/>
-                  </a:lnTo>
-                  <a:lnTo>
-                    <a:pt x="4653781" y="3498469"/>
-                  </a:lnTo>
-                  <a:lnTo>
-                    <a:pt x="4576147" y="3481237"/>
-                  </a:lnTo>
-                  <a:lnTo>
-                    <a:pt x="4498513" y="3462079"/>
-                  </a:lnTo>
-                  <a:lnTo>
-                    <a:pt x="4420879" y="3440779"/>
-                  </a:lnTo>
-                  <a:lnTo>
-                    <a:pt x="4343244" y="3417099"/>
-                  </a:lnTo>
-                  <a:lnTo>
-                    <a:pt x="4265610" y="3390772"/>
-                  </a:lnTo>
-                  <a:lnTo>
-                    <a:pt x="4187976" y="3361503"/>
-                  </a:lnTo>
-                  <a:lnTo>
-                    <a:pt x="4110342" y="3328962"/>
-                  </a:lnTo>
-                  <a:lnTo>
-                    <a:pt x="4032708" y="3292784"/>
-                  </a:lnTo>
-                  <a:lnTo>
-                    <a:pt x="3955074" y="3252562"/>
-                  </a:lnTo>
-                  <a:lnTo>
-                    <a:pt x="3877440" y="3207844"/>
-                  </a:lnTo>
-                  <a:lnTo>
-                    <a:pt x="3799806" y="3158129"/>
-                  </a:lnTo>
-                  <a:lnTo>
-                    <a:pt x="3722172" y="3102857"/>
-                  </a:lnTo>
-                  <a:lnTo>
-                    <a:pt x="3644538" y="3041407"/>
-                  </a:lnTo>
-                  <a:lnTo>
-                    <a:pt x="3566904" y="2973089"/>
-                  </a:lnTo>
-                  <a:lnTo>
-                    <a:pt x="3489270" y="2897134"/>
-                  </a:lnTo>
-                  <a:lnTo>
-                    <a:pt x="3411636" y="2812690"/>
-                  </a:lnTo>
-                  <a:lnTo>
-                    <a:pt x="3334002" y="2771225"/>
-                  </a:lnTo>
-                  <a:lnTo>
-                    <a:pt x="3256368" y="2753454"/>
-                  </a:lnTo>
-                  <a:lnTo>
-                    <a:pt x="3178734" y="2735325"/>
-                  </a:lnTo>
-                  <a:lnTo>
-                    <a:pt x="3101100" y="2716830"/>
-                  </a:lnTo>
-                  <a:lnTo>
-                    <a:pt x="3023466" y="2697961"/>
-                  </a:lnTo>
-                  <a:lnTo>
-                    <a:pt x="2945832" y="2678713"/>
-                  </a:lnTo>
-                  <a:lnTo>
-                    <a:pt x="2868198" y="2659077"/>
-                  </a:lnTo>
-                  <a:lnTo>
-                    <a:pt x="2790564" y="2639044"/>
-                  </a:lnTo>
-                  <a:lnTo>
-                    <a:pt x="2712930" y="2618608"/>
-                  </a:lnTo>
-                  <a:lnTo>
-                    <a:pt x="2635295" y="2597759"/>
-                  </a:lnTo>
-                  <a:lnTo>
-                    <a:pt x="2557661" y="2576491"/>
-                  </a:lnTo>
-                  <a:lnTo>
-                    <a:pt x="2480027" y="2554793"/>
-                  </a:lnTo>
-                  <a:lnTo>
-                    <a:pt x="2402393" y="2532658"/>
-                  </a:lnTo>
-                  <a:lnTo>
-                    <a:pt x="2324759" y="2510077"/>
-                  </a:lnTo>
-                  <a:lnTo>
-                    <a:pt x="2247125" y="2487040"/>
-                  </a:lnTo>
-                  <a:lnTo>
-                    <a:pt x="2169491" y="2463539"/>
-                  </a:lnTo>
-                  <a:lnTo>
-                    <a:pt x="2091857" y="2439564"/>
-                  </a:lnTo>
-                  <a:lnTo>
-                    <a:pt x="2014223" y="2415106"/>
-                  </a:lnTo>
-                  <a:lnTo>
-                    <a:pt x="1936589" y="2390155"/>
-                  </a:lnTo>
-                  <a:lnTo>
-                    <a:pt x="1858955" y="2364700"/>
-                  </a:lnTo>
-                  <a:lnTo>
-                    <a:pt x="1781321" y="2338732"/>
-                  </a:lnTo>
-                  <a:lnTo>
-                    <a:pt x="1703687" y="2312241"/>
-                  </a:lnTo>
-                  <a:lnTo>
-                    <a:pt x="1626053" y="2285216"/>
-                  </a:lnTo>
-                  <a:lnTo>
-                    <a:pt x="1548419" y="2257645"/>
-                  </a:lnTo>
-                  <a:lnTo>
-                    <a:pt x="1470785" y="2229519"/>
-                  </a:lnTo>
-                  <a:lnTo>
-                    <a:pt x="1393151" y="2200826"/>
-                  </a:lnTo>
-                  <a:lnTo>
-                    <a:pt x="1315517" y="2171554"/>
-                  </a:lnTo>
-                  <a:lnTo>
-                    <a:pt x="1237883" y="2141692"/>
-                  </a:lnTo>
-                  <a:lnTo>
-                    <a:pt x="1160249" y="2111228"/>
-                  </a:lnTo>
-                  <a:lnTo>
-                    <a:pt x="1082615" y="2080150"/>
-                  </a:lnTo>
-                  <a:lnTo>
-                    <a:pt x="1004981" y="2048445"/>
-                  </a:lnTo>
-                  <a:lnTo>
-                    <a:pt x="927346" y="2016101"/>
-                  </a:lnTo>
-                  <a:lnTo>
-                    <a:pt x="849712" y="1983105"/>
-                  </a:lnTo>
-                  <a:lnTo>
-                    <a:pt x="772078" y="1949444"/>
-                  </a:lnTo>
-                  <a:lnTo>
-                    <a:pt x="694444" y="1915103"/>
-                  </a:lnTo>
-                  <a:lnTo>
-                    <a:pt x="616810" y="1880071"/>
-                  </a:lnTo>
-                  <a:lnTo>
-                    <a:pt x="539176" y="1844332"/>
-                  </a:lnTo>
-                  <a:lnTo>
-                    <a:pt x="461542" y="1807873"/>
-                  </a:lnTo>
-                  <a:lnTo>
-                    <a:pt x="383908" y="1770678"/>
-                  </a:lnTo>
-                  <a:lnTo>
-                    <a:pt x="306274" y="1732734"/>
-                  </a:lnTo>
-                  <a:lnTo>
-                    <a:pt x="228640" y="1694024"/>
-                  </a:lnTo>
-                  <a:lnTo>
-                    <a:pt x="151006" y="1654534"/>
-                  </a:lnTo>
-                  <a:lnTo>
-                    <a:pt x="73372" y="1614248"/>
-                  </a:lnTo>
-                  <a:lnTo>
-                    <a:pt x="0" y="1575405"/>
+                    <a:pt x="2402393" y="74269"/>
+                  </a:lnTo>
+                  <a:lnTo>
+                    <a:pt x="2480027" y="452232"/>
+                  </a:lnTo>
+                  <a:lnTo>
+                    <a:pt x="2557661" y="790273"/>
+                  </a:lnTo>
+                  <a:lnTo>
+                    <a:pt x="2635295" y="1092609"/>
+                  </a:lnTo>
+                  <a:lnTo>
+                    <a:pt x="2712930" y="1363011"/>
+                  </a:lnTo>
+                  <a:lnTo>
+                    <a:pt x="2790564" y="1604851"/>
+                  </a:lnTo>
+                  <a:lnTo>
+                    <a:pt x="2868198" y="1821148"/>
+                  </a:lnTo>
+                  <a:lnTo>
+                    <a:pt x="2945832" y="2014598"/>
+                  </a:lnTo>
+                  <a:lnTo>
+                    <a:pt x="3023466" y="2187616"/>
+                  </a:lnTo>
+                  <a:lnTo>
+                    <a:pt x="3101100" y="2342358"/>
+                  </a:lnTo>
+                  <a:lnTo>
+                    <a:pt x="3178734" y="2480756"/>
+                  </a:lnTo>
+                  <a:lnTo>
+                    <a:pt x="3256368" y="2604536"/>
+                  </a:lnTo>
+                  <a:lnTo>
+                    <a:pt x="3334002" y="2715241"/>
+                  </a:lnTo>
+                  <a:lnTo>
+                    <a:pt x="3411636" y="2790575"/>
+                  </a:lnTo>
+                  <a:lnTo>
+                    <a:pt x="3489270" y="2813349"/>
+                  </a:lnTo>
+                  <a:lnTo>
+                    <a:pt x="3566904" y="2835521"/>
+                  </a:lnTo>
+                  <a:lnTo>
+                    <a:pt x="3644538" y="2857108"/>
+                  </a:lnTo>
+                  <a:lnTo>
+                    <a:pt x="3722172" y="2878124"/>
+                  </a:lnTo>
+                  <a:lnTo>
+                    <a:pt x="3799806" y="2898585"/>
+                  </a:lnTo>
+                  <a:lnTo>
+                    <a:pt x="3877440" y="2918505"/>
+                  </a:lnTo>
+                  <a:lnTo>
+                    <a:pt x="3955074" y="2937900"/>
+                  </a:lnTo>
+                  <a:lnTo>
+                    <a:pt x="4032708" y="2956782"/>
+                  </a:lnTo>
+                  <a:lnTo>
+                    <a:pt x="4110342" y="2975165"/>
+                  </a:lnTo>
+                  <a:lnTo>
+                    <a:pt x="4187976" y="2993062"/>
+                  </a:lnTo>
+                  <a:lnTo>
+                    <a:pt x="4265610" y="3010487"/>
+                  </a:lnTo>
+                  <a:lnTo>
+                    <a:pt x="4343244" y="3027451"/>
+                  </a:lnTo>
+                  <a:lnTo>
+                    <a:pt x="4420879" y="3043967"/>
+                  </a:lnTo>
+                  <a:lnTo>
+                    <a:pt x="4498513" y="3060047"/>
+                  </a:lnTo>
+                  <a:lnTo>
+                    <a:pt x="4576147" y="3075702"/>
+                  </a:lnTo>
+                  <a:lnTo>
+                    <a:pt x="4653781" y="3090944"/>
+                  </a:lnTo>
+                  <a:lnTo>
+                    <a:pt x="4731415" y="3105782"/>
+                  </a:lnTo>
+                  <a:lnTo>
+                    <a:pt x="4809049" y="3120229"/>
+                  </a:lnTo>
+                  <a:lnTo>
+                    <a:pt x="4886683" y="3134294"/>
+                  </a:lnTo>
+                  <a:lnTo>
+                    <a:pt x="4964317" y="3147988"/>
+                  </a:lnTo>
+                  <a:lnTo>
+                    <a:pt x="5041951" y="3161320"/>
+                  </a:lnTo>
+                  <a:lnTo>
+                    <a:pt x="5119585" y="3174299"/>
+                  </a:lnTo>
+                  <a:lnTo>
+                    <a:pt x="5197219" y="3186936"/>
+                  </a:lnTo>
+                  <a:lnTo>
+                    <a:pt x="5274853" y="3199239"/>
+                  </a:lnTo>
+                  <a:lnTo>
+                    <a:pt x="5352487" y="3211217"/>
+                  </a:lnTo>
+                  <a:lnTo>
+                    <a:pt x="5430121" y="3222879"/>
+                  </a:lnTo>
+                  <a:lnTo>
+                    <a:pt x="5507755" y="3234232"/>
+                  </a:lnTo>
+                  <a:lnTo>
+                    <a:pt x="5585389" y="3245285"/>
+                  </a:lnTo>
+                  <a:lnTo>
+                    <a:pt x="5663023" y="3256047"/>
+                  </a:lnTo>
+                  <a:lnTo>
+                    <a:pt x="5740657" y="3266524"/>
+                  </a:lnTo>
+                  <a:lnTo>
+                    <a:pt x="5818291" y="3276724"/>
+                  </a:lnTo>
+                  <a:lnTo>
+                    <a:pt x="5895925" y="3286655"/>
+                  </a:lnTo>
+                  <a:lnTo>
+                    <a:pt x="5973559" y="3296324"/>
+                  </a:lnTo>
+                  <a:lnTo>
+                    <a:pt x="6051193" y="3305737"/>
+                  </a:lnTo>
+                  <a:lnTo>
+                    <a:pt x="6128827" y="3314902"/>
+                  </a:lnTo>
+                  <a:lnTo>
+                    <a:pt x="6206462" y="3323824"/>
+                  </a:lnTo>
+                  <a:lnTo>
+                    <a:pt x="6284096" y="3332511"/>
+                  </a:lnTo>
+                  <a:lnTo>
+                    <a:pt x="6361730" y="3340968"/>
+                  </a:lnTo>
+                  <a:lnTo>
+                    <a:pt x="6439364" y="3349201"/>
+                  </a:lnTo>
+                  <a:lnTo>
+                    <a:pt x="6516998" y="3357218"/>
+                  </a:lnTo>
+                  <a:lnTo>
+                    <a:pt x="6594632" y="3365022"/>
+                  </a:lnTo>
+                  <a:lnTo>
+                    <a:pt x="6672266" y="3372621"/>
+                  </a:lnTo>
+                  <a:lnTo>
+                    <a:pt x="6749900" y="3380018"/>
+                  </a:lnTo>
+                  <a:lnTo>
+                    <a:pt x="6827534" y="3387220"/>
+                  </a:lnTo>
+                  <a:lnTo>
+                    <a:pt x="6905168" y="3394232"/>
+                  </a:lnTo>
+                  <a:lnTo>
+                    <a:pt x="6982802" y="3401059"/>
+                  </a:lnTo>
+                  <a:lnTo>
+                    <a:pt x="7060436" y="3407705"/>
+                  </a:lnTo>
+                  <a:lnTo>
+                    <a:pt x="7138070" y="3414176"/>
+                  </a:lnTo>
+                  <a:lnTo>
+                    <a:pt x="7215704" y="3420475"/>
+                  </a:lnTo>
+                  <a:lnTo>
+                    <a:pt x="7293338" y="3426609"/>
+                  </a:lnTo>
+                  <a:lnTo>
+                    <a:pt x="7370972" y="3432580"/>
+                  </a:lnTo>
+                  <a:lnTo>
+                    <a:pt x="7370972" y="3649819"/>
+                  </a:lnTo>
+                  <a:lnTo>
+                    <a:pt x="7293338" y="3649485"/>
+                  </a:lnTo>
+                  <a:lnTo>
+                    <a:pt x="7215704" y="3649112"/>
+                  </a:lnTo>
+                  <a:lnTo>
+                    <a:pt x="7138070" y="3648695"/>
+                  </a:lnTo>
+                  <a:lnTo>
+                    <a:pt x="7060436" y="3648229"/>
+                  </a:lnTo>
+                  <a:lnTo>
+                    <a:pt x="6982802" y="3647707"/>
+                  </a:lnTo>
+                  <a:lnTo>
+                    <a:pt x="6905168" y="3647124"/>
+                  </a:lnTo>
+                  <a:lnTo>
+                    <a:pt x="6827534" y="3646473"/>
+                  </a:lnTo>
+                  <a:lnTo>
+                    <a:pt x="6749900" y="3645744"/>
+                  </a:lnTo>
+                  <a:lnTo>
+                    <a:pt x="6672266" y="3644929"/>
+                  </a:lnTo>
+                  <a:lnTo>
+                    <a:pt x="6594632" y="3644018"/>
+                  </a:lnTo>
+                  <a:lnTo>
+                    <a:pt x="6516998" y="3643000"/>
+                  </a:lnTo>
+                  <a:lnTo>
+                    <a:pt x="6439364" y="3641861"/>
+                  </a:lnTo>
+                  <a:lnTo>
+                    <a:pt x="6361730" y="3640587"/>
+                  </a:lnTo>
+                  <a:lnTo>
+                    <a:pt x="6284096" y="3639163"/>
+                  </a:lnTo>
+                  <a:lnTo>
+                    <a:pt x="6206462" y="3637571"/>
+                  </a:lnTo>
+                  <a:lnTo>
+                    <a:pt x="6128827" y="3635792"/>
+                  </a:lnTo>
+                  <a:lnTo>
+                    <a:pt x="6051193" y="3633801"/>
+                  </a:lnTo>
+                  <a:lnTo>
+                    <a:pt x="5973559" y="3631576"/>
+                  </a:lnTo>
+                  <a:lnTo>
+                    <a:pt x="5895925" y="3629088"/>
+                  </a:lnTo>
+                  <a:lnTo>
+                    <a:pt x="5818291" y="3626306"/>
+                  </a:lnTo>
+                  <a:lnTo>
+                    <a:pt x="5740657" y="3623196"/>
+                  </a:lnTo>
+                  <a:lnTo>
+                    <a:pt x="5663023" y="3619718"/>
+                  </a:lnTo>
+                  <a:lnTo>
+                    <a:pt x="5585389" y="3615830"/>
+                  </a:lnTo>
+                  <a:lnTo>
+                    <a:pt x="5507755" y="3611482"/>
+                  </a:lnTo>
+                  <a:lnTo>
+                    <a:pt x="5430121" y="3606621"/>
+                  </a:lnTo>
+                  <a:lnTo>
+                    <a:pt x="5352487" y="3601186"/>
+                  </a:lnTo>
+                  <a:lnTo>
+                    <a:pt x="5274853" y="3595109"/>
+                  </a:lnTo>
+                  <a:lnTo>
+                    <a:pt x="5197219" y="3588314"/>
+                  </a:lnTo>
+                  <a:lnTo>
+                    <a:pt x="5119585" y="3580717"/>
+                  </a:lnTo>
+                  <a:lnTo>
+                    <a:pt x="5041951" y="3572223"/>
+                  </a:lnTo>
+                  <a:lnTo>
+                    <a:pt x="4964317" y="3562725"/>
+                  </a:lnTo>
+                  <a:lnTo>
+                    <a:pt x="4886683" y="3552106"/>
+                  </a:lnTo>
+                  <a:lnTo>
+                    <a:pt x="4809049" y="3540233"/>
+                  </a:lnTo>
+                  <a:lnTo>
+                    <a:pt x="4731415" y="3526958"/>
+                  </a:lnTo>
+                  <a:lnTo>
+                    <a:pt x="4653781" y="3512114"/>
+                  </a:lnTo>
+                  <a:lnTo>
+                    <a:pt x="4576147" y="3495518"/>
+                  </a:lnTo>
+                  <a:lnTo>
+                    <a:pt x="4498513" y="3476962"/>
+                  </a:lnTo>
+                  <a:lnTo>
+                    <a:pt x="4420879" y="3456214"/>
+                  </a:lnTo>
+                  <a:lnTo>
+                    <a:pt x="4343244" y="3433016"/>
+                  </a:lnTo>
+                  <a:lnTo>
+                    <a:pt x="4265610" y="3407079"/>
+                  </a:lnTo>
+                  <a:lnTo>
+                    <a:pt x="4187976" y="3378078"/>
+                  </a:lnTo>
+                  <a:lnTo>
+                    <a:pt x="4110342" y="3345652"/>
+                  </a:lnTo>
+                  <a:lnTo>
+                    <a:pt x="4032708" y="3309397"/>
+                  </a:lnTo>
+                  <a:lnTo>
+                    <a:pt x="3955074" y="3268860"/>
+                  </a:lnTo>
+                  <a:lnTo>
+                    <a:pt x="3877440" y="3223536"/>
+                  </a:lnTo>
+                  <a:lnTo>
+                    <a:pt x="3799806" y="3172859"/>
+                  </a:lnTo>
+                  <a:lnTo>
+                    <a:pt x="3722172" y="3116197"/>
+                  </a:lnTo>
+                  <a:lnTo>
+                    <a:pt x="3644538" y="3052844"/>
+                  </a:lnTo>
+                  <a:lnTo>
+                    <a:pt x="3566904" y="2982009"/>
+                  </a:lnTo>
+                  <a:lnTo>
+                    <a:pt x="3489270" y="2902808"/>
+                  </a:lnTo>
+                  <a:lnTo>
+                    <a:pt x="3411636" y="2814254"/>
+                  </a:lnTo>
+                  <a:lnTo>
+                    <a:pt x="3334002" y="2767183"/>
+                  </a:lnTo>
+                  <a:lnTo>
+                    <a:pt x="3256368" y="2743157"/>
+                  </a:lnTo>
+                  <a:lnTo>
+                    <a:pt x="3178734" y="2718478"/>
+                  </a:lnTo>
+                  <a:lnTo>
+                    <a:pt x="3101100" y="2693130"/>
+                  </a:lnTo>
+                  <a:lnTo>
+                    <a:pt x="3023466" y="2667094"/>
+                  </a:lnTo>
+                  <a:lnTo>
+                    <a:pt x="2945832" y="2640351"/>
+                  </a:lnTo>
+                  <a:lnTo>
+                    <a:pt x="2868198" y="2612883"/>
+                  </a:lnTo>
+                  <a:lnTo>
+                    <a:pt x="2790564" y="2584670"/>
+                  </a:lnTo>
+                  <a:lnTo>
+                    <a:pt x="2712930" y="2555691"/>
+                  </a:lnTo>
+                  <a:lnTo>
+                    <a:pt x="2635295" y="2525926"/>
+                  </a:lnTo>
+                  <a:lnTo>
+                    <a:pt x="2557661" y="2495353"/>
+                  </a:lnTo>
+                  <a:lnTo>
+                    <a:pt x="2480027" y="2463950"/>
+                  </a:lnTo>
+                  <a:lnTo>
+                    <a:pt x="2402393" y="2431695"/>
+                  </a:lnTo>
+                  <a:lnTo>
+                    <a:pt x="2324759" y="2398566"/>
+                  </a:lnTo>
+                  <a:lnTo>
+                    <a:pt x="2247125" y="2364537"/>
+                  </a:lnTo>
+                  <a:lnTo>
+                    <a:pt x="2169491" y="2329584"/>
+                  </a:lnTo>
+                  <a:lnTo>
+                    <a:pt x="2091857" y="2293684"/>
+                  </a:lnTo>
+                  <a:lnTo>
+                    <a:pt x="2014223" y="2256809"/>
+                  </a:lnTo>
+                  <a:lnTo>
+                    <a:pt x="1936589" y="2218934"/>
+                  </a:lnTo>
+                  <a:lnTo>
+                    <a:pt x="1858955" y="2180031"/>
+                  </a:lnTo>
+                  <a:lnTo>
+                    <a:pt x="1781321" y="2140072"/>
+                  </a:lnTo>
+                  <a:lnTo>
+                    <a:pt x="1703687" y="2099029"/>
+                  </a:lnTo>
+                  <a:lnTo>
+                    <a:pt x="1626053" y="2056872"/>
+                  </a:lnTo>
+                  <a:lnTo>
+                    <a:pt x="1548419" y="2013572"/>
+                  </a:lnTo>
+                  <a:lnTo>
+                    <a:pt x="1470785" y="1969096"/>
+                  </a:lnTo>
+                  <a:lnTo>
+                    <a:pt x="1393151" y="1923414"/>
+                  </a:lnTo>
+                  <a:lnTo>
+                    <a:pt x="1315517" y="1876492"/>
+                  </a:lnTo>
+                  <a:lnTo>
+                    <a:pt x="1237883" y="1828297"/>
+                  </a:lnTo>
+                  <a:lnTo>
+                    <a:pt x="1160249" y="1778794"/>
+                  </a:lnTo>
+                  <a:lnTo>
+                    <a:pt x="1082615" y="1727948"/>
+                  </a:lnTo>
+                  <a:lnTo>
+                    <a:pt x="1004981" y="1675723"/>
+                  </a:lnTo>
+                  <a:lnTo>
+                    <a:pt x="927346" y="1622080"/>
+                  </a:lnTo>
+                  <a:lnTo>
+                    <a:pt x="849712" y="1566981"/>
+                  </a:lnTo>
+                  <a:lnTo>
+                    <a:pt x="772078" y="1510388"/>
+                  </a:lnTo>
+                  <a:lnTo>
+                    <a:pt x="694444" y="1452259"/>
+                  </a:lnTo>
+                  <a:lnTo>
+                    <a:pt x="616810" y="1392552"/>
+                  </a:lnTo>
+                  <a:lnTo>
+                    <a:pt x="539176" y="1331226"/>
+                  </a:lnTo>
+                  <a:lnTo>
+                    <a:pt x="461542" y="1268235"/>
+                  </a:lnTo>
+                  <a:lnTo>
+                    <a:pt x="383908" y="1203535"/>
+                  </a:lnTo>
+                  <a:lnTo>
+                    <a:pt x="306274" y="1137080"/>
+                  </a:lnTo>
+                  <a:lnTo>
+                    <a:pt x="228640" y="1068821"/>
+                  </a:lnTo>
+                  <a:lnTo>
+                    <a:pt x="151006" y="998710"/>
+                  </a:lnTo>
+                  <a:lnTo>
+                    <a:pt x="73372" y="926697"/>
+                  </a:lnTo>
+                  <a:lnTo>
+                    <a:pt x="0" y="856790"/>
                   </a:lnTo>
                   <a:close/>
                 </a:path>
@@ -3519,210 +3519,210 @@
           </p:nvSpPr>
           <p:spPr>
             <a:xfrm>
-              <a:off x="3152628" y="1896563"/>
-              <a:ext cx="5035862" cy="3340479"/>
+              <a:off x="3206267" y="1896563"/>
+              <a:ext cx="4982222" cy="3432580"/>
             </a:xfrm>
             <a:custGeom>
               <a:avLst/>
               <a:pathLst>
-                <a:path w="5035862" h="3340479">
+                <a:path w="4982222" h="3432580">
                   <a:moveTo>
                     <a:pt x="0" y="0"/>
                   </a:moveTo>
                   <a:lnTo>
-                    <a:pt x="67283" y="322580"/>
-                  </a:lnTo>
-                  <a:lnTo>
-                    <a:pt x="144917" y="657364"/>
-                  </a:lnTo>
-                  <a:lnTo>
-                    <a:pt x="222551" y="958491"/>
-                  </a:lnTo>
-                  <a:lnTo>
-                    <a:pt x="300185" y="1229345"/>
-                  </a:lnTo>
-                  <a:lnTo>
-                    <a:pt x="377819" y="1472968"/>
-                  </a:lnTo>
-                  <a:lnTo>
-                    <a:pt x="455453" y="1692100"/>
-                  </a:lnTo>
-                  <a:lnTo>
-                    <a:pt x="533087" y="1889201"/>
-                  </a:lnTo>
-                  <a:lnTo>
-                    <a:pt x="610721" y="2066487"/>
-                  </a:lnTo>
-                  <a:lnTo>
-                    <a:pt x="688356" y="2225949"/>
-                  </a:lnTo>
-                  <a:lnTo>
-                    <a:pt x="765990" y="2369380"/>
-                  </a:lnTo>
-                  <a:lnTo>
-                    <a:pt x="843624" y="2498392"/>
-                  </a:lnTo>
-                  <a:lnTo>
-                    <a:pt x="921258" y="2614433"/>
-                  </a:lnTo>
-                  <a:lnTo>
-                    <a:pt x="998892" y="2718808"/>
-                  </a:lnTo>
-                  <a:lnTo>
-                    <a:pt x="1076526" y="2788646"/>
-                  </a:lnTo>
-                  <a:lnTo>
-                    <a:pt x="1154160" y="2805721"/>
-                  </a:lnTo>
-                  <a:lnTo>
-                    <a:pt x="1231794" y="2822460"/>
-                  </a:lnTo>
-                  <a:lnTo>
-                    <a:pt x="1309428" y="2838867"/>
-                  </a:lnTo>
-                  <a:lnTo>
-                    <a:pt x="1387062" y="2854950"/>
-                  </a:lnTo>
-                  <a:lnTo>
-                    <a:pt x="1464696" y="2870716"/>
-                  </a:lnTo>
-                  <a:lnTo>
-                    <a:pt x="1542330" y="2886169"/>
-                  </a:lnTo>
-                  <a:lnTo>
-                    <a:pt x="1619964" y="2901318"/>
-                  </a:lnTo>
-                  <a:lnTo>
-                    <a:pt x="1697598" y="2916167"/>
-                  </a:lnTo>
-                  <a:lnTo>
-                    <a:pt x="1775232" y="2930722"/>
-                  </a:lnTo>
-                  <a:lnTo>
-                    <a:pt x="1852866" y="2944990"/>
-                  </a:lnTo>
-                  <a:lnTo>
-                    <a:pt x="1930500" y="2958976"/>
-                  </a:lnTo>
-                  <a:lnTo>
-                    <a:pt x="2008134" y="2972685"/>
-                  </a:lnTo>
-                  <a:lnTo>
-                    <a:pt x="2085768" y="2986124"/>
-                  </a:lnTo>
-                  <a:lnTo>
-                    <a:pt x="2163402" y="2999297"/>
-                  </a:lnTo>
-                  <a:lnTo>
-                    <a:pt x="2241036" y="3012209"/>
-                  </a:lnTo>
-                  <a:lnTo>
-                    <a:pt x="2318670" y="3024866"/>
-                  </a:lnTo>
-                  <a:lnTo>
-                    <a:pt x="2396305" y="3037274"/>
-                  </a:lnTo>
-                  <a:lnTo>
-                    <a:pt x="2473939" y="3049436"/>
-                  </a:lnTo>
-                  <a:lnTo>
-                    <a:pt x="2551573" y="3061357"/>
-                  </a:lnTo>
-                  <a:lnTo>
-                    <a:pt x="2629207" y="3073043"/>
-                  </a:lnTo>
-                  <a:lnTo>
-                    <a:pt x="2706841" y="3084498"/>
-                  </a:lnTo>
-                  <a:lnTo>
-                    <a:pt x="2784475" y="3095727"/>
-                  </a:lnTo>
-                  <a:lnTo>
-                    <a:pt x="2862109" y="3106733"/>
-                  </a:lnTo>
-                  <a:lnTo>
-                    <a:pt x="2939743" y="3117523"/>
-                  </a:lnTo>
-                  <a:lnTo>
-                    <a:pt x="3017377" y="3128099"/>
-                  </a:lnTo>
-                  <a:lnTo>
-                    <a:pt x="3095011" y="3138466"/>
-                  </a:lnTo>
-                  <a:lnTo>
-                    <a:pt x="3172645" y="3148628"/>
-                  </a:lnTo>
-                  <a:lnTo>
-                    <a:pt x="3250279" y="3158589"/>
-                  </a:lnTo>
-                  <a:lnTo>
-                    <a:pt x="3327913" y="3168353"/>
-                  </a:lnTo>
-                  <a:lnTo>
-                    <a:pt x="3405547" y="3177924"/>
-                  </a:lnTo>
-                  <a:lnTo>
-                    <a:pt x="3483181" y="3187307"/>
-                  </a:lnTo>
-                  <a:lnTo>
-                    <a:pt x="3560815" y="3196503"/>
-                  </a:lnTo>
-                  <a:lnTo>
-                    <a:pt x="3638449" y="3205518"/>
-                  </a:lnTo>
-                  <a:lnTo>
-                    <a:pt x="3716083" y="3214355"/>
-                  </a:lnTo>
-                  <a:lnTo>
-                    <a:pt x="3793717" y="3223017"/>
-                  </a:lnTo>
-                  <a:lnTo>
-                    <a:pt x="3871351" y="3231508"/>
-                  </a:lnTo>
-                  <a:lnTo>
-                    <a:pt x="3948985" y="3239832"/>
-                  </a:lnTo>
-                  <a:lnTo>
-                    <a:pt x="4026619" y="3247990"/>
-                  </a:lnTo>
-                  <a:lnTo>
-                    <a:pt x="4104254" y="3255988"/>
-                  </a:lnTo>
-                  <a:lnTo>
-                    <a:pt x="4181888" y="3263827"/>
-                  </a:lnTo>
-                  <a:lnTo>
-                    <a:pt x="4259522" y="3271511"/>
-                  </a:lnTo>
-                  <a:lnTo>
-                    <a:pt x="4337156" y="3279044"/>
-                  </a:lnTo>
-                  <a:lnTo>
-                    <a:pt x="4414790" y="3286428"/>
-                  </a:lnTo>
-                  <a:lnTo>
-                    <a:pt x="4492424" y="3293665"/>
-                  </a:lnTo>
-                  <a:lnTo>
-                    <a:pt x="4570058" y="3300760"/>
-                  </a:lnTo>
-                  <a:lnTo>
-                    <a:pt x="4647692" y="3307715"/>
-                  </a:lnTo>
-                  <a:lnTo>
-                    <a:pt x="4725326" y="3314532"/>
-                  </a:lnTo>
-                  <a:lnTo>
-                    <a:pt x="4802960" y="3321214"/>
-                  </a:lnTo>
-                  <a:lnTo>
-                    <a:pt x="4880594" y="3327764"/>
-                  </a:lnTo>
-                  <a:lnTo>
-                    <a:pt x="4958228" y="3334185"/>
-                  </a:lnTo>
-                  <a:lnTo>
-                    <a:pt x="5035862" y="3340479"/>
+                    <a:pt x="13643" y="74269"/>
+                  </a:lnTo>
+                  <a:lnTo>
+                    <a:pt x="91277" y="452232"/>
+                  </a:lnTo>
+                  <a:lnTo>
+                    <a:pt x="168911" y="790273"/>
+                  </a:lnTo>
+                  <a:lnTo>
+                    <a:pt x="246545" y="1092609"/>
+                  </a:lnTo>
+                  <a:lnTo>
+                    <a:pt x="324179" y="1363011"/>
+                  </a:lnTo>
+                  <a:lnTo>
+                    <a:pt x="401813" y="1604851"/>
+                  </a:lnTo>
+                  <a:lnTo>
+                    <a:pt x="479447" y="1821148"/>
+                  </a:lnTo>
+                  <a:lnTo>
+                    <a:pt x="557082" y="2014598"/>
+                  </a:lnTo>
+                  <a:lnTo>
+                    <a:pt x="634716" y="2187616"/>
+                  </a:lnTo>
+                  <a:lnTo>
+                    <a:pt x="712350" y="2342358"/>
+                  </a:lnTo>
+                  <a:lnTo>
+                    <a:pt x="789984" y="2480756"/>
+                  </a:lnTo>
+                  <a:lnTo>
+                    <a:pt x="867618" y="2604536"/>
+                  </a:lnTo>
+                  <a:lnTo>
+                    <a:pt x="945252" y="2715241"/>
+                  </a:lnTo>
+                  <a:lnTo>
+                    <a:pt x="1022886" y="2790575"/>
+                  </a:lnTo>
+                  <a:lnTo>
+                    <a:pt x="1100520" y="2813349"/>
+                  </a:lnTo>
+                  <a:lnTo>
+                    <a:pt x="1178154" y="2835521"/>
+                  </a:lnTo>
+                  <a:lnTo>
+                    <a:pt x="1255788" y="2857108"/>
+                  </a:lnTo>
+                  <a:lnTo>
+                    <a:pt x="1333422" y="2878124"/>
+                  </a:lnTo>
+                  <a:lnTo>
+                    <a:pt x="1411056" y="2898585"/>
+                  </a:lnTo>
+                  <a:lnTo>
+                    <a:pt x="1488690" y="2918505"/>
+                  </a:lnTo>
+                  <a:lnTo>
+                    <a:pt x="1566324" y="2937900"/>
+                  </a:lnTo>
+                  <a:lnTo>
+                    <a:pt x="1643958" y="2956782"/>
+                  </a:lnTo>
+                  <a:lnTo>
+                    <a:pt x="1721592" y="2975165"/>
+                  </a:lnTo>
+                  <a:lnTo>
+                    <a:pt x="1799226" y="2993062"/>
+                  </a:lnTo>
+                  <a:lnTo>
+                    <a:pt x="1876860" y="3010487"/>
+                  </a:lnTo>
+                  <a:lnTo>
+                    <a:pt x="1954494" y="3027451"/>
+                  </a:lnTo>
+                  <a:lnTo>
+                    <a:pt x="2032128" y="3043967"/>
+                  </a:lnTo>
+                  <a:lnTo>
+                    <a:pt x="2109762" y="3060047"/>
+                  </a:lnTo>
+                  <a:lnTo>
+                    <a:pt x="2187396" y="3075702"/>
+                  </a:lnTo>
+                  <a:lnTo>
+                    <a:pt x="2265031" y="3090944"/>
+                  </a:lnTo>
+                  <a:lnTo>
+                    <a:pt x="2342665" y="3105782"/>
+                  </a:lnTo>
+                  <a:lnTo>
+                    <a:pt x="2420299" y="3120229"/>
+                  </a:lnTo>
+                  <a:lnTo>
+                    <a:pt x="2497933" y="3134294"/>
+                  </a:lnTo>
+                  <a:lnTo>
+                    <a:pt x="2575567" y="3147988"/>
+                  </a:lnTo>
+                  <a:lnTo>
+                    <a:pt x="2653201" y="3161320"/>
+                  </a:lnTo>
+                  <a:lnTo>
+                    <a:pt x="2730835" y="3174299"/>
+                  </a:lnTo>
+                  <a:lnTo>
+                    <a:pt x="2808469" y="3186936"/>
+                  </a:lnTo>
+                  <a:lnTo>
+                    <a:pt x="2886103" y="3199239"/>
+                  </a:lnTo>
+                  <a:lnTo>
+                    <a:pt x="2963737" y="3211217"/>
+                  </a:lnTo>
+                  <a:lnTo>
+                    <a:pt x="3041371" y="3222879"/>
+                  </a:lnTo>
+                  <a:lnTo>
+                    <a:pt x="3119005" y="3234232"/>
+                  </a:lnTo>
+                  <a:lnTo>
+                    <a:pt x="3196639" y="3245285"/>
+                  </a:lnTo>
+                  <a:lnTo>
+                    <a:pt x="3274273" y="3256047"/>
+                  </a:lnTo>
+                  <a:lnTo>
+                    <a:pt x="3351907" y="3266524"/>
+                  </a:lnTo>
+                  <a:lnTo>
+                    <a:pt x="3429541" y="3276724"/>
+                  </a:lnTo>
+                  <a:lnTo>
+                    <a:pt x="3507175" y="3286655"/>
+                  </a:lnTo>
+                  <a:lnTo>
+                    <a:pt x="3584809" y="3296324"/>
+                  </a:lnTo>
+                  <a:lnTo>
+                    <a:pt x="3662443" y="3305737"/>
+                  </a:lnTo>
+                  <a:lnTo>
+                    <a:pt x="3740077" y="3314902"/>
+                  </a:lnTo>
+                  <a:lnTo>
+                    <a:pt x="3817711" y="3323824"/>
+                  </a:lnTo>
+                  <a:lnTo>
+                    <a:pt x="3895345" y="3332511"/>
+                  </a:lnTo>
+                  <a:lnTo>
+                    <a:pt x="3972980" y="3340968"/>
+                  </a:lnTo>
+                  <a:lnTo>
+                    <a:pt x="4050614" y="3349201"/>
+                  </a:lnTo>
+                  <a:lnTo>
+                    <a:pt x="4128248" y="3357218"/>
+                  </a:lnTo>
+                  <a:lnTo>
+                    <a:pt x="4205882" y="3365022"/>
+                  </a:lnTo>
+                  <a:lnTo>
+                    <a:pt x="4283516" y="3372621"/>
+                  </a:lnTo>
+                  <a:lnTo>
+                    <a:pt x="4361150" y="3380018"/>
+                  </a:lnTo>
+                  <a:lnTo>
+                    <a:pt x="4438784" y="3387220"/>
+                  </a:lnTo>
+                  <a:lnTo>
+                    <a:pt x="4516418" y="3394232"/>
+                  </a:lnTo>
+                  <a:lnTo>
+                    <a:pt x="4594052" y="3401059"/>
+                  </a:lnTo>
+                  <a:lnTo>
+                    <a:pt x="4671686" y="3407705"/>
+                  </a:lnTo>
+                  <a:lnTo>
+                    <a:pt x="4749320" y="3414176"/>
+                  </a:lnTo>
+                  <a:lnTo>
+                    <a:pt x="4826954" y="3420475"/>
+                  </a:lnTo>
+                  <a:lnTo>
+                    <a:pt x="4904588" y="3426609"/>
+                  </a:lnTo>
+                  <a:lnTo>
+                    <a:pt x="4982222" y="3432580"/>
                   </a:lnTo>
                 </a:path>
               </a:pathLst>
@@ -3742,297 +3742,297 @@
           </p:nvSpPr>
           <p:spPr>
             <a:xfrm>
-              <a:off x="817517" y="3471969"/>
-              <a:ext cx="7370972" cy="2073457"/>
+              <a:off x="817517" y="2753353"/>
+              <a:ext cx="7370972" cy="2793029"/>
             </a:xfrm>
             <a:custGeom>
               <a:avLst/>
               <a:pathLst>
-                <a:path w="7370972" h="2073457">
+                <a:path w="7370972" h="2793029">
                   <a:moveTo>
-                    <a:pt x="7370972" y="2073457"/>
+                    <a:pt x="7370972" y="2793029"/>
                   </a:moveTo>
                   <a:lnTo>
-                    <a:pt x="7293338" y="2073035"/>
-                  </a:lnTo>
-                  <a:lnTo>
-                    <a:pt x="7215704" y="2072565"/>
-                  </a:lnTo>
-                  <a:lnTo>
-                    <a:pt x="7138070" y="2072043"/>
-                  </a:lnTo>
-                  <a:lnTo>
-                    <a:pt x="7060436" y="2071463"/>
-                  </a:lnTo>
-                  <a:lnTo>
-                    <a:pt x="6982802" y="2070817"/>
-                  </a:lnTo>
-                  <a:lnTo>
-                    <a:pt x="6905168" y="2070099"/>
-                  </a:lnTo>
-                  <a:lnTo>
-                    <a:pt x="6827534" y="2069302"/>
-                  </a:lnTo>
-                  <a:lnTo>
-                    <a:pt x="6749900" y="2068415"/>
-                  </a:lnTo>
-                  <a:lnTo>
-                    <a:pt x="6672266" y="2067429"/>
-                  </a:lnTo>
-                  <a:lnTo>
-                    <a:pt x="6594632" y="2066332"/>
-                  </a:lnTo>
-                  <a:lnTo>
-                    <a:pt x="6516998" y="2065113"/>
-                  </a:lnTo>
-                  <a:lnTo>
-                    <a:pt x="6439364" y="2063758"/>
-                  </a:lnTo>
-                  <a:lnTo>
-                    <a:pt x="6361730" y="2062252"/>
-                  </a:lnTo>
-                  <a:lnTo>
-                    <a:pt x="6284096" y="2060577"/>
-                  </a:lnTo>
-                  <a:lnTo>
-                    <a:pt x="6206462" y="2058715"/>
-                  </a:lnTo>
-                  <a:lnTo>
-                    <a:pt x="6128827" y="2056644"/>
-                  </a:lnTo>
-                  <a:lnTo>
-                    <a:pt x="6051193" y="2054342"/>
-                  </a:lnTo>
-                  <a:lnTo>
-                    <a:pt x="5973559" y="2051784"/>
-                  </a:lnTo>
-                  <a:lnTo>
-                    <a:pt x="5895925" y="2048939"/>
-                  </a:lnTo>
-                  <a:lnTo>
-                    <a:pt x="5818291" y="2045776"/>
-                  </a:lnTo>
-                  <a:lnTo>
-                    <a:pt x="5740657" y="2042259"/>
-                  </a:lnTo>
-                  <a:lnTo>
-                    <a:pt x="5663023" y="2038349"/>
-                  </a:lnTo>
-                  <a:lnTo>
-                    <a:pt x="5585389" y="2034003"/>
-                  </a:lnTo>
-                  <a:lnTo>
-                    <a:pt x="5507755" y="2029171"/>
-                  </a:lnTo>
-                  <a:lnTo>
-                    <a:pt x="5430121" y="2023798"/>
-                  </a:lnTo>
-                  <a:lnTo>
-                    <a:pt x="5352487" y="2017825"/>
-                  </a:lnTo>
-                  <a:lnTo>
-                    <a:pt x="5274853" y="2011185"/>
-                  </a:lnTo>
-                  <a:lnTo>
-                    <a:pt x="5197219" y="2003802"/>
-                  </a:lnTo>
-                  <a:lnTo>
-                    <a:pt x="5119585" y="1995594"/>
-                  </a:lnTo>
-                  <a:lnTo>
-                    <a:pt x="5041951" y="1986469"/>
-                  </a:lnTo>
-                  <a:lnTo>
-                    <a:pt x="4964317" y="1976323"/>
-                  </a:lnTo>
-                  <a:lnTo>
-                    <a:pt x="4886683" y="1965044"/>
-                  </a:lnTo>
-                  <a:lnTo>
-                    <a:pt x="4809049" y="1952504"/>
-                  </a:lnTo>
-                  <a:lnTo>
-                    <a:pt x="4731415" y="1938563"/>
-                  </a:lnTo>
-                  <a:lnTo>
-                    <a:pt x="4653781" y="1923063"/>
-                  </a:lnTo>
-                  <a:lnTo>
-                    <a:pt x="4576147" y="1905831"/>
-                  </a:lnTo>
-                  <a:lnTo>
-                    <a:pt x="4498513" y="1886673"/>
-                  </a:lnTo>
-                  <a:lnTo>
-                    <a:pt x="4420879" y="1865373"/>
-                  </a:lnTo>
-                  <a:lnTo>
-                    <a:pt x="4343244" y="1841693"/>
-                  </a:lnTo>
-                  <a:lnTo>
-                    <a:pt x="4265610" y="1815366"/>
-                  </a:lnTo>
-                  <a:lnTo>
-                    <a:pt x="4187976" y="1786097"/>
-                  </a:lnTo>
-                  <a:lnTo>
-                    <a:pt x="4110342" y="1753556"/>
-                  </a:lnTo>
-                  <a:lnTo>
-                    <a:pt x="4032708" y="1717378"/>
-                  </a:lnTo>
-                  <a:lnTo>
-                    <a:pt x="3955074" y="1677156"/>
-                  </a:lnTo>
-                  <a:lnTo>
-                    <a:pt x="3877440" y="1632438"/>
-                  </a:lnTo>
-                  <a:lnTo>
-                    <a:pt x="3799806" y="1582723"/>
-                  </a:lnTo>
-                  <a:lnTo>
-                    <a:pt x="3722172" y="1527451"/>
-                  </a:lnTo>
-                  <a:lnTo>
-                    <a:pt x="3644538" y="1466001"/>
-                  </a:lnTo>
-                  <a:lnTo>
-                    <a:pt x="3566904" y="1397683"/>
-                  </a:lnTo>
-                  <a:lnTo>
-                    <a:pt x="3489270" y="1321728"/>
-                  </a:lnTo>
-                  <a:lnTo>
-                    <a:pt x="3411636" y="1237285"/>
-                  </a:lnTo>
-                  <a:lnTo>
-                    <a:pt x="3334002" y="1195820"/>
-                  </a:lnTo>
-                  <a:lnTo>
-                    <a:pt x="3256368" y="1178048"/>
-                  </a:lnTo>
-                  <a:lnTo>
-                    <a:pt x="3178734" y="1159919"/>
-                  </a:lnTo>
-                  <a:lnTo>
-                    <a:pt x="3101100" y="1141424"/>
-                  </a:lnTo>
-                  <a:lnTo>
-                    <a:pt x="3023466" y="1122556"/>
-                  </a:lnTo>
-                  <a:lnTo>
-                    <a:pt x="2945832" y="1103307"/>
-                  </a:lnTo>
-                  <a:lnTo>
-                    <a:pt x="2868198" y="1083671"/>
-                  </a:lnTo>
-                  <a:lnTo>
-                    <a:pt x="2790564" y="1063638"/>
-                  </a:lnTo>
-                  <a:lnTo>
-                    <a:pt x="2712930" y="1043202"/>
-                  </a:lnTo>
-                  <a:lnTo>
-                    <a:pt x="2635295" y="1022353"/>
-                  </a:lnTo>
-                  <a:lnTo>
-                    <a:pt x="2557661" y="1001085"/>
-                  </a:lnTo>
-                  <a:lnTo>
-                    <a:pt x="2480027" y="979387"/>
-                  </a:lnTo>
-                  <a:lnTo>
-                    <a:pt x="2402393" y="957252"/>
-                  </a:lnTo>
-                  <a:lnTo>
-                    <a:pt x="2324759" y="934671"/>
-                  </a:lnTo>
-                  <a:lnTo>
-                    <a:pt x="2247125" y="911634"/>
-                  </a:lnTo>
-                  <a:lnTo>
-                    <a:pt x="2169491" y="888133"/>
-                  </a:lnTo>
-                  <a:lnTo>
-                    <a:pt x="2091857" y="864158"/>
-                  </a:lnTo>
-                  <a:lnTo>
-                    <a:pt x="2014223" y="839700"/>
-                  </a:lnTo>
-                  <a:lnTo>
-                    <a:pt x="1936589" y="814749"/>
-                  </a:lnTo>
-                  <a:lnTo>
-                    <a:pt x="1858955" y="789294"/>
-                  </a:lnTo>
-                  <a:lnTo>
-                    <a:pt x="1781321" y="763326"/>
-                  </a:lnTo>
-                  <a:lnTo>
-                    <a:pt x="1703687" y="736835"/>
-                  </a:lnTo>
-                  <a:lnTo>
-                    <a:pt x="1626053" y="709810"/>
-                  </a:lnTo>
-                  <a:lnTo>
-                    <a:pt x="1548419" y="682239"/>
-                  </a:lnTo>
-                  <a:lnTo>
-                    <a:pt x="1470785" y="654113"/>
-                  </a:lnTo>
-                  <a:lnTo>
-                    <a:pt x="1393151" y="625420"/>
-                  </a:lnTo>
-                  <a:lnTo>
-                    <a:pt x="1315517" y="596148"/>
-                  </a:lnTo>
-                  <a:lnTo>
-                    <a:pt x="1237883" y="566286"/>
-                  </a:lnTo>
-                  <a:lnTo>
-                    <a:pt x="1160249" y="535822"/>
-                  </a:lnTo>
-                  <a:lnTo>
-                    <a:pt x="1082615" y="504744"/>
-                  </a:lnTo>
-                  <a:lnTo>
-                    <a:pt x="1004981" y="473039"/>
-                  </a:lnTo>
-                  <a:lnTo>
-                    <a:pt x="927346" y="440695"/>
-                  </a:lnTo>
-                  <a:lnTo>
-                    <a:pt x="849712" y="407699"/>
-                  </a:lnTo>
-                  <a:lnTo>
-                    <a:pt x="772078" y="374038"/>
-                  </a:lnTo>
-                  <a:lnTo>
-                    <a:pt x="694444" y="339697"/>
-                  </a:lnTo>
-                  <a:lnTo>
-                    <a:pt x="616810" y="304665"/>
-                  </a:lnTo>
-                  <a:lnTo>
-                    <a:pt x="539176" y="268926"/>
-                  </a:lnTo>
-                  <a:lnTo>
-                    <a:pt x="461542" y="232467"/>
-                  </a:lnTo>
-                  <a:lnTo>
-                    <a:pt x="383908" y="195272"/>
-                  </a:lnTo>
-                  <a:lnTo>
-                    <a:pt x="306274" y="157328"/>
-                  </a:lnTo>
-                  <a:lnTo>
-                    <a:pt x="228640" y="118618"/>
-                  </a:lnTo>
-                  <a:lnTo>
-                    <a:pt x="151006" y="79128"/>
-                  </a:lnTo>
-                  <a:lnTo>
-                    <a:pt x="73372" y="38842"/>
+                    <a:pt x="7293338" y="2792695"/>
+                  </a:lnTo>
+                  <a:lnTo>
+                    <a:pt x="7215704" y="2792322"/>
+                  </a:lnTo>
+                  <a:lnTo>
+                    <a:pt x="7138070" y="2791905"/>
+                  </a:lnTo>
+                  <a:lnTo>
+                    <a:pt x="7060436" y="2791439"/>
+                  </a:lnTo>
+                  <a:lnTo>
+                    <a:pt x="6982802" y="2790917"/>
+                  </a:lnTo>
+                  <a:lnTo>
+                    <a:pt x="6905168" y="2790334"/>
+                  </a:lnTo>
+                  <a:lnTo>
+                    <a:pt x="6827534" y="2789683"/>
+                  </a:lnTo>
+                  <a:lnTo>
+                    <a:pt x="6749900" y="2788954"/>
+                  </a:lnTo>
+                  <a:lnTo>
+                    <a:pt x="6672266" y="2788139"/>
+                  </a:lnTo>
+                  <a:lnTo>
+                    <a:pt x="6594632" y="2787228"/>
+                  </a:lnTo>
+                  <a:lnTo>
+                    <a:pt x="6516998" y="2786209"/>
+                  </a:lnTo>
+                  <a:lnTo>
+                    <a:pt x="6439364" y="2785070"/>
+                  </a:lnTo>
+                  <a:lnTo>
+                    <a:pt x="6361730" y="2783797"/>
+                  </a:lnTo>
+                  <a:lnTo>
+                    <a:pt x="6284096" y="2782373"/>
+                  </a:lnTo>
+                  <a:lnTo>
+                    <a:pt x="6206462" y="2780781"/>
+                  </a:lnTo>
+                  <a:lnTo>
+                    <a:pt x="6128827" y="2779001"/>
+                  </a:lnTo>
+                  <a:lnTo>
+                    <a:pt x="6051193" y="2777011"/>
+                  </a:lnTo>
+                  <a:lnTo>
+                    <a:pt x="5973559" y="2774786"/>
+                  </a:lnTo>
+                  <a:lnTo>
+                    <a:pt x="5895925" y="2772298"/>
+                  </a:lnTo>
+                  <a:lnTo>
+                    <a:pt x="5818291" y="2769516"/>
+                  </a:lnTo>
+                  <a:lnTo>
+                    <a:pt x="5740657" y="2766406"/>
+                  </a:lnTo>
+                  <a:lnTo>
+                    <a:pt x="5663023" y="2762928"/>
+                  </a:lnTo>
+                  <a:lnTo>
+                    <a:pt x="5585389" y="2759040"/>
+                  </a:lnTo>
+                  <a:lnTo>
+                    <a:pt x="5507755" y="2754692"/>
+                  </a:lnTo>
+                  <a:lnTo>
+                    <a:pt x="5430121" y="2749831"/>
+                  </a:lnTo>
+                  <a:lnTo>
+                    <a:pt x="5352487" y="2744396"/>
+                  </a:lnTo>
+                  <a:lnTo>
+                    <a:pt x="5274853" y="2738319"/>
+                  </a:lnTo>
+                  <a:lnTo>
+                    <a:pt x="5197219" y="2731524"/>
+                  </a:lnTo>
+                  <a:lnTo>
+                    <a:pt x="5119585" y="2723927"/>
+                  </a:lnTo>
+                  <a:lnTo>
+                    <a:pt x="5041951" y="2715433"/>
+                  </a:lnTo>
+                  <a:lnTo>
+                    <a:pt x="4964317" y="2705935"/>
+                  </a:lnTo>
+                  <a:lnTo>
+                    <a:pt x="4886683" y="2695316"/>
+                  </a:lnTo>
+                  <a:lnTo>
+                    <a:pt x="4809049" y="2683443"/>
+                  </a:lnTo>
+                  <a:lnTo>
+                    <a:pt x="4731415" y="2670167"/>
+                  </a:lnTo>
+                  <a:lnTo>
+                    <a:pt x="4653781" y="2655324"/>
+                  </a:lnTo>
+                  <a:lnTo>
+                    <a:pt x="4576147" y="2638728"/>
+                  </a:lnTo>
+                  <a:lnTo>
+                    <a:pt x="4498513" y="2620172"/>
+                  </a:lnTo>
+                  <a:lnTo>
+                    <a:pt x="4420879" y="2599424"/>
+                  </a:lnTo>
+                  <a:lnTo>
+                    <a:pt x="4343244" y="2576226"/>
+                  </a:lnTo>
+                  <a:lnTo>
+                    <a:pt x="4265610" y="2550288"/>
+                  </a:lnTo>
+                  <a:lnTo>
+                    <a:pt x="4187976" y="2521288"/>
+                  </a:lnTo>
+                  <a:lnTo>
+                    <a:pt x="4110342" y="2488862"/>
+                  </a:lnTo>
+                  <a:lnTo>
+                    <a:pt x="4032708" y="2452607"/>
+                  </a:lnTo>
+                  <a:lnTo>
+                    <a:pt x="3955074" y="2412070"/>
+                  </a:lnTo>
+                  <a:lnTo>
+                    <a:pt x="3877440" y="2366746"/>
+                  </a:lnTo>
+                  <a:lnTo>
+                    <a:pt x="3799806" y="2316069"/>
+                  </a:lnTo>
+                  <a:lnTo>
+                    <a:pt x="3722172" y="2259407"/>
+                  </a:lnTo>
+                  <a:lnTo>
+                    <a:pt x="3644538" y="2196054"/>
+                  </a:lnTo>
+                  <a:lnTo>
+                    <a:pt x="3566904" y="2125219"/>
+                  </a:lnTo>
+                  <a:lnTo>
+                    <a:pt x="3489270" y="2046018"/>
+                  </a:lnTo>
+                  <a:lnTo>
+                    <a:pt x="3411636" y="1957464"/>
+                  </a:lnTo>
+                  <a:lnTo>
+                    <a:pt x="3334002" y="1910393"/>
+                  </a:lnTo>
+                  <a:lnTo>
+                    <a:pt x="3256368" y="1886366"/>
+                  </a:lnTo>
+                  <a:lnTo>
+                    <a:pt x="3178734" y="1861688"/>
+                  </a:lnTo>
+                  <a:lnTo>
+                    <a:pt x="3101100" y="1836340"/>
+                  </a:lnTo>
+                  <a:lnTo>
+                    <a:pt x="3023466" y="1810304"/>
+                  </a:lnTo>
+                  <a:lnTo>
+                    <a:pt x="2945832" y="1783561"/>
+                  </a:lnTo>
+                  <a:lnTo>
+                    <a:pt x="2868198" y="1756093"/>
+                  </a:lnTo>
+                  <a:lnTo>
+                    <a:pt x="2790564" y="1727880"/>
+                  </a:lnTo>
+                  <a:lnTo>
+                    <a:pt x="2712930" y="1698901"/>
+                  </a:lnTo>
+                  <a:lnTo>
+                    <a:pt x="2635295" y="1669136"/>
+                  </a:lnTo>
+                  <a:lnTo>
+                    <a:pt x="2557661" y="1638563"/>
+                  </a:lnTo>
+                  <a:lnTo>
+                    <a:pt x="2480027" y="1607160"/>
+                  </a:lnTo>
+                  <a:lnTo>
+                    <a:pt x="2402393" y="1574905"/>
+                  </a:lnTo>
+                  <a:lnTo>
+                    <a:pt x="2324759" y="1541775"/>
+                  </a:lnTo>
+                  <a:lnTo>
+                    <a:pt x="2247125" y="1507747"/>
+                  </a:lnTo>
+                  <a:lnTo>
+                    <a:pt x="2169491" y="1472794"/>
+                  </a:lnTo>
+                  <a:lnTo>
+                    <a:pt x="2091857" y="1436894"/>
+                  </a:lnTo>
+                  <a:lnTo>
+                    <a:pt x="2014223" y="1400019"/>
+                  </a:lnTo>
+                  <a:lnTo>
+                    <a:pt x="1936589" y="1362144"/>
+                  </a:lnTo>
+                  <a:lnTo>
+                    <a:pt x="1858955" y="1323241"/>
+                  </a:lnTo>
+                  <a:lnTo>
+                    <a:pt x="1781321" y="1283282"/>
+                  </a:lnTo>
+                  <a:lnTo>
+                    <a:pt x="1703687" y="1242239"/>
+                  </a:lnTo>
+                  <a:lnTo>
+                    <a:pt x="1626053" y="1200082"/>
+                  </a:lnTo>
+                  <a:lnTo>
+                    <a:pt x="1548419" y="1156782"/>
+                  </a:lnTo>
+                  <a:lnTo>
+                    <a:pt x="1470785" y="1112306"/>
+                  </a:lnTo>
+                  <a:lnTo>
+                    <a:pt x="1393151" y="1066624"/>
+                  </a:lnTo>
+                  <a:lnTo>
+                    <a:pt x="1315517" y="1019702"/>
+                  </a:lnTo>
+                  <a:lnTo>
+                    <a:pt x="1237883" y="971507"/>
+                  </a:lnTo>
+                  <a:lnTo>
+                    <a:pt x="1160249" y="922004"/>
+                  </a:lnTo>
+                  <a:lnTo>
+                    <a:pt x="1082615" y="871158"/>
+                  </a:lnTo>
+                  <a:lnTo>
+                    <a:pt x="1004981" y="818932"/>
+                  </a:lnTo>
+                  <a:lnTo>
+                    <a:pt x="927346" y="765290"/>
+                  </a:lnTo>
+                  <a:lnTo>
+                    <a:pt x="849712" y="710191"/>
+                  </a:lnTo>
+                  <a:lnTo>
+                    <a:pt x="772078" y="653598"/>
+                  </a:lnTo>
+                  <a:lnTo>
+                    <a:pt x="694444" y="595468"/>
+                  </a:lnTo>
+                  <a:lnTo>
+                    <a:pt x="616810" y="535762"/>
+                  </a:lnTo>
+                  <a:lnTo>
+                    <a:pt x="539176" y="474435"/>
+                  </a:lnTo>
+                  <a:lnTo>
+                    <a:pt x="461542" y="411445"/>
+                  </a:lnTo>
+                  <a:lnTo>
+                    <a:pt x="383908" y="346745"/>
+                  </a:lnTo>
+                  <a:lnTo>
+                    <a:pt x="306274" y="280289"/>
+                  </a:lnTo>
+                  <a:lnTo>
+                    <a:pt x="228640" y="212031"/>
+                  </a:lnTo>
+                  <a:lnTo>
+                    <a:pt x="151006" y="141920"/>
+                  </a:lnTo>
+                  <a:lnTo>
+                    <a:pt x="73372" y="69907"/>
                   </a:lnTo>
                   <a:lnTo>
                     <a:pt x="0" y="0"/>
@@ -4055,240 +4055,234 @@
           </p:nvSpPr>
           <p:spPr>
             <a:xfrm>
-              <a:off x="2434312" y="1896563"/>
-              <a:ext cx="5754178" cy="3618293"/>
+              <a:off x="2593871" y="1896563"/>
+              <a:ext cx="5594618" cy="3627711"/>
             </a:xfrm>
             <a:custGeom>
               <a:avLst/>
               <a:pathLst>
-                <a:path w="5754178" h="3618293">
+                <a:path w="5594618" h="3627711">
                   <a:moveTo>
                     <a:pt x="0" y="0"/>
                   </a:moveTo>
                   <a:lnTo>
-                    <a:pt x="9259" y="28090"/>
-                  </a:lnTo>
-                  <a:lnTo>
-                    <a:pt x="86893" y="249249"/>
-                  </a:lnTo>
-                  <a:lnTo>
-                    <a:pt x="164527" y="456914"/>
-                  </a:lnTo>
-                  <a:lnTo>
-                    <a:pt x="242161" y="651907"/>
-                  </a:lnTo>
-                  <a:lnTo>
-                    <a:pt x="319795" y="835002"/>
-                  </a:lnTo>
-                  <a:lnTo>
-                    <a:pt x="397429" y="1006926"/>
-                  </a:lnTo>
-                  <a:lnTo>
-                    <a:pt x="475063" y="1168359"/>
-                  </a:lnTo>
-                  <a:lnTo>
-                    <a:pt x="552697" y="1319943"/>
-                  </a:lnTo>
-                  <a:lnTo>
-                    <a:pt x="630331" y="1462277"/>
-                  </a:lnTo>
-                  <a:lnTo>
-                    <a:pt x="707965" y="1595926"/>
-                  </a:lnTo>
-                  <a:lnTo>
-                    <a:pt x="785599" y="1721420"/>
-                  </a:lnTo>
-                  <a:lnTo>
-                    <a:pt x="863233" y="1839258"/>
-                  </a:lnTo>
-                  <a:lnTo>
-                    <a:pt x="940867" y="1949905"/>
-                  </a:lnTo>
-                  <a:lnTo>
-                    <a:pt x="1018501" y="2053800"/>
-                  </a:lnTo>
-                  <a:lnTo>
-                    <a:pt x="1096135" y="2151357"/>
-                  </a:lnTo>
-                  <a:lnTo>
-                    <a:pt x="1173769" y="2242961"/>
-                  </a:lnTo>
-                  <a:lnTo>
-                    <a:pt x="1251403" y="2328975"/>
-                  </a:lnTo>
-                  <a:lnTo>
-                    <a:pt x="1329037" y="2409741"/>
-                  </a:lnTo>
-                  <a:lnTo>
-                    <a:pt x="1406671" y="2485579"/>
-                  </a:lnTo>
-                  <a:lnTo>
-                    <a:pt x="1484305" y="2556790"/>
-                  </a:lnTo>
-                  <a:lnTo>
-                    <a:pt x="1561940" y="2623655"/>
-                  </a:lnTo>
-                  <a:lnTo>
-                    <a:pt x="1639574" y="2686441"/>
-                  </a:lnTo>
-                  <a:lnTo>
-                    <a:pt x="1717208" y="2745395"/>
-                  </a:lnTo>
-                  <a:lnTo>
-                    <a:pt x="1794842" y="2800753"/>
-                  </a:lnTo>
-                  <a:lnTo>
-                    <a:pt x="1872476" y="2852733"/>
-                  </a:lnTo>
-                  <a:lnTo>
-                    <a:pt x="1950110" y="2901541"/>
-                  </a:lnTo>
-                  <a:lnTo>
-                    <a:pt x="2027744" y="2947370"/>
-                  </a:lnTo>
-                  <a:lnTo>
-                    <a:pt x="2105378" y="2990404"/>
-                  </a:lnTo>
-                  <a:lnTo>
-                    <a:pt x="2183012" y="3030812"/>
-                  </a:lnTo>
-                  <a:lnTo>
-                    <a:pt x="2260646" y="3068754"/>
-                  </a:lnTo>
-                  <a:lnTo>
-                    <a:pt x="2338280" y="3104381"/>
-                  </a:lnTo>
-                  <a:lnTo>
-                    <a:pt x="2415914" y="3137834"/>
-                  </a:lnTo>
-                  <a:lnTo>
-                    <a:pt x="2493548" y="3169246"/>
-                  </a:lnTo>
-                  <a:lnTo>
-                    <a:pt x="2571182" y="3198742"/>
-                  </a:lnTo>
-                  <a:lnTo>
-                    <a:pt x="2648816" y="3226437"/>
-                  </a:lnTo>
-                  <a:lnTo>
-                    <a:pt x="2726450" y="3252443"/>
-                  </a:lnTo>
-                  <a:lnTo>
-                    <a:pt x="2804084" y="3276862"/>
-                  </a:lnTo>
-                  <a:lnTo>
-                    <a:pt x="2881718" y="3299791"/>
-                  </a:lnTo>
-                  <a:lnTo>
-                    <a:pt x="2959352" y="3321321"/>
-                  </a:lnTo>
-                  <a:lnTo>
-                    <a:pt x="3036986" y="3341537"/>
-                  </a:lnTo>
-                  <a:lnTo>
-                    <a:pt x="3114620" y="3360520"/>
-                  </a:lnTo>
-                  <a:lnTo>
-                    <a:pt x="3192254" y="3378344"/>
-                  </a:lnTo>
-                  <a:lnTo>
-                    <a:pt x="3269889" y="3395081"/>
-                  </a:lnTo>
-                  <a:lnTo>
-                    <a:pt x="3347523" y="3410797"/>
-                  </a:lnTo>
-                  <a:lnTo>
-                    <a:pt x="3425157" y="3425554"/>
-                  </a:lnTo>
-                  <a:lnTo>
-                    <a:pt x="3502791" y="3439410"/>
-                  </a:lnTo>
-                  <a:lnTo>
-                    <a:pt x="3580425" y="3452421"/>
-                  </a:lnTo>
-                  <a:lnTo>
-                    <a:pt x="3658059" y="3464638"/>
-                  </a:lnTo>
-                  <a:lnTo>
-                    <a:pt x="3735693" y="3476109"/>
-                  </a:lnTo>
-                  <a:lnTo>
-                    <a:pt x="3813327" y="3486881"/>
-                  </a:lnTo>
-                  <a:lnTo>
-                    <a:pt x="3890961" y="3496995"/>
-                  </a:lnTo>
-                  <a:lnTo>
-                    <a:pt x="3968595" y="3506492"/>
-                  </a:lnTo>
-                  <a:lnTo>
-                    <a:pt x="4046229" y="3515410"/>
-                  </a:lnTo>
-                  <a:lnTo>
-                    <a:pt x="4123863" y="3523783"/>
-                  </a:lnTo>
-                  <a:lnTo>
-                    <a:pt x="4201497" y="3531646"/>
-                  </a:lnTo>
-                  <a:lnTo>
-                    <a:pt x="4279131" y="3539029"/>
-                  </a:lnTo>
-                  <a:lnTo>
-                    <a:pt x="4356765" y="3545961"/>
-                  </a:lnTo>
-                  <a:lnTo>
-                    <a:pt x="4434399" y="3552471"/>
-                  </a:lnTo>
-                  <a:lnTo>
-                    <a:pt x="4512033" y="3558583"/>
-                  </a:lnTo>
-                  <a:lnTo>
-                    <a:pt x="4589667" y="3564322"/>
-                  </a:lnTo>
-                  <a:lnTo>
-                    <a:pt x="4667301" y="3569711"/>
-                  </a:lnTo>
-                  <a:lnTo>
-                    <a:pt x="4744935" y="3574772"/>
-                  </a:lnTo>
-                  <a:lnTo>
-                    <a:pt x="4822569" y="3579523"/>
-                  </a:lnTo>
-                  <a:lnTo>
-                    <a:pt x="4900203" y="3583985"/>
-                  </a:lnTo>
-                  <a:lnTo>
-                    <a:pt x="4977838" y="3588174"/>
-                  </a:lnTo>
-                  <a:lnTo>
-                    <a:pt x="5055472" y="3592108"/>
-                  </a:lnTo>
-                  <a:lnTo>
-                    <a:pt x="5133106" y="3595801"/>
-                  </a:lnTo>
-                  <a:lnTo>
-                    <a:pt x="5210740" y="3599270"/>
-                  </a:lnTo>
-                  <a:lnTo>
-                    <a:pt x="5288374" y="3602526"/>
-                  </a:lnTo>
-                  <a:lnTo>
-                    <a:pt x="5366008" y="3605584"/>
-                  </a:lnTo>
-                  <a:lnTo>
-                    <a:pt x="5443642" y="3608456"/>
-                  </a:lnTo>
-                  <a:lnTo>
-                    <a:pt x="5521276" y="3611152"/>
-                  </a:lnTo>
-                  <a:lnTo>
-                    <a:pt x="5598910" y="3613684"/>
-                  </a:lnTo>
-                  <a:lnTo>
-                    <a:pt x="5676544" y="3616061"/>
-                  </a:lnTo>
-                  <a:lnTo>
-                    <a:pt x="5754178" y="3618293"/>
+                    <a:pt x="4967" y="16669"/>
+                  </a:lnTo>
+                  <a:lnTo>
+                    <a:pt x="82601" y="259774"/>
+                  </a:lnTo>
+                  <a:lnTo>
+                    <a:pt x="160235" y="486625"/>
+                  </a:lnTo>
+                  <a:lnTo>
+                    <a:pt x="237869" y="698308"/>
+                  </a:lnTo>
+                  <a:lnTo>
+                    <a:pt x="315503" y="895838"/>
+                  </a:lnTo>
+                  <a:lnTo>
+                    <a:pt x="393137" y="1080161"/>
+                  </a:lnTo>
+                  <a:lnTo>
+                    <a:pt x="470771" y="1252159"/>
+                  </a:lnTo>
+                  <a:lnTo>
+                    <a:pt x="548405" y="1412658"/>
+                  </a:lnTo>
+                  <a:lnTo>
+                    <a:pt x="626039" y="1562426"/>
+                  </a:lnTo>
+                  <a:lnTo>
+                    <a:pt x="703673" y="1702180"/>
+                  </a:lnTo>
+                  <a:lnTo>
+                    <a:pt x="781307" y="1832590"/>
+                  </a:lnTo>
+                  <a:lnTo>
+                    <a:pt x="858941" y="1954281"/>
+                  </a:lnTo>
+                  <a:lnTo>
+                    <a:pt x="936575" y="2067835"/>
+                  </a:lnTo>
+                  <a:lnTo>
+                    <a:pt x="1014210" y="2173797"/>
+                  </a:lnTo>
+                  <a:lnTo>
+                    <a:pt x="1091844" y="2272674"/>
+                  </a:lnTo>
+                  <a:lnTo>
+                    <a:pt x="1169478" y="2364940"/>
+                  </a:lnTo>
+                  <a:lnTo>
+                    <a:pt x="1247112" y="2451037"/>
+                  </a:lnTo>
+                  <a:lnTo>
+                    <a:pt x="1324746" y="2531378"/>
+                  </a:lnTo>
+                  <a:lnTo>
+                    <a:pt x="1402380" y="2606347"/>
+                  </a:lnTo>
+                  <a:lnTo>
+                    <a:pt x="1480014" y="2676303"/>
+                  </a:lnTo>
+                  <a:lnTo>
+                    <a:pt x="1557648" y="2741582"/>
+                  </a:lnTo>
+                  <a:lnTo>
+                    <a:pt x="1635282" y="2802497"/>
+                  </a:lnTo>
+                  <a:lnTo>
+                    <a:pt x="1712916" y="2859338"/>
+                  </a:lnTo>
+                  <a:lnTo>
+                    <a:pt x="1790550" y="2912380"/>
+                  </a:lnTo>
+                  <a:lnTo>
+                    <a:pt x="1868184" y="2961874"/>
+                  </a:lnTo>
+                  <a:lnTo>
+                    <a:pt x="1945818" y="3008060"/>
+                  </a:lnTo>
+                  <a:lnTo>
+                    <a:pt x="2023452" y="3051157"/>
+                  </a:lnTo>
+                  <a:lnTo>
+                    <a:pt x="2101086" y="3091373"/>
+                  </a:lnTo>
+                  <a:lnTo>
+                    <a:pt x="2178720" y="3128900"/>
+                  </a:lnTo>
+                  <a:lnTo>
+                    <a:pt x="2256354" y="3163918"/>
+                  </a:lnTo>
+                  <a:lnTo>
+                    <a:pt x="2333988" y="3196595"/>
+                  </a:lnTo>
+                  <a:lnTo>
+                    <a:pt x="2411622" y="3227087"/>
+                  </a:lnTo>
+                  <a:lnTo>
+                    <a:pt x="2489256" y="3255540"/>
+                  </a:lnTo>
+                  <a:lnTo>
+                    <a:pt x="2566890" y="3282091"/>
+                  </a:lnTo>
+                  <a:lnTo>
+                    <a:pt x="2644524" y="3306866"/>
+                  </a:lnTo>
+                  <a:lnTo>
+                    <a:pt x="2722159" y="3329985"/>
+                  </a:lnTo>
+                  <a:lnTo>
+                    <a:pt x="2799793" y="3351559"/>
+                  </a:lnTo>
+                  <a:lnTo>
+                    <a:pt x="2877427" y="3371689"/>
+                  </a:lnTo>
+                  <a:lnTo>
+                    <a:pt x="2955061" y="3390474"/>
+                  </a:lnTo>
+                  <a:lnTo>
+                    <a:pt x="3032695" y="3408003"/>
+                  </a:lnTo>
+                  <a:lnTo>
+                    <a:pt x="3110329" y="3424360"/>
+                  </a:lnTo>
+                  <a:lnTo>
+                    <a:pt x="3187963" y="3439623"/>
+                  </a:lnTo>
+                  <a:lnTo>
+                    <a:pt x="3265597" y="3453866"/>
+                  </a:lnTo>
+                  <a:lnTo>
+                    <a:pt x="3343231" y="3467156"/>
+                  </a:lnTo>
+                  <a:lnTo>
+                    <a:pt x="3420865" y="3479558"/>
+                  </a:lnTo>
+                  <a:lnTo>
+                    <a:pt x="3498499" y="3491131"/>
+                  </a:lnTo>
+                  <a:lnTo>
+                    <a:pt x="3576133" y="3501930"/>
+                  </a:lnTo>
+                  <a:lnTo>
+                    <a:pt x="3653767" y="3512007"/>
+                  </a:lnTo>
+                  <a:lnTo>
+                    <a:pt x="3731401" y="3521410"/>
+                  </a:lnTo>
+                  <a:lnTo>
+                    <a:pt x="3809035" y="3530184"/>
+                  </a:lnTo>
+                  <a:lnTo>
+                    <a:pt x="3886669" y="3538372"/>
+                  </a:lnTo>
+                  <a:lnTo>
+                    <a:pt x="3964303" y="3546012"/>
+                  </a:lnTo>
+                  <a:lnTo>
+                    <a:pt x="4041937" y="3553142"/>
+                  </a:lnTo>
+                  <a:lnTo>
+                    <a:pt x="4119571" y="3559794"/>
+                  </a:lnTo>
+                  <a:lnTo>
+                    <a:pt x="4197205" y="3566002"/>
+                  </a:lnTo>
+                  <a:lnTo>
+                    <a:pt x="4274839" y="3571795"/>
+                  </a:lnTo>
+                  <a:lnTo>
+                    <a:pt x="4352473" y="3577201"/>
+                  </a:lnTo>
+                  <a:lnTo>
+                    <a:pt x="4430107" y="3582245"/>
+                  </a:lnTo>
+                  <a:lnTo>
+                    <a:pt x="4507742" y="3586952"/>
+                  </a:lnTo>
+                  <a:lnTo>
+                    <a:pt x="4585376" y="3591344"/>
+                  </a:lnTo>
+                  <a:lnTo>
+                    <a:pt x="4663010" y="3595443"/>
+                  </a:lnTo>
+                  <a:lnTo>
+                    <a:pt x="4740644" y="3599267"/>
+                  </a:lnTo>
+                  <a:lnTo>
+                    <a:pt x="4818278" y="3602836"/>
+                  </a:lnTo>
+                  <a:lnTo>
+                    <a:pt x="4895912" y="3606166"/>
+                  </a:lnTo>
+                  <a:lnTo>
+                    <a:pt x="4973546" y="3609274"/>
+                  </a:lnTo>
+                  <a:lnTo>
+                    <a:pt x="5051180" y="3612173"/>
+                  </a:lnTo>
+                  <a:lnTo>
+                    <a:pt x="5128814" y="3614879"/>
+                  </a:lnTo>
+                  <a:lnTo>
+                    <a:pt x="5206448" y="3617404"/>
+                  </a:lnTo>
+                  <a:lnTo>
+                    <a:pt x="5284082" y="3619760"/>
+                  </a:lnTo>
+                  <a:lnTo>
+                    <a:pt x="5361716" y="3621959"/>
+                  </a:lnTo>
+                  <a:lnTo>
+                    <a:pt x="5439350" y="3624010"/>
+                  </a:lnTo>
+                  <a:lnTo>
+                    <a:pt x="5516984" y="3625925"/>
+                  </a:lnTo>
+                  <a:lnTo>
+                    <a:pt x="5594618" y="3627711"/>
                   </a:lnTo>
                 </a:path>
               </a:pathLst>

--- a/docs/plots/carbo/jx_carbo_linsubhr_ratio_hosp3.pptx
+++ b/docs/plots/carbo/jx_carbo_linsubhr_ratio_hosp3.pptx
@@ -2271,7 +2271,7 @@
           </p:nvSpPr>
           <p:spPr>
             <a:xfrm>
-              <a:off x="817517" y="5114368"/>
+              <a:off x="817517" y="5142518"/>
               <a:ext cx="7799693" cy="0"/>
             </a:xfrm>
             <a:custGeom>
@@ -2314,7 +2314,7 @@
           </p:nvSpPr>
           <p:spPr>
             <a:xfrm>
-              <a:off x="817517" y="4244691"/>
+              <a:off x="817517" y="4313054"/>
               <a:ext cx="7799693" cy="0"/>
             </a:xfrm>
             <a:custGeom>
@@ -2357,7 +2357,7 @@
           </p:nvSpPr>
           <p:spPr>
             <a:xfrm>
-              <a:off x="817517" y="3375014"/>
+              <a:off x="817517" y="3483591"/>
               <a:ext cx="7799693" cy="0"/>
             </a:xfrm>
             <a:custGeom>
@@ -2400,7 +2400,7 @@
           </p:nvSpPr>
           <p:spPr>
             <a:xfrm>
-              <a:off x="817517" y="2505337"/>
+              <a:off x="817517" y="2654127"/>
               <a:ext cx="7799693" cy="0"/>
             </a:xfrm>
             <a:custGeom>
@@ -2443,15 +2443,15 @@
           </p:nvSpPr>
           <p:spPr>
             <a:xfrm>
-              <a:off x="1615213" y="1896563"/>
-              <a:ext cx="0" cy="3826579"/>
+              <a:off x="1615213" y="2073503"/>
+              <a:ext cx="0" cy="3649639"/>
             </a:xfrm>
             <a:custGeom>
               <a:avLst/>
               <a:pathLst>
-                <a:path w="0" h="3826579">
+                <a:path w="0" h="3649639">
                   <a:moveTo>
-                    <a:pt x="0" y="3826579"/>
+                    <a:pt x="0" y="3649639"/>
                   </a:moveTo>
                   <a:lnTo>
                     <a:pt x="0" y="0"/>
@@ -2486,15 +2486,15 @@
           </p:nvSpPr>
           <p:spPr>
             <a:xfrm>
-              <a:off x="3387871" y="1896563"/>
-              <a:ext cx="0" cy="3826579"/>
+              <a:off x="3387871" y="2073503"/>
+              <a:ext cx="0" cy="3649639"/>
             </a:xfrm>
             <a:custGeom>
               <a:avLst/>
               <a:pathLst>
-                <a:path w="0" h="3826579">
+                <a:path w="0" h="3649639">
                   <a:moveTo>
-                    <a:pt x="0" y="3826579"/>
+                    <a:pt x="0" y="3649639"/>
                   </a:moveTo>
                   <a:lnTo>
                     <a:pt x="0" y="0"/>
@@ -2529,15 +2529,15 @@
           </p:nvSpPr>
           <p:spPr>
             <a:xfrm>
-              <a:off x="5160528" y="1896563"/>
-              <a:ext cx="0" cy="3826579"/>
+              <a:off x="5160528" y="2073503"/>
+              <a:ext cx="0" cy="3649639"/>
             </a:xfrm>
             <a:custGeom>
               <a:avLst/>
               <a:pathLst>
-                <a:path w="0" h="3826579">
+                <a:path w="0" h="3649639">
                   <a:moveTo>
-                    <a:pt x="0" y="3826579"/>
+                    <a:pt x="0" y="3649639"/>
                   </a:moveTo>
                   <a:lnTo>
                     <a:pt x="0" y="0"/>
@@ -2572,15 +2572,15 @@
           </p:nvSpPr>
           <p:spPr>
             <a:xfrm>
-              <a:off x="6933186" y="1896563"/>
-              <a:ext cx="0" cy="3826579"/>
+              <a:off x="6933186" y="2073503"/>
+              <a:ext cx="0" cy="3649639"/>
             </a:xfrm>
             <a:custGeom>
               <a:avLst/>
               <a:pathLst>
-                <a:path w="0" h="3826579">
+                <a:path w="0" h="3649639">
                   <a:moveTo>
-                    <a:pt x="0" y="3826579"/>
+                    <a:pt x="0" y="3649639"/>
                   </a:moveTo>
                   <a:lnTo>
                     <a:pt x="0" y="0"/>
@@ -2615,7 +2615,7 @@
           </p:nvSpPr>
           <p:spPr>
             <a:xfrm>
-              <a:off x="817517" y="5549207"/>
+              <a:off x="817517" y="5557249"/>
               <a:ext cx="7799693" cy="0"/>
             </a:xfrm>
             <a:custGeom>
@@ -2658,7 +2658,7 @@
           </p:nvSpPr>
           <p:spPr>
             <a:xfrm>
-              <a:off x="817517" y="4679530"/>
+              <a:off x="817517" y="4727786"/>
               <a:ext cx="7799693" cy="0"/>
             </a:xfrm>
             <a:custGeom>
@@ -2701,7 +2701,7 @@
           </p:nvSpPr>
           <p:spPr>
             <a:xfrm>
-              <a:off x="817517" y="3809853"/>
+              <a:off x="817517" y="3898322"/>
               <a:ext cx="7799693" cy="0"/>
             </a:xfrm>
             <a:custGeom>
@@ -2744,7 +2744,7 @@
           </p:nvSpPr>
           <p:spPr>
             <a:xfrm>
-              <a:off x="817517" y="2940175"/>
+              <a:off x="817517" y="3068859"/>
               <a:ext cx="7799693" cy="0"/>
             </a:xfrm>
             <a:custGeom>
@@ -2787,7 +2787,7 @@
           </p:nvSpPr>
           <p:spPr>
             <a:xfrm>
-              <a:off x="817517" y="2070498"/>
+              <a:off x="817517" y="2239395"/>
               <a:ext cx="7799693" cy="0"/>
             </a:xfrm>
             <a:custGeom>
@@ -2830,15 +2830,15 @@
           </p:nvSpPr>
           <p:spPr>
             <a:xfrm>
-              <a:off x="2501542" y="1896563"/>
-              <a:ext cx="0" cy="3826579"/>
+              <a:off x="2501542" y="2073503"/>
+              <a:ext cx="0" cy="3649639"/>
             </a:xfrm>
             <a:custGeom>
               <a:avLst/>
               <a:pathLst>
-                <a:path w="0" h="3826579">
+                <a:path w="0" h="3649639">
                   <a:moveTo>
-                    <a:pt x="0" y="3826579"/>
+                    <a:pt x="0" y="3649639"/>
                   </a:moveTo>
                   <a:lnTo>
                     <a:pt x="0" y="0"/>
@@ -2873,15 +2873,15 @@
           </p:nvSpPr>
           <p:spPr>
             <a:xfrm>
-              <a:off x="4274200" y="1896563"/>
-              <a:ext cx="0" cy="3826579"/>
+              <a:off x="4274200" y="2073503"/>
+              <a:ext cx="0" cy="3649639"/>
             </a:xfrm>
             <a:custGeom>
               <a:avLst/>
               <a:pathLst>
-                <a:path w="0" h="3826579">
+                <a:path w="0" h="3649639">
                   <a:moveTo>
-                    <a:pt x="0" y="3826579"/>
+                    <a:pt x="0" y="3649639"/>
                   </a:moveTo>
                   <a:lnTo>
                     <a:pt x="0" y="0"/>
@@ -2916,15 +2916,15 @@
           </p:nvSpPr>
           <p:spPr>
             <a:xfrm>
-              <a:off x="6046857" y="1896563"/>
-              <a:ext cx="0" cy="3826579"/>
+              <a:off x="6046857" y="2073503"/>
+              <a:ext cx="0" cy="3649639"/>
             </a:xfrm>
             <a:custGeom>
               <a:avLst/>
               <a:pathLst>
-                <a:path w="0" h="3826579">
+                <a:path w="0" h="3649639">
                   <a:moveTo>
-                    <a:pt x="0" y="3826579"/>
+                    <a:pt x="0" y="3649639"/>
                   </a:moveTo>
                   <a:lnTo>
                     <a:pt x="0" y="0"/>
@@ -2959,15 +2959,15 @@
           </p:nvSpPr>
           <p:spPr>
             <a:xfrm>
-              <a:off x="7819515" y="1896563"/>
-              <a:ext cx="0" cy="3826579"/>
+              <a:off x="7819515" y="2073503"/>
+              <a:ext cx="0" cy="3649639"/>
             </a:xfrm>
             <a:custGeom>
               <a:avLst/>
               <a:pathLst>
-                <a:path w="0" h="3826579">
+                <a:path w="0" h="3649639">
                   <a:moveTo>
-                    <a:pt x="0" y="3826579"/>
+                    <a:pt x="0" y="3649639"/>
                   </a:moveTo>
                   <a:lnTo>
                     <a:pt x="0" y="0"/>
@@ -3002,498 +3002,498 @@
           </p:nvSpPr>
           <p:spPr>
             <a:xfrm>
-              <a:off x="817517" y="1896563"/>
-              <a:ext cx="7370972" cy="3649819"/>
+              <a:off x="817517" y="2073503"/>
+              <a:ext cx="7370972" cy="3481052"/>
             </a:xfrm>
             <a:custGeom>
               <a:avLst/>
               <a:pathLst>
-                <a:path w="7370972" h="3649819">
+                <a:path w="7370972" h="3481052">
                   <a:moveTo>
                     <a:pt x="2388750" y="0"/>
                   </a:moveTo>
                   <a:lnTo>
-                    <a:pt x="2402393" y="74269"/>
-                  </a:lnTo>
-                  <a:lnTo>
-                    <a:pt x="2480027" y="452232"/>
-                  </a:lnTo>
-                  <a:lnTo>
-                    <a:pt x="2557661" y="790273"/>
-                  </a:lnTo>
-                  <a:lnTo>
-                    <a:pt x="2635295" y="1092609"/>
-                  </a:lnTo>
-                  <a:lnTo>
-                    <a:pt x="2712930" y="1363011"/>
-                  </a:lnTo>
-                  <a:lnTo>
-                    <a:pt x="2790564" y="1604851"/>
-                  </a:lnTo>
-                  <a:lnTo>
-                    <a:pt x="2868198" y="1821148"/>
-                  </a:lnTo>
-                  <a:lnTo>
-                    <a:pt x="2945832" y="2014598"/>
-                  </a:lnTo>
-                  <a:lnTo>
-                    <a:pt x="3023466" y="2187616"/>
-                  </a:lnTo>
-                  <a:lnTo>
-                    <a:pt x="3101100" y="2342358"/>
-                  </a:lnTo>
-                  <a:lnTo>
-                    <a:pt x="3178734" y="2480756"/>
-                  </a:lnTo>
-                  <a:lnTo>
-                    <a:pt x="3256368" y="2604536"/>
-                  </a:lnTo>
-                  <a:lnTo>
-                    <a:pt x="3334002" y="2715241"/>
-                  </a:lnTo>
-                  <a:lnTo>
-                    <a:pt x="3411636" y="2790575"/>
-                  </a:lnTo>
-                  <a:lnTo>
-                    <a:pt x="3489270" y="2813349"/>
-                  </a:lnTo>
-                  <a:lnTo>
-                    <a:pt x="3566904" y="2835521"/>
-                  </a:lnTo>
-                  <a:lnTo>
-                    <a:pt x="3644538" y="2857108"/>
-                  </a:lnTo>
-                  <a:lnTo>
-                    <a:pt x="3722172" y="2878124"/>
-                  </a:lnTo>
-                  <a:lnTo>
-                    <a:pt x="3799806" y="2898585"/>
-                  </a:lnTo>
-                  <a:lnTo>
-                    <a:pt x="3877440" y="2918505"/>
-                  </a:lnTo>
-                  <a:lnTo>
-                    <a:pt x="3955074" y="2937900"/>
-                  </a:lnTo>
-                  <a:lnTo>
-                    <a:pt x="4032708" y="2956782"/>
-                  </a:lnTo>
-                  <a:lnTo>
-                    <a:pt x="4110342" y="2975165"/>
-                  </a:lnTo>
-                  <a:lnTo>
-                    <a:pt x="4187976" y="2993062"/>
-                  </a:lnTo>
-                  <a:lnTo>
-                    <a:pt x="4265610" y="3010487"/>
-                  </a:lnTo>
-                  <a:lnTo>
-                    <a:pt x="4343244" y="3027451"/>
-                  </a:lnTo>
-                  <a:lnTo>
-                    <a:pt x="4420879" y="3043967"/>
-                  </a:lnTo>
-                  <a:lnTo>
-                    <a:pt x="4498513" y="3060047"/>
-                  </a:lnTo>
-                  <a:lnTo>
-                    <a:pt x="4576147" y="3075702"/>
-                  </a:lnTo>
-                  <a:lnTo>
-                    <a:pt x="4653781" y="3090944"/>
-                  </a:lnTo>
-                  <a:lnTo>
-                    <a:pt x="4731415" y="3105782"/>
-                  </a:lnTo>
-                  <a:lnTo>
-                    <a:pt x="4809049" y="3120229"/>
-                  </a:lnTo>
-                  <a:lnTo>
-                    <a:pt x="4886683" y="3134294"/>
-                  </a:lnTo>
-                  <a:lnTo>
-                    <a:pt x="4964317" y="3147988"/>
-                  </a:lnTo>
-                  <a:lnTo>
-                    <a:pt x="5041951" y="3161320"/>
-                  </a:lnTo>
-                  <a:lnTo>
-                    <a:pt x="5119585" y="3174299"/>
-                  </a:lnTo>
-                  <a:lnTo>
-                    <a:pt x="5197219" y="3186936"/>
-                  </a:lnTo>
-                  <a:lnTo>
-                    <a:pt x="5274853" y="3199239"/>
-                  </a:lnTo>
-                  <a:lnTo>
-                    <a:pt x="5352487" y="3211217"/>
-                  </a:lnTo>
-                  <a:lnTo>
-                    <a:pt x="5430121" y="3222879"/>
-                  </a:lnTo>
-                  <a:lnTo>
-                    <a:pt x="5507755" y="3234232"/>
-                  </a:lnTo>
-                  <a:lnTo>
-                    <a:pt x="5585389" y="3245285"/>
-                  </a:lnTo>
-                  <a:lnTo>
-                    <a:pt x="5663023" y="3256047"/>
-                  </a:lnTo>
-                  <a:lnTo>
-                    <a:pt x="5740657" y="3266524"/>
-                  </a:lnTo>
-                  <a:lnTo>
-                    <a:pt x="5818291" y="3276724"/>
-                  </a:lnTo>
-                  <a:lnTo>
-                    <a:pt x="5895925" y="3286655"/>
-                  </a:lnTo>
-                  <a:lnTo>
-                    <a:pt x="5973559" y="3296324"/>
-                  </a:lnTo>
-                  <a:lnTo>
-                    <a:pt x="6051193" y="3305737"/>
-                  </a:lnTo>
-                  <a:lnTo>
-                    <a:pt x="6128827" y="3314902"/>
-                  </a:lnTo>
-                  <a:lnTo>
-                    <a:pt x="6206462" y="3323824"/>
-                  </a:lnTo>
-                  <a:lnTo>
-                    <a:pt x="6284096" y="3332511"/>
-                  </a:lnTo>
-                  <a:lnTo>
-                    <a:pt x="6361730" y="3340968"/>
-                  </a:lnTo>
-                  <a:lnTo>
-                    <a:pt x="6439364" y="3349201"/>
-                  </a:lnTo>
-                  <a:lnTo>
-                    <a:pt x="6516998" y="3357218"/>
-                  </a:lnTo>
-                  <a:lnTo>
-                    <a:pt x="6594632" y="3365022"/>
-                  </a:lnTo>
-                  <a:lnTo>
-                    <a:pt x="6672266" y="3372621"/>
-                  </a:lnTo>
-                  <a:lnTo>
-                    <a:pt x="6749900" y="3380018"/>
-                  </a:lnTo>
-                  <a:lnTo>
-                    <a:pt x="6827534" y="3387220"/>
-                  </a:lnTo>
-                  <a:lnTo>
-                    <a:pt x="6905168" y="3394232"/>
-                  </a:lnTo>
-                  <a:lnTo>
-                    <a:pt x="6982802" y="3401059"/>
-                  </a:lnTo>
-                  <a:lnTo>
-                    <a:pt x="7060436" y="3407705"/>
-                  </a:lnTo>
-                  <a:lnTo>
-                    <a:pt x="7138070" y="3414176"/>
-                  </a:lnTo>
-                  <a:lnTo>
-                    <a:pt x="7215704" y="3420475"/>
-                  </a:lnTo>
-                  <a:lnTo>
-                    <a:pt x="7293338" y="3426609"/>
-                  </a:lnTo>
-                  <a:lnTo>
-                    <a:pt x="7370972" y="3432580"/>
-                  </a:lnTo>
-                  <a:lnTo>
-                    <a:pt x="7370972" y="3649819"/>
-                  </a:lnTo>
-                  <a:lnTo>
-                    <a:pt x="7293338" y="3649485"/>
-                  </a:lnTo>
-                  <a:lnTo>
-                    <a:pt x="7215704" y="3649112"/>
-                  </a:lnTo>
-                  <a:lnTo>
-                    <a:pt x="7138070" y="3648695"/>
-                  </a:lnTo>
-                  <a:lnTo>
-                    <a:pt x="7060436" y="3648229"/>
-                  </a:lnTo>
-                  <a:lnTo>
-                    <a:pt x="6982802" y="3647707"/>
-                  </a:lnTo>
-                  <a:lnTo>
-                    <a:pt x="6905168" y="3647124"/>
-                  </a:lnTo>
-                  <a:lnTo>
-                    <a:pt x="6827534" y="3646473"/>
-                  </a:lnTo>
-                  <a:lnTo>
-                    <a:pt x="6749900" y="3645744"/>
-                  </a:lnTo>
-                  <a:lnTo>
-                    <a:pt x="6672266" y="3644929"/>
-                  </a:lnTo>
-                  <a:lnTo>
-                    <a:pt x="6594632" y="3644018"/>
-                  </a:lnTo>
-                  <a:lnTo>
-                    <a:pt x="6516998" y="3643000"/>
-                  </a:lnTo>
-                  <a:lnTo>
-                    <a:pt x="6439364" y="3641861"/>
-                  </a:lnTo>
-                  <a:lnTo>
-                    <a:pt x="6361730" y="3640587"/>
-                  </a:lnTo>
-                  <a:lnTo>
-                    <a:pt x="6284096" y="3639163"/>
-                  </a:lnTo>
-                  <a:lnTo>
-                    <a:pt x="6206462" y="3637571"/>
-                  </a:lnTo>
-                  <a:lnTo>
-                    <a:pt x="6128827" y="3635792"/>
-                  </a:lnTo>
-                  <a:lnTo>
-                    <a:pt x="6051193" y="3633801"/>
-                  </a:lnTo>
-                  <a:lnTo>
-                    <a:pt x="5973559" y="3631576"/>
-                  </a:lnTo>
-                  <a:lnTo>
-                    <a:pt x="5895925" y="3629088"/>
-                  </a:lnTo>
-                  <a:lnTo>
-                    <a:pt x="5818291" y="3626306"/>
-                  </a:lnTo>
-                  <a:lnTo>
-                    <a:pt x="5740657" y="3623196"/>
-                  </a:lnTo>
-                  <a:lnTo>
-                    <a:pt x="5663023" y="3619718"/>
-                  </a:lnTo>
-                  <a:lnTo>
-                    <a:pt x="5585389" y="3615830"/>
-                  </a:lnTo>
-                  <a:lnTo>
-                    <a:pt x="5507755" y="3611482"/>
-                  </a:lnTo>
-                  <a:lnTo>
-                    <a:pt x="5430121" y="3606621"/>
-                  </a:lnTo>
-                  <a:lnTo>
-                    <a:pt x="5352487" y="3601186"/>
-                  </a:lnTo>
-                  <a:lnTo>
-                    <a:pt x="5274853" y="3595109"/>
-                  </a:lnTo>
-                  <a:lnTo>
-                    <a:pt x="5197219" y="3588314"/>
-                  </a:lnTo>
-                  <a:lnTo>
-                    <a:pt x="5119585" y="3580717"/>
-                  </a:lnTo>
-                  <a:lnTo>
-                    <a:pt x="5041951" y="3572223"/>
-                  </a:lnTo>
-                  <a:lnTo>
-                    <a:pt x="4964317" y="3562725"/>
-                  </a:lnTo>
-                  <a:lnTo>
-                    <a:pt x="4886683" y="3552106"/>
-                  </a:lnTo>
-                  <a:lnTo>
-                    <a:pt x="4809049" y="3540233"/>
-                  </a:lnTo>
-                  <a:lnTo>
-                    <a:pt x="4731415" y="3526958"/>
-                  </a:lnTo>
-                  <a:lnTo>
-                    <a:pt x="4653781" y="3512114"/>
-                  </a:lnTo>
-                  <a:lnTo>
-                    <a:pt x="4576147" y="3495518"/>
-                  </a:lnTo>
-                  <a:lnTo>
-                    <a:pt x="4498513" y="3476962"/>
-                  </a:lnTo>
-                  <a:lnTo>
-                    <a:pt x="4420879" y="3456214"/>
-                  </a:lnTo>
-                  <a:lnTo>
-                    <a:pt x="4343244" y="3433016"/>
-                  </a:lnTo>
-                  <a:lnTo>
-                    <a:pt x="4265610" y="3407079"/>
-                  </a:lnTo>
-                  <a:lnTo>
-                    <a:pt x="4187976" y="3378078"/>
-                  </a:lnTo>
-                  <a:lnTo>
-                    <a:pt x="4110342" y="3345652"/>
-                  </a:lnTo>
-                  <a:lnTo>
-                    <a:pt x="4032708" y="3309397"/>
-                  </a:lnTo>
-                  <a:lnTo>
-                    <a:pt x="3955074" y="3268860"/>
-                  </a:lnTo>
-                  <a:lnTo>
-                    <a:pt x="3877440" y="3223536"/>
-                  </a:lnTo>
-                  <a:lnTo>
-                    <a:pt x="3799806" y="3172859"/>
-                  </a:lnTo>
-                  <a:lnTo>
-                    <a:pt x="3722172" y="3116197"/>
-                  </a:lnTo>
-                  <a:lnTo>
-                    <a:pt x="3644538" y="3052844"/>
-                  </a:lnTo>
-                  <a:lnTo>
-                    <a:pt x="3566904" y="2982009"/>
-                  </a:lnTo>
-                  <a:lnTo>
-                    <a:pt x="3489270" y="2902808"/>
-                  </a:lnTo>
-                  <a:lnTo>
-                    <a:pt x="3411636" y="2814254"/>
-                  </a:lnTo>
-                  <a:lnTo>
-                    <a:pt x="3334002" y="2767183"/>
-                  </a:lnTo>
-                  <a:lnTo>
-                    <a:pt x="3256368" y="2743157"/>
-                  </a:lnTo>
-                  <a:lnTo>
-                    <a:pt x="3178734" y="2718478"/>
-                  </a:lnTo>
-                  <a:lnTo>
-                    <a:pt x="3101100" y="2693130"/>
-                  </a:lnTo>
-                  <a:lnTo>
-                    <a:pt x="3023466" y="2667094"/>
-                  </a:lnTo>
-                  <a:lnTo>
-                    <a:pt x="2945832" y="2640351"/>
-                  </a:lnTo>
-                  <a:lnTo>
-                    <a:pt x="2868198" y="2612883"/>
-                  </a:lnTo>
-                  <a:lnTo>
-                    <a:pt x="2790564" y="2584670"/>
-                  </a:lnTo>
-                  <a:lnTo>
-                    <a:pt x="2712930" y="2555691"/>
-                  </a:lnTo>
-                  <a:lnTo>
-                    <a:pt x="2635295" y="2525926"/>
-                  </a:lnTo>
-                  <a:lnTo>
-                    <a:pt x="2557661" y="2495353"/>
-                  </a:lnTo>
-                  <a:lnTo>
-                    <a:pt x="2480027" y="2463950"/>
-                  </a:lnTo>
-                  <a:lnTo>
-                    <a:pt x="2402393" y="2431695"/>
-                  </a:lnTo>
-                  <a:lnTo>
-                    <a:pt x="2324759" y="2398566"/>
-                  </a:lnTo>
-                  <a:lnTo>
-                    <a:pt x="2247125" y="2364537"/>
-                  </a:lnTo>
-                  <a:lnTo>
-                    <a:pt x="2169491" y="2329584"/>
-                  </a:lnTo>
-                  <a:lnTo>
-                    <a:pt x="2091857" y="2293684"/>
-                  </a:lnTo>
-                  <a:lnTo>
-                    <a:pt x="2014223" y="2256809"/>
-                  </a:lnTo>
-                  <a:lnTo>
-                    <a:pt x="1936589" y="2218934"/>
-                  </a:lnTo>
-                  <a:lnTo>
-                    <a:pt x="1858955" y="2180031"/>
-                  </a:lnTo>
-                  <a:lnTo>
-                    <a:pt x="1781321" y="2140072"/>
-                  </a:lnTo>
-                  <a:lnTo>
-                    <a:pt x="1703687" y="2099029"/>
-                  </a:lnTo>
-                  <a:lnTo>
-                    <a:pt x="1626053" y="2056872"/>
-                  </a:lnTo>
-                  <a:lnTo>
-                    <a:pt x="1548419" y="2013572"/>
-                  </a:lnTo>
-                  <a:lnTo>
-                    <a:pt x="1470785" y="1969096"/>
-                  </a:lnTo>
-                  <a:lnTo>
-                    <a:pt x="1393151" y="1923414"/>
-                  </a:lnTo>
-                  <a:lnTo>
-                    <a:pt x="1315517" y="1876492"/>
-                  </a:lnTo>
-                  <a:lnTo>
-                    <a:pt x="1237883" y="1828297"/>
-                  </a:lnTo>
-                  <a:lnTo>
-                    <a:pt x="1160249" y="1778794"/>
-                  </a:lnTo>
-                  <a:lnTo>
-                    <a:pt x="1082615" y="1727948"/>
-                  </a:lnTo>
-                  <a:lnTo>
-                    <a:pt x="1004981" y="1675723"/>
-                  </a:lnTo>
-                  <a:lnTo>
-                    <a:pt x="927346" y="1622080"/>
-                  </a:lnTo>
-                  <a:lnTo>
-                    <a:pt x="849712" y="1566981"/>
-                  </a:lnTo>
-                  <a:lnTo>
-                    <a:pt x="772078" y="1510388"/>
-                  </a:lnTo>
-                  <a:lnTo>
-                    <a:pt x="694444" y="1452259"/>
-                  </a:lnTo>
-                  <a:lnTo>
-                    <a:pt x="616810" y="1392552"/>
-                  </a:lnTo>
-                  <a:lnTo>
-                    <a:pt x="539176" y="1331226"/>
-                  </a:lnTo>
-                  <a:lnTo>
-                    <a:pt x="461542" y="1268235"/>
-                  </a:lnTo>
-                  <a:lnTo>
-                    <a:pt x="383908" y="1203535"/>
-                  </a:lnTo>
-                  <a:lnTo>
-                    <a:pt x="306274" y="1137080"/>
-                  </a:lnTo>
-                  <a:lnTo>
-                    <a:pt x="228640" y="1068821"/>
-                  </a:lnTo>
-                  <a:lnTo>
-                    <a:pt x="151006" y="998710"/>
-                  </a:lnTo>
-                  <a:lnTo>
-                    <a:pt x="73372" y="926697"/>
-                  </a:lnTo>
-                  <a:lnTo>
-                    <a:pt x="0" y="856790"/>
+                    <a:pt x="2402393" y="70835"/>
+                  </a:lnTo>
+                  <a:lnTo>
+                    <a:pt x="2480027" y="431321"/>
+                  </a:lnTo>
+                  <a:lnTo>
+                    <a:pt x="2557661" y="753731"/>
+                  </a:lnTo>
+                  <a:lnTo>
+                    <a:pt x="2635295" y="1042087"/>
+                  </a:lnTo>
+                  <a:lnTo>
+                    <a:pt x="2712930" y="1299985"/>
+                  </a:lnTo>
+                  <a:lnTo>
+                    <a:pt x="2790564" y="1530644"/>
+                  </a:lnTo>
+                  <a:lnTo>
+                    <a:pt x="2868198" y="1736939"/>
+                  </a:lnTo>
+                  <a:lnTo>
+                    <a:pt x="2945832" y="1921444"/>
+                  </a:lnTo>
+                  <a:lnTo>
+                    <a:pt x="3023466" y="2086461"/>
+                  </a:lnTo>
+                  <a:lnTo>
+                    <a:pt x="3101100" y="2234048"/>
+                  </a:lnTo>
+                  <a:lnTo>
+                    <a:pt x="3178734" y="2366047"/>
+                  </a:lnTo>
+                  <a:lnTo>
+                    <a:pt x="3256368" y="2484103"/>
+                  </a:lnTo>
+                  <a:lnTo>
+                    <a:pt x="3334002" y="2589690"/>
+                  </a:lnTo>
+                  <a:lnTo>
+                    <a:pt x="3411636" y="2661540"/>
+                  </a:lnTo>
+                  <a:lnTo>
+                    <a:pt x="3489270" y="2683261"/>
+                  </a:lnTo>
+                  <a:lnTo>
+                    <a:pt x="3566904" y="2704408"/>
+                  </a:lnTo>
+                  <a:lnTo>
+                    <a:pt x="3644538" y="2724996"/>
+                  </a:lnTo>
+                  <a:lnTo>
+                    <a:pt x="3722172" y="2745040"/>
+                  </a:lnTo>
+                  <a:lnTo>
+                    <a:pt x="3799806" y="2764555"/>
+                  </a:lnTo>
+                  <a:lnTo>
+                    <a:pt x="3877440" y="2783555"/>
+                  </a:lnTo>
+                  <a:lnTo>
+                    <a:pt x="3955074" y="2802052"/>
+                  </a:lnTo>
+                  <a:lnTo>
+                    <a:pt x="4032708" y="2820061"/>
+                  </a:lnTo>
+                  <a:lnTo>
+                    <a:pt x="4110342" y="2837594"/>
+                  </a:lnTo>
+                  <a:lnTo>
+                    <a:pt x="4187976" y="2854664"/>
+                  </a:lnTo>
+                  <a:lnTo>
+                    <a:pt x="4265610" y="2871283"/>
+                  </a:lnTo>
+                  <a:lnTo>
+                    <a:pt x="4343244" y="2887463"/>
+                  </a:lnTo>
+                  <a:lnTo>
+                    <a:pt x="4420879" y="2903215"/>
+                  </a:lnTo>
+                  <a:lnTo>
+                    <a:pt x="4498513" y="2918552"/>
+                  </a:lnTo>
+                  <a:lnTo>
+                    <a:pt x="4576147" y="2933483"/>
+                  </a:lnTo>
+                  <a:lnTo>
+                    <a:pt x="4653781" y="2948019"/>
+                  </a:lnTo>
+                  <a:lnTo>
+                    <a:pt x="4731415" y="2962172"/>
+                  </a:lnTo>
+                  <a:lnTo>
+                    <a:pt x="4809049" y="2975951"/>
+                  </a:lnTo>
+                  <a:lnTo>
+                    <a:pt x="4886683" y="2989366"/>
+                  </a:lnTo>
+                  <a:lnTo>
+                    <a:pt x="4964317" y="3002426"/>
+                  </a:lnTo>
+                  <a:lnTo>
+                    <a:pt x="5041951" y="3015142"/>
+                  </a:lnTo>
+                  <a:lnTo>
+                    <a:pt x="5119585" y="3027521"/>
+                  </a:lnTo>
+                  <a:lnTo>
+                    <a:pt x="5197219" y="3039573"/>
+                  </a:lnTo>
+                  <a:lnTo>
+                    <a:pt x="5274853" y="3051307"/>
+                  </a:lnTo>
+                  <a:lnTo>
+                    <a:pt x="5352487" y="3062732"/>
+                  </a:lnTo>
+                  <a:lnTo>
+                    <a:pt x="5430121" y="3073854"/>
+                  </a:lnTo>
+                  <a:lnTo>
+                    <a:pt x="5507755" y="3084682"/>
+                  </a:lnTo>
+                  <a:lnTo>
+                    <a:pt x="5585389" y="3095225"/>
+                  </a:lnTo>
+                  <a:lnTo>
+                    <a:pt x="5663023" y="3105488"/>
+                  </a:lnTo>
+                  <a:lnTo>
+                    <a:pt x="5740657" y="3115481"/>
+                  </a:lnTo>
+                  <a:lnTo>
+                    <a:pt x="5818291" y="3125210"/>
+                  </a:lnTo>
+                  <a:lnTo>
+                    <a:pt x="5895925" y="3134682"/>
+                  </a:lnTo>
+                  <a:lnTo>
+                    <a:pt x="5973559" y="3143903"/>
+                  </a:lnTo>
+                  <a:lnTo>
+                    <a:pt x="6051193" y="3152881"/>
+                  </a:lnTo>
+                  <a:lnTo>
+                    <a:pt x="6128827" y="3161622"/>
+                  </a:lnTo>
+                  <a:lnTo>
+                    <a:pt x="6206462" y="3170131"/>
+                  </a:lnTo>
+                  <a:lnTo>
+                    <a:pt x="6284096" y="3178416"/>
+                  </a:lnTo>
+                  <a:lnTo>
+                    <a:pt x="6361730" y="3186483"/>
+                  </a:lnTo>
+                  <a:lnTo>
+                    <a:pt x="6439364" y="3194336"/>
+                  </a:lnTo>
+                  <a:lnTo>
+                    <a:pt x="6516998" y="3201981"/>
+                  </a:lnTo>
+                  <a:lnTo>
+                    <a:pt x="6594632" y="3209425"/>
+                  </a:lnTo>
+                  <a:lnTo>
+                    <a:pt x="6672266" y="3216672"/>
+                  </a:lnTo>
+                  <a:lnTo>
+                    <a:pt x="6749900" y="3223727"/>
+                  </a:lnTo>
+                  <a:lnTo>
+                    <a:pt x="6827534" y="3230596"/>
+                  </a:lnTo>
+                  <a:lnTo>
+                    <a:pt x="6905168" y="3237284"/>
+                  </a:lnTo>
+                  <a:lnTo>
+                    <a:pt x="6982802" y="3243795"/>
+                  </a:lnTo>
+                  <a:lnTo>
+                    <a:pt x="7060436" y="3250134"/>
+                  </a:lnTo>
+                  <a:lnTo>
+                    <a:pt x="7138070" y="3256305"/>
+                  </a:lnTo>
+                  <a:lnTo>
+                    <a:pt x="7215704" y="3262314"/>
+                  </a:lnTo>
+                  <a:lnTo>
+                    <a:pt x="7293338" y="3268164"/>
+                  </a:lnTo>
+                  <a:lnTo>
+                    <a:pt x="7370972" y="3273859"/>
+                  </a:lnTo>
+                  <a:lnTo>
+                    <a:pt x="7370972" y="3481052"/>
+                  </a:lnTo>
+                  <a:lnTo>
+                    <a:pt x="7293338" y="3480734"/>
+                  </a:lnTo>
+                  <a:lnTo>
+                    <a:pt x="7215704" y="3480378"/>
+                  </a:lnTo>
+                  <a:lnTo>
+                    <a:pt x="7138070" y="3479981"/>
+                  </a:lnTo>
+                  <a:lnTo>
+                    <a:pt x="7060436" y="3479536"/>
+                  </a:lnTo>
+                  <a:lnTo>
+                    <a:pt x="6982802" y="3479039"/>
+                  </a:lnTo>
+                  <a:lnTo>
+                    <a:pt x="6905168" y="3478483"/>
+                  </a:lnTo>
+                  <a:lnTo>
+                    <a:pt x="6827534" y="3477861"/>
+                  </a:lnTo>
+                  <a:lnTo>
+                    <a:pt x="6749900" y="3477166"/>
+                  </a:lnTo>
+                  <a:lnTo>
+                    <a:pt x="6672266" y="3476389"/>
+                  </a:lnTo>
+                  <a:lnTo>
+                    <a:pt x="6594632" y="3475520"/>
+                  </a:lnTo>
+                  <a:lnTo>
+                    <a:pt x="6516998" y="3474549"/>
+                  </a:lnTo>
+                  <a:lnTo>
+                    <a:pt x="6439364" y="3473462"/>
+                  </a:lnTo>
+                  <a:lnTo>
+                    <a:pt x="6361730" y="3472248"/>
+                  </a:lnTo>
+                  <a:lnTo>
+                    <a:pt x="6284096" y="3470890"/>
+                  </a:lnTo>
+                  <a:lnTo>
+                    <a:pt x="6206462" y="3469371"/>
+                  </a:lnTo>
+                  <a:lnTo>
+                    <a:pt x="6128827" y="3467674"/>
+                  </a:lnTo>
+                  <a:lnTo>
+                    <a:pt x="6051193" y="3465776"/>
+                  </a:lnTo>
+                  <a:lnTo>
+                    <a:pt x="5973559" y="3463653"/>
+                  </a:lnTo>
+                  <a:lnTo>
+                    <a:pt x="5895925" y="3461280"/>
+                  </a:lnTo>
+                  <a:lnTo>
+                    <a:pt x="5818291" y="3458627"/>
+                  </a:lnTo>
+                  <a:lnTo>
+                    <a:pt x="5740657" y="3455661"/>
+                  </a:lnTo>
+                  <a:lnTo>
+                    <a:pt x="5663023" y="3452344"/>
+                  </a:lnTo>
+                  <a:lnTo>
+                    <a:pt x="5585389" y="3448635"/>
+                  </a:lnTo>
+                  <a:lnTo>
+                    <a:pt x="5507755" y="3444489"/>
+                  </a:lnTo>
+                  <a:lnTo>
+                    <a:pt x="5430121" y="3439852"/>
+                  </a:lnTo>
+                  <a:lnTo>
+                    <a:pt x="5352487" y="3434669"/>
+                  </a:lnTo>
+                  <a:lnTo>
+                    <a:pt x="5274853" y="3428873"/>
+                  </a:lnTo>
+                  <a:lnTo>
+                    <a:pt x="5197219" y="3422392"/>
+                  </a:lnTo>
+                  <a:lnTo>
+                    <a:pt x="5119585" y="3415146"/>
+                  </a:lnTo>
+                  <a:lnTo>
+                    <a:pt x="5041951" y="3407045"/>
+                  </a:lnTo>
+                  <a:lnTo>
+                    <a:pt x="4964317" y="3397986"/>
+                  </a:lnTo>
+                  <a:lnTo>
+                    <a:pt x="4886683" y="3387858"/>
+                  </a:lnTo>
+                  <a:lnTo>
+                    <a:pt x="4809049" y="3376534"/>
+                  </a:lnTo>
+                  <a:lnTo>
+                    <a:pt x="4731415" y="3363872"/>
+                  </a:lnTo>
+                  <a:lnTo>
+                    <a:pt x="4653781" y="3349715"/>
+                  </a:lnTo>
+                  <a:lnTo>
+                    <a:pt x="4576147" y="3333887"/>
+                  </a:lnTo>
+                  <a:lnTo>
+                    <a:pt x="4498513" y="3316188"/>
+                  </a:lnTo>
+                  <a:lnTo>
+                    <a:pt x="4420879" y="3296400"/>
+                  </a:lnTo>
+                  <a:lnTo>
+                    <a:pt x="4343244" y="3274275"/>
+                  </a:lnTo>
+                  <a:lnTo>
+                    <a:pt x="4265610" y="3249537"/>
+                  </a:lnTo>
+                  <a:lnTo>
+                    <a:pt x="4187976" y="3221877"/>
+                  </a:lnTo>
+                  <a:lnTo>
+                    <a:pt x="4110342" y="3190950"/>
+                  </a:lnTo>
+                  <a:lnTo>
+                    <a:pt x="4032708" y="3156372"/>
+                  </a:lnTo>
+                  <a:lnTo>
+                    <a:pt x="3955074" y="3117709"/>
+                  </a:lnTo>
+                  <a:lnTo>
+                    <a:pt x="3877440" y="3074481"/>
+                  </a:lnTo>
+                  <a:lnTo>
+                    <a:pt x="3799806" y="3026147"/>
+                  </a:lnTo>
+                  <a:lnTo>
+                    <a:pt x="3722172" y="2972106"/>
+                  </a:lnTo>
+                  <a:lnTo>
+                    <a:pt x="3644538" y="2911682"/>
+                  </a:lnTo>
+                  <a:lnTo>
+                    <a:pt x="3566904" y="2844122"/>
+                  </a:lnTo>
+                  <a:lnTo>
+                    <a:pt x="3489270" y="2768583"/>
+                  </a:lnTo>
+                  <a:lnTo>
+                    <a:pt x="3411636" y="2684124"/>
+                  </a:lnTo>
+                  <a:lnTo>
+                    <a:pt x="3334002" y="2639230"/>
+                  </a:lnTo>
+                  <a:lnTo>
+                    <a:pt x="3256368" y="2616314"/>
+                  </a:lnTo>
+                  <a:lnTo>
+                    <a:pt x="3178734" y="2592777"/>
+                  </a:lnTo>
+                  <a:lnTo>
+                    <a:pt x="3101100" y="2568601"/>
+                  </a:lnTo>
+                  <a:lnTo>
+                    <a:pt x="3023466" y="2543768"/>
+                  </a:lnTo>
+                  <a:lnTo>
+                    <a:pt x="2945832" y="2518263"/>
+                  </a:lnTo>
+                  <a:lnTo>
+                    <a:pt x="2868198" y="2492065"/>
+                  </a:lnTo>
+                  <a:lnTo>
+                    <a:pt x="2790564" y="2465156"/>
+                  </a:lnTo>
+                  <a:lnTo>
+                    <a:pt x="2712930" y="2437517"/>
+                  </a:lnTo>
+                  <a:lnTo>
+                    <a:pt x="2635295" y="2409128"/>
+                  </a:lnTo>
+                  <a:lnTo>
+                    <a:pt x="2557661" y="2379968"/>
+                  </a:lnTo>
+                  <a:lnTo>
+                    <a:pt x="2480027" y="2350018"/>
+                  </a:lnTo>
+                  <a:lnTo>
+                    <a:pt x="2402393" y="2319255"/>
+                  </a:lnTo>
+                  <a:lnTo>
+                    <a:pt x="2324759" y="2287657"/>
+                  </a:lnTo>
+                  <a:lnTo>
+                    <a:pt x="2247125" y="2255201"/>
+                  </a:lnTo>
+                  <a:lnTo>
+                    <a:pt x="2169491" y="2221865"/>
+                  </a:lnTo>
+                  <a:lnTo>
+                    <a:pt x="2091857" y="2187625"/>
+                  </a:lnTo>
+                  <a:lnTo>
+                    <a:pt x="2014223" y="2152455"/>
+                  </a:lnTo>
+                  <a:lnTo>
+                    <a:pt x="1936589" y="2116331"/>
+                  </a:lnTo>
+                  <a:lnTo>
+                    <a:pt x="1858955" y="2079227"/>
+                  </a:lnTo>
+                  <a:lnTo>
+                    <a:pt x="1781321" y="2041116"/>
+                  </a:lnTo>
+                  <a:lnTo>
+                    <a:pt x="1703687" y="2001971"/>
+                  </a:lnTo>
+                  <a:lnTo>
+                    <a:pt x="1626053" y="1961763"/>
+                  </a:lnTo>
+                  <a:lnTo>
+                    <a:pt x="1548419" y="1920465"/>
+                  </a:lnTo>
+                  <a:lnTo>
+                    <a:pt x="1470785" y="1878046"/>
+                  </a:lnTo>
+                  <a:lnTo>
+                    <a:pt x="1393151" y="1834476"/>
+                  </a:lnTo>
+                  <a:lnTo>
+                    <a:pt x="1315517" y="1789724"/>
+                  </a:lnTo>
+                  <a:lnTo>
+                    <a:pt x="1237883" y="1743757"/>
+                  </a:lnTo>
+                  <a:lnTo>
+                    <a:pt x="1160249" y="1696544"/>
+                  </a:lnTo>
+                  <a:lnTo>
+                    <a:pt x="1082615" y="1648049"/>
+                  </a:lnTo>
+                  <a:lnTo>
+                    <a:pt x="1004981" y="1598238"/>
+                  </a:lnTo>
+                  <a:lnTo>
+                    <a:pt x="927346" y="1547075"/>
+                  </a:lnTo>
+                  <a:lnTo>
+                    <a:pt x="849712" y="1494525"/>
+                  </a:lnTo>
+                  <a:lnTo>
+                    <a:pt x="772078" y="1440548"/>
+                  </a:lnTo>
+                  <a:lnTo>
+                    <a:pt x="694444" y="1385107"/>
+                  </a:lnTo>
+                  <a:lnTo>
+                    <a:pt x="616810" y="1328161"/>
+                  </a:lnTo>
+                  <a:lnTo>
+                    <a:pt x="539176" y="1269670"/>
+                  </a:lnTo>
+                  <a:lnTo>
+                    <a:pt x="461542" y="1209592"/>
+                  </a:lnTo>
+                  <a:lnTo>
+                    <a:pt x="383908" y="1147884"/>
+                  </a:lnTo>
+                  <a:lnTo>
+                    <a:pt x="306274" y="1084501"/>
+                  </a:lnTo>
+                  <a:lnTo>
+                    <a:pt x="228640" y="1019399"/>
+                  </a:lnTo>
+                  <a:lnTo>
+                    <a:pt x="151006" y="952530"/>
+                  </a:lnTo>
+                  <a:lnTo>
+                    <a:pt x="73372" y="883847"/>
+                  </a:lnTo>
+                  <a:lnTo>
+                    <a:pt x="0" y="817172"/>
                   </a:lnTo>
                   <a:close/>
                 </a:path>
@@ -3519,210 +3519,210 @@
           </p:nvSpPr>
           <p:spPr>
             <a:xfrm>
-              <a:off x="3206267" y="1896563"/>
-              <a:ext cx="4982222" cy="3432580"/>
+              <a:off x="3206267" y="2073503"/>
+              <a:ext cx="4982222" cy="3273859"/>
             </a:xfrm>
             <a:custGeom>
               <a:avLst/>
               <a:pathLst>
-                <a:path w="4982222" h="3432580">
+                <a:path w="4982222" h="3273859">
                   <a:moveTo>
                     <a:pt x="0" y="0"/>
                   </a:moveTo>
                   <a:lnTo>
-                    <a:pt x="13643" y="74269"/>
-                  </a:lnTo>
-                  <a:lnTo>
-                    <a:pt x="91277" y="452232"/>
-                  </a:lnTo>
-                  <a:lnTo>
-                    <a:pt x="168911" y="790273"/>
-                  </a:lnTo>
-                  <a:lnTo>
-                    <a:pt x="246545" y="1092609"/>
-                  </a:lnTo>
-                  <a:lnTo>
-                    <a:pt x="324179" y="1363011"/>
-                  </a:lnTo>
-                  <a:lnTo>
-                    <a:pt x="401813" y="1604851"/>
-                  </a:lnTo>
-                  <a:lnTo>
-                    <a:pt x="479447" y="1821148"/>
-                  </a:lnTo>
-                  <a:lnTo>
-                    <a:pt x="557082" y="2014598"/>
-                  </a:lnTo>
-                  <a:lnTo>
-                    <a:pt x="634716" y="2187616"/>
-                  </a:lnTo>
-                  <a:lnTo>
-                    <a:pt x="712350" y="2342358"/>
-                  </a:lnTo>
-                  <a:lnTo>
-                    <a:pt x="789984" y="2480756"/>
-                  </a:lnTo>
-                  <a:lnTo>
-                    <a:pt x="867618" y="2604536"/>
-                  </a:lnTo>
-                  <a:lnTo>
-                    <a:pt x="945252" y="2715241"/>
-                  </a:lnTo>
-                  <a:lnTo>
-                    <a:pt x="1022886" y="2790575"/>
-                  </a:lnTo>
-                  <a:lnTo>
-                    <a:pt x="1100520" y="2813349"/>
-                  </a:lnTo>
-                  <a:lnTo>
-                    <a:pt x="1178154" y="2835521"/>
-                  </a:lnTo>
-                  <a:lnTo>
-                    <a:pt x="1255788" y="2857108"/>
-                  </a:lnTo>
-                  <a:lnTo>
-                    <a:pt x="1333422" y="2878124"/>
-                  </a:lnTo>
-                  <a:lnTo>
-                    <a:pt x="1411056" y="2898585"/>
-                  </a:lnTo>
-                  <a:lnTo>
-                    <a:pt x="1488690" y="2918505"/>
-                  </a:lnTo>
-                  <a:lnTo>
-                    <a:pt x="1566324" y="2937900"/>
-                  </a:lnTo>
-                  <a:lnTo>
-                    <a:pt x="1643958" y="2956782"/>
-                  </a:lnTo>
-                  <a:lnTo>
-                    <a:pt x="1721592" y="2975165"/>
-                  </a:lnTo>
-                  <a:lnTo>
-                    <a:pt x="1799226" y="2993062"/>
-                  </a:lnTo>
-                  <a:lnTo>
-                    <a:pt x="1876860" y="3010487"/>
-                  </a:lnTo>
-                  <a:lnTo>
-                    <a:pt x="1954494" y="3027451"/>
-                  </a:lnTo>
-                  <a:lnTo>
-                    <a:pt x="2032128" y="3043967"/>
-                  </a:lnTo>
-                  <a:lnTo>
-                    <a:pt x="2109762" y="3060047"/>
-                  </a:lnTo>
-                  <a:lnTo>
-                    <a:pt x="2187396" y="3075702"/>
-                  </a:lnTo>
-                  <a:lnTo>
-                    <a:pt x="2265031" y="3090944"/>
-                  </a:lnTo>
-                  <a:lnTo>
-                    <a:pt x="2342665" y="3105782"/>
-                  </a:lnTo>
-                  <a:lnTo>
-                    <a:pt x="2420299" y="3120229"/>
-                  </a:lnTo>
-                  <a:lnTo>
-                    <a:pt x="2497933" y="3134294"/>
-                  </a:lnTo>
-                  <a:lnTo>
-                    <a:pt x="2575567" y="3147988"/>
-                  </a:lnTo>
-                  <a:lnTo>
-                    <a:pt x="2653201" y="3161320"/>
-                  </a:lnTo>
-                  <a:lnTo>
-                    <a:pt x="2730835" y="3174299"/>
-                  </a:lnTo>
-                  <a:lnTo>
-                    <a:pt x="2808469" y="3186936"/>
-                  </a:lnTo>
-                  <a:lnTo>
-                    <a:pt x="2886103" y="3199239"/>
-                  </a:lnTo>
-                  <a:lnTo>
-                    <a:pt x="2963737" y="3211217"/>
-                  </a:lnTo>
-                  <a:lnTo>
-                    <a:pt x="3041371" y="3222879"/>
-                  </a:lnTo>
-                  <a:lnTo>
-                    <a:pt x="3119005" y="3234232"/>
-                  </a:lnTo>
-                  <a:lnTo>
-                    <a:pt x="3196639" y="3245285"/>
-                  </a:lnTo>
-                  <a:lnTo>
-                    <a:pt x="3274273" y="3256047"/>
-                  </a:lnTo>
-                  <a:lnTo>
-                    <a:pt x="3351907" y="3266524"/>
-                  </a:lnTo>
-                  <a:lnTo>
-                    <a:pt x="3429541" y="3276724"/>
-                  </a:lnTo>
-                  <a:lnTo>
-                    <a:pt x="3507175" y="3286655"/>
-                  </a:lnTo>
-                  <a:lnTo>
-                    <a:pt x="3584809" y="3296324"/>
-                  </a:lnTo>
-                  <a:lnTo>
-                    <a:pt x="3662443" y="3305737"/>
-                  </a:lnTo>
-                  <a:lnTo>
-                    <a:pt x="3740077" y="3314902"/>
-                  </a:lnTo>
-                  <a:lnTo>
-                    <a:pt x="3817711" y="3323824"/>
-                  </a:lnTo>
-                  <a:lnTo>
-                    <a:pt x="3895345" y="3332511"/>
-                  </a:lnTo>
-                  <a:lnTo>
-                    <a:pt x="3972980" y="3340968"/>
-                  </a:lnTo>
-                  <a:lnTo>
-                    <a:pt x="4050614" y="3349201"/>
-                  </a:lnTo>
-                  <a:lnTo>
-                    <a:pt x="4128248" y="3357218"/>
-                  </a:lnTo>
-                  <a:lnTo>
-                    <a:pt x="4205882" y="3365022"/>
-                  </a:lnTo>
-                  <a:lnTo>
-                    <a:pt x="4283516" y="3372621"/>
-                  </a:lnTo>
-                  <a:lnTo>
-                    <a:pt x="4361150" y="3380018"/>
-                  </a:lnTo>
-                  <a:lnTo>
-                    <a:pt x="4438784" y="3387220"/>
-                  </a:lnTo>
-                  <a:lnTo>
-                    <a:pt x="4516418" y="3394232"/>
-                  </a:lnTo>
-                  <a:lnTo>
-                    <a:pt x="4594052" y="3401059"/>
-                  </a:lnTo>
-                  <a:lnTo>
-                    <a:pt x="4671686" y="3407705"/>
-                  </a:lnTo>
-                  <a:lnTo>
-                    <a:pt x="4749320" y="3414176"/>
-                  </a:lnTo>
-                  <a:lnTo>
-                    <a:pt x="4826954" y="3420475"/>
-                  </a:lnTo>
-                  <a:lnTo>
-                    <a:pt x="4904588" y="3426609"/>
-                  </a:lnTo>
-                  <a:lnTo>
-                    <a:pt x="4982222" y="3432580"/>
+                    <a:pt x="13643" y="70835"/>
+                  </a:lnTo>
+                  <a:lnTo>
+                    <a:pt x="91277" y="431321"/>
+                  </a:lnTo>
+                  <a:lnTo>
+                    <a:pt x="168911" y="753731"/>
+                  </a:lnTo>
+                  <a:lnTo>
+                    <a:pt x="246545" y="1042087"/>
+                  </a:lnTo>
+                  <a:lnTo>
+                    <a:pt x="324179" y="1299985"/>
+                  </a:lnTo>
+                  <a:lnTo>
+                    <a:pt x="401813" y="1530644"/>
+                  </a:lnTo>
+                  <a:lnTo>
+                    <a:pt x="479447" y="1736939"/>
+                  </a:lnTo>
+                  <a:lnTo>
+                    <a:pt x="557082" y="1921444"/>
+                  </a:lnTo>
+                  <a:lnTo>
+                    <a:pt x="634716" y="2086461"/>
+                  </a:lnTo>
+                  <a:lnTo>
+                    <a:pt x="712350" y="2234048"/>
+                  </a:lnTo>
+                  <a:lnTo>
+                    <a:pt x="789984" y="2366047"/>
+                  </a:lnTo>
+                  <a:lnTo>
+                    <a:pt x="867618" y="2484103"/>
+                  </a:lnTo>
+                  <a:lnTo>
+                    <a:pt x="945252" y="2589690"/>
+                  </a:lnTo>
+                  <a:lnTo>
+                    <a:pt x="1022886" y="2661540"/>
+                  </a:lnTo>
+                  <a:lnTo>
+                    <a:pt x="1100520" y="2683261"/>
+                  </a:lnTo>
+                  <a:lnTo>
+                    <a:pt x="1178154" y="2704408"/>
+                  </a:lnTo>
+                  <a:lnTo>
+                    <a:pt x="1255788" y="2724996"/>
+                  </a:lnTo>
+                  <a:lnTo>
+                    <a:pt x="1333422" y="2745040"/>
+                  </a:lnTo>
+                  <a:lnTo>
+                    <a:pt x="1411056" y="2764555"/>
+                  </a:lnTo>
+                  <a:lnTo>
+                    <a:pt x="1488690" y="2783555"/>
+                  </a:lnTo>
+                  <a:lnTo>
+                    <a:pt x="1566324" y="2802052"/>
+                  </a:lnTo>
+                  <a:lnTo>
+                    <a:pt x="1643958" y="2820061"/>
+                  </a:lnTo>
+                  <a:lnTo>
+                    <a:pt x="1721592" y="2837594"/>
+                  </a:lnTo>
+                  <a:lnTo>
+                    <a:pt x="1799226" y="2854664"/>
+                  </a:lnTo>
+                  <a:lnTo>
+                    <a:pt x="1876860" y="2871283"/>
+                  </a:lnTo>
+                  <a:lnTo>
+                    <a:pt x="1954494" y="2887463"/>
+                  </a:lnTo>
+                  <a:lnTo>
+                    <a:pt x="2032128" y="2903215"/>
+                  </a:lnTo>
+                  <a:lnTo>
+                    <a:pt x="2109762" y="2918552"/>
+                  </a:lnTo>
+                  <a:lnTo>
+                    <a:pt x="2187396" y="2933483"/>
+                  </a:lnTo>
+                  <a:lnTo>
+                    <a:pt x="2265031" y="2948019"/>
+                  </a:lnTo>
+                  <a:lnTo>
+                    <a:pt x="2342665" y="2962172"/>
+                  </a:lnTo>
+                  <a:lnTo>
+                    <a:pt x="2420299" y="2975951"/>
+                  </a:lnTo>
+                  <a:lnTo>
+                    <a:pt x="2497933" y="2989366"/>
+                  </a:lnTo>
+                  <a:lnTo>
+                    <a:pt x="2575567" y="3002426"/>
+                  </a:lnTo>
+                  <a:lnTo>
+                    <a:pt x="2653201" y="3015142"/>
+                  </a:lnTo>
+                  <a:lnTo>
+                    <a:pt x="2730835" y="3027521"/>
+                  </a:lnTo>
+                  <a:lnTo>
+                    <a:pt x="2808469" y="3039573"/>
+                  </a:lnTo>
+                  <a:lnTo>
+                    <a:pt x="2886103" y="3051307"/>
+                  </a:lnTo>
+                  <a:lnTo>
+                    <a:pt x="2963737" y="3062732"/>
+                  </a:lnTo>
+                  <a:lnTo>
+                    <a:pt x="3041371" y="3073854"/>
+                  </a:lnTo>
+                  <a:lnTo>
+                    <a:pt x="3119005" y="3084682"/>
+                  </a:lnTo>
+                  <a:lnTo>
+                    <a:pt x="3196639" y="3095225"/>
+                  </a:lnTo>
+                  <a:lnTo>
+                    <a:pt x="3274273" y="3105488"/>
+                  </a:lnTo>
+                  <a:lnTo>
+                    <a:pt x="3351907" y="3115481"/>
+                  </a:lnTo>
+                  <a:lnTo>
+                    <a:pt x="3429541" y="3125210"/>
+                  </a:lnTo>
+                  <a:lnTo>
+                    <a:pt x="3507175" y="3134682"/>
+                  </a:lnTo>
+                  <a:lnTo>
+                    <a:pt x="3584809" y="3143903"/>
+                  </a:lnTo>
+                  <a:lnTo>
+                    <a:pt x="3662443" y="3152881"/>
+                  </a:lnTo>
+                  <a:lnTo>
+                    <a:pt x="3740077" y="3161622"/>
+                  </a:lnTo>
+                  <a:lnTo>
+                    <a:pt x="3817711" y="3170131"/>
+                  </a:lnTo>
+                  <a:lnTo>
+                    <a:pt x="3895345" y="3178416"/>
+                  </a:lnTo>
+                  <a:lnTo>
+                    <a:pt x="3972980" y="3186483"/>
+                  </a:lnTo>
+                  <a:lnTo>
+                    <a:pt x="4050614" y="3194336"/>
+                  </a:lnTo>
+                  <a:lnTo>
+                    <a:pt x="4128248" y="3201981"/>
+                  </a:lnTo>
+                  <a:lnTo>
+                    <a:pt x="4205882" y="3209425"/>
+                  </a:lnTo>
+                  <a:lnTo>
+                    <a:pt x="4283516" y="3216672"/>
+                  </a:lnTo>
+                  <a:lnTo>
+                    <a:pt x="4361150" y="3223727"/>
+                  </a:lnTo>
+                  <a:lnTo>
+                    <a:pt x="4438784" y="3230596"/>
+                  </a:lnTo>
+                  <a:lnTo>
+                    <a:pt x="4516418" y="3237284"/>
+                  </a:lnTo>
+                  <a:lnTo>
+                    <a:pt x="4594052" y="3243795"/>
+                  </a:lnTo>
+                  <a:lnTo>
+                    <a:pt x="4671686" y="3250134"/>
+                  </a:lnTo>
+                  <a:lnTo>
+                    <a:pt x="4749320" y="3256305"/>
+                  </a:lnTo>
+                  <a:lnTo>
+                    <a:pt x="4826954" y="3262314"/>
+                  </a:lnTo>
+                  <a:lnTo>
+                    <a:pt x="4904588" y="3268164"/>
+                  </a:lnTo>
+                  <a:lnTo>
+                    <a:pt x="4982222" y="3273859"/>
                   </a:lnTo>
                 </a:path>
               </a:pathLst>
@@ -3742,297 +3742,297 @@
           </p:nvSpPr>
           <p:spPr>
             <a:xfrm>
-              <a:off x="817517" y="2753353"/>
-              <a:ext cx="7370972" cy="2793029"/>
+              <a:off x="817517" y="2890675"/>
+              <a:ext cx="7370972" cy="2663880"/>
             </a:xfrm>
             <a:custGeom>
               <a:avLst/>
               <a:pathLst>
-                <a:path w="7370972" h="2793029">
+                <a:path w="7370972" h="2663880">
                   <a:moveTo>
-                    <a:pt x="7370972" y="2793029"/>
+                    <a:pt x="7370972" y="2663880"/>
                   </a:moveTo>
                   <a:lnTo>
-                    <a:pt x="7293338" y="2792695"/>
-                  </a:lnTo>
-                  <a:lnTo>
-                    <a:pt x="7215704" y="2792322"/>
-                  </a:lnTo>
-                  <a:lnTo>
-                    <a:pt x="7138070" y="2791905"/>
-                  </a:lnTo>
-                  <a:lnTo>
-                    <a:pt x="7060436" y="2791439"/>
-                  </a:lnTo>
-                  <a:lnTo>
-                    <a:pt x="6982802" y="2790917"/>
-                  </a:lnTo>
-                  <a:lnTo>
-                    <a:pt x="6905168" y="2790334"/>
-                  </a:lnTo>
-                  <a:lnTo>
-                    <a:pt x="6827534" y="2789683"/>
-                  </a:lnTo>
-                  <a:lnTo>
-                    <a:pt x="6749900" y="2788954"/>
-                  </a:lnTo>
-                  <a:lnTo>
-                    <a:pt x="6672266" y="2788139"/>
-                  </a:lnTo>
-                  <a:lnTo>
-                    <a:pt x="6594632" y="2787228"/>
-                  </a:lnTo>
-                  <a:lnTo>
-                    <a:pt x="6516998" y="2786209"/>
-                  </a:lnTo>
-                  <a:lnTo>
-                    <a:pt x="6439364" y="2785070"/>
-                  </a:lnTo>
-                  <a:lnTo>
-                    <a:pt x="6361730" y="2783797"/>
-                  </a:lnTo>
-                  <a:lnTo>
-                    <a:pt x="6284096" y="2782373"/>
-                  </a:lnTo>
-                  <a:lnTo>
-                    <a:pt x="6206462" y="2780781"/>
-                  </a:lnTo>
-                  <a:lnTo>
-                    <a:pt x="6128827" y="2779001"/>
-                  </a:lnTo>
-                  <a:lnTo>
-                    <a:pt x="6051193" y="2777011"/>
-                  </a:lnTo>
-                  <a:lnTo>
-                    <a:pt x="5973559" y="2774786"/>
-                  </a:lnTo>
-                  <a:lnTo>
-                    <a:pt x="5895925" y="2772298"/>
-                  </a:lnTo>
-                  <a:lnTo>
-                    <a:pt x="5818291" y="2769516"/>
-                  </a:lnTo>
-                  <a:lnTo>
-                    <a:pt x="5740657" y="2766406"/>
-                  </a:lnTo>
-                  <a:lnTo>
-                    <a:pt x="5663023" y="2762928"/>
-                  </a:lnTo>
-                  <a:lnTo>
-                    <a:pt x="5585389" y="2759040"/>
-                  </a:lnTo>
-                  <a:lnTo>
-                    <a:pt x="5507755" y="2754692"/>
-                  </a:lnTo>
-                  <a:lnTo>
-                    <a:pt x="5430121" y="2749831"/>
-                  </a:lnTo>
-                  <a:lnTo>
-                    <a:pt x="5352487" y="2744396"/>
-                  </a:lnTo>
-                  <a:lnTo>
-                    <a:pt x="5274853" y="2738319"/>
-                  </a:lnTo>
-                  <a:lnTo>
-                    <a:pt x="5197219" y="2731524"/>
-                  </a:lnTo>
-                  <a:lnTo>
-                    <a:pt x="5119585" y="2723927"/>
-                  </a:lnTo>
-                  <a:lnTo>
-                    <a:pt x="5041951" y="2715433"/>
-                  </a:lnTo>
-                  <a:lnTo>
-                    <a:pt x="4964317" y="2705935"/>
-                  </a:lnTo>
-                  <a:lnTo>
-                    <a:pt x="4886683" y="2695316"/>
-                  </a:lnTo>
-                  <a:lnTo>
-                    <a:pt x="4809049" y="2683443"/>
-                  </a:lnTo>
-                  <a:lnTo>
-                    <a:pt x="4731415" y="2670167"/>
-                  </a:lnTo>
-                  <a:lnTo>
-                    <a:pt x="4653781" y="2655324"/>
-                  </a:lnTo>
-                  <a:lnTo>
-                    <a:pt x="4576147" y="2638728"/>
-                  </a:lnTo>
-                  <a:lnTo>
-                    <a:pt x="4498513" y="2620172"/>
-                  </a:lnTo>
-                  <a:lnTo>
-                    <a:pt x="4420879" y="2599424"/>
-                  </a:lnTo>
-                  <a:lnTo>
-                    <a:pt x="4343244" y="2576226"/>
-                  </a:lnTo>
-                  <a:lnTo>
-                    <a:pt x="4265610" y="2550288"/>
-                  </a:lnTo>
-                  <a:lnTo>
-                    <a:pt x="4187976" y="2521288"/>
-                  </a:lnTo>
-                  <a:lnTo>
-                    <a:pt x="4110342" y="2488862"/>
-                  </a:lnTo>
-                  <a:lnTo>
-                    <a:pt x="4032708" y="2452607"/>
-                  </a:lnTo>
-                  <a:lnTo>
-                    <a:pt x="3955074" y="2412070"/>
-                  </a:lnTo>
-                  <a:lnTo>
-                    <a:pt x="3877440" y="2366746"/>
-                  </a:lnTo>
-                  <a:lnTo>
-                    <a:pt x="3799806" y="2316069"/>
-                  </a:lnTo>
-                  <a:lnTo>
-                    <a:pt x="3722172" y="2259407"/>
-                  </a:lnTo>
-                  <a:lnTo>
-                    <a:pt x="3644538" y="2196054"/>
-                  </a:lnTo>
-                  <a:lnTo>
-                    <a:pt x="3566904" y="2125219"/>
-                  </a:lnTo>
-                  <a:lnTo>
-                    <a:pt x="3489270" y="2046018"/>
-                  </a:lnTo>
-                  <a:lnTo>
-                    <a:pt x="3411636" y="1957464"/>
-                  </a:lnTo>
-                  <a:lnTo>
-                    <a:pt x="3334002" y="1910393"/>
-                  </a:lnTo>
-                  <a:lnTo>
-                    <a:pt x="3256368" y="1886366"/>
-                  </a:lnTo>
-                  <a:lnTo>
-                    <a:pt x="3178734" y="1861688"/>
-                  </a:lnTo>
-                  <a:lnTo>
-                    <a:pt x="3101100" y="1836340"/>
-                  </a:lnTo>
-                  <a:lnTo>
-                    <a:pt x="3023466" y="1810304"/>
-                  </a:lnTo>
-                  <a:lnTo>
-                    <a:pt x="2945832" y="1783561"/>
-                  </a:lnTo>
-                  <a:lnTo>
-                    <a:pt x="2868198" y="1756093"/>
-                  </a:lnTo>
-                  <a:lnTo>
-                    <a:pt x="2790564" y="1727880"/>
-                  </a:lnTo>
-                  <a:lnTo>
-                    <a:pt x="2712930" y="1698901"/>
-                  </a:lnTo>
-                  <a:lnTo>
-                    <a:pt x="2635295" y="1669136"/>
-                  </a:lnTo>
-                  <a:lnTo>
-                    <a:pt x="2557661" y="1638563"/>
-                  </a:lnTo>
-                  <a:lnTo>
-                    <a:pt x="2480027" y="1607160"/>
-                  </a:lnTo>
-                  <a:lnTo>
-                    <a:pt x="2402393" y="1574905"/>
-                  </a:lnTo>
-                  <a:lnTo>
-                    <a:pt x="2324759" y="1541775"/>
-                  </a:lnTo>
-                  <a:lnTo>
-                    <a:pt x="2247125" y="1507747"/>
-                  </a:lnTo>
-                  <a:lnTo>
-                    <a:pt x="2169491" y="1472794"/>
-                  </a:lnTo>
-                  <a:lnTo>
-                    <a:pt x="2091857" y="1436894"/>
-                  </a:lnTo>
-                  <a:lnTo>
-                    <a:pt x="2014223" y="1400019"/>
-                  </a:lnTo>
-                  <a:lnTo>
-                    <a:pt x="1936589" y="1362144"/>
-                  </a:lnTo>
-                  <a:lnTo>
-                    <a:pt x="1858955" y="1323241"/>
-                  </a:lnTo>
-                  <a:lnTo>
-                    <a:pt x="1781321" y="1283282"/>
-                  </a:lnTo>
-                  <a:lnTo>
-                    <a:pt x="1703687" y="1242239"/>
-                  </a:lnTo>
-                  <a:lnTo>
-                    <a:pt x="1626053" y="1200082"/>
-                  </a:lnTo>
-                  <a:lnTo>
-                    <a:pt x="1548419" y="1156782"/>
-                  </a:lnTo>
-                  <a:lnTo>
-                    <a:pt x="1470785" y="1112306"/>
-                  </a:lnTo>
-                  <a:lnTo>
-                    <a:pt x="1393151" y="1066624"/>
-                  </a:lnTo>
-                  <a:lnTo>
-                    <a:pt x="1315517" y="1019702"/>
-                  </a:lnTo>
-                  <a:lnTo>
-                    <a:pt x="1237883" y="971507"/>
-                  </a:lnTo>
-                  <a:lnTo>
-                    <a:pt x="1160249" y="922004"/>
-                  </a:lnTo>
-                  <a:lnTo>
-                    <a:pt x="1082615" y="871158"/>
-                  </a:lnTo>
-                  <a:lnTo>
-                    <a:pt x="1004981" y="818932"/>
-                  </a:lnTo>
-                  <a:lnTo>
-                    <a:pt x="927346" y="765290"/>
-                  </a:lnTo>
-                  <a:lnTo>
-                    <a:pt x="849712" y="710191"/>
-                  </a:lnTo>
-                  <a:lnTo>
-                    <a:pt x="772078" y="653598"/>
-                  </a:lnTo>
-                  <a:lnTo>
-                    <a:pt x="694444" y="595468"/>
-                  </a:lnTo>
-                  <a:lnTo>
-                    <a:pt x="616810" y="535762"/>
-                  </a:lnTo>
-                  <a:lnTo>
-                    <a:pt x="539176" y="474435"/>
-                  </a:lnTo>
-                  <a:lnTo>
-                    <a:pt x="461542" y="411445"/>
-                  </a:lnTo>
-                  <a:lnTo>
-                    <a:pt x="383908" y="346745"/>
-                  </a:lnTo>
-                  <a:lnTo>
-                    <a:pt x="306274" y="280289"/>
-                  </a:lnTo>
-                  <a:lnTo>
-                    <a:pt x="228640" y="212031"/>
-                  </a:lnTo>
-                  <a:lnTo>
-                    <a:pt x="151006" y="141920"/>
-                  </a:lnTo>
-                  <a:lnTo>
-                    <a:pt x="73372" y="69907"/>
+                    <a:pt x="7293338" y="2663562"/>
+                  </a:lnTo>
+                  <a:lnTo>
+                    <a:pt x="7215704" y="2663206"/>
+                  </a:lnTo>
+                  <a:lnTo>
+                    <a:pt x="7138070" y="2662808"/>
+                  </a:lnTo>
+                  <a:lnTo>
+                    <a:pt x="7060436" y="2662364"/>
+                  </a:lnTo>
+                  <a:lnTo>
+                    <a:pt x="6982802" y="2661866"/>
+                  </a:lnTo>
+                  <a:lnTo>
+                    <a:pt x="6905168" y="2661310"/>
+                  </a:lnTo>
+                  <a:lnTo>
+                    <a:pt x="6827534" y="2660689"/>
+                  </a:lnTo>
+                  <a:lnTo>
+                    <a:pt x="6749900" y="2659994"/>
+                  </a:lnTo>
+                  <a:lnTo>
+                    <a:pt x="6672266" y="2659217"/>
+                  </a:lnTo>
+                  <a:lnTo>
+                    <a:pt x="6594632" y="2658348"/>
+                  </a:lnTo>
+                  <a:lnTo>
+                    <a:pt x="6516998" y="2657376"/>
+                  </a:lnTo>
+                  <a:lnTo>
+                    <a:pt x="6439364" y="2656290"/>
+                  </a:lnTo>
+                  <a:lnTo>
+                    <a:pt x="6361730" y="2655075"/>
+                  </a:lnTo>
+                  <a:lnTo>
+                    <a:pt x="6284096" y="2653717"/>
+                  </a:lnTo>
+                  <a:lnTo>
+                    <a:pt x="6206462" y="2652199"/>
+                  </a:lnTo>
+                  <a:lnTo>
+                    <a:pt x="6128827" y="2650501"/>
+                  </a:lnTo>
+                  <a:lnTo>
+                    <a:pt x="6051193" y="2648603"/>
+                  </a:lnTo>
+                  <a:lnTo>
+                    <a:pt x="5973559" y="2646481"/>
+                  </a:lnTo>
+                  <a:lnTo>
+                    <a:pt x="5895925" y="2644108"/>
+                  </a:lnTo>
+                  <a:lnTo>
+                    <a:pt x="5818291" y="2641455"/>
+                  </a:lnTo>
+                  <a:lnTo>
+                    <a:pt x="5740657" y="2638488"/>
+                  </a:lnTo>
+                  <a:lnTo>
+                    <a:pt x="5663023" y="2635171"/>
+                  </a:lnTo>
+                  <a:lnTo>
+                    <a:pt x="5585389" y="2631463"/>
+                  </a:lnTo>
+                  <a:lnTo>
+                    <a:pt x="5507755" y="2627316"/>
+                  </a:lnTo>
+                  <a:lnTo>
+                    <a:pt x="5430121" y="2622680"/>
+                  </a:lnTo>
+                  <a:lnTo>
+                    <a:pt x="5352487" y="2617496"/>
+                  </a:lnTo>
+                  <a:lnTo>
+                    <a:pt x="5274853" y="2611700"/>
+                  </a:lnTo>
+                  <a:lnTo>
+                    <a:pt x="5197219" y="2605220"/>
+                  </a:lnTo>
+                  <a:lnTo>
+                    <a:pt x="5119585" y="2597974"/>
+                  </a:lnTo>
+                  <a:lnTo>
+                    <a:pt x="5041951" y="2589872"/>
+                  </a:lnTo>
+                  <a:lnTo>
+                    <a:pt x="4964317" y="2580814"/>
+                  </a:lnTo>
+                  <a:lnTo>
+                    <a:pt x="4886683" y="2570686"/>
+                  </a:lnTo>
+                  <a:lnTo>
+                    <a:pt x="4809049" y="2559361"/>
+                  </a:lnTo>
+                  <a:lnTo>
+                    <a:pt x="4731415" y="2546700"/>
+                  </a:lnTo>
+                  <a:lnTo>
+                    <a:pt x="4653781" y="2532543"/>
+                  </a:lnTo>
+                  <a:lnTo>
+                    <a:pt x="4576147" y="2516714"/>
+                  </a:lnTo>
+                  <a:lnTo>
+                    <a:pt x="4498513" y="2499016"/>
+                  </a:lnTo>
+                  <a:lnTo>
+                    <a:pt x="4420879" y="2479228"/>
+                  </a:lnTo>
+                  <a:lnTo>
+                    <a:pt x="4343244" y="2457102"/>
+                  </a:lnTo>
+                  <a:lnTo>
+                    <a:pt x="4265610" y="2432364"/>
+                  </a:lnTo>
+                  <a:lnTo>
+                    <a:pt x="4187976" y="2404704"/>
+                  </a:lnTo>
+                  <a:lnTo>
+                    <a:pt x="4110342" y="2373778"/>
+                  </a:lnTo>
+                  <a:lnTo>
+                    <a:pt x="4032708" y="2339199"/>
+                  </a:lnTo>
+                  <a:lnTo>
+                    <a:pt x="3955074" y="2300537"/>
+                  </a:lnTo>
+                  <a:lnTo>
+                    <a:pt x="3877440" y="2257308"/>
+                  </a:lnTo>
+                  <a:lnTo>
+                    <a:pt x="3799806" y="2208975"/>
+                  </a:lnTo>
+                  <a:lnTo>
+                    <a:pt x="3722172" y="2154933"/>
+                  </a:lnTo>
+                  <a:lnTo>
+                    <a:pt x="3644538" y="2094509"/>
+                  </a:lnTo>
+                  <a:lnTo>
+                    <a:pt x="3566904" y="2026949"/>
+                  </a:lnTo>
+                  <a:lnTo>
+                    <a:pt x="3489270" y="1951411"/>
+                  </a:lnTo>
+                  <a:lnTo>
+                    <a:pt x="3411636" y="1866951"/>
+                  </a:lnTo>
+                  <a:lnTo>
+                    <a:pt x="3334002" y="1822057"/>
+                  </a:lnTo>
+                  <a:lnTo>
+                    <a:pt x="3256368" y="1799142"/>
+                  </a:lnTo>
+                  <a:lnTo>
+                    <a:pt x="3178734" y="1775604"/>
+                  </a:lnTo>
+                  <a:lnTo>
+                    <a:pt x="3101100" y="1751428"/>
+                  </a:lnTo>
+                  <a:lnTo>
+                    <a:pt x="3023466" y="1726596"/>
+                  </a:lnTo>
+                  <a:lnTo>
+                    <a:pt x="2945832" y="1701090"/>
+                  </a:lnTo>
+                  <a:lnTo>
+                    <a:pt x="2868198" y="1674892"/>
+                  </a:lnTo>
+                  <a:lnTo>
+                    <a:pt x="2790564" y="1647983"/>
+                  </a:lnTo>
+                  <a:lnTo>
+                    <a:pt x="2712930" y="1620344"/>
+                  </a:lnTo>
+                  <a:lnTo>
+                    <a:pt x="2635295" y="1591955"/>
+                  </a:lnTo>
+                  <a:lnTo>
+                    <a:pt x="2557661" y="1562796"/>
+                  </a:lnTo>
+                  <a:lnTo>
+                    <a:pt x="2480027" y="1532845"/>
+                  </a:lnTo>
+                  <a:lnTo>
+                    <a:pt x="2402393" y="1502082"/>
+                  </a:lnTo>
+                  <a:lnTo>
+                    <a:pt x="2324759" y="1470484"/>
+                  </a:lnTo>
+                  <a:lnTo>
+                    <a:pt x="2247125" y="1438029"/>
+                  </a:lnTo>
+                  <a:lnTo>
+                    <a:pt x="2169491" y="1404693"/>
+                  </a:lnTo>
+                  <a:lnTo>
+                    <a:pt x="2091857" y="1370452"/>
+                  </a:lnTo>
+                  <a:lnTo>
+                    <a:pt x="2014223" y="1335283"/>
+                  </a:lnTo>
+                  <a:lnTo>
+                    <a:pt x="1936589" y="1299159"/>
+                  </a:lnTo>
+                  <a:lnTo>
+                    <a:pt x="1858955" y="1262054"/>
+                  </a:lnTo>
+                  <a:lnTo>
+                    <a:pt x="1781321" y="1223943"/>
+                  </a:lnTo>
+                  <a:lnTo>
+                    <a:pt x="1703687" y="1184798"/>
+                  </a:lnTo>
+                  <a:lnTo>
+                    <a:pt x="1626053" y="1144591"/>
+                  </a:lnTo>
+                  <a:lnTo>
+                    <a:pt x="1548419" y="1103293"/>
+                  </a:lnTo>
+                  <a:lnTo>
+                    <a:pt x="1470785" y="1060874"/>
+                  </a:lnTo>
+                  <a:lnTo>
+                    <a:pt x="1393151" y="1017304"/>
+                  </a:lnTo>
+                  <a:lnTo>
+                    <a:pt x="1315517" y="972551"/>
+                  </a:lnTo>
+                  <a:lnTo>
+                    <a:pt x="1237883" y="926585"/>
+                  </a:lnTo>
+                  <a:lnTo>
+                    <a:pt x="1160249" y="879371"/>
+                  </a:lnTo>
+                  <a:lnTo>
+                    <a:pt x="1082615" y="830876"/>
+                  </a:lnTo>
+                  <a:lnTo>
+                    <a:pt x="1004981" y="781065"/>
+                  </a:lnTo>
+                  <a:lnTo>
+                    <a:pt x="927346" y="729903"/>
+                  </a:lnTo>
+                  <a:lnTo>
+                    <a:pt x="849712" y="677352"/>
+                  </a:lnTo>
+                  <a:lnTo>
+                    <a:pt x="772078" y="623375"/>
+                  </a:lnTo>
+                  <a:lnTo>
+                    <a:pt x="694444" y="567934"/>
+                  </a:lnTo>
+                  <a:lnTo>
+                    <a:pt x="616810" y="510989"/>
+                  </a:lnTo>
+                  <a:lnTo>
+                    <a:pt x="539176" y="452498"/>
+                  </a:lnTo>
+                  <a:lnTo>
+                    <a:pt x="461542" y="392420"/>
+                  </a:lnTo>
+                  <a:lnTo>
+                    <a:pt x="383908" y="330712"/>
+                  </a:lnTo>
+                  <a:lnTo>
+                    <a:pt x="306274" y="267329"/>
+                  </a:lnTo>
+                  <a:lnTo>
+                    <a:pt x="228640" y="202227"/>
+                  </a:lnTo>
+                  <a:lnTo>
+                    <a:pt x="151006" y="135358"/>
+                  </a:lnTo>
+                  <a:lnTo>
+                    <a:pt x="73372" y="66674"/>
                   </a:lnTo>
                   <a:lnTo>
                     <a:pt x="0" y="0"/>
@@ -4055,234 +4055,234 @@
           </p:nvSpPr>
           <p:spPr>
             <a:xfrm>
-              <a:off x="2593871" y="1896563"/>
-              <a:ext cx="5594618" cy="3627711"/>
+              <a:off x="2593871" y="2073503"/>
+              <a:ext cx="5594618" cy="3459967"/>
             </a:xfrm>
             <a:custGeom>
               <a:avLst/>
               <a:pathLst>
-                <a:path w="5594618" h="3627711">
+                <a:path w="5594618" h="3459967">
                   <a:moveTo>
                     <a:pt x="0" y="0"/>
                   </a:moveTo>
                   <a:lnTo>
-                    <a:pt x="4967" y="16669"/>
-                  </a:lnTo>
-                  <a:lnTo>
-                    <a:pt x="82601" y="259774"/>
-                  </a:lnTo>
-                  <a:lnTo>
-                    <a:pt x="160235" y="486625"/>
-                  </a:lnTo>
-                  <a:lnTo>
-                    <a:pt x="237869" y="698308"/>
-                  </a:lnTo>
-                  <a:lnTo>
-                    <a:pt x="315503" y="895838"/>
-                  </a:lnTo>
-                  <a:lnTo>
-                    <a:pt x="393137" y="1080161"/>
-                  </a:lnTo>
-                  <a:lnTo>
-                    <a:pt x="470771" y="1252159"/>
-                  </a:lnTo>
-                  <a:lnTo>
-                    <a:pt x="548405" y="1412658"/>
-                  </a:lnTo>
-                  <a:lnTo>
-                    <a:pt x="626039" y="1562426"/>
-                  </a:lnTo>
-                  <a:lnTo>
-                    <a:pt x="703673" y="1702180"/>
-                  </a:lnTo>
-                  <a:lnTo>
-                    <a:pt x="781307" y="1832590"/>
-                  </a:lnTo>
-                  <a:lnTo>
-                    <a:pt x="858941" y="1954281"/>
-                  </a:lnTo>
-                  <a:lnTo>
-                    <a:pt x="936575" y="2067835"/>
-                  </a:lnTo>
-                  <a:lnTo>
-                    <a:pt x="1014210" y="2173797"/>
-                  </a:lnTo>
-                  <a:lnTo>
-                    <a:pt x="1091844" y="2272674"/>
-                  </a:lnTo>
-                  <a:lnTo>
-                    <a:pt x="1169478" y="2364940"/>
-                  </a:lnTo>
-                  <a:lnTo>
-                    <a:pt x="1247112" y="2451037"/>
-                  </a:lnTo>
-                  <a:lnTo>
-                    <a:pt x="1324746" y="2531378"/>
-                  </a:lnTo>
-                  <a:lnTo>
-                    <a:pt x="1402380" y="2606347"/>
-                  </a:lnTo>
-                  <a:lnTo>
-                    <a:pt x="1480014" y="2676303"/>
-                  </a:lnTo>
-                  <a:lnTo>
-                    <a:pt x="1557648" y="2741582"/>
-                  </a:lnTo>
-                  <a:lnTo>
-                    <a:pt x="1635282" y="2802497"/>
-                  </a:lnTo>
-                  <a:lnTo>
-                    <a:pt x="1712916" y="2859338"/>
-                  </a:lnTo>
-                  <a:lnTo>
-                    <a:pt x="1790550" y="2912380"/>
-                  </a:lnTo>
-                  <a:lnTo>
-                    <a:pt x="1868184" y="2961874"/>
-                  </a:lnTo>
-                  <a:lnTo>
-                    <a:pt x="1945818" y="3008060"/>
-                  </a:lnTo>
-                  <a:lnTo>
-                    <a:pt x="2023452" y="3051157"/>
-                  </a:lnTo>
-                  <a:lnTo>
-                    <a:pt x="2101086" y="3091373"/>
-                  </a:lnTo>
-                  <a:lnTo>
-                    <a:pt x="2178720" y="3128900"/>
-                  </a:lnTo>
-                  <a:lnTo>
-                    <a:pt x="2256354" y="3163918"/>
-                  </a:lnTo>
-                  <a:lnTo>
-                    <a:pt x="2333988" y="3196595"/>
-                  </a:lnTo>
-                  <a:lnTo>
-                    <a:pt x="2411622" y="3227087"/>
-                  </a:lnTo>
-                  <a:lnTo>
-                    <a:pt x="2489256" y="3255540"/>
-                  </a:lnTo>
-                  <a:lnTo>
-                    <a:pt x="2566890" y="3282091"/>
-                  </a:lnTo>
-                  <a:lnTo>
-                    <a:pt x="2644524" y="3306866"/>
-                  </a:lnTo>
-                  <a:lnTo>
-                    <a:pt x="2722159" y="3329985"/>
-                  </a:lnTo>
-                  <a:lnTo>
-                    <a:pt x="2799793" y="3351559"/>
-                  </a:lnTo>
-                  <a:lnTo>
-                    <a:pt x="2877427" y="3371689"/>
-                  </a:lnTo>
-                  <a:lnTo>
-                    <a:pt x="2955061" y="3390474"/>
-                  </a:lnTo>
-                  <a:lnTo>
-                    <a:pt x="3032695" y="3408003"/>
-                  </a:lnTo>
-                  <a:lnTo>
-                    <a:pt x="3110329" y="3424360"/>
-                  </a:lnTo>
-                  <a:lnTo>
-                    <a:pt x="3187963" y="3439623"/>
-                  </a:lnTo>
-                  <a:lnTo>
-                    <a:pt x="3265597" y="3453866"/>
-                  </a:lnTo>
-                  <a:lnTo>
-                    <a:pt x="3343231" y="3467156"/>
-                  </a:lnTo>
-                  <a:lnTo>
-                    <a:pt x="3420865" y="3479558"/>
-                  </a:lnTo>
-                  <a:lnTo>
-                    <a:pt x="3498499" y="3491131"/>
-                  </a:lnTo>
-                  <a:lnTo>
-                    <a:pt x="3576133" y="3501930"/>
-                  </a:lnTo>
-                  <a:lnTo>
-                    <a:pt x="3653767" y="3512007"/>
-                  </a:lnTo>
-                  <a:lnTo>
-                    <a:pt x="3731401" y="3521410"/>
-                  </a:lnTo>
-                  <a:lnTo>
-                    <a:pt x="3809035" y="3530184"/>
-                  </a:lnTo>
-                  <a:lnTo>
-                    <a:pt x="3886669" y="3538372"/>
-                  </a:lnTo>
-                  <a:lnTo>
-                    <a:pt x="3964303" y="3546012"/>
-                  </a:lnTo>
-                  <a:lnTo>
-                    <a:pt x="4041937" y="3553142"/>
-                  </a:lnTo>
-                  <a:lnTo>
-                    <a:pt x="4119571" y="3559794"/>
-                  </a:lnTo>
-                  <a:lnTo>
-                    <a:pt x="4197205" y="3566002"/>
-                  </a:lnTo>
-                  <a:lnTo>
-                    <a:pt x="4274839" y="3571795"/>
-                  </a:lnTo>
-                  <a:lnTo>
-                    <a:pt x="4352473" y="3577201"/>
-                  </a:lnTo>
-                  <a:lnTo>
-                    <a:pt x="4430107" y="3582245"/>
-                  </a:lnTo>
-                  <a:lnTo>
-                    <a:pt x="4507742" y="3586952"/>
-                  </a:lnTo>
-                  <a:lnTo>
-                    <a:pt x="4585376" y="3591344"/>
-                  </a:lnTo>
-                  <a:lnTo>
-                    <a:pt x="4663010" y="3595443"/>
-                  </a:lnTo>
-                  <a:lnTo>
-                    <a:pt x="4740644" y="3599267"/>
-                  </a:lnTo>
-                  <a:lnTo>
-                    <a:pt x="4818278" y="3602836"/>
-                  </a:lnTo>
-                  <a:lnTo>
-                    <a:pt x="4895912" y="3606166"/>
-                  </a:lnTo>
-                  <a:lnTo>
-                    <a:pt x="4973546" y="3609274"/>
-                  </a:lnTo>
-                  <a:lnTo>
-                    <a:pt x="5051180" y="3612173"/>
-                  </a:lnTo>
-                  <a:lnTo>
-                    <a:pt x="5128814" y="3614879"/>
-                  </a:lnTo>
-                  <a:lnTo>
-                    <a:pt x="5206448" y="3617404"/>
-                  </a:lnTo>
-                  <a:lnTo>
-                    <a:pt x="5284082" y="3619760"/>
-                  </a:lnTo>
-                  <a:lnTo>
-                    <a:pt x="5361716" y="3621959"/>
-                  </a:lnTo>
-                  <a:lnTo>
-                    <a:pt x="5439350" y="3624010"/>
-                  </a:lnTo>
-                  <a:lnTo>
-                    <a:pt x="5516984" y="3625925"/>
-                  </a:lnTo>
-                  <a:lnTo>
-                    <a:pt x="5594618" y="3627711"/>
+                    <a:pt x="4967" y="15898"/>
+                  </a:lnTo>
+                  <a:lnTo>
+                    <a:pt x="82601" y="247762"/>
+                  </a:lnTo>
+                  <a:lnTo>
+                    <a:pt x="160235" y="464123"/>
+                  </a:lnTo>
+                  <a:lnTo>
+                    <a:pt x="237869" y="666018"/>
+                  </a:lnTo>
+                  <a:lnTo>
+                    <a:pt x="315503" y="854415"/>
+                  </a:lnTo>
+                  <a:lnTo>
+                    <a:pt x="393137" y="1030214"/>
+                  </a:lnTo>
+                  <a:lnTo>
+                    <a:pt x="470771" y="1194260"/>
+                  </a:lnTo>
+                  <a:lnTo>
+                    <a:pt x="548405" y="1347337"/>
+                  </a:lnTo>
+                  <a:lnTo>
+                    <a:pt x="626039" y="1490180"/>
+                  </a:lnTo>
+                  <a:lnTo>
+                    <a:pt x="703673" y="1623472"/>
+                  </a:lnTo>
+                  <a:lnTo>
+                    <a:pt x="781307" y="1747852"/>
+                  </a:lnTo>
+                  <a:lnTo>
+                    <a:pt x="858941" y="1863915"/>
+                  </a:lnTo>
+                  <a:lnTo>
+                    <a:pt x="936575" y="1972219"/>
+                  </a:lnTo>
+                  <a:lnTo>
+                    <a:pt x="1014210" y="2073281"/>
+                  </a:lnTo>
+                  <a:lnTo>
+                    <a:pt x="1091844" y="2167586"/>
+                  </a:lnTo>
+                  <a:lnTo>
+                    <a:pt x="1169478" y="2255586"/>
+                  </a:lnTo>
+                  <a:lnTo>
+                    <a:pt x="1247112" y="2337702"/>
+                  </a:lnTo>
+                  <a:lnTo>
+                    <a:pt x="1324746" y="2414328"/>
+                  </a:lnTo>
+                  <a:lnTo>
+                    <a:pt x="1402380" y="2485830"/>
+                  </a:lnTo>
+                  <a:lnTo>
+                    <a:pt x="1480014" y="2552552"/>
+                  </a:lnTo>
+                  <a:lnTo>
+                    <a:pt x="1557648" y="2614813"/>
+                  </a:lnTo>
+                  <a:lnTo>
+                    <a:pt x="1635282" y="2672910"/>
+                  </a:lnTo>
+                  <a:lnTo>
+                    <a:pt x="1712916" y="2727124"/>
+                  </a:lnTo>
+                  <a:lnTo>
+                    <a:pt x="1790550" y="2777712"/>
+                  </a:lnTo>
+                  <a:lnTo>
+                    <a:pt x="1868184" y="2824918"/>
+                  </a:lnTo>
+                  <a:lnTo>
+                    <a:pt x="1945818" y="2868968"/>
+                  </a:lnTo>
+                  <a:lnTo>
+                    <a:pt x="2023452" y="2910073"/>
+                  </a:lnTo>
+                  <a:lnTo>
+                    <a:pt x="2101086" y="2948429"/>
+                  </a:lnTo>
+                  <a:lnTo>
+                    <a:pt x="2178720" y="2984221"/>
+                  </a:lnTo>
+                  <a:lnTo>
+                    <a:pt x="2256354" y="3017620"/>
+                  </a:lnTo>
+                  <a:lnTo>
+                    <a:pt x="2333988" y="3048786"/>
+                  </a:lnTo>
+                  <a:lnTo>
+                    <a:pt x="2411622" y="3077868"/>
+                  </a:lnTo>
+                  <a:lnTo>
+                    <a:pt x="2489256" y="3105005"/>
+                  </a:lnTo>
+                  <a:lnTo>
+                    <a:pt x="2566890" y="3130328"/>
+                  </a:lnTo>
+                  <a:lnTo>
+                    <a:pt x="2644524" y="3153958"/>
+                  </a:lnTo>
+                  <a:lnTo>
+                    <a:pt x="2722159" y="3176008"/>
+                  </a:lnTo>
+                  <a:lnTo>
+                    <a:pt x="2799793" y="3196584"/>
+                  </a:lnTo>
+                  <a:lnTo>
+                    <a:pt x="2877427" y="3215784"/>
+                  </a:lnTo>
+                  <a:lnTo>
+                    <a:pt x="2955061" y="3233700"/>
+                  </a:lnTo>
+                  <a:lnTo>
+                    <a:pt x="3032695" y="3250418"/>
+                  </a:lnTo>
+                  <a:lnTo>
+                    <a:pt x="3110329" y="3266019"/>
+                  </a:lnTo>
+                  <a:lnTo>
+                    <a:pt x="3187963" y="3280576"/>
+                  </a:lnTo>
+                  <a:lnTo>
+                    <a:pt x="3265597" y="3294160"/>
+                  </a:lnTo>
+                  <a:lnTo>
+                    <a:pt x="3343231" y="3306836"/>
+                  </a:lnTo>
+                  <a:lnTo>
+                    <a:pt x="3420865" y="3318665"/>
+                  </a:lnTo>
+                  <a:lnTo>
+                    <a:pt x="3498499" y="3329702"/>
+                  </a:lnTo>
+                  <a:lnTo>
+                    <a:pt x="3576133" y="3340002"/>
+                  </a:lnTo>
+                  <a:lnTo>
+                    <a:pt x="3653767" y="3349613"/>
+                  </a:lnTo>
+                  <a:lnTo>
+                    <a:pt x="3731401" y="3358581"/>
+                  </a:lnTo>
+                  <a:lnTo>
+                    <a:pt x="3809035" y="3366950"/>
+                  </a:lnTo>
+                  <a:lnTo>
+                    <a:pt x="3886669" y="3374759"/>
+                  </a:lnTo>
+                  <a:lnTo>
+                    <a:pt x="3964303" y="3382046"/>
+                  </a:lnTo>
+                  <a:lnTo>
+                    <a:pt x="4041937" y="3388846"/>
+                  </a:lnTo>
+                  <a:lnTo>
+                    <a:pt x="4119571" y="3395191"/>
+                  </a:lnTo>
+                  <a:lnTo>
+                    <a:pt x="4197205" y="3401112"/>
+                  </a:lnTo>
+                  <a:lnTo>
+                    <a:pt x="4274839" y="3406637"/>
+                  </a:lnTo>
+                  <a:lnTo>
+                    <a:pt x="4352473" y="3411792"/>
+                  </a:lnTo>
+                  <a:lnTo>
+                    <a:pt x="4430107" y="3416603"/>
+                  </a:lnTo>
+                  <a:lnTo>
+                    <a:pt x="4507742" y="3421093"/>
+                  </a:lnTo>
+                  <a:lnTo>
+                    <a:pt x="4585376" y="3425282"/>
+                  </a:lnTo>
+                  <a:lnTo>
+                    <a:pt x="4663010" y="3429191"/>
+                  </a:lnTo>
+                  <a:lnTo>
+                    <a:pt x="4740644" y="3432838"/>
+                  </a:lnTo>
+                  <a:lnTo>
+                    <a:pt x="4818278" y="3436242"/>
+                  </a:lnTo>
+                  <a:lnTo>
+                    <a:pt x="4895912" y="3439418"/>
+                  </a:lnTo>
+                  <a:lnTo>
+                    <a:pt x="4973546" y="3442382"/>
+                  </a:lnTo>
+                  <a:lnTo>
+                    <a:pt x="5051180" y="3445148"/>
+                  </a:lnTo>
+                  <a:lnTo>
+                    <a:pt x="5128814" y="3447729"/>
+                  </a:lnTo>
+                  <a:lnTo>
+                    <a:pt x="5206448" y="3450137"/>
+                  </a:lnTo>
+                  <a:lnTo>
+                    <a:pt x="5284082" y="3452384"/>
+                  </a:lnTo>
+                  <a:lnTo>
+                    <a:pt x="5361716" y="3454481"/>
+                  </a:lnTo>
+                  <a:lnTo>
+                    <a:pt x="5439350" y="3456438"/>
+                  </a:lnTo>
+                  <a:lnTo>
+                    <a:pt x="5516984" y="3458263"/>
+                  </a:lnTo>
+                  <a:lnTo>
+                    <a:pt x="5594618" y="3459967"/>
                   </a:lnTo>
                 </a:path>
               </a:pathLst>
@@ -4311,7 +4311,7 @@
           </p:nvSpPr>
           <p:spPr>
             <a:xfrm>
-              <a:off x="817517" y="4679530"/>
+              <a:off x="817517" y="4727786"/>
               <a:ext cx="7799693" cy="0"/>
             </a:xfrm>
             <a:custGeom>
@@ -4354,15 +4354,15 @@
           </p:nvSpPr>
           <p:spPr>
             <a:xfrm>
-              <a:off x="4203673" y="1896563"/>
-              <a:ext cx="0" cy="3826579"/>
+              <a:off x="4203673" y="2073503"/>
+              <a:ext cx="0" cy="3649639"/>
             </a:xfrm>
             <a:custGeom>
               <a:avLst/>
               <a:pathLst>
-                <a:path w="0" h="3826579">
+                <a:path w="0" h="3649639">
                   <a:moveTo>
-                    <a:pt x="0" y="3826579"/>
+                    <a:pt x="0" y="3649639"/>
                   </a:moveTo>
                   <a:lnTo>
                     <a:pt x="0" y="0"/>
@@ -4397,7 +4397,7 @@
           </p:nvSpPr>
           <p:spPr>
             <a:xfrm>
-              <a:off x="692708" y="5509156"/>
+              <a:off x="692708" y="5517199"/>
               <a:ext cx="62179" cy="80101"/>
             </a:xfrm>
             <a:prstGeom prst="rect">
@@ -4443,7 +4443,7 @@
           </p:nvSpPr>
           <p:spPr>
             <a:xfrm>
-              <a:off x="692708" y="4639479"/>
+              <a:off x="692708" y="4687735"/>
               <a:ext cx="62179" cy="80101"/>
             </a:xfrm>
             <a:prstGeom prst="rect">
@@ -4489,7 +4489,7 @@
           </p:nvSpPr>
           <p:spPr>
             <a:xfrm>
-              <a:off x="692708" y="3769802"/>
+              <a:off x="692708" y="3858272"/>
               <a:ext cx="62179" cy="80101"/>
             </a:xfrm>
             <a:prstGeom prst="rect">
@@ -4535,7 +4535,7 @@
           </p:nvSpPr>
           <p:spPr>
             <a:xfrm>
-              <a:off x="692708" y="2900125"/>
+              <a:off x="692708" y="3028808"/>
               <a:ext cx="62179" cy="80101"/>
             </a:xfrm>
             <a:prstGeom prst="rect">
@@ -4581,7 +4581,7 @@
           </p:nvSpPr>
           <p:spPr>
             <a:xfrm>
-              <a:off x="692708" y="2030448"/>
+              <a:off x="692708" y="2199345"/>
               <a:ext cx="62179" cy="80101"/>
             </a:xfrm>
             <a:prstGeom prst="rect">
@@ -4857,7 +4857,7 @@
           </p:nvSpPr>
           <p:spPr>
             <a:xfrm rot="-5400000">
-              <a:off x="68446" y="3759743"/>
+              <a:off x="68446" y="3848213"/>
               <a:ext cx="1016904" cy="100218"/>
             </a:xfrm>
             <a:prstGeom prst="rect">
@@ -4898,6 +4898,52 @@
         <p:sp>
           <p:nvSpPr>
             <p:cNvPr id="38" name="tx38"/>
+            <p:cNvSpPr/>
+            <p:nvPr/>
+          </p:nvSpPr>
+          <p:spPr>
+            <a:xfrm>
+              <a:off x="817517" y="1896563"/>
+              <a:ext cx="4166463" cy="82021"/>
+            </a:xfrm>
+            <a:prstGeom prst="rect">
+              <a:avLst/>
+            </a:prstGeom>
+            <a:noFill/>
+          </p:spPr>
+          <p:txBody>
+            <a:bodyPr lIns="0" rIns="0" tIns="0" bIns="0" anchorCtr="1" anchor="ctr" wrap="none"/>
+            <a:lstStyle/>
+            <a:p>
+              <a:pPr algn="l" marL="0" marR="0" indent="0">
+                <a:lnSpc>
+                  <a:spcPts val="900"/>
+                </a:lnSpc>
+                <a:spcBef>
+                  <a:spcPts val="0"/>
+                </a:spcBef>
+                <a:spcAft>
+                  <a:spcPts val="0"/>
+                </a:spcAft>
+              </a:pPr>
+              <a:r>
+                <a:rPr sz="900">
+                  <a:solidFill>
+                    <a:srgbClr val="404040">
+                      <a:alpha val="100000"/>
+                    </a:srgbClr>
+                  </a:solidFill>
+                  <a:latin typeface="Helvetica"/>
+                  <a:cs typeface="Helvetica"/>
+                </a:rPr>
+                <a:t>subHR = 0.45 (95% CI 0.28-0.74), p = 0.001   (per 0.1-unit increase in eGFR ratio)</a:t>
+              </a:r>
+            </a:p>
+          </p:txBody>
+        </p:sp>
+        <p:sp>
+          <p:nvSpPr>
+            <p:cNvPr id="39" name="tx39"/>
             <p:cNvSpPr/>
             <p:nvPr/>
           </p:nvSpPr>

--- a/docs/plots/carbo/jx_carbo_linsubhr_ratio_hosp3.pptx
+++ b/docs/plots/carbo/jx_carbo_linsubhr_ratio_hosp3.pptx
@@ -2271,26 +2271,26 @@
           </p:nvSpPr>
           <p:spPr>
             <a:xfrm>
-              <a:off x="817517" y="5142518"/>
-              <a:ext cx="7799693" cy="0"/>
+              <a:off x="915645" y="5071743"/>
+              <a:ext cx="7682587" cy="0"/>
             </a:xfrm>
             <a:custGeom>
               <a:avLst/>
               <a:pathLst>
-                <a:path w="7799693" h="0">
+                <a:path w="7682587" h="0">
                   <a:moveTo>
                     <a:pt x="0" y="0"/>
                   </a:moveTo>
                   <a:lnTo>
-                    <a:pt x="7799693" y="0"/>
-                  </a:lnTo>
-                  <a:lnTo>
-                    <a:pt x="7799693" y="0"/>
+                    <a:pt x="7682587" y="0"/>
+                  </a:lnTo>
+                  <a:lnTo>
+                    <a:pt x="7682587" y="0"/>
                   </a:lnTo>
                 </a:path>
               </a:pathLst>
             </a:custGeom>
-            <a:ln w="6775" cap="flat">
+            <a:ln w="8623" cap="flat">
               <a:solidFill>
                 <a:srgbClr val="EBEBEB">
                   <a:alpha val="100000"/>
@@ -2314,26 +2314,26 @@
           </p:nvSpPr>
           <p:spPr>
             <a:xfrm>
-              <a:off x="817517" y="4313054"/>
-              <a:ext cx="7799693" cy="0"/>
+              <a:off x="915645" y="4298074"/>
+              <a:ext cx="7682587" cy="0"/>
             </a:xfrm>
             <a:custGeom>
               <a:avLst/>
               <a:pathLst>
-                <a:path w="7799693" h="0">
+                <a:path w="7682587" h="0">
                   <a:moveTo>
                     <a:pt x="0" y="0"/>
                   </a:moveTo>
                   <a:lnTo>
-                    <a:pt x="7799693" y="0"/>
-                  </a:lnTo>
-                  <a:lnTo>
-                    <a:pt x="7799693" y="0"/>
+                    <a:pt x="7682587" y="0"/>
+                  </a:lnTo>
+                  <a:lnTo>
+                    <a:pt x="7682587" y="0"/>
                   </a:lnTo>
                 </a:path>
               </a:pathLst>
             </a:custGeom>
-            <a:ln w="6775" cap="flat">
+            <a:ln w="8623" cap="flat">
               <a:solidFill>
                 <a:srgbClr val="EBEBEB">
                   <a:alpha val="100000"/>
@@ -2357,26 +2357,26 @@
           </p:nvSpPr>
           <p:spPr>
             <a:xfrm>
-              <a:off x="817517" y="3483591"/>
-              <a:ext cx="7799693" cy="0"/>
+              <a:off x="915645" y="3524405"/>
+              <a:ext cx="7682587" cy="0"/>
             </a:xfrm>
             <a:custGeom>
               <a:avLst/>
               <a:pathLst>
-                <a:path w="7799693" h="0">
+                <a:path w="7682587" h="0">
                   <a:moveTo>
                     <a:pt x="0" y="0"/>
                   </a:moveTo>
                   <a:lnTo>
-                    <a:pt x="7799693" y="0"/>
-                  </a:lnTo>
-                  <a:lnTo>
-                    <a:pt x="7799693" y="0"/>
+                    <a:pt x="7682587" y="0"/>
+                  </a:lnTo>
+                  <a:lnTo>
+                    <a:pt x="7682587" y="0"/>
                   </a:lnTo>
                 </a:path>
               </a:pathLst>
             </a:custGeom>
-            <a:ln w="6775" cap="flat">
+            <a:ln w="8623" cap="flat">
               <a:solidFill>
                 <a:srgbClr val="EBEBEB">
                   <a:alpha val="100000"/>
@@ -2400,26 +2400,26 @@
           </p:nvSpPr>
           <p:spPr>
             <a:xfrm>
-              <a:off x="817517" y="2654127"/>
-              <a:ext cx="7799693" cy="0"/>
+              <a:off x="915645" y="2750737"/>
+              <a:ext cx="7682587" cy="0"/>
             </a:xfrm>
             <a:custGeom>
               <a:avLst/>
               <a:pathLst>
-                <a:path w="7799693" h="0">
+                <a:path w="7682587" h="0">
                   <a:moveTo>
                     <a:pt x="0" y="0"/>
                   </a:moveTo>
                   <a:lnTo>
-                    <a:pt x="7799693" y="0"/>
-                  </a:lnTo>
-                  <a:lnTo>
-                    <a:pt x="7799693" y="0"/>
+                    <a:pt x="7682587" y="0"/>
+                  </a:lnTo>
+                  <a:lnTo>
+                    <a:pt x="7682587" y="0"/>
                   </a:lnTo>
                 </a:path>
               </a:pathLst>
             </a:custGeom>
-            <a:ln w="6775" cap="flat">
+            <a:ln w="8623" cap="flat">
               <a:solidFill>
                 <a:srgbClr val="EBEBEB">
                   <a:alpha val="100000"/>
@@ -2443,15 +2443,15 @@
           </p:nvSpPr>
           <p:spPr>
             <a:xfrm>
-              <a:off x="1615213" y="2073503"/>
-              <a:ext cx="0" cy="3649639"/>
+              <a:off x="1701364" y="2209169"/>
+              <a:ext cx="0" cy="3404141"/>
             </a:xfrm>
             <a:custGeom>
               <a:avLst/>
               <a:pathLst>
-                <a:path w="0" h="3649639">
+                <a:path w="0" h="3404141">
                   <a:moveTo>
-                    <a:pt x="0" y="3649639"/>
+                    <a:pt x="0" y="3404141"/>
                   </a:moveTo>
                   <a:lnTo>
                     <a:pt x="0" y="0"/>
@@ -2462,7 +2462,7 @@
                 </a:path>
               </a:pathLst>
             </a:custGeom>
-            <a:ln w="6775" cap="flat">
+            <a:ln w="8623" cap="flat">
               <a:solidFill>
                 <a:srgbClr val="EBEBEB">
                   <a:alpha val="100000"/>
@@ -2486,15 +2486,15 @@
           </p:nvSpPr>
           <p:spPr>
             <a:xfrm>
-              <a:off x="3387871" y="2073503"/>
-              <a:ext cx="0" cy="3649639"/>
+              <a:off x="3447406" y="2209169"/>
+              <a:ext cx="0" cy="3404141"/>
             </a:xfrm>
             <a:custGeom>
               <a:avLst/>
               <a:pathLst>
-                <a:path w="0" h="3649639">
+                <a:path w="0" h="3404141">
                   <a:moveTo>
-                    <a:pt x="0" y="3649639"/>
+                    <a:pt x="0" y="3404141"/>
                   </a:moveTo>
                   <a:lnTo>
                     <a:pt x="0" y="0"/>
@@ -2505,7 +2505,7 @@
                 </a:path>
               </a:pathLst>
             </a:custGeom>
-            <a:ln w="6775" cap="flat">
+            <a:ln w="8623" cap="flat">
               <a:solidFill>
                 <a:srgbClr val="EBEBEB">
                   <a:alpha val="100000"/>
@@ -2529,15 +2529,15 @@
           </p:nvSpPr>
           <p:spPr>
             <a:xfrm>
-              <a:off x="5160528" y="2073503"/>
-              <a:ext cx="0" cy="3649639"/>
+              <a:off x="5193449" y="2209169"/>
+              <a:ext cx="0" cy="3404141"/>
             </a:xfrm>
             <a:custGeom>
               <a:avLst/>
               <a:pathLst>
-                <a:path w="0" h="3649639">
+                <a:path w="0" h="3404141">
                   <a:moveTo>
-                    <a:pt x="0" y="3649639"/>
+                    <a:pt x="0" y="3404141"/>
                   </a:moveTo>
                   <a:lnTo>
                     <a:pt x="0" y="0"/>
@@ -2548,7 +2548,7 @@
                 </a:path>
               </a:pathLst>
             </a:custGeom>
-            <a:ln w="6775" cap="flat">
+            <a:ln w="8623" cap="flat">
               <a:solidFill>
                 <a:srgbClr val="EBEBEB">
                   <a:alpha val="100000"/>
@@ -2572,15 +2572,15 @@
           </p:nvSpPr>
           <p:spPr>
             <a:xfrm>
-              <a:off x="6933186" y="2073503"/>
-              <a:ext cx="0" cy="3649639"/>
+              <a:off x="6939491" y="2209169"/>
+              <a:ext cx="0" cy="3404141"/>
             </a:xfrm>
             <a:custGeom>
               <a:avLst/>
               <a:pathLst>
-                <a:path w="0" h="3649639">
+                <a:path w="0" h="3404141">
                   <a:moveTo>
-                    <a:pt x="0" y="3649639"/>
+                    <a:pt x="0" y="3404141"/>
                   </a:moveTo>
                   <a:lnTo>
                     <a:pt x="0" y="0"/>
@@ -2591,7 +2591,7 @@
                 </a:path>
               </a:pathLst>
             </a:custGeom>
-            <a:ln w="6775" cap="flat">
+            <a:ln w="8623" cap="flat">
               <a:solidFill>
                 <a:srgbClr val="EBEBEB">
                   <a:alpha val="100000"/>
@@ -2615,26 +2615,26 @@
           </p:nvSpPr>
           <p:spPr>
             <a:xfrm>
-              <a:off x="817517" y="5557249"/>
-              <a:ext cx="7799693" cy="0"/>
+              <a:off x="915645" y="5458577"/>
+              <a:ext cx="7682587" cy="0"/>
             </a:xfrm>
             <a:custGeom>
               <a:avLst/>
               <a:pathLst>
-                <a:path w="7799693" h="0">
+                <a:path w="7682587" h="0">
                   <a:moveTo>
                     <a:pt x="0" y="0"/>
                   </a:moveTo>
                   <a:lnTo>
-                    <a:pt x="7799693" y="0"/>
-                  </a:lnTo>
-                  <a:lnTo>
-                    <a:pt x="7799693" y="0"/>
+                    <a:pt x="7682587" y="0"/>
+                  </a:lnTo>
+                  <a:lnTo>
+                    <a:pt x="7682587" y="0"/>
                   </a:lnTo>
                 </a:path>
               </a:pathLst>
             </a:custGeom>
-            <a:ln w="13550" cap="flat">
+            <a:ln w="17246" cap="flat">
               <a:solidFill>
                 <a:srgbClr val="EBEBEB">
                   <a:alpha val="100000"/>
@@ -2658,26 +2658,26 @@
           </p:nvSpPr>
           <p:spPr>
             <a:xfrm>
-              <a:off x="817517" y="4727786"/>
-              <a:ext cx="7799693" cy="0"/>
+              <a:off x="915645" y="4684908"/>
+              <a:ext cx="7682587" cy="0"/>
             </a:xfrm>
             <a:custGeom>
               <a:avLst/>
               <a:pathLst>
-                <a:path w="7799693" h="0">
+                <a:path w="7682587" h="0">
                   <a:moveTo>
                     <a:pt x="0" y="0"/>
                   </a:moveTo>
                   <a:lnTo>
-                    <a:pt x="7799693" y="0"/>
-                  </a:lnTo>
-                  <a:lnTo>
-                    <a:pt x="7799693" y="0"/>
+                    <a:pt x="7682587" y="0"/>
+                  </a:lnTo>
+                  <a:lnTo>
+                    <a:pt x="7682587" y="0"/>
                   </a:lnTo>
                 </a:path>
               </a:pathLst>
             </a:custGeom>
-            <a:ln w="13550" cap="flat">
+            <a:ln w="17246" cap="flat">
               <a:solidFill>
                 <a:srgbClr val="EBEBEB">
                   <a:alpha val="100000"/>
@@ -2701,26 +2701,26 @@
           </p:nvSpPr>
           <p:spPr>
             <a:xfrm>
-              <a:off x="817517" y="3898322"/>
-              <a:ext cx="7799693" cy="0"/>
+              <a:off x="915645" y="3911240"/>
+              <a:ext cx="7682587" cy="0"/>
             </a:xfrm>
             <a:custGeom>
               <a:avLst/>
               <a:pathLst>
-                <a:path w="7799693" h="0">
+                <a:path w="7682587" h="0">
                   <a:moveTo>
                     <a:pt x="0" y="0"/>
                   </a:moveTo>
                   <a:lnTo>
-                    <a:pt x="7799693" y="0"/>
-                  </a:lnTo>
-                  <a:lnTo>
-                    <a:pt x="7799693" y="0"/>
+                    <a:pt x="7682587" y="0"/>
+                  </a:lnTo>
+                  <a:lnTo>
+                    <a:pt x="7682587" y="0"/>
                   </a:lnTo>
                 </a:path>
               </a:pathLst>
             </a:custGeom>
-            <a:ln w="13550" cap="flat">
+            <a:ln w="17246" cap="flat">
               <a:solidFill>
                 <a:srgbClr val="EBEBEB">
                   <a:alpha val="100000"/>
@@ -2744,26 +2744,26 @@
           </p:nvSpPr>
           <p:spPr>
             <a:xfrm>
-              <a:off x="817517" y="3068859"/>
-              <a:ext cx="7799693" cy="0"/>
+              <a:off x="915645" y="3137571"/>
+              <a:ext cx="7682587" cy="0"/>
             </a:xfrm>
             <a:custGeom>
               <a:avLst/>
               <a:pathLst>
-                <a:path w="7799693" h="0">
+                <a:path w="7682587" h="0">
                   <a:moveTo>
                     <a:pt x="0" y="0"/>
                   </a:moveTo>
                   <a:lnTo>
-                    <a:pt x="7799693" y="0"/>
-                  </a:lnTo>
-                  <a:lnTo>
-                    <a:pt x="7799693" y="0"/>
+                    <a:pt x="7682587" y="0"/>
+                  </a:lnTo>
+                  <a:lnTo>
+                    <a:pt x="7682587" y="0"/>
                   </a:lnTo>
                 </a:path>
               </a:pathLst>
             </a:custGeom>
-            <a:ln w="13550" cap="flat">
+            <a:ln w="17246" cap="flat">
               <a:solidFill>
                 <a:srgbClr val="EBEBEB">
                   <a:alpha val="100000"/>
@@ -2787,26 +2787,26 @@
           </p:nvSpPr>
           <p:spPr>
             <a:xfrm>
-              <a:off x="817517" y="2239395"/>
-              <a:ext cx="7799693" cy="0"/>
+              <a:off x="915645" y="2363903"/>
+              <a:ext cx="7682587" cy="0"/>
             </a:xfrm>
             <a:custGeom>
               <a:avLst/>
               <a:pathLst>
-                <a:path w="7799693" h="0">
+                <a:path w="7682587" h="0">
                   <a:moveTo>
                     <a:pt x="0" y="0"/>
                   </a:moveTo>
                   <a:lnTo>
-                    <a:pt x="7799693" y="0"/>
-                  </a:lnTo>
-                  <a:lnTo>
-                    <a:pt x="7799693" y="0"/>
+                    <a:pt x="7682587" y="0"/>
+                  </a:lnTo>
+                  <a:lnTo>
+                    <a:pt x="7682587" y="0"/>
                   </a:lnTo>
                 </a:path>
               </a:pathLst>
             </a:custGeom>
-            <a:ln w="13550" cap="flat">
+            <a:ln w="17246" cap="flat">
               <a:solidFill>
                 <a:srgbClr val="EBEBEB">
                   <a:alpha val="100000"/>
@@ -2830,15 +2830,15 @@
           </p:nvSpPr>
           <p:spPr>
             <a:xfrm>
-              <a:off x="2501542" y="2073503"/>
-              <a:ext cx="0" cy="3649639"/>
+              <a:off x="2574385" y="2209169"/>
+              <a:ext cx="0" cy="3404141"/>
             </a:xfrm>
             <a:custGeom>
               <a:avLst/>
               <a:pathLst>
-                <a:path w="0" h="3649639">
+                <a:path w="0" h="3404141">
                   <a:moveTo>
-                    <a:pt x="0" y="3649639"/>
+                    <a:pt x="0" y="3404141"/>
                   </a:moveTo>
                   <a:lnTo>
                     <a:pt x="0" y="0"/>
@@ -2849,7 +2849,7 @@
                 </a:path>
               </a:pathLst>
             </a:custGeom>
-            <a:ln w="13550" cap="flat">
+            <a:ln w="17246" cap="flat">
               <a:solidFill>
                 <a:srgbClr val="EBEBEB">
                   <a:alpha val="100000"/>
@@ -2873,15 +2873,15 @@
           </p:nvSpPr>
           <p:spPr>
             <a:xfrm>
-              <a:off x="4274200" y="2073503"/>
-              <a:ext cx="0" cy="3649639"/>
+              <a:off x="4320427" y="2209169"/>
+              <a:ext cx="0" cy="3404141"/>
             </a:xfrm>
             <a:custGeom>
               <a:avLst/>
               <a:pathLst>
-                <a:path w="0" h="3649639">
+                <a:path w="0" h="3404141">
                   <a:moveTo>
-                    <a:pt x="0" y="3649639"/>
+                    <a:pt x="0" y="3404141"/>
                   </a:moveTo>
                   <a:lnTo>
                     <a:pt x="0" y="0"/>
@@ -2892,7 +2892,7 @@
                 </a:path>
               </a:pathLst>
             </a:custGeom>
-            <a:ln w="13550" cap="flat">
+            <a:ln w="17246" cap="flat">
               <a:solidFill>
                 <a:srgbClr val="EBEBEB">
                   <a:alpha val="100000"/>
@@ -2916,15 +2916,15 @@
           </p:nvSpPr>
           <p:spPr>
             <a:xfrm>
-              <a:off x="6046857" y="2073503"/>
-              <a:ext cx="0" cy="3649639"/>
+              <a:off x="6066470" y="2209169"/>
+              <a:ext cx="0" cy="3404141"/>
             </a:xfrm>
             <a:custGeom>
               <a:avLst/>
               <a:pathLst>
-                <a:path w="0" h="3649639">
+                <a:path w="0" h="3404141">
                   <a:moveTo>
-                    <a:pt x="0" y="3649639"/>
+                    <a:pt x="0" y="3404141"/>
                   </a:moveTo>
                   <a:lnTo>
                     <a:pt x="0" y="0"/>
@@ -2935,7 +2935,7 @@
                 </a:path>
               </a:pathLst>
             </a:custGeom>
-            <a:ln w="13550" cap="flat">
+            <a:ln w="17246" cap="flat">
               <a:solidFill>
                 <a:srgbClr val="EBEBEB">
                   <a:alpha val="100000"/>
@@ -2959,15 +2959,15 @@
           </p:nvSpPr>
           <p:spPr>
             <a:xfrm>
-              <a:off x="7819515" y="2073503"/>
-              <a:ext cx="0" cy="3649639"/>
+              <a:off x="7812512" y="2209169"/>
+              <a:ext cx="0" cy="3404141"/>
             </a:xfrm>
             <a:custGeom>
               <a:avLst/>
               <a:pathLst>
-                <a:path w="0" h="3649639">
+                <a:path w="0" h="3404141">
                   <a:moveTo>
-                    <a:pt x="0" y="3649639"/>
+                    <a:pt x="0" y="3404141"/>
                   </a:moveTo>
                   <a:lnTo>
                     <a:pt x="0" y="0"/>
@@ -2978,7 +2978,7 @@
                 </a:path>
               </a:pathLst>
             </a:custGeom>
-            <a:ln w="13550" cap="flat">
+            <a:ln w="17246" cap="flat">
               <a:solidFill>
                 <a:srgbClr val="EBEBEB">
                   <a:alpha val="100000"/>
@@ -3002,498 +3002,498 @@
           </p:nvSpPr>
           <p:spPr>
             <a:xfrm>
-              <a:off x="817517" y="2073503"/>
-              <a:ext cx="7370972" cy="3481052"/>
+              <a:off x="915645" y="2209169"/>
+              <a:ext cx="7260303" cy="3246895"/>
             </a:xfrm>
             <a:custGeom>
               <a:avLst/>
               <a:pathLst>
-                <a:path w="7370972" h="3481052">
+                <a:path w="7260303" h="3246895">
                   <a:moveTo>
-                    <a:pt x="2388750" y="0"/>
+                    <a:pt x="2352885" y="0"/>
                   </a:moveTo>
                   <a:lnTo>
-                    <a:pt x="2402393" y="70835"/>
-                  </a:lnTo>
-                  <a:lnTo>
-                    <a:pt x="2480027" y="431321"/>
-                  </a:lnTo>
-                  <a:lnTo>
-                    <a:pt x="2557661" y="753731"/>
-                  </a:lnTo>
-                  <a:lnTo>
-                    <a:pt x="2635295" y="1042087"/>
-                  </a:lnTo>
-                  <a:lnTo>
-                    <a:pt x="2712930" y="1299985"/>
-                  </a:lnTo>
-                  <a:lnTo>
-                    <a:pt x="2790564" y="1530644"/>
-                  </a:lnTo>
-                  <a:lnTo>
-                    <a:pt x="2868198" y="1736939"/>
-                  </a:lnTo>
-                  <a:lnTo>
-                    <a:pt x="2945832" y="1921444"/>
-                  </a:lnTo>
-                  <a:lnTo>
-                    <a:pt x="3023466" y="2086461"/>
-                  </a:lnTo>
-                  <a:lnTo>
-                    <a:pt x="3101100" y="2234048"/>
-                  </a:lnTo>
-                  <a:lnTo>
-                    <a:pt x="3178734" y="2366047"/>
-                  </a:lnTo>
-                  <a:lnTo>
-                    <a:pt x="3256368" y="2484103"/>
-                  </a:lnTo>
-                  <a:lnTo>
-                    <a:pt x="3334002" y="2589690"/>
-                  </a:lnTo>
-                  <a:lnTo>
-                    <a:pt x="3411636" y="2661540"/>
-                  </a:lnTo>
-                  <a:lnTo>
-                    <a:pt x="3489270" y="2683261"/>
-                  </a:lnTo>
-                  <a:lnTo>
-                    <a:pt x="3566904" y="2704408"/>
-                  </a:lnTo>
-                  <a:lnTo>
-                    <a:pt x="3644538" y="2724996"/>
-                  </a:lnTo>
-                  <a:lnTo>
-                    <a:pt x="3722172" y="2745040"/>
-                  </a:lnTo>
-                  <a:lnTo>
-                    <a:pt x="3799806" y="2764555"/>
-                  </a:lnTo>
-                  <a:lnTo>
-                    <a:pt x="3877440" y="2783555"/>
-                  </a:lnTo>
-                  <a:lnTo>
-                    <a:pt x="3955074" y="2802052"/>
-                  </a:lnTo>
-                  <a:lnTo>
-                    <a:pt x="4032708" y="2820061"/>
-                  </a:lnTo>
-                  <a:lnTo>
-                    <a:pt x="4110342" y="2837594"/>
-                  </a:lnTo>
-                  <a:lnTo>
-                    <a:pt x="4187976" y="2854664"/>
-                  </a:lnTo>
-                  <a:lnTo>
-                    <a:pt x="4265610" y="2871283"/>
-                  </a:lnTo>
-                  <a:lnTo>
-                    <a:pt x="4343244" y="2887463"/>
-                  </a:lnTo>
-                  <a:lnTo>
-                    <a:pt x="4420879" y="2903215"/>
-                  </a:lnTo>
-                  <a:lnTo>
-                    <a:pt x="4498513" y="2918552"/>
-                  </a:lnTo>
-                  <a:lnTo>
-                    <a:pt x="4576147" y="2933483"/>
-                  </a:lnTo>
-                  <a:lnTo>
-                    <a:pt x="4653781" y="2948019"/>
-                  </a:lnTo>
-                  <a:lnTo>
-                    <a:pt x="4731415" y="2962172"/>
-                  </a:lnTo>
-                  <a:lnTo>
-                    <a:pt x="4809049" y="2975951"/>
-                  </a:lnTo>
-                  <a:lnTo>
-                    <a:pt x="4886683" y="2989366"/>
-                  </a:lnTo>
-                  <a:lnTo>
-                    <a:pt x="4964317" y="3002426"/>
-                  </a:lnTo>
-                  <a:lnTo>
-                    <a:pt x="5041951" y="3015142"/>
-                  </a:lnTo>
-                  <a:lnTo>
-                    <a:pt x="5119585" y="3027521"/>
-                  </a:lnTo>
-                  <a:lnTo>
-                    <a:pt x="5197219" y="3039573"/>
-                  </a:lnTo>
-                  <a:lnTo>
-                    <a:pt x="5274853" y="3051307"/>
-                  </a:lnTo>
-                  <a:lnTo>
-                    <a:pt x="5352487" y="3062732"/>
-                  </a:lnTo>
-                  <a:lnTo>
-                    <a:pt x="5430121" y="3073854"/>
-                  </a:lnTo>
-                  <a:lnTo>
-                    <a:pt x="5507755" y="3084682"/>
-                  </a:lnTo>
-                  <a:lnTo>
-                    <a:pt x="5585389" y="3095225"/>
-                  </a:lnTo>
-                  <a:lnTo>
-                    <a:pt x="5663023" y="3105488"/>
-                  </a:lnTo>
-                  <a:lnTo>
-                    <a:pt x="5740657" y="3115481"/>
-                  </a:lnTo>
-                  <a:lnTo>
-                    <a:pt x="5818291" y="3125210"/>
-                  </a:lnTo>
-                  <a:lnTo>
-                    <a:pt x="5895925" y="3134682"/>
-                  </a:lnTo>
-                  <a:lnTo>
-                    <a:pt x="5973559" y="3143903"/>
-                  </a:lnTo>
-                  <a:lnTo>
-                    <a:pt x="6051193" y="3152881"/>
-                  </a:lnTo>
-                  <a:lnTo>
-                    <a:pt x="6128827" y="3161622"/>
-                  </a:lnTo>
-                  <a:lnTo>
-                    <a:pt x="6206462" y="3170131"/>
-                  </a:lnTo>
-                  <a:lnTo>
-                    <a:pt x="6284096" y="3178416"/>
-                  </a:lnTo>
-                  <a:lnTo>
-                    <a:pt x="6361730" y="3186483"/>
-                  </a:lnTo>
-                  <a:lnTo>
-                    <a:pt x="6439364" y="3194336"/>
-                  </a:lnTo>
-                  <a:lnTo>
-                    <a:pt x="6516998" y="3201981"/>
-                  </a:lnTo>
-                  <a:lnTo>
-                    <a:pt x="6594632" y="3209425"/>
-                  </a:lnTo>
-                  <a:lnTo>
-                    <a:pt x="6672266" y="3216672"/>
-                  </a:lnTo>
-                  <a:lnTo>
-                    <a:pt x="6749900" y="3223727"/>
-                  </a:lnTo>
-                  <a:lnTo>
-                    <a:pt x="6827534" y="3230596"/>
-                  </a:lnTo>
-                  <a:lnTo>
-                    <a:pt x="6905168" y="3237284"/>
-                  </a:lnTo>
-                  <a:lnTo>
-                    <a:pt x="6982802" y="3243795"/>
-                  </a:lnTo>
-                  <a:lnTo>
-                    <a:pt x="7060436" y="3250134"/>
-                  </a:lnTo>
-                  <a:lnTo>
-                    <a:pt x="7138070" y="3256305"/>
-                  </a:lnTo>
-                  <a:lnTo>
-                    <a:pt x="7215704" y="3262314"/>
-                  </a:lnTo>
-                  <a:lnTo>
-                    <a:pt x="7293338" y="3268164"/>
-                  </a:lnTo>
-                  <a:lnTo>
-                    <a:pt x="7370972" y="3273859"/>
-                  </a:lnTo>
-                  <a:lnTo>
-                    <a:pt x="7370972" y="3481052"/>
-                  </a:lnTo>
-                  <a:lnTo>
-                    <a:pt x="7293338" y="3480734"/>
-                  </a:lnTo>
-                  <a:lnTo>
-                    <a:pt x="7215704" y="3480378"/>
-                  </a:lnTo>
-                  <a:lnTo>
-                    <a:pt x="7138070" y="3479981"/>
-                  </a:lnTo>
-                  <a:lnTo>
-                    <a:pt x="7060436" y="3479536"/>
-                  </a:lnTo>
-                  <a:lnTo>
-                    <a:pt x="6982802" y="3479039"/>
-                  </a:lnTo>
-                  <a:lnTo>
-                    <a:pt x="6905168" y="3478483"/>
-                  </a:lnTo>
-                  <a:lnTo>
-                    <a:pt x="6827534" y="3477861"/>
-                  </a:lnTo>
-                  <a:lnTo>
-                    <a:pt x="6749900" y="3477166"/>
-                  </a:lnTo>
-                  <a:lnTo>
-                    <a:pt x="6672266" y="3476389"/>
-                  </a:lnTo>
-                  <a:lnTo>
-                    <a:pt x="6594632" y="3475520"/>
-                  </a:lnTo>
-                  <a:lnTo>
-                    <a:pt x="6516998" y="3474549"/>
-                  </a:lnTo>
-                  <a:lnTo>
-                    <a:pt x="6439364" y="3473462"/>
-                  </a:lnTo>
-                  <a:lnTo>
-                    <a:pt x="6361730" y="3472248"/>
-                  </a:lnTo>
-                  <a:lnTo>
-                    <a:pt x="6284096" y="3470890"/>
-                  </a:lnTo>
-                  <a:lnTo>
-                    <a:pt x="6206462" y="3469371"/>
-                  </a:lnTo>
-                  <a:lnTo>
-                    <a:pt x="6128827" y="3467674"/>
-                  </a:lnTo>
-                  <a:lnTo>
-                    <a:pt x="6051193" y="3465776"/>
-                  </a:lnTo>
-                  <a:lnTo>
-                    <a:pt x="5973559" y="3463653"/>
-                  </a:lnTo>
-                  <a:lnTo>
-                    <a:pt x="5895925" y="3461280"/>
-                  </a:lnTo>
-                  <a:lnTo>
-                    <a:pt x="5818291" y="3458627"/>
-                  </a:lnTo>
-                  <a:lnTo>
-                    <a:pt x="5740657" y="3455661"/>
-                  </a:lnTo>
-                  <a:lnTo>
-                    <a:pt x="5663023" y="3452344"/>
-                  </a:lnTo>
-                  <a:lnTo>
-                    <a:pt x="5585389" y="3448635"/>
-                  </a:lnTo>
-                  <a:lnTo>
-                    <a:pt x="5507755" y="3444489"/>
-                  </a:lnTo>
-                  <a:lnTo>
-                    <a:pt x="5430121" y="3439852"/>
-                  </a:lnTo>
-                  <a:lnTo>
-                    <a:pt x="5352487" y="3434669"/>
-                  </a:lnTo>
-                  <a:lnTo>
-                    <a:pt x="5274853" y="3428873"/>
-                  </a:lnTo>
-                  <a:lnTo>
-                    <a:pt x="5197219" y="3422392"/>
-                  </a:lnTo>
-                  <a:lnTo>
-                    <a:pt x="5119585" y="3415146"/>
-                  </a:lnTo>
-                  <a:lnTo>
-                    <a:pt x="5041951" y="3407045"/>
-                  </a:lnTo>
-                  <a:lnTo>
-                    <a:pt x="4964317" y="3397986"/>
-                  </a:lnTo>
-                  <a:lnTo>
-                    <a:pt x="4886683" y="3387858"/>
-                  </a:lnTo>
-                  <a:lnTo>
-                    <a:pt x="4809049" y="3376534"/>
-                  </a:lnTo>
-                  <a:lnTo>
-                    <a:pt x="4731415" y="3363872"/>
-                  </a:lnTo>
-                  <a:lnTo>
-                    <a:pt x="4653781" y="3349715"/>
-                  </a:lnTo>
-                  <a:lnTo>
-                    <a:pt x="4576147" y="3333887"/>
-                  </a:lnTo>
-                  <a:lnTo>
-                    <a:pt x="4498513" y="3316188"/>
-                  </a:lnTo>
-                  <a:lnTo>
-                    <a:pt x="4420879" y="3296400"/>
-                  </a:lnTo>
-                  <a:lnTo>
-                    <a:pt x="4343244" y="3274275"/>
-                  </a:lnTo>
-                  <a:lnTo>
-                    <a:pt x="4265610" y="3249537"/>
-                  </a:lnTo>
-                  <a:lnTo>
-                    <a:pt x="4187976" y="3221877"/>
-                  </a:lnTo>
-                  <a:lnTo>
-                    <a:pt x="4110342" y="3190950"/>
-                  </a:lnTo>
-                  <a:lnTo>
-                    <a:pt x="4032708" y="3156372"/>
-                  </a:lnTo>
-                  <a:lnTo>
-                    <a:pt x="3955074" y="3117709"/>
-                  </a:lnTo>
-                  <a:lnTo>
-                    <a:pt x="3877440" y="3074481"/>
-                  </a:lnTo>
-                  <a:lnTo>
-                    <a:pt x="3799806" y="3026147"/>
-                  </a:lnTo>
-                  <a:lnTo>
-                    <a:pt x="3722172" y="2972106"/>
-                  </a:lnTo>
-                  <a:lnTo>
-                    <a:pt x="3644538" y="2911682"/>
-                  </a:lnTo>
-                  <a:lnTo>
-                    <a:pt x="3566904" y="2844122"/>
-                  </a:lnTo>
-                  <a:lnTo>
-                    <a:pt x="3489270" y="2768583"/>
-                  </a:lnTo>
-                  <a:lnTo>
-                    <a:pt x="3411636" y="2684124"/>
-                  </a:lnTo>
-                  <a:lnTo>
-                    <a:pt x="3334002" y="2639230"/>
-                  </a:lnTo>
-                  <a:lnTo>
-                    <a:pt x="3256368" y="2616314"/>
-                  </a:lnTo>
-                  <a:lnTo>
-                    <a:pt x="3178734" y="2592777"/>
-                  </a:lnTo>
-                  <a:lnTo>
-                    <a:pt x="3101100" y="2568601"/>
-                  </a:lnTo>
-                  <a:lnTo>
-                    <a:pt x="3023466" y="2543768"/>
-                  </a:lnTo>
-                  <a:lnTo>
-                    <a:pt x="2945832" y="2518263"/>
-                  </a:lnTo>
-                  <a:lnTo>
-                    <a:pt x="2868198" y="2492065"/>
-                  </a:lnTo>
-                  <a:lnTo>
-                    <a:pt x="2790564" y="2465156"/>
-                  </a:lnTo>
-                  <a:lnTo>
-                    <a:pt x="2712930" y="2437517"/>
-                  </a:lnTo>
-                  <a:lnTo>
-                    <a:pt x="2635295" y="2409128"/>
-                  </a:lnTo>
-                  <a:lnTo>
-                    <a:pt x="2557661" y="2379968"/>
-                  </a:lnTo>
-                  <a:lnTo>
-                    <a:pt x="2480027" y="2350018"/>
-                  </a:lnTo>
-                  <a:lnTo>
-                    <a:pt x="2402393" y="2319255"/>
-                  </a:lnTo>
-                  <a:lnTo>
-                    <a:pt x="2324759" y="2287657"/>
-                  </a:lnTo>
-                  <a:lnTo>
-                    <a:pt x="2247125" y="2255201"/>
-                  </a:lnTo>
-                  <a:lnTo>
-                    <a:pt x="2169491" y="2221865"/>
-                  </a:lnTo>
-                  <a:lnTo>
-                    <a:pt x="2091857" y="2187625"/>
-                  </a:lnTo>
-                  <a:lnTo>
-                    <a:pt x="2014223" y="2152455"/>
-                  </a:lnTo>
-                  <a:lnTo>
-                    <a:pt x="1936589" y="2116331"/>
-                  </a:lnTo>
-                  <a:lnTo>
-                    <a:pt x="1858955" y="2079227"/>
-                  </a:lnTo>
-                  <a:lnTo>
-                    <a:pt x="1781321" y="2041116"/>
-                  </a:lnTo>
-                  <a:lnTo>
-                    <a:pt x="1703687" y="2001971"/>
-                  </a:lnTo>
-                  <a:lnTo>
-                    <a:pt x="1626053" y="1961763"/>
-                  </a:lnTo>
-                  <a:lnTo>
-                    <a:pt x="1548419" y="1920465"/>
-                  </a:lnTo>
-                  <a:lnTo>
-                    <a:pt x="1470785" y="1878046"/>
-                  </a:lnTo>
-                  <a:lnTo>
-                    <a:pt x="1393151" y="1834476"/>
-                  </a:lnTo>
-                  <a:lnTo>
-                    <a:pt x="1315517" y="1789724"/>
-                  </a:lnTo>
-                  <a:lnTo>
-                    <a:pt x="1237883" y="1743757"/>
-                  </a:lnTo>
-                  <a:lnTo>
-                    <a:pt x="1160249" y="1696544"/>
-                  </a:lnTo>
-                  <a:lnTo>
-                    <a:pt x="1082615" y="1648049"/>
-                  </a:lnTo>
-                  <a:lnTo>
-                    <a:pt x="1004981" y="1598238"/>
-                  </a:lnTo>
-                  <a:lnTo>
-                    <a:pt x="927346" y="1547075"/>
-                  </a:lnTo>
-                  <a:lnTo>
-                    <a:pt x="849712" y="1494525"/>
-                  </a:lnTo>
-                  <a:lnTo>
-                    <a:pt x="772078" y="1440548"/>
-                  </a:lnTo>
-                  <a:lnTo>
-                    <a:pt x="694444" y="1385107"/>
-                  </a:lnTo>
-                  <a:lnTo>
-                    <a:pt x="616810" y="1328161"/>
-                  </a:lnTo>
-                  <a:lnTo>
-                    <a:pt x="539176" y="1269670"/>
-                  </a:lnTo>
-                  <a:lnTo>
-                    <a:pt x="461542" y="1209592"/>
-                  </a:lnTo>
-                  <a:lnTo>
-                    <a:pt x="383908" y="1147884"/>
-                  </a:lnTo>
-                  <a:lnTo>
-                    <a:pt x="306274" y="1084501"/>
-                  </a:lnTo>
-                  <a:lnTo>
-                    <a:pt x="228640" y="1019399"/>
-                  </a:lnTo>
-                  <a:lnTo>
-                    <a:pt x="151006" y="952530"/>
-                  </a:lnTo>
-                  <a:lnTo>
-                    <a:pt x="73372" y="883847"/>
-                  </a:lnTo>
-                  <a:lnTo>
-                    <a:pt x="0" y="817172"/>
+                    <a:pt x="2366323" y="66070"/>
+                  </a:lnTo>
+                  <a:lnTo>
+                    <a:pt x="2442792" y="402308"/>
+                  </a:lnTo>
+                  <a:lnTo>
+                    <a:pt x="2519260" y="703030"/>
+                  </a:lnTo>
+                  <a:lnTo>
+                    <a:pt x="2595729" y="971990"/>
+                  </a:lnTo>
+                  <a:lnTo>
+                    <a:pt x="2672197" y="1212540"/>
+                  </a:lnTo>
+                  <a:lnTo>
+                    <a:pt x="2748666" y="1427683"/>
+                  </a:lnTo>
+                  <a:lnTo>
+                    <a:pt x="2825134" y="1620101"/>
+                  </a:lnTo>
+                  <a:lnTo>
+                    <a:pt x="2901602" y="1792195"/>
+                  </a:lnTo>
+                  <a:lnTo>
+                    <a:pt x="2978071" y="1946112"/>
+                  </a:lnTo>
+                  <a:lnTo>
+                    <a:pt x="3054539" y="2083772"/>
+                  </a:lnTo>
+                  <a:lnTo>
+                    <a:pt x="3131008" y="2206891"/>
+                  </a:lnTo>
+                  <a:lnTo>
+                    <a:pt x="3207476" y="2317006"/>
+                  </a:lnTo>
+                  <a:lnTo>
+                    <a:pt x="3283945" y="2415491"/>
+                  </a:lnTo>
+                  <a:lnTo>
+                    <a:pt x="3360413" y="2482508"/>
+                  </a:lnTo>
+                  <a:lnTo>
+                    <a:pt x="3436881" y="2502768"/>
+                  </a:lnTo>
+                  <a:lnTo>
+                    <a:pt x="3513350" y="2522492"/>
+                  </a:lnTo>
+                  <a:lnTo>
+                    <a:pt x="3589818" y="2541695"/>
+                  </a:lnTo>
+                  <a:lnTo>
+                    <a:pt x="3666287" y="2560392"/>
+                  </a:lnTo>
+                  <a:lnTo>
+                    <a:pt x="3742755" y="2578594"/>
+                  </a:lnTo>
+                  <a:lnTo>
+                    <a:pt x="3819224" y="2596315"/>
+                  </a:lnTo>
+                  <a:lnTo>
+                    <a:pt x="3895692" y="2613568"/>
+                  </a:lnTo>
+                  <a:lnTo>
+                    <a:pt x="3972160" y="2630366"/>
+                  </a:lnTo>
+                  <a:lnTo>
+                    <a:pt x="4048629" y="2646720"/>
+                  </a:lnTo>
+                  <a:lnTo>
+                    <a:pt x="4125097" y="2662641"/>
+                  </a:lnTo>
+                  <a:lnTo>
+                    <a:pt x="4201566" y="2678142"/>
+                  </a:lnTo>
+                  <a:lnTo>
+                    <a:pt x="4278034" y="2693234"/>
+                  </a:lnTo>
+                  <a:lnTo>
+                    <a:pt x="4354503" y="2707927"/>
+                  </a:lnTo>
+                  <a:lnTo>
+                    <a:pt x="4430971" y="2722231"/>
+                  </a:lnTo>
+                  <a:lnTo>
+                    <a:pt x="4507439" y="2736158"/>
+                  </a:lnTo>
+                  <a:lnTo>
+                    <a:pt x="4583908" y="2749717"/>
+                  </a:lnTo>
+                  <a:lnTo>
+                    <a:pt x="4660376" y="2762918"/>
+                  </a:lnTo>
+                  <a:lnTo>
+                    <a:pt x="4736845" y="2775770"/>
+                  </a:lnTo>
+                  <a:lnTo>
+                    <a:pt x="4813313" y="2788282"/>
+                  </a:lnTo>
+                  <a:lnTo>
+                    <a:pt x="4889782" y="2800464"/>
+                  </a:lnTo>
+                  <a:lnTo>
+                    <a:pt x="4966250" y="2812324"/>
+                  </a:lnTo>
+                  <a:lnTo>
+                    <a:pt x="5042719" y="2823871"/>
+                  </a:lnTo>
+                  <a:lnTo>
+                    <a:pt x="5119187" y="2835112"/>
+                  </a:lnTo>
+                  <a:lnTo>
+                    <a:pt x="5195655" y="2846057"/>
+                  </a:lnTo>
+                  <a:lnTo>
+                    <a:pt x="5272124" y="2856713"/>
+                  </a:lnTo>
+                  <a:lnTo>
+                    <a:pt x="5348592" y="2867087"/>
+                  </a:lnTo>
+                  <a:lnTo>
+                    <a:pt x="5425061" y="2877187"/>
+                  </a:lnTo>
+                  <a:lnTo>
+                    <a:pt x="5501529" y="2887020"/>
+                  </a:lnTo>
+                  <a:lnTo>
+                    <a:pt x="5577998" y="2896594"/>
+                  </a:lnTo>
+                  <a:lnTo>
+                    <a:pt x="5654466" y="2905914"/>
+                  </a:lnTo>
+                  <a:lnTo>
+                    <a:pt x="5730934" y="2914988"/>
+                  </a:lnTo>
+                  <a:lnTo>
+                    <a:pt x="5807403" y="2923823"/>
+                  </a:lnTo>
+                  <a:lnTo>
+                    <a:pt x="5883871" y="2932424"/>
+                  </a:lnTo>
+                  <a:lnTo>
+                    <a:pt x="5960340" y="2940798"/>
+                  </a:lnTo>
+                  <a:lnTo>
+                    <a:pt x="6036808" y="2948951"/>
+                  </a:lnTo>
+                  <a:lnTo>
+                    <a:pt x="6113277" y="2956888"/>
+                  </a:lnTo>
+                  <a:lnTo>
+                    <a:pt x="6189745" y="2964616"/>
+                  </a:lnTo>
+                  <a:lnTo>
+                    <a:pt x="6266213" y="2972140"/>
+                  </a:lnTo>
+                  <a:lnTo>
+                    <a:pt x="6342682" y="2979464"/>
+                  </a:lnTo>
+                  <a:lnTo>
+                    <a:pt x="6419150" y="2986596"/>
+                  </a:lnTo>
+                  <a:lnTo>
+                    <a:pt x="6495619" y="2993539"/>
+                  </a:lnTo>
+                  <a:lnTo>
+                    <a:pt x="6572087" y="3000298"/>
+                  </a:lnTo>
+                  <a:lnTo>
+                    <a:pt x="6648556" y="3006879"/>
+                  </a:lnTo>
+                  <a:lnTo>
+                    <a:pt x="6725024" y="3013286"/>
+                  </a:lnTo>
+                  <a:lnTo>
+                    <a:pt x="6801492" y="3019524"/>
+                  </a:lnTo>
+                  <a:lnTo>
+                    <a:pt x="6877961" y="3025597"/>
+                  </a:lnTo>
+                  <a:lnTo>
+                    <a:pt x="6954429" y="3031509"/>
+                  </a:lnTo>
+                  <a:lnTo>
+                    <a:pt x="7030898" y="3037266"/>
+                  </a:lnTo>
+                  <a:lnTo>
+                    <a:pt x="7107366" y="3042870"/>
+                  </a:lnTo>
+                  <a:lnTo>
+                    <a:pt x="7183835" y="3048326"/>
+                  </a:lnTo>
+                  <a:lnTo>
+                    <a:pt x="7260303" y="3053638"/>
+                  </a:lnTo>
+                  <a:lnTo>
+                    <a:pt x="7260303" y="3246895"/>
+                  </a:lnTo>
+                  <a:lnTo>
+                    <a:pt x="7183835" y="3246598"/>
+                  </a:lnTo>
+                  <a:lnTo>
+                    <a:pt x="7107366" y="3246266"/>
+                  </a:lnTo>
+                  <a:lnTo>
+                    <a:pt x="7030898" y="3245895"/>
+                  </a:lnTo>
+                  <a:lnTo>
+                    <a:pt x="6954429" y="3245480"/>
+                  </a:lnTo>
+                  <a:lnTo>
+                    <a:pt x="6877961" y="3245017"/>
+                  </a:lnTo>
+                  <a:lnTo>
+                    <a:pt x="6801492" y="3244498"/>
+                  </a:lnTo>
+                  <a:lnTo>
+                    <a:pt x="6725024" y="3243918"/>
+                  </a:lnTo>
+                  <a:lnTo>
+                    <a:pt x="6648556" y="3243270"/>
+                  </a:lnTo>
+                  <a:lnTo>
+                    <a:pt x="6572087" y="3242545"/>
+                  </a:lnTo>
+                  <a:lnTo>
+                    <a:pt x="6495619" y="3241735"/>
+                  </a:lnTo>
+                  <a:lnTo>
+                    <a:pt x="6419150" y="3240828"/>
+                  </a:lnTo>
+                  <a:lnTo>
+                    <a:pt x="6342682" y="3239815"/>
+                  </a:lnTo>
+                  <a:lnTo>
+                    <a:pt x="6266213" y="3238682"/>
+                  </a:lnTo>
+                  <a:lnTo>
+                    <a:pt x="6189745" y="3237416"/>
+                  </a:lnTo>
+                  <a:lnTo>
+                    <a:pt x="6113277" y="3236000"/>
+                  </a:lnTo>
+                  <a:lnTo>
+                    <a:pt x="6036808" y="3234416"/>
+                  </a:lnTo>
+                  <a:lnTo>
+                    <a:pt x="5960340" y="3232646"/>
+                  </a:lnTo>
+                  <a:lnTo>
+                    <a:pt x="5883871" y="3230666"/>
+                  </a:lnTo>
+                  <a:lnTo>
+                    <a:pt x="5807403" y="3228453"/>
+                  </a:lnTo>
+                  <a:lnTo>
+                    <a:pt x="5730934" y="3225978"/>
+                  </a:lnTo>
+                  <a:lnTo>
+                    <a:pt x="5654466" y="3223211"/>
+                  </a:lnTo>
+                  <a:lnTo>
+                    <a:pt x="5577998" y="3220117"/>
+                  </a:lnTo>
+                  <a:lnTo>
+                    <a:pt x="5501529" y="3216658"/>
+                  </a:lnTo>
+                  <a:lnTo>
+                    <a:pt x="5425061" y="3212791"/>
+                  </a:lnTo>
+                  <a:lnTo>
+                    <a:pt x="5348592" y="3208466"/>
+                  </a:lnTo>
+                  <a:lnTo>
+                    <a:pt x="5272124" y="3203631"/>
+                  </a:lnTo>
+                  <a:lnTo>
+                    <a:pt x="5195655" y="3198225"/>
+                  </a:lnTo>
+                  <a:lnTo>
+                    <a:pt x="5119187" y="3192180"/>
+                  </a:lnTo>
+                  <a:lnTo>
+                    <a:pt x="5042719" y="3185422"/>
+                  </a:lnTo>
+                  <a:lnTo>
+                    <a:pt x="4966250" y="3177865"/>
+                  </a:lnTo>
+                  <a:lnTo>
+                    <a:pt x="4889782" y="3169416"/>
+                  </a:lnTo>
+                  <a:lnTo>
+                    <a:pt x="4813313" y="3159969"/>
+                  </a:lnTo>
+                  <a:lnTo>
+                    <a:pt x="4736845" y="3149407"/>
+                  </a:lnTo>
+                  <a:lnTo>
+                    <a:pt x="4660376" y="3137597"/>
+                  </a:lnTo>
+                  <a:lnTo>
+                    <a:pt x="4583908" y="3124392"/>
+                  </a:lnTo>
+                  <a:lnTo>
+                    <a:pt x="4507439" y="3109628"/>
+                  </a:lnTo>
+                  <a:lnTo>
+                    <a:pt x="4430971" y="3093121"/>
+                  </a:lnTo>
+                  <a:lnTo>
+                    <a:pt x="4354503" y="3074663"/>
+                  </a:lnTo>
+                  <a:lnTo>
+                    <a:pt x="4278034" y="3054026"/>
+                  </a:lnTo>
+                  <a:lnTo>
+                    <a:pt x="4201566" y="3030952"/>
+                  </a:lnTo>
+                  <a:lnTo>
+                    <a:pt x="4125097" y="3005153"/>
+                  </a:lnTo>
+                  <a:lnTo>
+                    <a:pt x="4048629" y="2976307"/>
+                  </a:lnTo>
+                  <a:lnTo>
+                    <a:pt x="3972160" y="2944054"/>
+                  </a:lnTo>
+                  <a:lnTo>
+                    <a:pt x="3895692" y="2907992"/>
+                  </a:lnTo>
+                  <a:lnTo>
+                    <a:pt x="3819224" y="2867672"/>
+                  </a:lnTo>
+                  <a:lnTo>
+                    <a:pt x="3742755" y="2822589"/>
+                  </a:lnTo>
+                  <a:lnTo>
+                    <a:pt x="3666287" y="2772183"/>
+                  </a:lnTo>
+                  <a:lnTo>
+                    <a:pt x="3589818" y="2715824"/>
+                  </a:lnTo>
+                  <a:lnTo>
+                    <a:pt x="3513350" y="2652808"/>
+                  </a:lnTo>
+                  <a:lnTo>
+                    <a:pt x="3436881" y="2582351"/>
+                  </a:lnTo>
+                  <a:lnTo>
+                    <a:pt x="3360413" y="2503572"/>
+                  </a:lnTo>
+                  <a:lnTo>
+                    <a:pt x="3283945" y="2461698"/>
+                  </a:lnTo>
+                  <a:lnTo>
+                    <a:pt x="3207476" y="2440324"/>
+                  </a:lnTo>
+                  <a:lnTo>
+                    <a:pt x="3131008" y="2418370"/>
+                  </a:lnTo>
+                  <a:lnTo>
+                    <a:pt x="3054539" y="2395820"/>
+                  </a:lnTo>
+                  <a:lnTo>
+                    <a:pt x="2978071" y="2372658"/>
+                  </a:lnTo>
+                  <a:lnTo>
+                    <a:pt x="2901602" y="2348868"/>
+                  </a:lnTo>
+                  <a:lnTo>
+                    <a:pt x="2825134" y="2324433"/>
+                  </a:lnTo>
+                  <a:lnTo>
+                    <a:pt x="2748666" y="2299334"/>
+                  </a:lnTo>
+                  <a:lnTo>
+                    <a:pt x="2672197" y="2273554"/>
+                  </a:lnTo>
+                  <a:lnTo>
+                    <a:pt x="2595729" y="2247075"/>
+                  </a:lnTo>
+                  <a:lnTo>
+                    <a:pt x="2519260" y="2219877"/>
+                  </a:lnTo>
+                  <a:lnTo>
+                    <a:pt x="2442792" y="2191941"/>
+                  </a:lnTo>
+                  <a:lnTo>
+                    <a:pt x="2366323" y="2163247"/>
+                  </a:lnTo>
+                  <a:lnTo>
+                    <a:pt x="2289855" y="2133774"/>
+                  </a:lnTo>
+                  <a:lnTo>
+                    <a:pt x="2213386" y="2103502"/>
+                  </a:lnTo>
+                  <a:lnTo>
+                    <a:pt x="2136918" y="2072409"/>
+                  </a:lnTo>
+                  <a:lnTo>
+                    <a:pt x="2060450" y="2040471"/>
+                  </a:lnTo>
+                  <a:lnTo>
+                    <a:pt x="1983981" y="2007667"/>
+                  </a:lnTo>
+                  <a:lnTo>
+                    <a:pt x="1907513" y="1973973"/>
+                  </a:lnTo>
+                  <a:lnTo>
+                    <a:pt x="1831044" y="1939365"/>
+                  </a:lnTo>
+                  <a:lnTo>
+                    <a:pt x="1754576" y="1903817"/>
+                  </a:lnTo>
+                  <a:lnTo>
+                    <a:pt x="1678107" y="1867305"/>
+                  </a:lnTo>
+                  <a:lnTo>
+                    <a:pt x="1601639" y="1829803"/>
+                  </a:lnTo>
+                  <a:lnTo>
+                    <a:pt x="1525171" y="1791282"/>
+                  </a:lnTo>
+                  <a:lnTo>
+                    <a:pt x="1448702" y="1751717"/>
+                  </a:lnTo>
+                  <a:lnTo>
+                    <a:pt x="1372234" y="1711078"/>
+                  </a:lnTo>
+                  <a:lnTo>
+                    <a:pt x="1295765" y="1669336"/>
+                  </a:lnTo>
+                  <a:lnTo>
+                    <a:pt x="1219297" y="1626461"/>
+                  </a:lnTo>
+                  <a:lnTo>
+                    <a:pt x="1142828" y="1582423"/>
+                  </a:lnTo>
+                  <a:lnTo>
+                    <a:pt x="1066360" y="1537190"/>
+                  </a:lnTo>
+                  <a:lnTo>
+                    <a:pt x="989892" y="1490730"/>
+                  </a:lnTo>
+                  <a:lnTo>
+                    <a:pt x="913423" y="1443009"/>
+                  </a:lnTo>
+                  <a:lnTo>
+                    <a:pt x="836955" y="1393993"/>
+                  </a:lnTo>
+                  <a:lnTo>
+                    <a:pt x="760486" y="1343648"/>
+                  </a:lnTo>
+                  <a:lnTo>
+                    <a:pt x="684018" y="1291936"/>
+                  </a:lnTo>
+                  <a:lnTo>
+                    <a:pt x="607549" y="1238820"/>
+                  </a:lnTo>
+                  <a:lnTo>
+                    <a:pt x="531081" y="1184264"/>
+                  </a:lnTo>
+                  <a:lnTo>
+                    <a:pt x="454613" y="1128227"/>
+                  </a:lnTo>
+                  <a:lnTo>
+                    <a:pt x="378144" y="1070670"/>
+                  </a:lnTo>
+                  <a:lnTo>
+                    <a:pt x="301676" y="1011551"/>
+                  </a:lnTo>
+                  <a:lnTo>
+                    <a:pt x="225207" y="950828"/>
+                  </a:lnTo>
+                  <a:lnTo>
+                    <a:pt x="148739" y="888457"/>
+                  </a:lnTo>
+                  <a:lnTo>
+                    <a:pt x="72270" y="824393"/>
+                  </a:lnTo>
+                  <a:lnTo>
+                    <a:pt x="0" y="762204"/>
                   </a:lnTo>
                   <a:close/>
                 </a:path>
@@ -3519,210 +3519,210 @@
           </p:nvSpPr>
           <p:spPr>
             <a:xfrm>
-              <a:off x="3206267" y="2073503"/>
-              <a:ext cx="4982222" cy="3273859"/>
+              <a:off x="3268530" y="2209169"/>
+              <a:ext cx="4907418" cy="3053638"/>
             </a:xfrm>
             <a:custGeom>
               <a:avLst/>
               <a:pathLst>
-                <a:path w="4982222" h="3273859">
+                <a:path w="4907418" h="3053638">
                   <a:moveTo>
                     <a:pt x="0" y="0"/>
                   </a:moveTo>
                   <a:lnTo>
-                    <a:pt x="13643" y="70835"/>
-                  </a:lnTo>
-                  <a:lnTo>
-                    <a:pt x="91277" y="431321"/>
-                  </a:lnTo>
-                  <a:lnTo>
-                    <a:pt x="168911" y="753731"/>
-                  </a:lnTo>
-                  <a:lnTo>
-                    <a:pt x="246545" y="1042087"/>
-                  </a:lnTo>
-                  <a:lnTo>
-                    <a:pt x="324179" y="1299985"/>
-                  </a:lnTo>
-                  <a:lnTo>
-                    <a:pt x="401813" y="1530644"/>
-                  </a:lnTo>
-                  <a:lnTo>
-                    <a:pt x="479447" y="1736939"/>
-                  </a:lnTo>
-                  <a:lnTo>
-                    <a:pt x="557082" y="1921444"/>
-                  </a:lnTo>
-                  <a:lnTo>
-                    <a:pt x="634716" y="2086461"/>
-                  </a:lnTo>
-                  <a:lnTo>
-                    <a:pt x="712350" y="2234048"/>
-                  </a:lnTo>
-                  <a:lnTo>
-                    <a:pt x="789984" y="2366047"/>
-                  </a:lnTo>
-                  <a:lnTo>
-                    <a:pt x="867618" y="2484103"/>
-                  </a:lnTo>
-                  <a:lnTo>
-                    <a:pt x="945252" y="2589690"/>
-                  </a:lnTo>
-                  <a:lnTo>
-                    <a:pt x="1022886" y="2661540"/>
-                  </a:lnTo>
-                  <a:lnTo>
-                    <a:pt x="1100520" y="2683261"/>
-                  </a:lnTo>
-                  <a:lnTo>
-                    <a:pt x="1178154" y="2704408"/>
-                  </a:lnTo>
-                  <a:lnTo>
-                    <a:pt x="1255788" y="2724996"/>
-                  </a:lnTo>
-                  <a:lnTo>
-                    <a:pt x="1333422" y="2745040"/>
-                  </a:lnTo>
-                  <a:lnTo>
-                    <a:pt x="1411056" y="2764555"/>
-                  </a:lnTo>
-                  <a:lnTo>
-                    <a:pt x="1488690" y="2783555"/>
-                  </a:lnTo>
-                  <a:lnTo>
-                    <a:pt x="1566324" y="2802052"/>
-                  </a:lnTo>
-                  <a:lnTo>
-                    <a:pt x="1643958" y="2820061"/>
-                  </a:lnTo>
-                  <a:lnTo>
-                    <a:pt x="1721592" y="2837594"/>
-                  </a:lnTo>
-                  <a:lnTo>
-                    <a:pt x="1799226" y="2854664"/>
-                  </a:lnTo>
-                  <a:lnTo>
-                    <a:pt x="1876860" y="2871283"/>
-                  </a:lnTo>
-                  <a:lnTo>
-                    <a:pt x="1954494" y="2887463"/>
-                  </a:lnTo>
-                  <a:lnTo>
-                    <a:pt x="2032128" y="2903215"/>
-                  </a:lnTo>
-                  <a:lnTo>
-                    <a:pt x="2109762" y="2918552"/>
-                  </a:lnTo>
-                  <a:lnTo>
-                    <a:pt x="2187396" y="2933483"/>
-                  </a:lnTo>
-                  <a:lnTo>
-                    <a:pt x="2265031" y="2948019"/>
-                  </a:lnTo>
-                  <a:lnTo>
-                    <a:pt x="2342665" y="2962172"/>
-                  </a:lnTo>
-                  <a:lnTo>
-                    <a:pt x="2420299" y="2975951"/>
-                  </a:lnTo>
-                  <a:lnTo>
-                    <a:pt x="2497933" y="2989366"/>
-                  </a:lnTo>
-                  <a:lnTo>
-                    <a:pt x="2575567" y="3002426"/>
-                  </a:lnTo>
-                  <a:lnTo>
-                    <a:pt x="2653201" y="3015142"/>
-                  </a:lnTo>
-                  <a:lnTo>
-                    <a:pt x="2730835" y="3027521"/>
-                  </a:lnTo>
-                  <a:lnTo>
-                    <a:pt x="2808469" y="3039573"/>
-                  </a:lnTo>
-                  <a:lnTo>
-                    <a:pt x="2886103" y="3051307"/>
-                  </a:lnTo>
-                  <a:lnTo>
-                    <a:pt x="2963737" y="3062732"/>
-                  </a:lnTo>
-                  <a:lnTo>
-                    <a:pt x="3041371" y="3073854"/>
-                  </a:lnTo>
-                  <a:lnTo>
-                    <a:pt x="3119005" y="3084682"/>
-                  </a:lnTo>
-                  <a:lnTo>
-                    <a:pt x="3196639" y="3095225"/>
-                  </a:lnTo>
-                  <a:lnTo>
-                    <a:pt x="3274273" y="3105488"/>
-                  </a:lnTo>
-                  <a:lnTo>
-                    <a:pt x="3351907" y="3115481"/>
-                  </a:lnTo>
-                  <a:lnTo>
-                    <a:pt x="3429541" y="3125210"/>
-                  </a:lnTo>
-                  <a:lnTo>
-                    <a:pt x="3507175" y="3134682"/>
-                  </a:lnTo>
-                  <a:lnTo>
-                    <a:pt x="3584809" y="3143903"/>
-                  </a:lnTo>
-                  <a:lnTo>
-                    <a:pt x="3662443" y="3152881"/>
-                  </a:lnTo>
-                  <a:lnTo>
-                    <a:pt x="3740077" y="3161622"/>
-                  </a:lnTo>
-                  <a:lnTo>
-                    <a:pt x="3817711" y="3170131"/>
-                  </a:lnTo>
-                  <a:lnTo>
-                    <a:pt x="3895345" y="3178416"/>
-                  </a:lnTo>
-                  <a:lnTo>
-                    <a:pt x="3972980" y="3186483"/>
-                  </a:lnTo>
-                  <a:lnTo>
-                    <a:pt x="4050614" y="3194336"/>
-                  </a:lnTo>
-                  <a:lnTo>
-                    <a:pt x="4128248" y="3201981"/>
-                  </a:lnTo>
-                  <a:lnTo>
-                    <a:pt x="4205882" y="3209425"/>
-                  </a:lnTo>
-                  <a:lnTo>
-                    <a:pt x="4283516" y="3216672"/>
-                  </a:lnTo>
-                  <a:lnTo>
-                    <a:pt x="4361150" y="3223727"/>
-                  </a:lnTo>
-                  <a:lnTo>
-                    <a:pt x="4438784" y="3230596"/>
-                  </a:lnTo>
-                  <a:lnTo>
-                    <a:pt x="4516418" y="3237284"/>
-                  </a:lnTo>
-                  <a:lnTo>
-                    <a:pt x="4594052" y="3243795"/>
-                  </a:lnTo>
-                  <a:lnTo>
-                    <a:pt x="4671686" y="3250134"/>
-                  </a:lnTo>
-                  <a:lnTo>
-                    <a:pt x="4749320" y="3256305"/>
-                  </a:lnTo>
-                  <a:lnTo>
-                    <a:pt x="4826954" y="3262314"/>
-                  </a:lnTo>
-                  <a:lnTo>
-                    <a:pt x="4904588" y="3268164"/>
-                  </a:lnTo>
-                  <a:lnTo>
-                    <a:pt x="4982222" y="3273859"/>
+                    <a:pt x="13438" y="66070"/>
+                  </a:lnTo>
+                  <a:lnTo>
+                    <a:pt x="89907" y="402308"/>
+                  </a:lnTo>
+                  <a:lnTo>
+                    <a:pt x="166375" y="703030"/>
+                  </a:lnTo>
+                  <a:lnTo>
+                    <a:pt x="242844" y="971990"/>
+                  </a:lnTo>
+                  <a:lnTo>
+                    <a:pt x="319312" y="1212540"/>
+                  </a:lnTo>
+                  <a:lnTo>
+                    <a:pt x="395781" y="1427683"/>
+                  </a:lnTo>
+                  <a:lnTo>
+                    <a:pt x="472249" y="1620101"/>
+                  </a:lnTo>
+                  <a:lnTo>
+                    <a:pt x="548717" y="1792195"/>
+                  </a:lnTo>
+                  <a:lnTo>
+                    <a:pt x="625186" y="1946112"/>
+                  </a:lnTo>
+                  <a:lnTo>
+                    <a:pt x="701654" y="2083772"/>
+                  </a:lnTo>
+                  <a:lnTo>
+                    <a:pt x="778123" y="2206891"/>
+                  </a:lnTo>
+                  <a:lnTo>
+                    <a:pt x="854591" y="2317006"/>
+                  </a:lnTo>
+                  <a:lnTo>
+                    <a:pt x="931060" y="2415491"/>
+                  </a:lnTo>
+                  <a:lnTo>
+                    <a:pt x="1007528" y="2482508"/>
+                  </a:lnTo>
+                  <a:lnTo>
+                    <a:pt x="1083996" y="2502768"/>
+                  </a:lnTo>
+                  <a:lnTo>
+                    <a:pt x="1160465" y="2522492"/>
+                  </a:lnTo>
+                  <a:lnTo>
+                    <a:pt x="1236933" y="2541695"/>
+                  </a:lnTo>
+                  <a:lnTo>
+                    <a:pt x="1313402" y="2560392"/>
+                  </a:lnTo>
+                  <a:lnTo>
+                    <a:pt x="1389870" y="2578594"/>
+                  </a:lnTo>
+                  <a:lnTo>
+                    <a:pt x="1466339" y="2596315"/>
+                  </a:lnTo>
+                  <a:lnTo>
+                    <a:pt x="1542807" y="2613568"/>
+                  </a:lnTo>
+                  <a:lnTo>
+                    <a:pt x="1619275" y="2630366"/>
+                  </a:lnTo>
+                  <a:lnTo>
+                    <a:pt x="1695744" y="2646720"/>
+                  </a:lnTo>
+                  <a:lnTo>
+                    <a:pt x="1772212" y="2662641"/>
+                  </a:lnTo>
+                  <a:lnTo>
+                    <a:pt x="1848681" y="2678142"/>
+                  </a:lnTo>
+                  <a:lnTo>
+                    <a:pt x="1925149" y="2693234"/>
+                  </a:lnTo>
+                  <a:lnTo>
+                    <a:pt x="2001618" y="2707927"/>
+                  </a:lnTo>
+                  <a:lnTo>
+                    <a:pt x="2078086" y="2722231"/>
+                  </a:lnTo>
+                  <a:lnTo>
+                    <a:pt x="2154554" y="2736158"/>
+                  </a:lnTo>
+                  <a:lnTo>
+                    <a:pt x="2231023" y="2749717"/>
+                  </a:lnTo>
+                  <a:lnTo>
+                    <a:pt x="2307491" y="2762918"/>
+                  </a:lnTo>
+                  <a:lnTo>
+                    <a:pt x="2383960" y="2775770"/>
+                  </a:lnTo>
+                  <a:lnTo>
+                    <a:pt x="2460428" y="2788282"/>
+                  </a:lnTo>
+                  <a:lnTo>
+                    <a:pt x="2536897" y="2800464"/>
+                  </a:lnTo>
+                  <a:lnTo>
+                    <a:pt x="2613365" y="2812324"/>
+                  </a:lnTo>
+                  <a:lnTo>
+                    <a:pt x="2689834" y="2823871"/>
+                  </a:lnTo>
+                  <a:lnTo>
+                    <a:pt x="2766302" y="2835112"/>
+                  </a:lnTo>
+                  <a:lnTo>
+                    <a:pt x="2842770" y="2846057"/>
+                  </a:lnTo>
+                  <a:lnTo>
+                    <a:pt x="2919239" y="2856713"/>
+                  </a:lnTo>
+                  <a:lnTo>
+                    <a:pt x="2995707" y="2867087"/>
+                  </a:lnTo>
+                  <a:lnTo>
+                    <a:pt x="3072176" y="2877187"/>
+                  </a:lnTo>
+                  <a:lnTo>
+                    <a:pt x="3148644" y="2887020"/>
+                  </a:lnTo>
+                  <a:lnTo>
+                    <a:pt x="3225113" y="2896594"/>
+                  </a:lnTo>
+                  <a:lnTo>
+                    <a:pt x="3301581" y="2905914"/>
+                  </a:lnTo>
+                  <a:lnTo>
+                    <a:pt x="3378049" y="2914988"/>
+                  </a:lnTo>
+                  <a:lnTo>
+                    <a:pt x="3454518" y="2923823"/>
+                  </a:lnTo>
+                  <a:lnTo>
+                    <a:pt x="3530986" y="2932424"/>
+                  </a:lnTo>
+                  <a:lnTo>
+                    <a:pt x="3607455" y="2940798"/>
+                  </a:lnTo>
+                  <a:lnTo>
+                    <a:pt x="3683923" y="2948951"/>
+                  </a:lnTo>
+                  <a:lnTo>
+                    <a:pt x="3760392" y="2956888"/>
+                  </a:lnTo>
+                  <a:lnTo>
+                    <a:pt x="3836860" y="2964616"/>
+                  </a:lnTo>
+                  <a:lnTo>
+                    <a:pt x="3913328" y="2972140"/>
+                  </a:lnTo>
+                  <a:lnTo>
+                    <a:pt x="3989797" y="2979464"/>
+                  </a:lnTo>
+                  <a:lnTo>
+                    <a:pt x="4066265" y="2986596"/>
+                  </a:lnTo>
+                  <a:lnTo>
+                    <a:pt x="4142734" y="2993539"/>
+                  </a:lnTo>
+                  <a:lnTo>
+                    <a:pt x="4219202" y="3000298"/>
+                  </a:lnTo>
+                  <a:lnTo>
+                    <a:pt x="4295671" y="3006879"/>
+                  </a:lnTo>
+                  <a:lnTo>
+                    <a:pt x="4372139" y="3013286"/>
+                  </a:lnTo>
+                  <a:lnTo>
+                    <a:pt x="4448607" y="3019524"/>
+                  </a:lnTo>
+                  <a:lnTo>
+                    <a:pt x="4525076" y="3025597"/>
+                  </a:lnTo>
+                  <a:lnTo>
+                    <a:pt x="4601544" y="3031509"/>
+                  </a:lnTo>
+                  <a:lnTo>
+                    <a:pt x="4678013" y="3037266"/>
+                  </a:lnTo>
+                  <a:lnTo>
+                    <a:pt x="4754481" y="3042870"/>
+                  </a:lnTo>
+                  <a:lnTo>
+                    <a:pt x="4830950" y="3048326"/>
+                  </a:lnTo>
+                  <a:lnTo>
+                    <a:pt x="4907418" y="3053638"/>
                   </a:lnTo>
                 </a:path>
               </a:pathLst>
@@ -3742,297 +3742,297 @@
           </p:nvSpPr>
           <p:spPr>
             <a:xfrm>
-              <a:off x="817517" y="2890675"/>
-              <a:ext cx="7370972" cy="2663880"/>
+              <a:off x="915645" y="2971373"/>
+              <a:ext cx="7260303" cy="2484690"/>
             </a:xfrm>
             <a:custGeom>
               <a:avLst/>
               <a:pathLst>
-                <a:path w="7370972" h="2663880">
+                <a:path w="7260303" h="2484690">
                   <a:moveTo>
-                    <a:pt x="7370972" y="2663880"/>
+                    <a:pt x="7260303" y="2484690"/>
                   </a:moveTo>
                   <a:lnTo>
-                    <a:pt x="7293338" y="2663562"/>
-                  </a:lnTo>
-                  <a:lnTo>
-                    <a:pt x="7215704" y="2663206"/>
-                  </a:lnTo>
-                  <a:lnTo>
-                    <a:pt x="7138070" y="2662808"/>
-                  </a:lnTo>
-                  <a:lnTo>
-                    <a:pt x="7060436" y="2662364"/>
-                  </a:lnTo>
-                  <a:lnTo>
-                    <a:pt x="6982802" y="2661866"/>
-                  </a:lnTo>
-                  <a:lnTo>
-                    <a:pt x="6905168" y="2661310"/>
-                  </a:lnTo>
-                  <a:lnTo>
-                    <a:pt x="6827534" y="2660689"/>
-                  </a:lnTo>
-                  <a:lnTo>
-                    <a:pt x="6749900" y="2659994"/>
-                  </a:lnTo>
-                  <a:lnTo>
-                    <a:pt x="6672266" y="2659217"/>
-                  </a:lnTo>
-                  <a:lnTo>
-                    <a:pt x="6594632" y="2658348"/>
-                  </a:lnTo>
-                  <a:lnTo>
-                    <a:pt x="6516998" y="2657376"/>
-                  </a:lnTo>
-                  <a:lnTo>
-                    <a:pt x="6439364" y="2656290"/>
-                  </a:lnTo>
-                  <a:lnTo>
-                    <a:pt x="6361730" y="2655075"/>
-                  </a:lnTo>
-                  <a:lnTo>
-                    <a:pt x="6284096" y="2653717"/>
-                  </a:lnTo>
-                  <a:lnTo>
-                    <a:pt x="6206462" y="2652199"/>
-                  </a:lnTo>
-                  <a:lnTo>
-                    <a:pt x="6128827" y="2650501"/>
-                  </a:lnTo>
-                  <a:lnTo>
-                    <a:pt x="6051193" y="2648603"/>
-                  </a:lnTo>
-                  <a:lnTo>
-                    <a:pt x="5973559" y="2646481"/>
-                  </a:lnTo>
-                  <a:lnTo>
-                    <a:pt x="5895925" y="2644108"/>
-                  </a:lnTo>
-                  <a:lnTo>
-                    <a:pt x="5818291" y="2641455"/>
-                  </a:lnTo>
-                  <a:lnTo>
-                    <a:pt x="5740657" y="2638488"/>
-                  </a:lnTo>
-                  <a:lnTo>
-                    <a:pt x="5663023" y="2635171"/>
-                  </a:lnTo>
-                  <a:lnTo>
-                    <a:pt x="5585389" y="2631463"/>
-                  </a:lnTo>
-                  <a:lnTo>
-                    <a:pt x="5507755" y="2627316"/>
-                  </a:lnTo>
-                  <a:lnTo>
-                    <a:pt x="5430121" y="2622680"/>
-                  </a:lnTo>
-                  <a:lnTo>
-                    <a:pt x="5352487" y="2617496"/>
-                  </a:lnTo>
-                  <a:lnTo>
-                    <a:pt x="5274853" y="2611700"/>
-                  </a:lnTo>
-                  <a:lnTo>
-                    <a:pt x="5197219" y="2605220"/>
-                  </a:lnTo>
-                  <a:lnTo>
-                    <a:pt x="5119585" y="2597974"/>
-                  </a:lnTo>
-                  <a:lnTo>
-                    <a:pt x="5041951" y="2589872"/>
-                  </a:lnTo>
-                  <a:lnTo>
-                    <a:pt x="4964317" y="2580814"/>
-                  </a:lnTo>
-                  <a:lnTo>
-                    <a:pt x="4886683" y="2570686"/>
-                  </a:lnTo>
-                  <a:lnTo>
-                    <a:pt x="4809049" y="2559361"/>
-                  </a:lnTo>
-                  <a:lnTo>
-                    <a:pt x="4731415" y="2546700"/>
-                  </a:lnTo>
-                  <a:lnTo>
-                    <a:pt x="4653781" y="2532543"/>
-                  </a:lnTo>
-                  <a:lnTo>
-                    <a:pt x="4576147" y="2516714"/>
-                  </a:lnTo>
-                  <a:lnTo>
-                    <a:pt x="4498513" y="2499016"/>
-                  </a:lnTo>
-                  <a:lnTo>
-                    <a:pt x="4420879" y="2479228"/>
-                  </a:lnTo>
-                  <a:lnTo>
-                    <a:pt x="4343244" y="2457102"/>
-                  </a:lnTo>
-                  <a:lnTo>
-                    <a:pt x="4265610" y="2432364"/>
-                  </a:lnTo>
-                  <a:lnTo>
-                    <a:pt x="4187976" y="2404704"/>
-                  </a:lnTo>
-                  <a:lnTo>
-                    <a:pt x="4110342" y="2373778"/>
-                  </a:lnTo>
-                  <a:lnTo>
-                    <a:pt x="4032708" y="2339199"/>
-                  </a:lnTo>
-                  <a:lnTo>
-                    <a:pt x="3955074" y="2300537"/>
-                  </a:lnTo>
-                  <a:lnTo>
-                    <a:pt x="3877440" y="2257308"/>
-                  </a:lnTo>
-                  <a:lnTo>
-                    <a:pt x="3799806" y="2208975"/>
-                  </a:lnTo>
-                  <a:lnTo>
-                    <a:pt x="3722172" y="2154933"/>
-                  </a:lnTo>
-                  <a:lnTo>
-                    <a:pt x="3644538" y="2094509"/>
-                  </a:lnTo>
-                  <a:lnTo>
-                    <a:pt x="3566904" y="2026949"/>
-                  </a:lnTo>
-                  <a:lnTo>
-                    <a:pt x="3489270" y="1951411"/>
-                  </a:lnTo>
-                  <a:lnTo>
-                    <a:pt x="3411636" y="1866951"/>
-                  </a:lnTo>
-                  <a:lnTo>
-                    <a:pt x="3334002" y="1822057"/>
-                  </a:lnTo>
-                  <a:lnTo>
-                    <a:pt x="3256368" y="1799142"/>
-                  </a:lnTo>
-                  <a:lnTo>
-                    <a:pt x="3178734" y="1775604"/>
-                  </a:lnTo>
-                  <a:lnTo>
-                    <a:pt x="3101100" y="1751428"/>
-                  </a:lnTo>
-                  <a:lnTo>
-                    <a:pt x="3023466" y="1726596"/>
-                  </a:lnTo>
-                  <a:lnTo>
-                    <a:pt x="2945832" y="1701090"/>
-                  </a:lnTo>
-                  <a:lnTo>
-                    <a:pt x="2868198" y="1674892"/>
-                  </a:lnTo>
-                  <a:lnTo>
-                    <a:pt x="2790564" y="1647983"/>
-                  </a:lnTo>
-                  <a:lnTo>
-                    <a:pt x="2712930" y="1620344"/>
-                  </a:lnTo>
-                  <a:lnTo>
-                    <a:pt x="2635295" y="1591955"/>
-                  </a:lnTo>
-                  <a:lnTo>
-                    <a:pt x="2557661" y="1562796"/>
-                  </a:lnTo>
-                  <a:lnTo>
-                    <a:pt x="2480027" y="1532845"/>
-                  </a:lnTo>
-                  <a:lnTo>
-                    <a:pt x="2402393" y="1502082"/>
-                  </a:lnTo>
-                  <a:lnTo>
-                    <a:pt x="2324759" y="1470484"/>
-                  </a:lnTo>
-                  <a:lnTo>
-                    <a:pt x="2247125" y="1438029"/>
-                  </a:lnTo>
-                  <a:lnTo>
-                    <a:pt x="2169491" y="1404693"/>
-                  </a:lnTo>
-                  <a:lnTo>
-                    <a:pt x="2091857" y="1370452"/>
-                  </a:lnTo>
-                  <a:lnTo>
-                    <a:pt x="2014223" y="1335283"/>
-                  </a:lnTo>
-                  <a:lnTo>
-                    <a:pt x="1936589" y="1299159"/>
-                  </a:lnTo>
-                  <a:lnTo>
-                    <a:pt x="1858955" y="1262054"/>
-                  </a:lnTo>
-                  <a:lnTo>
-                    <a:pt x="1781321" y="1223943"/>
-                  </a:lnTo>
-                  <a:lnTo>
-                    <a:pt x="1703687" y="1184798"/>
-                  </a:lnTo>
-                  <a:lnTo>
-                    <a:pt x="1626053" y="1144591"/>
-                  </a:lnTo>
-                  <a:lnTo>
-                    <a:pt x="1548419" y="1103293"/>
-                  </a:lnTo>
-                  <a:lnTo>
-                    <a:pt x="1470785" y="1060874"/>
-                  </a:lnTo>
-                  <a:lnTo>
-                    <a:pt x="1393151" y="1017304"/>
-                  </a:lnTo>
-                  <a:lnTo>
-                    <a:pt x="1315517" y="972551"/>
-                  </a:lnTo>
-                  <a:lnTo>
-                    <a:pt x="1237883" y="926585"/>
-                  </a:lnTo>
-                  <a:lnTo>
-                    <a:pt x="1160249" y="879371"/>
-                  </a:lnTo>
-                  <a:lnTo>
-                    <a:pt x="1082615" y="830876"/>
-                  </a:lnTo>
-                  <a:lnTo>
-                    <a:pt x="1004981" y="781065"/>
-                  </a:lnTo>
-                  <a:lnTo>
-                    <a:pt x="927346" y="729903"/>
-                  </a:lnTo>
-                  <a:lnTo>
-                    <a:pt x="849712" y="677352"/>
-                  </a:lnTo>
-                  <a:lnTo>
-                    <a:pt x="772078" y="623375"/>
-                  </a:lnTo>
-                  <a:lnTo>
-                    <a:pt x="694444" y="567934"/>
-                  </a:lnTo>
-                  <a:lnTo>
-                    <a:pt x="616810" y="510989"/>
-                  </a:lnTo>
-                  <a:lnTo>
-                    <a:pt x="539176" y="452498"/>
-                  </a:lnTo>
-                  <a:lnTo>
-                    <a:pt x="461542" y="392420"/>
-                  </a:lnTo>
-                  <a:lnTo>
-                    <a:pt x="383908" y="330712"/>
-                  </a:lnTo>
-                  <a:lnTo>
-                    <a:pt x="306274" y="267329"/>
-                  </a:lnTo>
-                  <a:lnTo>
-                    <a:pt x="228640" y="202227"/>
-                  </a:lnTo>
-                  <a:lnTo>
-                    <a:pt x="151006" y="135358"/>
-                  </a:lnTo>
-                  <a:lnTo>
-                    <a:pt x="73372" y="66674"/>
+                    <a:pt x="7183835" y="2484394"/>
+                  </a:lnTo>
+                  <a:lnTo>
+                    <a:pt x="7107366" y="2484062"/>
+                  </a:lnTo>
+                  <a:lnTo>
+                    <a:pt x="7030898" y="2483691"/>
+                  </a:lnTo>
+                  <a:lnTo>
+                    <a:pt x="6954429" y="2483276"/>
+                  </a:lnTo>
+                  <a:lnTo>
+                    <a:pt x="6877961" y="2482812"/>
+                  </a:lnTo>
+                  <a:lnTo>
+                    <a:pt x="6801492" y="2482294"/>
+                  </a:lnTo>
+                  <a:lnTo>
+                    <a:pt x="6725024" y="2481714"/>
+                  </a:lnTo>
+                  <a:lnTo>
+                    <a:pt x="6648556" y="2481066"/>
+                  </a:lnTo>
+                  <a:lnTo>
+                    <a:pt x="6572087" y="2480341"/>
+                  </a:lnTo>
+                  <a:lnTo>
+                    <a:pt x="6495619" y="2479530"/>
+                  </a:lnTo>
+                  <a:lnTo>
+                    <a:pt x="6419150" y="2478624"/>
+                  </a:lnTo>
+                  <a:lnTo>
+                    <a:pt x="6342682" y="2477611"/>
+                  </a:lnTo>
+                  <a:lnTo>
+                    <a:pt x="6266213" y="2476478"/>
+                  </a:lnTo>
+                  <a:lnTo>
+                    <a:pt x="6189745" y="2475212"/>
+                  </a:lnTo>
+                  <a:lnTo>
+                    <a:pt x="6113277" y="2473795"/>
+                  </a:lnTo>
+                  <a:lnTo>
+                    <a:pt x="6036808" y="2472212"/>
+                  </a:lnTo>
+                  <a:lnTo>
+                    <a:pt x="5960340" y="2470441"/>
+                  </a:lnTo>
+                  <a:lnTo>
+                    <a:pt x="5883871" y="2468462"/>
+                  </a:lnTo>
+                  <a:lnTo>
+                    <a:pt x="5807403" y="2466248"/>
+                  </a:lnTo>
+                  <a:lnTo>
+                    <a:pt x="5730934" y="2463774"/>
+                  </a:lnTo>
+                  <a:lnTo>
+                    <a:pt x="5654466" y="2461007"/>
+                  </a:lnTo>
+                  <a:lnTo>
+                    <a:pt x="5577998" y="2457913"/>
+                  </a:lnTo>
+                  <a:lnTo>
+                    <a:pt x="5501529" y="2454454"/>
+                  </a:lnTo>
+                  <a:lnTo>
+                    <a:pt x="5425061" y="2450586"/>
+                  </a:lnTo>
+                  <a:lnTo>
+                    <a:pt x="5348592" y="2446262"/>
+                  </a:lnTo>
+                  <a:lnTo>
+                    <a:pt x="5272124" y="2441427"/>
+                  </a:lnTo>
+                  <a:lnTo>
+                    <a:pt x="5195655" y="2436021"/>
+                  </a:lnTo>
+                  <a:lnTo>
+                    <a:pt x="5119187" y="2429976"/>
+                  </a:lnTo>
+                  <a:lnTo>
+                    <a:pt x="5042719" y="2423218"/>
+                  </a:lnTo>
+                  <a:lnTo>
+                    <a:pt x="4966250" y="2415661"/>
+                  </a:lnTo>
+                  <a:lnTo>
+                    <a:pt x="4889782" y="2407212"/>
+                  </a:lnTo>
+                  <a:lnTo>
+                    <a:pt x="4813313" y="2397765"/>
+                  </a:lnTo>
+                  <a:lnTo>
+                    <a:pt x="4736845" y="2387203"/>
+                  </a:lnTo>
+                  <a:lnTo>
+                    <a:pt x="4660376" y="2375393"/>
+                  </a:lnTo>
+                  <a:lnTo>
+                    <a:pt x="4583908" y="2362188"/>
+                  </a:lnTo>
+                  <a:lnTo>
+                    <a:pt x="4507439" y="2347424"/>
+                  </a:lnTo>
+                  <a:lnTo>
+                    <a:pt x="4430971" y="2330916"/>
+                  </a:lnTo>
+                  <a:lnTo>
+                    <a:pt x="4354503" y="2312459"/>
+                  </a:lnTo>
+                  <a:lnTo>
+                    <a:pt x="4278034" y="2291822"/>
+                  </a:lnTo>
+                  <a:lnTo>
+                    <a:pt x="4201566" y="2268748"/>
+                  </a:lnTo>
+                  <a:lnTo>
+                    <a:pt x="4125097" y="2242949"/>
+                  </a:lnTo>
+                  <a:lnTo>
+                    <a:pt x="4048629" y="2214103"/>
+                  </a:lnTo>
+                  <a:lnTo>
+                    <a:pt x="3972160" y="2181850"/>
+                  </a:lnTo>
+                  <a:lnTo>
+                    <a:pt x="3895692" y="2145788"/>
+                  </a:lnTo>
+                  <a:lnTo>
+                    <a:pt x="3819224" y="2105467"/>
+                  </a:lnTo>
+                  <a:lnTo>
+                    <a:pt x="3742755" y="2060385"/>
+                  </a:lnTo>
+                  <a:lnTo>
+                    <a:pt x="3666287" y="2009979"/>
+                  </a:lnTo>
+                  <a:lnTo>
+                    <a:pt x="3589818" y="1953619"/>
+                  </a:lnTo>
+                  <a:lnTo>
+                    <a:pt x="3513350" y="1890604"/>
+                  </a:lnTo>
+                  <a:lnTo>
+                    <a:pt x="3436881" y="1820146"/>
+                  </a:lnTo>
+                  <a:lnTo>
+                    <a:pt x="3360413" y="1741368"/>
+                  </a:lnTo>
+                  <a:lnTo>
+                    <a:pt x="3283945" y="1699494"/>
+                  </a:lnTo>
+                  <a:lnTo>
+                    <a:pt x="3207476" y="1678120"/>
+                  </a:lnTo>
+                  <a:lnTo>
+                    <a:pt x="3131008" y="1656166"/>
+                  </a:lnTo>
+                  <a:lnTo>
+                    <a:pt x="3054539" y="1633616"/>
+                  </a:lnTo>
+                  <a:lnTo>
+                    <a:pt x="2978071" y="1610454"/>
+                  </a:lnTo>
+                  <a:lnTo>
+                    <a:pt x="2901602" y="1586664"/>
+                  </a:lnTo>
+                  <a:lnTo>
+                    <a:pt x="2825134" y="1562228"/>
+                  </a:lnTo>
+                  <a:lnTo>
+                    <a:pt x="2748666" y="1537129"/>
+                  </a:lnTo>
+                  <a:lnTo>
+                    <a:pt x="2672197" y="1511350"/>
+                  </a:lnTo>
+                  <a:lnTo>
+                    <a:pt x="2595729" y="1484870"/>
+                  </a:lnTo>
+                  <a:lnTo>
+                    <a:pt x="2519260" y="1457672"/>
+                  </a:lnTo>
+                  <a:lnTo>
+                    <a:pt x="2442792" y="1429737"/>
+                  </a:lnTo>
+                  <a:lnTo>
+                    <a:pt x="2366323" y="1401043"/>
+                  </a:lnTo>
+                  <a:lnTo>
+                    <a:pt x="2289855" y="1371570"/>
+                  </a:lnTo>
+                  <a:lnTo>
+                    <a:pt x="2213386" y="1341298"/>
+                  </a:lnTo>
+                  <a:lnTo>
+                    <a:pt x="2136918" y="1310204"/>
+                  </a:lnTo>
+                  <a:lnTo>
+                    <a:pt x="2060450" y="1278267"/>
+                  </a:lnTo>
+                  <a:lnTo>
+                    <a:pt x="1983981" y="1245463"/>
+                  </a:lnTo>
+                  <a:lnTo>
+                    <a:pt x="1907513" y="1211769"/>
+                  </a:lnTo>
+                  <a:lnTo>
+                    <a:pt x="1831044" y="1177161"/>
+                  </a:lnTo>
+                  <a:lnTo>
+                    <a:pt x="1754576" y="1141613"/>
+                  </a:lnTo>
+                  <a:lnTo>
+                    <a:pt x="1678107" y="1105101"/>
+                  </a:lnTo>
+                  <a:lnTo>
+                    <a:pt x="1601639" y="1067598"/>
+                  </a:lnTo>
+                  <a:lnTo>
+                    <a:pt x="1525171" y="1029078"/>
+                  </a:lnTo>
+                  <a:lnTo>
+                    <a:pt x="1448702" y="989513"/>
+                  </a:lnTo>
+                  <a:lnTo>
+                    <a:pt x="1372234" y="948873"/>
+                  </a:lnTo>
+                  <a:lnTo>
+                    <a:pt x="1295765" y="907131"/>
+                  </a:lnTo>
+                  <a:lnTo>
+                    <a:pt x="1219297" y="864257"/>
+                  </a:lnTo>
+                  <a:lnTo>
+                    <a:pt x="1142828" y="820219"/>
+                  </a:lnTo>
+                  <a:lnTo>
+                    <a:pt x="1066360" y="774986"/>
+                  </a:lnTo>
+                  <a:lnTo>
+                    <a:pt x="989892" y="728526"/>
+                  </a:lnTo>
+                  <a:lnTo>
+                    <a:pt x="913423" y="680805"/>
+                  </a:lnTo>
+                  <a:lnTo>
+                    <a:pt x="836955" y="631789"/>
+                  </a:lnTo>
+                  <a:lnTo>
+                    <a:pt x="760486" y="581443"/>
+                  </a:lnTo>
+                  <a:lnTo>
+                    <a:pt x="684018" y="529731"/>
+                  </a:lnTo>
+                  <a:lnTo>
+                    <a:pt x="607549" y="476616"/>
+                  </a:lnTo>
+                  <a:lnTo>
+                    <a:pt x="531081" y="422060"/>
+                  </a:lnTo>
+                  <a:lnTo>
+                    <a:pt x="454613" y="366023"/>
+                  </a:lnTo>
+                  <a:lnTo>
+                    <a:pt x="378144" y="308466"/>
+                  </a:lnTo>
+                  <a:lnTo>
+                    <a:pt x="301676" y="249347"/>
+                  </a:lnTo>
+                  <a:lnTo>
+                    <a:pt x="225207" y="188623"/>
+                  </a:lnTo>
+                  <a:lnTo>
+                    <a:pt x="148739" y="126252"/>
+                  </a:lnTo>
+                  <a:lnTo>
+                    <a:pt x="72270" y="62189"/>
                   </a:lnTo>
                   <a:lnTo>
                     <a:pt x="0" y="0"/>
@@ -4055,234 +4055,234 @@
           </p:nvSpPr>
           <p:spPr>
             <a:xfrm>
-              <a:off x="2593871" y="2073503"/>
-              <a:ext cx="5594618" cy="3459967"/>
+              <a:off x="2665328" y="2209169"/>
+              <a:ext cx="5510620" cy="3227228"/>
             </a:xfrm>
             <a:custGeom>
               <a:avLst/>
               <a:pathLst>
-                <a:path w="5594618" h="3459967">
+                <a:path w="5510620" h="3227228">
                   <a:moveTo>
                     <a:pt x="0" y="0"/>
                   </a:moveTo>
                   <a:lnTo>
-                    <a:pt x="4967" y="15898"/>
-                  </a:lnTo>
-                  <a:lnTo>
-                    <a:pt x="82601" y="247762"/>
-                  </a:lnTo>
-                  <a:lnTo>
-                    <a:pt x="160235" y="464123"/>
-                  </a:lnTo>
-                  <a:lnTo>
-                    <a:pt x="237869" y="666018"/>
-                  </a:lnTo>
-                  <a:lnTo>
-                    <a:pt x="315503" y="854415"/>
-                  </a:lnTo>
-                  <a:lnTo>
-                    <a:pt x="393137" y="1030214"/>
-                  </a:lnTo>
-                  <a:lnTo>
-                    <a:pt x="470771" y="1194260"/>
-                  </a:lnTo>
-                  <a:lnTo>
-                    <a:pt x="548405" y="1347337"/>
-                  </a:lnTo>
-                  <a:lnTo>
-                    <a:pt x="626039" y="1490180"/>
-                  </a:lnTo>
-                  <a:lnTo>
-                    <a:pt x="703673" y="1623472"/>
-                  </a:lnTo>
-                  <a:lnTo>
-                    <a:pt x="781307" y="1747852"/>
-                  </a:lnTo>
-                  <a:lnTo>
-                    <a:pt x="858941" y="1863915"/>
-                  </a:lnTo>
-                  <a:lnTo>
-                    <a:pt x="936575" y="1972219"/>
-                  </a:lnTo>
-                  <a:lnTo>
-                    <a:pt x="1014210" y="2073281"/>
-                  </a:lnTo>
-                  <a:lnTo>
-                    <a:pt x="1091844" y="2167586"/>
-                  </a:lnTo>
-                  <a:lnTo>
-                    <a:pt x="1169478" y="2255586"/>
-                  </a:lnTo>
-                  <a:lnTo>
-                    <a:pt x="1247112" y="2337702"/>
-                  </a:lnTo>
-                  <a:lnTo>
-                    <a:pt x="1324746" y="2414328"/>
-                  </a:lnTo>
-                  <a:lnTo>
-                    <a:pt x="1402380" y="2485830"/>
-                  </a:lnTo>
-                  <a:lnTo>
-                    <a:pt x="1480014" y="2552552"/>
-                  </a:lnTo>
-                  <a:lnTo>
-                    <a:pt x="1557648" y="2614813"/>
-                  </a:lnTo>
-                  <a:lnTo>
-                    <a:pt x="1635282" y="2672910"/>
-                  </a:lnTo>
-                  <a:lnTo>
-                    <a:pt x="1712916" y="2727124"/>
-                  </a:lnTo>
-                  <a:lnTo>
-                    <a:pt x="1790550" y="2777712"/>
-                  </a:lnTo>
-                  <a:lnTo>
-                    <a:pt x="1868184" y="2824918"/>
-                  </a:lnTo>
-                  <a:lnTo>
-                    <a:pt x="1945818" y="2868968"/>
-                  </a:lnTo>
-                  <a:lnTo>
-                    <a:pt x="2023452" y="2910073"/>
-                  </a:lnTo>
-                  <a:lnTo>
-                    <a:pt x="2101086" y="2948429"/>
-                  </a:lnTo>
-                  <a:lnTo>
-                    <a:pt x="2178720" y="2984221"/>
-                  </a:lnTo>
-                  <a:lnTo>
-                    <a:pt x="2256354" y="3017620"/>
-                  </a:lnTo>
-                  <a:lnTo>
-                    <a:pt x="2333988" y="3048786"/>
-                  </a:lnTo>
-                  <a:lnTo>
-                    <a:pt x="2411622" y="3077868"/>
-                  </a:lnTo>
-                  <a:lnTo>
-                    <a:pt x="2489256" y="3105005"/>
-                  </a:lnTo>
-                  <a:lnTo>
-                    <a:pt x="2566890" y="3130328"/>
-                  </a:lnTo>
-                  <a:lnTo>
-                    <a:pt x="2644524" y="3153958"/>
-                  </a:lnTo>
-                  <a:lnTo>
-                    <a:pt x="2722159" y="3176008"/>
-                  </a:lnTo>
-                  <a:lnTo>
-                    <a:pt x="2799793" y="3196584"/>
-                  </a:lnTo>
-                  <a:lnTo>
-                    <a:pt x="2877427" y="3215784"/>
-                  </a:lnTo>
-                  <a:lnTo>
-                    <a:pt x="2955061" y="3233700"/>
-                  </a:lnTo>
-                  <a:lnTo>
-                    <a:pt x="3032695" y="3250418"/>
-                  </a:lnTo>
-                  <a:lnTo>
-                    <a:pt x="3110329" y="3266019"/>
-                  </a:lnTo>
-                  <a:lnTo>
-                    <a:pt x="3187963" y="3280576"/>
-                  </a:lnTo>
-                  <a:lnTo>
-                    <a:pt x="3265597" y="3294160"/>
-                  </a:lnTo>
-                  <a:lnTo>
-                    <a:pt x="3343231" y="3306836"/>
-                  </a:lnTo>
-                  <a:lnTo>
-                    <a:pt x="3420865" y="3318665"/>
-                  </a:lnTo>
-                  <a:lnTo>
-                    <a:pt x="3498499" y="3329702"/>
-                  </a:lnTo>
-                  <a:lnTo>
-                    <a:pt x="3576133" y="3340002"/>
-                  </a:lnTo>
-                  <a:lnTo>
-                    <a:pt x="3653767" y="3349613"/>
-                  </a:lnTo>
-                  <a:lnTo>
-                    <a:pt x="3731401" y="3358581"/>
-                  </a:lnTo>
-                  <a:lnTo>
-                    <a:pt x="3809035" y="3366950"/>
-                  </a:lnTo>
-                  <a:lnTo>
-                    <a:pt x="3886669" y="3374759"/>
-                  </a:lnTo>
-                  <a:lnTo>
-                    <a:pt x="3964303" y="3382046"/>
-                  </a:lnTo>
-                  <a:lnTo>
-                    <a:pt x="4041937" y="3388846"/>
-                  </a:lnTo>
-                  <a:lnTo>
-                    <a:pt x="4119571" y="3395191"/>
-                  </a:lnTo>
-                  <a:lnTo>
-                    <a:pt x="4197205" y="3401112"/>
-                  </a:lnTo>
-                  <a:lnTo>
-                    <a:pt x="4274839" y="3406637"/>
-                  </a:lnTo>
-                  <a:lnTo>
-                    <a:pt x="4352473" y="3411792"/>
-                  </a:lnTo>
-                  <a:lnTo>
-                    <a:pt x="4430107" y="3416603"/>
-                  </a:lnTo>
-                  <a:lnTo>
-                    <a:pt x="4507742" y="3421093"/>
-                  </a:lnTo>
-                  <a:lnTo>
-                    <a:pt x="4585376" y="3425282"/>
-                  </a:lnTo>
-                  <a:lnTo>
-                    <a:pt x="4663010" y="3429191"/>
-                  </a:lnTo>
-                  <a:lnTo>
-                    <a:pt x="4740644" y="3432838"/>
-                  </a:lnTo>
-                  <a:lnTo>
-                    <a:pt x="4818278" y="3436242"/>
-                  </a:lnTo>
-                  <a:lnTo>
-                    <a:pt x="4895912" y="3439418"/>
-                  </a:lnTo>
-                  <a:lnTo>
-                    <a:pt x="4973546" y="3442382"/>
-                  </a:lnTo>
-                  <a:lnTo>
-                    <a:pt x="5051180" y="3445148"/>
-                  </a:lnTo>
-                  <a:lnTo>
-                    <a:pt x="5128814" y="3447729"/>
-                  </a:lnTo>
-                  <a:lnTo>
-                    <a:pt x="5206448" y="3450137"/>
-                  </a:lnTo>
-                  <a:lnTo>
-                    <a:pt x="5284082" y="3452384"/>
-                  </a:lnTo>
-                  <a:lnTo>
-                    <a:pt x="5361716" y="3454481"/>
-                  </a:lnTo>
-                  <a:lnTo>
-                    <a:pt x="5439350" y="3456438"/>
-                  </a:lnTo>
-                  <a:lnTo>
-                    <a:pt x="5516984" y="3458263"/>
-                  </a:lnTo>
-                  <a:lnTo>
-                    <a:pt x="5594618" y="3459967"/>
+                    <a:pt x="4892" y="14829"/>
+                  </a:lnTo>
+                  <a:lnTo>
+                    <a:pt x="81361" y="231096"/>
+                  </a:lnTo>
+                  <a:lnTo>
+                    <a:pt x="157829" y="432903"/>
+                  </a:lnTo>
+                  <a:lnTo>
+                    <a:pt x="234298" y="621218"/>
+                  </a:lnTo>
+                  <a:lnTo>
+                    <a:pt x="310766" y="796941"/>
+                  </a:lnTo>
+                  <a:lnTo>
+                    <a:pt x="387235" y="960916"/>
+                  </a:lnTo>
+                  <a:lnTo>
+                    <a:pt x="463703" y="1113927"/>
+                  </a:lnTo>
+                  <a:lnTo>
+                    <a:pt x="540171" y="1256707"/>
+                  </a:lnTo>
+                  <a:lnTo>
+                    <a:pt x="616640" y="1389941"/>
+                  </a:lnTo>
+                  <a:lnTo>
+                    <a:pt x="693108" y="1514267"/>
+                  </a:lnTo>
+                  <a:lnTo>
+                    <a:pt x="769577" y="1630280"/>
+                  </a:lnTo>
+                  <a:lnTo>
+                    <a:pt x="846045" y="1738537"/>
+                  </a:lnTo>
+                  <a:lnTo>
+                    <a:pt x="922514" y="1839555"/>
+                  </a:lnTo>
+                  <a:lnTo>
+                    <a:pt x="998982" y="1933819"/>
+                  </a:lnTo>
+                  <a:lnTo>
+                    <a:pt x="1075450" y="2021781"/>
+                  </a:lnTo>
+                  <a:lnTo>
+                    <a:pt x="1151919" y="2103861"/>
+                  </a:lnTo>
+                  <a:lnTo>
+                    <a:pt x="1228387" y="2180453"/>
+                  </a:lnTo>
+                  <a:lnTo>
+                    <a:pt x="1304856" y="2251925"/>
+                  </a:lnTo>
+                  <a:lnTo>
+                    <a:pt x="1381324" y="2318618"/>
+                  </a:lnTo>
+                  <a:lnTo>
+                    <a:pt x="1457793" y="2380851"/>
+                  </a:lnTo>
+                  <a:lnTo>
+                    <a:pt x="1534261" y="2438924"/>
+                  </a:lnTo>
+                  <a:lnTo>
+                    <a:pt x="1610729" y="2493113"/>
+                  </a:lnTo>
+                  <a:lnTo>
+                    <a:pt x="1687198" y="2543680"/>
+                  </a:lnTo>
+                  <a:lnTo>
+                    <a:pt x="1763666" y="2590866"/>
+                  </a:lnTo>
+                  <a:lnTo>
+                    <a:pt x="1840135" y="2634896"/>
+                  </a:lnTo>
+                  <a:lnTo>
+                    <a:pt x="1916603" y="2675983"/>
+                  </a:lnTo>
+                  <a:lnTo>
+                    <a:pt x="1993072" y="2714323"/>
+                  </a:lnTo>
+                  <a:lnTo>
+                    <a:pt x="2069540" y="2750099"/>
+                  </a:lnTo>
+                  <a:lnTo>
+                    <a:pt x="2146008" y="2783484"/>
+                  </a:lnTo>
+                  <a:lnTo>
+                    <a:pt x="2222477" y="2814636"/>
+                  </a:lnTo>
+                  <a:lnTo>
+                    <a:pt x="2298945" y="2843705"/>
+                  </a:lnTo>
+                  <a:lnTo>
+                    <a:pt x="2375414" y="2870831"/>
+                  </a:lnTo>
+                  <a:lnTo>
+                    <a:pt x="2451882" y="2896143"/>
+                  </a:lnTo>
+                  <a:lnTo>
+                    <a:pt x="2528351" y="2919762"/>
+                  </a:lnTo>
+                  <a:lnTo>
+                    <a:pt x="2604819" y="2941803"/>
+                  </a:lnTo>
+                  <a:lnTo>
+                    <a:pt x="2681288" y="2962370"/>
+                  </a:lnTo>
+                  <a:lnTo>
+                    <a:pt x="2757756" y="2981561"/>
+                  </a:lnTo>
+                  <a:lnTo>
+                    <a:pt x="2834224" y="2999470"/>
+                  </a:lnTo>
+                  <a:lnTo>
+                    <a:pt x="2910693" y="3016181"/>
+                  </a:lnTo>
+                  <a:lnTo>
+                    <a:pt x="2987161" y="3031775"/>
+                  </a:lnTo>
+                  <a:lnTo>
+                    <a:pt x="3063630" y="3046326"/>
+                  </a:lnTo>
+                  <a:lnTo>
+                    <a:pt x="3140098" y="3059904"/>
+                  </a:lnTo>
+                  <a:lnTo>
+                    <a:pt x="3216567" y="3072574"/>
+                  </a:lnTo>
+                  <a:lnTo>
+                    <a:pt x="3293035" y="3084398"/>
+                  </a:lnTo>
+                  <a:lnTo>
+                    <a:pt x="3369503" y="3095430"/>
+                  </a:lnTo>
+                  <a:lnTo>
+                    <a:pt x="3445972" y="3105725"/>
+                  </a:lnTo>
+                  <a:lnTo>
+                    <a:pt x="3522440" y="3115332"/>
+                  </a:lnTo>
+                  <a:lnTo>
+                    <a:pt x="3598909" y="3124297"/>
+                  </a:lnTo>
+                  <a:lnTo>
+                    <a:pt x="3675377" y="3132662"/>
+                  </a:lnTo>
+                  <a:lnTo>
+                    <a:pt x="3751846" y="3140467"/>
+                  </a:lnTo>
+                  <a:lnTo>
+                    <a:pt x="3828314" y="3147751"/>
+                  </a:lnTo>
+                  <a:lnTo>
+                    <a:pt x="3904782" y="3154548"/>
+                  </a:lnTo>
+                  <a:lnTo>
+                    <a:pt x="3981251" y="3160890"/>
+                  </a:lnTo>
+                  <a:lnTo>
+                    <a:pt x="4057719" y="3166809"/>
+                  </a:lnTo>
+                  <a:lnTo>
+                    <a:pt x="4134188" y="3172331"/>
+                  </a:lnTo>
+                  <a:lnTo>
+                    <a:pt x="4210656" y="3177485"/>
+                  </a:lnTo>
+                  <a:lnTo>
+                    <a:pt x="4287125" y="3182294"/>
+                  </a:lnTo>
+                  <a:lnTo>
+                    <a:pt x="4363593" y="3186781"/>
+                  </a:lnTo>
+                  <a:lnTo>
+                    <a:pt x="4440061" y="3190968"/>
+                  </a:lnTo>
+                  <a:lnTo>
+                    <a:pt x="4516530" y="3194876"/>
+                  </a:lnTo>
+                  <a:lnTo>
+                    <a:pt x="4592998" y="3198522"/>
+                  </a:lnTo>
+                  <a:lnTo>
+                    <a:pt x="4669467" y="3201924"/>
+                  </a:lnTo>
+                  <a:lnTo>
+                    <a:pt x="4745935" y="3205099"/>
+                  </a:lnTo>
+                  <a:lnTo>
+                    <a:pt x="4822404" y="3208061"/>
+                  </a:lnTo>
+                  <a:lnTo>
+                    <a:pt x="4898872" y="3210826"/>
+                  </a:lnTo>
+                  <a:lnTo>
+                    <a:pt x="4975341" y="3213405"/>
+                  </a:lnTo>
+                  <a:lnTo>
+                    <a:pt x="5051809" y="3215812"/>
+                  </a:lnTo>
+                  <a:lnTo>
+                    <a:pt x="5128277" y="3218059"/>
+                  </a:lnTo>
+                  <a:lnTo>
+                    <a:pt x="5204746" y="3220155"/>
+                  </a:lnTo>
+                  <a:lnTo>
+                    <a:pt x="5281214" y="3222111"/>
+                  </a:lnTo>
+                  <a:lnTo>
+                    <a:pt x="5357683" y="3223936"/>
+                  </a:lnTo>
+                  <a:lnTo>
+                    <a:pt x="5434151" y="3225639"/>
+                  </a:lnTo>
+                  <a:lnTo>
+                    <a:pt x="5510620" y="3227228"/>
                   </a:lnTo>
                 </a:path>
               </a:pathLst>
@@ -4311,21 +4311,21 @@
           </p:nvSpPr>
           <p:spPr>
             <a:xfrm>
-              <a:off x="817517" y="4727786"/>
-              <a:ext cx="7799693" cy="0"/>
+              <a:off x="915645" y="4684908"/>
+              <a:ext cx="7682587" cy="0"/>
             </a:xfrm>
             <a:custGeom>
               <a:avLst/>
               <a:pathLst>
-                <a:path w="7799693" h="0">
+                <a:path w="7682587" h="0">
                   <a:moveTo>
                     <a:pt x="0" y="0"/>
                   </a:moveTo>
                   <a:lnTo>
-                    <a:pt x="7799693" y="0"/>
-                  </a:lnTo>
-                  <a:lnTo>
-                    <a:pt x="7799693" y="0"/>
+                    <a:pt x="7682587" y="0"/>
+                  </a:lnTo>
+                  <a:lnTo>
+                    <a:pt x="7682587" y="0"/>
                   </a:lnTo>
                 </a:path>
               </a:pathLst>
@@ -4354,15 +4354,15 @@
           </p:nvSpPr>
           <p:spPr>
             <a:xfrm>
-              <a:off x="4203673" y="2073503"/>
-              <a:ext cx="0" cy="3649639"/>
+              <a:off x="4250960" y="2209169"/>
+              <a:ext cx="0" cy="3404141"/>
             </a:xfrm>
             <a:custGeom>
               <a:avLst/>
               <a:pathLst>
-                <a:path w="0" h="3649639">
+                <a:path w="0" h="3404141">
                   <a:moveTo>
-                    <a:pt x="0" y="3649639"/>
+                    <a:pt x="0" y="3404141"/>
                   </a:moveTo>
                   <a:lnTo>
                     <a:pt x="0" y="0"/>
@@ -4397,8 +4397,8 @@
           </p:nvSpPr>
           <p:spPr>
             <a:xfrm>
-              <a:off x="692708" y="5517199"/>
-              <a:ext cx="62179" cy="80101"/>
+              <a:off x="756929" y="5407599"/>
+              <a:ext cx="79004" cy="101955"/>
             </a:xfrm>
             <a:prstGeom prst="rect">
               <a:avLst/>
@@ -4411,7 +4411,7 @@
             <a:p>
               <a:pPr algn="l" marL="0" marR="0" indent="0">
                 <a:lnSpc>
-                  <a:spcPts val="880"/>
+                  <a:spcPts val="1120"/>
                 </a:lnSpc>
                 <a:spcBef>
                   <a:spcPts val="0"/>
@@ -4421,7 +4421,7 @@
                 </a:spcAft>
               </a:pPr>
               <a:r>
-                <a:rPr sz="880">
+                <a:rPr sz="1120">
                   <a:solidFill>
                     <a:srgbClr val="4D4D4D">
                       <a:alpha val="100000"/>
@@ -4443,8 +4443,8 @@
           </p:nvSpPr>
           <p:spPr>
             <a:xfrm>
-              <a:off x="692708" y="4687735"/>
-              <a:ext cx="62179" cy="80101"/>
+              <a:off x="756929" y="4633931"/>
+              <a:ext cx="79004" cy="101955"/>
             </a:xfrm>
             <a:prstGeom prst="rect">
               <a:avLst/>
@@ -4457,7 +4457,7 @@
             <a:p>
               <a:pPr algn="l" marL="0" marR="0" indent="0">
                 <a:lnSpc>
-                  <a:spcPts val="880"/>
+                  <a:spcPts val="1120"/>
                 </a:lnSpc>
                 <a:spcBef>
                   <a:spcPts val="0"/>
@@ -4467,7 +4467,7 @@
                 </a:spcAft>
               </a:pPr>
               <a:r>
-                <a:rPr sz="880">
+                <a:rPr sz="1120">
                   <a:solidFill>
                     <a:srgbClr val="4D4D4D">
                       <a:alpha val="100000"/>
@@ -4489,8 +4489,8 @@
           </p:nvSpPr>
           <p:spPr>
             <a:xfrm>
-              <a:off x="692708" y="3858272"/>
-              <a:ext cx="62179" cy="80101"/>
+              <a:off x="756929" y="3860262"/>
+              <a:ext cx="79004" cy="101955"/>
             </a:xfrm>
             <a:prstGeom prst="rect">
               <a:avLst/>
@@ -4503,7 +4503,7 @@
             <a:p>
               <a:pPr algn="l" marL="0" marR="0" indent="0">
                 <a:lnSpc>
-                  <a:spcPts val="880"/>
+                  <a:spcPts val="1120"/>
                 </a:lnSpc>
                 <a:spcBef>
                   <a:spcPts val="0"/>
@@ -4513,7 +4513,7 @@
                 </a:spcAft>
               </a:pPr>
               <a:r>
-                <a:rPr sz="880">
+                <a:rPr sz="1120">
                   <a:solidFill>
                     <a:srgbClr val="4D4D4D">
                       <a:alpha val="100000"/>
@@ -4535,8 +4535,8 @@
           </p:nvSpPr>
           <p:spPr>
             <a:xfrm>
-              <a:off x="692708" y="3028808"/>
-              <a:ext cx="62179" cy="80101"/>
+              <a:off x="756929" y="3086593"/>
+              <a:ext cx="79004" cy="101955"/>
             </a:xfrm>
             <a:prstGeom prst="rect">
               <a:avLst/>
@@ -4549,7 +4549,7 @@
             <a:p>
               <a:pPr algn="l" marL="0" marR="0" indent="0">
                 <a:lnSpc>
-                  <a:spcPts val="880"/>
+                  <a:spcPts val="1120"/>
                 </a:lnSpc>
                 <a:spcBef>
                   <a:spcPts val="0"/>
@@ -4559,7 +4559,7 @@
                 </a:spcAft>
               </a:pPr>
               <a:r>
-                <a:rPr sz="880">
+                <a:rPr sz="1120">
                   <a:solidFill>
                     <a:srgbClr val="4D4D4D">
                       <a:alpha val="100000"/>
@@ -4581,8 +4581,8 @@
           </p:nvSpPr>
           <p:spPr>
             <a:xfrm>
-              <a:off x="692708" y="2199345"/>
-              <a:ext cx="62179" cy="80101"/>
+              <a:off x="756929" y="2312925"/>
+              <a:ext cx="79004" cy="101955"/>
             </a:xfrm>
             <a:prstGeom prst="rect">
               <a:avLst/>
@@ -4595,7 +4595,7 @@
             <a:p>
               <a:pPr algn="l" marL="0" marR="0" indent="0">
                 <a:lnSpc>
-                  <a:spcPts val="880"/>
+                  <a:spcPts val="1120"/>
                 </a:lnSpc>
                 <a:spcBef>
                   <a:spcPts val="0"/>
@@ -4605,7 +4605,7 @@
                 </a:spcAft>
               </a:pPr>
               <a:r>
-                <a:rPr sz="880">
+                <a:rPr sz="1120">
                   <a:solidFill>
                     <a:srgbClr val="4D4D4D">
                       <a:alpha val="100000"/>
@@ -4627,8 +4627,8 @@
           </p:nvSpPr>
           <p:spPr>
             <a:xfrm>
-              <a:off x="2423864" y="5785772"/>
-              <a:ext cx="155356" cy="80101"/>
+              <a:off x="2475630" y="5693022"/>
+              <a:ext cx="197510" cy="101955"/>
             </a:xfrm>
             <a:prstGeom prst="rect">
               <a:avLst/>
@@ -4641,7 +4641,7 @@
             <a:p>
               <a:pPr algn="l" marL="0" marR="0" indent="0">
                 <a:lnSpc>
-                  <a:spcPts val="880"/>
+                  <a:spcPts val="1120"/>
                 </a:lnSpc>
                 <a:spcBef>
                   <a:spcPts val="0"/>
@@ -4651,7 +4651,7 @@
                 </a:spcAft>
               </a:pPr>
               <a:r>
-                <a:rPr sz="880">
+                <a:rPr sz="1120">
                   <a:solidFill>
                     <a:srgbClr val="4D4D4D">
                       <a:alpha val="100000"/>
@@ -4673,8 +4673,8 @@
           </p:nvSpPr>
           <p:spPr>
             <a:xfrm>
-              <a:off x="4196521" y="5785772"/>
-              <a:ext cx="155356" cy="80101"/>
+              <a:off x="4221672" y="5693022"/>
+              <a:ext cx="197510" cy="101955"/>
             </a:xfrm>
             <a:prstGeom prst="rect">
               <a:avLst/>
@@ -4687,7 +4687,7 @@
             <a:p>
               <a:pPr algn="l" marL="0" marR="0" indent="0">
                 <a:lnSpc>
-                  <a:spcPts val="880"/>
+                  <a:spcPts val="1120"/>
                 </a:lnSpc>
                 <a:spcBef>
                   <a:spcPts val="0"/>
@@ -4697,7 +4697,7 @@
                 </a:spcAft>
               </a:pPr>
               <a:r>
-                <a:rPr sz="880">
+                <a:rPr sz="1120">
                   <a:solidFill>
                     <a:srgbClr val="4D4D4D">
                       <a:alpha val="100000"/>
@@ -4719,8 +4719,8 @@
           </p:nvSpPr>
           <p:spPr>
             <a:xfrm>
-              <a:off x="5969179" y="5785772"/>
-              <a:ext cx="155356" cy="80101"/>
+              <a:off x="5967715" y="5693022"/>
+              <a:ext cx="197510" cy="101955"/>
             </a:xfrm>
             <a:prstGeom prst="rect">
               <a:avLst/>
@@ -4733,7 +4733,7 @@
             <a:p>
               <a:pPr algn="l" marL="0" marR="0" indent="0">
                 <a:lnSpc>
-                  <a:spcPts val="880"/>
+                  <a:spcPts val="1120"/>
                 </a:lnSpc>
                 <a:spcBef>
                   <a:spcPts val="0"/>
@@ -4743,7 +4743,7 @@
                 </a:spcAft>
               </a:pPr>
               <a:r>
-                <a:rPr sz="880">
+                <a:rPr sz="1120">
                   <a:solidFill>
                     <a:srgbClr val="4D4D4D">
                       <a:alpha val="100000"/>
@@ -4765,8 +4765,8 @@
           </p:nvSpPr>
           <p:spPr>
             <a:xfrm>
-              <a:off x="7741836" y="5785772"/>
-              <a:ext cx="155356" cy="80101"/>
+              <a:off x="7713757" y="5693022"/>
+              <a:ext cx="197510" cy="101955"/>
             </a:xfrm>
             <a:prstGeom prst="rect">
               <a:avLst/>
@@ -4779,7 +4779,7 @@
             <a:p>
               <a:pPr algn="l" marL="0" marR="0" indent="0">
                 <a:lnSpc>
-                  <a:spcPts val="880"/>
+                  <a:spcPts val="1120"/>
                 </a:lnSpc>
                 <a:spcBef>
                   <a:spcPts val="0"/>
@@ -4789,7 +4789,7 @@
                 </a:spcAft>
               </a:pPr>
               <a:r>
-                <a:rPr sz="880">
+                <a:rPr sz="1120">
                   <a:solidFill>
                     <a:srgbClr val="4D4D4D">
                       <a:alpha val="100000"/>
@@ -4811,8 +4811,8 @@
           </p:nvSpPr>
           <p:spPr>
             <a:xfrm>
-              <a:off x="3879271" y="5925448"/>
-              <a:ext cx="1676186" cy="100218"/>
+              <a:off x="3690153" y="5870717"/>
+              <a:ext cx="2133569" cy="127558"/>
             </a:xfrm>
             <a:prstGeom prst="rect">
               <a:avLst/>
@@ -4825,7 +4825,7 @@
             <a:p>
               <a:pPr algn="l" marL="0" marR="0" indent="0">
                 <a:lnSpc>
-                  <a:spcPts val="1100"/>
+                  <a:spcPts val="1400"/>
                 </a:lnSpc>
                 <a:spcBef>
                   <a:spcPts val="0"/>
@@ -4835,7 +4835,7 @@
                 </a:spcAft>
               </a:pPr>
               <a:r>
-                <a:rPr sz="1100">
+                <a:rPr sz="1400">
                   <a:solidFill>
                     <a:srgbClr val="000000">
                       <a:alpha val="100000"/>
@@ -4857,8 +4857,8 @@
           </p:nvSpPr>
           <p:spPr>
             <a:xfrm rot="-5400000">
-              <a:off x="68446" y="3848213"/>
-              <a:ext cx="1016904" cy="100218"/>
+              <a:off x="-37527" y="3847460"/>
+              <a:ext cx="1294150" cy="127558"/>
             </a:xfrm>
             <a:prstGeom prst="rect">
               <a:avLst/>
@@ -4871,7 +4871,7 @@
             <a:p>
               <a:pPr algn="l" marL="0" marR="0" indent="0">
                 <a:lnSpc>
-                  <a:spcPts val="1100"/>
+                  <a:spcPts val="1400"/>
                 </a:lnSpc>
                 <a:spcBef>
                   <a:spcPts val="0"/>
@@ -4881,7 +4881,7 @@
                 </a:spcAft>
               </a:pPr>
               <a:r>
-                <a:rPr sz="1100">
+                <a:rPr sz="1400">
                   <a:solidFill>
                     <a:srgbClr val="000000">
                       <a:alpha val="100000"/>
@@ -4903,8 +4903,8 @@
           </p:nvSpPr>
           <p:spPr>
             <a:xfrm>
-              <a:off x="817517" y="1896563"/>
-              <a:ext cx="4166463" cy="82021"/>
+              <a:off x="915645" y="1977589"/>
+              <a:ext cx="5556900" cy="109362"/>
             </a:xfrm>
             <a:prstGeom prst="rect">
               <a:avLst/>
@@ -4917,7 +4917,7 @@
             <a:p>
               <a:pPr algn="l" marL="0" marR="0" indent="0">
                 <a:lnSpc>
-                  <a:spcPts val="900"/>
+                  <a:spcPts val="1200"/>
                 </a:lnSpc>
                 <a:spcBef>
                   <a:spcPts val="0"/>
@@ -4927,7 +4927,7 @@
                 </a:spcAft>
               </a:pPr>
               <a:r>
-                <a:rPr sz="900">
+                <a:rPr sz="1200">
                   <a:solidFill>
                     <a:srgbClr val="404040">
                       <a:alpha val="100000"/>
@@ -4949,8 +4949,8 @@
           </p:nvSpPr>
           <p:spPr>
             <a:xfrm>
-              <a:off x="817517" y="1669789"/>
-              <a:ext cx="1284914" cy="120152"/>
+              <a:off x="915645" y="1688767"/>
+              <a:ext cx="1635861" cy="153070"/>
             </a:xfrm>
             <a:prstGeom prst="rect">
               <a:avLst/>
@@ -4963,7 +4963,7 @@
             <a:p>
               <a:pPr algn="l" marL="0" marR="0" indent="0">
                 <a:lnSpc>
-                  <a:spcPts val="1320"/>
+                  <a:spcPts val="1680"/>
                 </a:lnSpc>
                 <a:spcBef>
                   <a:spcPts val="0"/>
@@ -4973,7 +4973,7 @@
                 </a:spcAft>
               </a:pPr>
               <a:r>
-                <a:rPr sz="1320">
+                <a:rPr sz="1680">
                   <a:solidFill>
                     <a:srgbClr val="000000">
                       <a:alpha val="100000"/>
